--- a/figs/DIYfigures_pp.pptx
+++ b/figs/DIYfigures_pp.pptx
@@ -266,7 +266,7 @@
           <a:p>
             <a:fld id="{DBD89380-344E-284F-BE0F-D796858BF56F}" type="datetimeFigureOut">
               <a:rPr kumimoji="1" lang="ja-JP" altLang="en-US" smtClean="0"/>
-              <a:t>2026/8/24</a:t>
+              <a:t>2026/9/18</a:t>
             </a:fld>
             <a:endParaRPr kumimoji="1" lang="ja-JP" altLang="en-US"/>
           </a:p>
@@ -468,7 +468,7 @@
           <a:p>
             <a:fld id="{DBD89380-344E-284F-BE0F-D796858BF56F}" type="datetimeFigureOut">
               <a:rPr kumimoji="1" lang="ja-JP" altLang="en-US" smtClean="0"/>
-              <a:t>2026/8/24</a:t>
+              <a:t>2026/9/18</a:t>
             </a:fld>
             <a:endParaRPr kumimoji="1" lang="ja-JP" altLang="en-US"/>
           </a:p>
@@ -680,7 +680,7 @@
           <a:p>
             <a:fld id="{DBD89380-344E-284F-BE0F-D796858BF56F}" type="datetimeFigureOut">
               <a:rPr kumimoji="1" lang="ja-JP" altLang="en-US" smtClean="0"/>
-              <a:t>2026/8/24</a:t>
+              <a:t>2026/9/18</a:t>
             </a:fld>
             <a:endParaRPr kumimoji="1" lang="ja-JP" altLang="en-US"/>
           </a:p>
@@ -882,7 +882,7 @@
           <a:p>
             <a:fld id="{DBD89380-344E-284F-BE0F-D796858BF56F}" type="datetimeFigureOut">
               <a:rPr kumimoji="1" lang="ja-JP" altLang="en-US" smtClean="0"/>
-              <a:t>2026/8/24</a:t>
+              <a:t>2026/9/18</a:t>
             </a:fld>
             <a:endParaRPr kumimoji="1" lang="ja-JP" altLang="en-US"/>
           </a:p>
@@ -1126,7 +1126,7 @@
           <a:p>
             <a:fld id="{DBD89380-344E-284F-BE0F-D796858BF56F}" type="datetimeFigureOut">
               <a:rPr kumimoji="1" lang="ja-JP" altLang="en-US" smtClean="0"/>
-              <a:t>2026/8/24</a:t>
+              <a:t>2026/9/18</a:t>
             </a:fld>
             <a:endParaRPr kumimoji="1" lang="ja-JP" altLang="en-US"/>
           </a:p>
@@ -1422,7 +1422,7 @@
           <a:p>
             <a:fld id="{DBD89380-344E-284F-BE0F-D796858BF56F}" type="datetimeFigureOut">
               <a:rPr kumimoji="1" lang="ja-JP" altLang="en-US" smtClean="0"/>
-              <a:t>2026/8/24</a:t>
+              <a:t>2026/9/18</a:t>
             </a:fld>
             <a:endParaRPr kumimoji="1" lang="ja-JP" altLang="en-US"/>
           </a:p>
@@ -1853,7 +1853,7 @@
           <a:p>
             <a:fld id="{DBD89380-344E-284F-BE0F-D796858BF56F}" type="datetimeFigureOut">
               <a:rPr kumimoji="1" lang="ja-JP" altLang="en-US" smtClean="0"/>
-              <a:t>2026/8/24</a:t>
+              <a:t>2026/9/18</a:t>
             </a:fld>
             <a:endParaRPr kumimoji="1" lang="ja-JP" altLang="en-US"/>
           </a:p>
@@ -1971,7 +1971,7 @@
           <a:p>
             <a:fld id="{DBD89380-344E-284F-BE0F-D796858BF56F}" type="datetimeFigureOut">
               <a:rPr kumimoji="1" lang="ja-JP" altLang="en-US" smtClean="0"/>
-              <a:t>2026/8/24</a:t>
+              <a:t>2026/9/18</a:t>
             </a:fld>
             <a:endParaRPr kumimoji="1" lang="ja-JP" altLang="en-US"/>
           </a:p>
@@ -2066,7 +2066,7 @@
           <a:p>
             <a:fld id="{DBD89380-344E-284F-BE0F-D796858BF56F}" type="datetimeFigureOut">
               <a:rPr kumimoji="1" lang="ja-JP" altLang="en-US" smtClean="0"/>
-              <a:t>2026/8/24</a:t>
+              <a:t>2026/9/18</a:t>
             </a:fld>
             <a:endParaRPr kumimoji="1" lang="ja-JP" altLang="en-US"/>
           </a:p>
@@ -2375,7 +2375,7 @@
           <a:p>
             <a:fld id="{DBD89380-344E-284F-BE0F-D796858BF56F}" type="datetimeFigureOut">
               <a:rPr kumimoji="1" lang="ja-JP" altLang="en-US" smtClean="0"/>
-              <a:t>2026/8/24</a:t>
+              <a:t>2026/9/18</a:t>
             </a:fld>
             <a:endParaRPr kumimoji="1" lang="ja-JP" altLang="en-US"/>
           </a:p>
@@ -2632,7 +2632,7 @@
           <a:p>
             <a:fld id="{DBD89380-344E-284F-BE0F-D796858BF56F}" type="datetimeFigureOut">
               <a:rPr kumimoji="1" lang="ja-JP" altLang="en-US" smtClean="0"/>
-              <a:t>2026/8/24</a:t>
+              <a:t>2026/9/18</a:t>
             </a:fld>
             <a:endParaRPr kumimoji="1" lang="ja-JP" altLang="en-US"/>
           </a:p>
@@ -2877,7 +2877,7 @@
           <a:p>
             <a:fld id="{DBD89380-344E-284F-BE0F-D796858BF56F}" type="datetimeFigureOut">
               <a:rPr kumimoji="1" lang="ja-JP" altLang="en-US" smtClean="0"/>
-              <a:t>2026/8/24</a:t>
+              <a:t>2026/9/18</a:t>
             </a:fld>
             <a:endParaRPr kumimoji="1" lang="ja-JP" altLang="en-US"/>
           </a:p>
@@ -4077,7 +4077,7 @@
                   <a:latin typeface="HGPGothicE" panose="020B0900000000000000" pitchFamily="34" charset="-128"/>
                   <a:ea typeface="HGPGothicE" panose="020B0900000000000000" pitchFamily="34" charset="-128"/>
                 </a:rPr>
-                <a:t>組織</a:t>
+                <a:t>意思決定</a:t>
               </a:r>
             </a:p>
           </p:txBody>

--- a/figs/DIYfigures_pp.pptx
+++ b/figs/DIYfigures_pp.pptx
@@ -29,6 +29,9 @@
     <p:sldId id="277" r:id="rId23"/>
     <p:sldId id="279" r:id="rId24"/>
     <p:sldId id="278" r:id="rId25"/>
+    <p:sldId id="280" r:id="rId26"/>
+    <p:sldId id="282" r:id="rId27"/>
+    <p:sldId id="281" r:id="rId28"/>
   </p:sldIdLst>
   <p:sldSz cx="12801600" cy="9601200" type="A3"/>
   <p:notesSz cx="6858000" cy="9144000"/>
@@ -133,6 +136,6778 @@
     </p:ext>
   </p:extLst>
 </p:presentation>
+</file>
+
+<file path=ppt/diagrams/colors1.xml><?xml version="1.0" encoding="utf-8"?>
+<dgm:colorsDef xmlns:dgm="http://schemas.openxmlformats.org/drawingml/2006/diagram" xmlns:a="http://schemas.openxmlformats.org/drawingml/2006/main" uniqueId="urn:microsoft.com/office/officeart/2005/8/colors/accent3_4">
+  <dgm:title val=""/>
+  <dgm:desc val=""/>
+  <dgm:catLst>
+    <dgm:cat type="accent3" pri="11400"/>
+  </dgm:catLst>
+  <dgm:styleLbl name="node0">
+    <dgm:fillClrLst meth="cycle">
+      <a:schemeClr val="accent3">
+        <a:shade val="60000"/>
+      </a:schemeClr>
+    </dgm:fillClrLst>
+    <dgm:linClrLst meth="repeat">
+      <a:schemeClr val="lt1"/>
+    </dgm:linClrLst>
+    <dgm:effectClrLst/>
+    <dgm:txLinClrLst/>
+    <dgm:txFillClrLst/>
+    <dgm:txEffectClrLst/>
+  </dgm:styleLbl>
+  <dgm:styleLbl name="node1">
+    <dgm:fillClrLst meth="cycle">
+      <a:schemeClr val="accent3">
+        <a:shade val="50000"/>
+      </a:schemeClr>
+      <a:schemeClr val="accent3">
+        <a:tint val="55000"/>
+      </a:schemeClr>
+    </dgm:fillClrLst>
+    <dgm:linClrLst meth="repeat">
+      <a:schemeClr val="lt1"/>
+    </dgm:linClrLst>
+    <dgm:effectClrLst/>
+    <dgm:txLinClrLst/>
+    <dgm:txFillClrLst/>
+    <dgm:txEffectClrLst/>
+  </dgm:styleLbl>
+  <dgm:styleLbl name="alignNode1">
+    <dgm:fillClrLst meth="cycle">
+      <a:schemeClr val="accent3">
+        <a:shade val="50000"/>
+      </a:schemeClr>
+      <a:schemeClr val="accent3">
+        <a:tint val="55000"/>
+      </a:schemeClr>
+    </dgm:fillClrLst>
+    <dgm:linClrLst meth="cycle">
+      <a:schemeClr val="accent3">
+        <a:shade val="50000"/>
+      </a:schemeClr>
+      <a:schemeClr val="accent3">
+        <a:tint val="55000"/>
+      </a:schemeClr>
+    </dgm:linClrLst>
+    <dgm:effectClrLst/>
+    <dgm:txLinClrLst/>
+    <dgm:txFillClrLst/>
+    <dgm:txEffectClrLst/>
+  </dgm:styleLbl>
+  <dgm:styleLbl name="lnNode1">
+    <dgm:fillClrLst meth="cycle">
+      <a:schemeClr val="accent3">
+        <a:shade val="50000"/>
+      </a:schemeClr>
+      <a:schemeClr val="accent3">
+        <a:tint val="55000"/>
+      </a:schemeClr>
+    </dgm:fillClrLst>
+    <dgm:linClrLst meth="repeat">
+      <a:schemeClr val="lt1"/>
+    </dgm:linClrLst>
+    <dgm:effectClrLst/>
+    <dgm:txLinClrLst/>
+    <dgm:txFillClrLst/>
+    <dgm:txEffectClrLst/>
+  </dgm:styleLbl>
+  <dgm:styleLbl name="vennNode1">
+    <dgm:fillClrLst meth="cycle">
+      <a:schemeClr val="accent3">
+        <a:shade val="80000"/>
+        <a:alpha val="50000"/>
+      </a:schemeClr>
+      <a:schemeClr val="accent3">
+        <a:tint val="50000"/>
+        <a:alpha val="50000"/>
+      </a:schemeClr>
+    </dgm:fillClrLst>
+    <dgm:linClrLst meth="repeat">
+      <a:schemeClr val="lt1"/>
+    </dgm:linClrLst>
+    <dgm:effectClrLst/>
+    <dgm:txLinClrLst/>
+    <dgm:txFillClrLst/>
+    <dgm:txEffectClrLst/>
+  </dgm:styleLbl>
+  <dgm:styleLbl name="node2">
+    <dgm:fillClrLst>
+      <a:schemeClr val="accent3">
+        <a:shade val="80000"/>
+      </a:schemeClr>
+    </dgm:fillClrLst>
+    <dgm:linClrLst meth="repeat">
+      <a:schemeClr val="lt1"/>
+    </dgm:linClrLst>
+    <dgm:effectClrLst/>
+    <dgm:txLinClrLst/>
+    <dgm:txFillClrLst/>
+    <dgm:txEffectClrLst/>
+  </dgm:styleLbl>
+  <dgm:styleLbl name="node3">
+    <dgm:fillClrLst>
+      <a:schemeClr val="accent3">
+        <a:tint val="99000"/>
+      </a:schemeClr>
+    </dgm:fillClrLst>
+    <dgm:linClrLst meth="repeat">
+      <a:schemeClr val="lt1"/>
+    </dgm:linClrLst>
+    <dgm:effectClrLst/>
+    <dgm:txLinClrLst/>
+    <dgm:txFillClrLst/>
+    <dgm:txEffectClrLst/>
+  </dgm:styleLbl>
+  <dgm:styleLbl name="node4">
+    <dgm:fillClrLst>
+      <a:schemeClr val="accent3">
+        <a:tint val="70000"/>
+      </a:schemeClr>
+    </dgm:fillClrLst>
+    <dgm:linClrLst meth="repeat">
+      <a:schemeClr val="lt1"/>
+    </dgm:linClrLst>
+    <dgm:effectClrLst/>
+    <dgm:txLinClrLst/>
+    <dgm:txFillClrLst/>
+    <dgm:txEffectClrLst/>
+  </dgm:styleLbl>
+  <dgm:styleLbl name="fgImgPlace1">
+    <dgm:fillClrLst>
+      <a:schemeClr val="accent3">
+        <a:tint val="50000"/>
+      </a:schemeClr>
+      <a:schemeClr val="accent3">
+        <a:tint val="55000"/>
+      </a:schemeClr>
+    </dgm:fillClrLst>
+    <dgm:linClrLst meth="repeat">
+      <a:schemeClr val="lt1"/>
+    </dgm:linClrLst>
+    <dgm:effectClrLst/>
+    <dgm:txLinClrLst/>
+    <dgm:txFillClrLst meth="repeat">
+      <a:schemeClr val="lt1"/>
+    </dgm:txFillClrLst>
+    <dgm:txEffectClrLst/>
+  </dgm:styleLbl>
+  <dgm:styleLbl name="alignImgPlace1">
+    <dgm:fillClrLst>
+      <a:schemeClr val="accent3">
+        <a:tint val="50000"/>
+      </a:schemeClr>
+      <a:schemeClr val="accent3">
+        <a:tint val="55000"/>
+      </a:schemeClr>
+    </dgm:fillClrLst>
+    <dgm:linClrLst meth="repeat">
+      <a:schemeClr val="lt1"/>
+    </dgm:linClrLst>
+    <dgm:effectClrLst/>
+    <dgm:txLinClrLst/>
+    <dgm:txFillClrLst meth="repeat">
+      <a:schemeClr val="lt1"/>
+    </dgm:txFillClrLst>
+    <dgm:txEffectClrLst/>
+  </dgm:styleLbl>
+  <dgm:styleLbl name="bgImgPlace1">
+    <dgm:fillClrLst>
+      <a:schemeClr val="accent3">
+        <a:tint val="50000"/>
+      </a:schemeClr>
+      <a:schemeClr val="accent3">
+        <a:tint val="55000"/>
+      </a:schemeClr>
+    </dgm:fillClrLst>
+    <dgm:linClrLst meth="repeat">
+      <a:schemeClr val="lt1"/>
+    </dgm:linClrLst>
+    <dgm:effectClrLst/>
+    <dgm:txLinClrLst/>
+    <dgm:txFillClrLst meth="repeat">
+      <a:schemeClr val="lt1"/>
+    </dgm:txFillClrLst>
+    <dgm:txEffectClrLst/>
+  </dgm:styleLbl>
+  <dgm:styleLbl name="sibTrans2D1">
+    <dgm:fillClrLst meth="cycle">
+      <a:schemeClr val="accent3">
+        <a:shade val="90000"/>
+      </a:schemeClr>
+      <a:schemeClr val="accent3">
+        <a:tint val="50000"/>
+      </a:schemeClr>
+    </dgm:fillClrLst>
+    <dgm:linClrLst meth="cycle">
+      <a:schemeClr val="accent3">
+        <a:shade val="90000"/>
+      </a:schemeClr>
+      <a:schemeClr val="accent3">
+        <a:tint val="50000"/>
+      </a:schemeClr>
+    </dgm:linClrLst>
+    <dgm:effectClrLst/>
+    <dgm:txLinClrLst/>
+    <dgm:txFillClrLst/>
+    <dgm:txEffectClrLst/>
+  </dgm:styleLbl>
+  <dgm:styleLbl name="fgSibTrans2D1">
+    <dgm:fillClrLst meth="cycle">
+      <a:schemeClr val="accent3">
+        <a:shade val="90000"/>
+      </a:schemeClr>
+      <a:schemeClr val="accent3">
+        <a:tint val="50000"/>
+      </a:schemeClr>
+    </dgm:fillClrLst>
+    <dgm:linClrLst meth="cycle">
+      <a:schemeClr val="accent3">
+        <a:shade val="90000"/>
+      </a:schemeClr>
+      <a:schemeClr val="accent3">
+        <a:tint val="50000"/>
+      </a:schemeClr>
+    </dgm:linClrLst>
+    <dgm:effectClrLst/>
+    <dgm:txLinClrLst/>
+    <dgm:txFillClrLst/>
+    <dgm:txEffectClrLst/>
+  </dgm:styleLbl>
+  <dgm:styleLbl name="bgSibTrans2D1">
+    <dgm:fillClrLst meth="cycle">
+      <a:schemeClr val="accent3">
+        <a:shade val="90000"/>
+      </a:schemeClr>
+      <a:schemeClr val="accent3">
+        <a:tint val="50000"/>
+      </a:schemeClr>
+    </dgm:fillClrLst>
+    <dgm:linClrLst meth="cycle">
+      <a:schemeClr val="accent3">
+        <a:shade val="90000"/>
+      </a:schemeClr>
+      <a:schemeClr val="accent3">
+        <a:tint val="50000"/>
+      </a:schemeClr>
+    </dgm:linClrLst>
+    <dgm:effectClrLst/>
+    <dgm:txLinClrLst/>
+    <dgm:txFillClrLst/>
+    <dgm:txEffectClrLst/>
+  </dgm:styleLbl>
+  <dgm:styleLbl name="sibTrans1D1">
+    <dgm:fillClrLst meth="cycle">
+      <a:schemeClr val="accent3">
+        <a:shade val="90000"/>
+      </a:schemeClr>
+      <a:schemeClr val="accent3">
+        <a:tint val="50000"/>
+      </a:schemeClr>
+    </dgm:fillClrLst>
+    <dgm:linClrLst meth="cycle">
+      <a:schemeClr val="accent3">
+        <a:shade val="90000"/>
+      </a:schemeClr>
+      <a:schemeClr val="accent3">
+        <a:tint val="50000"/>
+      </a:schemeClr>
+    </dgm:linClrLst>
+    <dgm:effectClrLst/>
+    <dgm:txLinClrLst/>
+    <dgm:txFillClrLst meth="repeat">
+      <a:schemeClr val="tx1"/>
+    </dgm:txFillClrLst>
+    <dgm:txEffectClrLst/>
+  </dgm:styleLbl>
+  <dgm:styleLbl name="callout">
+    <dgm:fillClrLst meth="repeat">
+      <a:schemeClr val="accent3"/>
+    </dgm:fillClrLst>
+    <dgm:linClrLst meth="repeat">
+      <a:schemeClr val="accent3"/>
+    </dgm:linClrLst>
+    <dgm:effectClrLst/>
+    <dgm:txLinClrLst/>
+    <dgm:txFillClrLst meth="repeat">
+      <a:schemeClr val="tx1"/>
+    </dgm:txFillClrLst>
+    <dgm:txEffectClrLst/>
+  </dgm:styleLbl>
+  <dgm:styleLbl name="asst0">
+    <dgm:fillClrLst meth="repeat">
+      <a:schemeClr val="accent3">
+        <a:shade val="80000"/>
+      </a:schemeClr>
+    </dgm:fillClrLst>
+    <dgm:linClrLst meth="repeat">
+      <a:schemeClr val="lt1"/>
+    </dgm:linClrLst>
+    <dgm:effectClrLst/>
+    <dgm:txLinClrLst/>
+    <dgm:txFillClrLst/>
+    <dgm:txEffectClrLst/>
+  </dgm:styleLbl>
+  <dgm:styleLbl name="asst1">
+    <dgm:fillClrLst meth="repeat">
+      <a:schemeClr val="accent3">
+        <a:shade val="80000"/>
+      </a:schemeClr>
+    </dgm:fillClrLst>
+    <dgm:linClrLst meth="repeat">
+      <a:schemeClr val="lt1"/>
+    </dgm:linClrLst>
+    <dgm:effectClrLst/>
+    <dgm:txLinClrLst/>
+    <dgm:txFillClrLst/>
+    <dgm:txEffectClrLst/>
+  </dgm:styleLbl>
+  <dgm:styleLbl name="asst2">
+    <dgm:fillClrLst>
+      <a:schemeClr val="accent3">
+        <a:tint val="90000"/>
+      </a:schemeClr>
+    </dgm:fillClrLst>
+    <dgm:linClrLst meth="repeat">
+      <a:schemeClr val="lt1"/>
+    </dgm:linClrLst>
+    <dgm:effectClrLst/>
+    <dgm:txLinClrLst/>
+    <dgm:txFillClrLst/>
+    <dgm:txEffectClrLst/>
+  </dgm:styleLbl>
+  <dgm:styleLbl name="asst3">
+    <dgm:fillClrLst>
+      <a:schemeClr val="accent3">
+        <a:tint val="70000"/>
+      </a:schemeClr>
+    </dgm:fillClrLst>
+    <dgm:linClrLst meth="repeat">
+      <a:schemeClr val="lt1"/>
+    </dgm:linClrLst>
+    <dgm:effectClrLst/>
+    <dgm:txLinClrLst/>
+    <dgm:txFillClrLst/>
+    <dgm:txEffectClrLst/>
+  </dgm:styleLbl>
+  <dgm:styleLbl name="asst4">
+    <dgm:fillClrLst>
+      <a:schemeClr val="accent3">
+        <a:tint val="50000"/>
+      </a:schemeClr>
+    </dgm:fillClrLst>
+    <dgm:linClrLst meth="repeat">
+      <a:schemeClr val="lt1"/>
+    </dgm:linClrLst>
+    <dgm:effectClrLst/>
+    <dgm:txLinClrLst/>
+    <dgm:txFillClrLst/>
+    <dgm:txEffectClrLst/>
+  </dgm:styleLbl>
+  <dgm:styleLbl name="parChTrans2D1">
+    <dgm:fillClrLst meth="repeat">
+      <a:schemeClr val="accent3">
+        <a:tint val="60000"/>
+      </a:schemeClr>
+    </dgm:fillClrLst>
+    <dgm:linClrLst meth="repeat">
+      <a:schemeClr val="accent3">
+        <a:shade val="80000"/>
+      </a:schemeClr>
+    </dgm:linClrLst>
+    <dgm:effectClrLst/>
+    <dgm:txLinClrLst/>
+    <dgm:txFillClrLst/>
+    <dgm:txEffectClrLst/>
+  </dgm:styleLbl>
+  <dgm:styleLbl name="parChTrans2D2">
+    <dgm:fillClrLst meth="repeat">
+      <a:schemeClr val="accent3">
+        <a:tint val="90000"/>
+      </a:schemeClr>
+    </dgm:fillClrLst>
+    <dgm:linClrLst meth="repeat">
+      <a:schemeClr val="accent3">
+        <a:tint val="90000"/>
+      </a:schemeClr>
+    </dgm:linClrLst>
+    <dgm:effectClrLst/>
+    <dgm:txLinClrLst/>
+    <dgm:txFillClrLst/>
+    <dgm:txEffectClrLst/>
+  </dgm:styleLbl>
+  <dgm:styleLbl name="parChTrans2D3">
+    <dgm:fillClrLst meth="repeat">
+      <a:schemeClr val="accent3">
+        <a:tint val="70000"/>
+      </a:schemeClr>
+    </dgm:fillClrLst>
+    <dgm:linClrLst meth="repeat">
+      <a:schemeClr val="accent3">
+        <a:tint val="70000"/>
+      </a:schemeClr>
+    </dgm:linClrLst>
+    <dgm:effectClrLst/>
+    <dgm:txLinClrLst/>
+    <dgm:txFillClrLst/>
+    <dgm:txEffectClrLst/>
+  </dgm:styleLbl>
+  <dgm:styleLbl name="parChTrans2D4">
+    <dgm:fillClrLst meth="repeat">
+      <a:schemeClr val="accent3">
+        <a:tint val="50000"/>
+      </a:schemeClr>
+    </dgm:fillClrLst>
+    <dgm:linClrLst meth="repeat">
+      <a:schemeClr val="accent3">
+        <a:tint val="50000"/>
+      </a:schemeClr>
+    </dgm:linClrLst>
+    <dgm:effectClrLst/>
+    <dgm:txLinClrLst/>
+    <dgm:txFillClrLst meth="repeat">
+      <a:schemeClr val="dk1"/>
+    </dgm:txFillClrLst>
+    <dgm:txEffectClrLst/>
+  </dgm:styleLbl>
+  <dgm:styleLbl name="parChTrans1D1">
+    <dgm:fillClrLst meth="repeat">
+      <a:schemeClr val="accent3">
+        <a:shade val="80000"/>
+      </a:schemeClr>
+    </dgm:fillClrLst>
+    <dgm:linClrLst meth="repeat">
+      <a:schemeClr val="accent3">
+        <a:shade val="80000"/>
+      </a:schemeClr>
+    </dgm:linClrLst>
+    <dgm:effectClrLst/>
+    <dgm:txLinClrLst/>
+    <dgm:txFillClrLst meth="repeat">
+      <a:schemeClr val="tx1"/>
+    </dgm:txFillClrLst>
+    <dgm:txEffectClrLst/>
+  </dgm:styleLbl>
+  <dgm:styleLbl name="parChTrans1D2">
+    <dgm:fillClrLst meth="repeat">
+      <a:schemeClr val="accent3">
+        <a:tint val="90000"/>
+      </a:schemeClr>
+    </dgm:fillClrLst>
+    <dgm:linClrLst meth="repeat">
+      <a:schemeClr val="accent3">
+        <a:tint val="90000"/>
+      </a:schemeClr>
+    </dgm:linClrLst>
+    <dgm:effectClrLst/>
+    <dgm:txLinClrLst/>
+    <dgm:txFillClrLst meth="repeat">
+      <a:schemeClr val="tx1"/>
+    </dgm:txFillClrLst>
+    <dgm:txEffectClrLst/>
+  </dgm:styleLbl>
+  <dgm:styleLbl name="parChTrans1D3">
+    <dgm:fillClrLst meth="repeat">
+      <a:schemeClr val="accent3">
+        <a:tint val="70000"/>
+      </a:schemeClr>
+    </dgm:fillClrLst>
+    <dgm:linClrLst meth="repeat">
+      <a:schemeClr val="accent3">
+        <a:tint val="70000"/>
+      </a:schemeClr>
+    </dgm:linClrLst>
+    <dgm:effectClrLst/>
+    <dgm:txLinClrLst/>
+    <dgm:txFillClrLst meth="repeat">
+      <a:schemeClr val="tx1"/>
+    </dgm:txFillClrLst>
+    <dgm:txEffectClrLst/>
+  </dgm:styleLbl>
+  <dgm:styleLbl name="parChTrans1D4">
+    <dgm:fillClrLst meth="repeat">
+      <a:schemeClr val="accent3">
+        <a:tint val="50000"/>
+      </a:schemeClr>
+    </dgm:fillClrLst>
+    <dgm:linClrLst meth="repeat">
+      <a:schemeClr val="accent3">
+        <a:tint val="50000"/>
+      </a:schemeClr>
+    </dgm:linClrLst>
+    <dgm:effectClrLst/>
+    <dgm:txLinClrLst/>
+    <dgm:txFillClrLst meth="repeat">
+      <a:schemeClr val="tx1"/>
+    </dgm:txFillClrLst>
+    <dgm:txEffectClrLst/>
+  </dgm:styleLbl>
+  <dgm:styleLbl name="fgAcc1">
+    <dgm:fillClrLst meth="repeat">
+      <a:schemeClr val="lt1">
+        <a:alpha val="90000"/>
+      </a:schemeClr>
+    </dgm:fillClrLst>
+    <dgm:linClrLst meth="cycle">
+      <a:schemeClr val="accent3">
+        <a:shade val="50000"/>
+      </a:schemeClr>
+      <a:schemeClr val="accent3">
+        <a:tint val="55000"/>
+      </a:schemeClr>
+    </dgm:linClrLst>
+    <dgm:effectClrLst/>
+    <dgm:txLinClrLst/>
+    <dgm:txFillClrLst meth="repeat">
+      <a:schemeClr val="dk1"/>
+    </dgm:txFillClrLst>
+    <dgm:txEffectClrLst/>
+  </dgm:styleLbl>
+  <dgm:styleLbl name="conFgAcc1">
+    <dgm:fillClrLst meth="repeat">
+      <a:schemeClr val="lt1">
+        <a:alpha val="90000"/>
+      </a:schemeClr>
+    </dgm:fillClrLst>
+    <dgm:linClrLst meth="cycle">
+      <a:schemeClr val="accent3">
+        <a:shade val="50000"/>
+      </a:schemeClr>
+      <a:schemeClr val="accent3">
+        <a:tint val="55000"/>
+      </a:schemeClr>
+    </dgm:linClrLst>
+    <dgm:effectClrLst/>
+    <dgm:txLinClrLst/>
+    <dgm:txFillClrLst meth="repeat">
+      <a:schemeClr val="dk1"/>
+    </dgm:txFillClrLst>
+    <dgm:txEffectClrLst/>
+  </dgm:styleLbl>
+  <dgm:styleLbl name="alignAcc1">
+    <dgm:fillClrLst meth="repeat">
+      <a:schemeClr val="lt1">
+        <a:alpha val="90000"/>
+      </a:schemeClr>
+    </dgm:fillClrLst>
+    <dgm:linClrLst meth="cycle">
+      <a:schemeClr val="accent3">
+        <a:shade val="50000"/>
+      </a:schemeClr>
+      <a:schemeClr val="accent3">
+        <a:tint val="55000"/>
+      </a:schemeClr>
+    </dgm:linClrLst>
+    <dgm:effectClrLst/>
+    <dgm:txLinClrLst/>
+    <dgm:txFillClrLst meth="repeat">
+      <a:schemeClr val="dk1"/>
+    </dgm:txFillClrLst>
+    <dgm:txEffectClrLst/>
+  </dgm:styleLbl>
+  <dgm:styleLbl name="trAlignAcc1">
+    <dgm:fillClrLst meth="repeat">
+      <a:schemeClr val="lt1">
+        <a:alpha val="55000"/>
+      </a:schemeClr>
+    </dgm:fillClrLst>
+    <dgm:linClrLst meth="repeat">
+      <a:schemeClr val="accent3"/>
+    </dgm:linClrLst>
+    <dgm:effectClrLst/>
+    <dgm:txLinClrLst/>
+    <dgm:txFillClrLst meth="repeat">
+      <a:schemeClr val="dk1"/>
+    </dgm:txFillClrLst>
+    <dgm:txEffectClrLst/>
+  </dgm:styleLbl>
+  <dgm:styleLbl name="bgAcc1">
+    <dgm:fillClrLst meth="repeat">
+      <a:schemeClr val="lt1">
+        <a:alpha val="90000"/>
+      </a:schemeClr>
+    </dgm:fillClrLst>
+    <dgm:linClrLst meth="cycle">
+      <a:schemeClr val="accent3">
+        <a:shade val="50000"/>
+      </a:schemeClr>
+      <a:schemeClr val="accent3">
+        <a:tint val="55000"/>
+      </a:schemeClr>
+    </dgm:linClrLst>
+    <dgm:effectClrLst/>
+    <dgm:txLinClrLst/>
+    <dgm:txFillClrLst meth="repeat">
+      <a:schemeClr val="dk1"/>
+    </dgm:txFillClrLst>
+    <dgm:txEffectClrLst/>
+  </dgm:styleLbl>
+  <dgm:styleLbl name="solidFgAcc1">
+    <dgm:fillClrLst meth="repeat">
+      <a:schemeClr val="lt1"/>
+    </dgm:fillClrLst>
+    <dgm:linClrLst meth="cycle">
+      <a:schemeClr val="accent3">
+        <a:shade val="50000"/>
+      </a:schemeClr>
+      <a:schemeClr val="accent3">
+        <a:tint val="55000"/>
+      </a:schemeClr>
+    </dgm:linClrLst>
+    <dgm:effectClrLst/>
+    <dgm:txLinClrLst/>
+    <dgm:txFillClrLst meth="repeat">
+      <a:schemeClr val="dk1"/>
+    </dgm:txFillClrLst>
+    <dgm:txEffectClrLst/>
+  </dgm:styleLbl>
+  <dgm:styleLbl name="solidAlignAcc1">
+    <dgm:fillClrLst meth="repeat">
+      <a:schemeClr val="lt1"/>
+    </dgm:fillClrLst>
+    <dgm:linClrLst meth="repeat">
+      <a:schemeClr val="accent3"/>
+    </dgm:linClrLst>
+    <dgm:effectClrLst/>
+    <dgm:txLinClrLst/>
+    <dgm:txFillClrLst meth="repeat">
+      <a:schemeClr val="dk1"/>
+    </dgm:txFillClrLst>
+    <dgm:txEffectClrLst/>
+  </dgm:styleLbl>
+  <dgm:styleLbl name="solidBgAcc1">
+    <dgm:fillClrLst meth="repeat">
+      <a:schemeClr val="lt1"/>
+    </dgm:fillClrLst>
+    <dgm:linClrLst meth="repeat">
+      <a:schemeClr val="accent3"/>
+    </dgm:linClrLst>
+    <dgm:effectClrLst/>
+    <dgm:txLinClrLst/>
+    <dgm:txFillClrLst meth="repeat">
+      <a:schemeClr val="dk1"/>
+    </dgm:txFillClrLst>
+    <dgm:txEffectClrLst/>
+  </dgm:styleLbl>
+  <dgm:styleLbl name="fgAccFollowNode1">
+    <dgm:fillClrLst meth="repeat">
+      <a:schemeClr val="accent3">
+        <a:alpha val="90000"/>
+        <a:tint val="55000"/>
+      </a:schemeClr>
+    </dgm:fillClrLst>
+    <dgm:linClrLst meth="repeat">
+      <a:schemeClr val="accent3">
+        <a:alpha val="90000"/>
+        <a:tint val="55000"/>
+      </a:schemeClr>
+    </dgm:linClrLst>
+    <dgm:effectClrLst/>
+    <dgm:txLinClrLst/>
+    <dgm:txFillClrLst meth="repeat">
+      <a:schemeClr val="dk1"/>
+    </dgm:txFillClrLst>
+    <dgm:txEffectClrLst/>
+  </dgm:styleLbl>
+  <dgm:styleLbl name="alignAccFollowNode1">
+    <dgm:fillClrLst meth="repeat">
+      <a:schemeClr val="accent3">
+        <a:alpha val="90000"/>
+        <a:tint val="55000"/>
+      </a:schemeClr>
+    </dgm:fillClrLst>
+    <dgm:linClrLst meth="repeat">
+      <a:schemeClr val="accent3">
+        <a:alpha val="90000"/>
+        <a:tint val="55000"/>
+      </a:schemeClr>
+    </dgm:linClrLst>
+    <dgm:effectClrLst/>
+    <dgm:txLinClrLst/>
+    <dgm:txFillClrLst meth="repeat">
+      <a:schemeClr val="dk1"/>
+    </dgm:txFillClrLst>
+    <dgm:txEffectClrLst/>
+  </dgm:styleLbl>
+  <dgm:styleLbl name="bgAccFollowNode1">
+    <dgm:fillClrLst meth="repeat">
+      <a:schemeClr val="accent3">
+        <a:alpha val="90000"/>
+        <a:tint val="55000"/>
+      </a:schemeClr>
+    </dgm:fillClrLst>
+    <dgm:linClrLst meth="repeat">
+      <a:schemeClr val="lt1"/>
+    </dgm:linClrLst>
+    <dgm:effectClrLst/>
+    <dgm:txLinClrLst/>
+    <dgm:txFillClrLst meth="repeat">
+      <a:schemeClr val="dk1"/>
+    </dgm:txFillClrLst>
+    <dgm:txEffectClrLst/>
+  </dgm:styleLbl>
+  <dgm:styleLbl name="fgAcc0">
+    <dgm:fillClrLst meth="repeat">
+      <a:schemeClr val="lt1">
+        <a:alpha val="90000"/>
+      </a:schemeClr>
+    </dgm:fillClrLst>
+    <dgm:linClrLst meth="repeat">
+      <a:schemeClr val="accent3">
+        <a:shade val="80000"/>
+      </a:schemeClr>
+    </dgm:linClrLst>
+    <dgm:effectClrLst/>
+    <dgm:txLinClrLst/>
+    <dgm:txFillClrLst meth="repeat">
+      <a:schemeClr val="dk1"/>
+    </dgm:txFillClrLst>
+    <dgm:txEffectClrLst/>
+  </dgm:styleLbl>
+  <dgm:styleLbl name="fgAcc2">
+    <dgm:fillClrLst meth="repeat">
+      <a:schemeClr val="lt1">
+        <a:alpha val="90000"/>
+      </a:schemeClr>
+    </dgm:fillClrLst>
+    <dgm:linClrLst meth="repeat">
+      <a:schemeClr val="accent3">
+        <a:tint val="90000"/>
+      </a:schemeClr>
+    </dgm:linClrLst>
+    <dgm:effectClrLst/>
+    <dgm:txLinClrLst/>
+    <dgm:txFillClrLst meth="repeat">
+      <a:schemeClr val="dk1"/>
+    </dgm:txFillClrLst>
+    <dgm:txEffectClrLst/>
+  </dgm:styleLbl>
+  <dgm:styleLbl name="fgAcc3">
+    <dgm:fillClrLst meth="repeat">
+      <a:schemeClr val="lt1">
+        <a:alpha val="90000"/>
+      </a:schemeClr>
+    </dgm:fillClrLst>
+    <dgm:linClrLst meth="repeat">
+      <a:schemeClr val="accent3">
+        <a:tint val="70000"/>
+      </a:schemeClr>
+    </dgm:linClrLst>
+    <dgm:effectClrLst/>
+    <dgm:txLinClrLst/>
+    <dgm:txFillClrLst meth="repeat">
+      <a:schemeClr val="dk1"/>
+    </dgm:txFillClrLst>
+    <dgm:txEffectClrLst/>
+  </dgm:styleLbl>
+  <dgm:styleLbl name="fgAcc4">
+    <dgm:fillClrLst meth="repeat">
+      <a:schemeClr val="lt1">
+        <a:alpha val="90000"/>
+      </a:schemeClr>
+    </dgm:fillClrLst>
+    <dgm:linClrLst meth="repeat">
+      <a:schemeClr val="accent3">
+        <a:tint val="50000"/>
+      </a:schemeClr>
+    </dgm:linClrLst>
+    <dgm:effectClrLst/>
+    <dgm:txLinClrLst/>
+    <dgm:txFillClrLst meth="repeat">
+      <a:schemeClr val="dk1"/>
+    </dgm:txFillClrLst>
+    <dgm:txEffectClrLst/>
+  </dgm:styleLbl>
+  <dgm:styleLbl name="bgShp">
+    <dgm:fillClrLst meth="repeat">
+      <a:schemeClr val="accent3">
+        <a:tint val="55000"/>
+      </a:schemeClr>
+    </dgm:fillClrLst>
+    <dgm:linClrLst meth="repeat">
+      <a:schemeClr val="dk1"/>
+    </dgm:linClrLst>
+    <dgm:effectClrLst/>
+    <dgm:txLinClrLst/>
+    <dgm:txFillClrLst meth="repeat">
+      <a:schemeClr val="dk1"/>
+    </dgm:txFillClrLst>
+    <dgm:txEffectClrLst/>
+  </dgm:styleLbl>
+  <dgm:styleLbl name="dkBgShp">
+    <dgm:fillClrLst meth="repeat">
+      <a:schemeClr val="accent3">
+        <a:shade val="90000"/>
+      </a:schemeClr>
+    </dgm:fillClrLst>
+    <dgm:linClrLst meth="repeat">
+      <a:schemeClr val="dk1"/>
+    </dgm:linClrLst>
+    <dgm:effectClrLst/>
+    <dgm:txLinClrLst/>
+    <dgm:txFillClrLst meth="repeat">
+      <a:schemeClr val="lt1"/>
+    </dgm:txFillClrLst>
+    <dgm:txEffectClrLst/>
+  </dgm:styleLbl>
+  <dgm:styleLbl name="trBgShp">
+    <dgm:fillClrLst meth="repeat">
+      <a:schemeClr val="accent3">
+        <a:tint val="50000"/>
+        <a:alpha val="55000"/>
+      </a:schemeClr>
+    </dgm:fillClrLst>
+    <dgm:linClrLst meth="repeat">
+      <a:schemeClr val="accent3"/>
+    </dgm:linClrLst>
+    <dgm:effectClrLst/>
+    <dgm:txLinClrLst/>
+    <dgm:txFillClrLst meth="repeat">
+      <a:schemeClr val="lt1"/>
+    </dgm:txFillClrLst>
+    <dgm:txEffectClrLst/>
+  </dgm:styleLbl>
+  <dgm:styleLbl name="fgShp">
+    <dgm:fillClrLst meth="repeat">
+      <a:schemeClr val="accent3">
+        <a:tint val="55000"/>
+      </a:schemeClr>
+    </dgm:fillClrLst>
+    <dgm:linClrLst meth="repeat">
+      <a:schemeClr val="lt1"/>
+    </dgm:linClrLst>
+    <dgm:effectClrLst/>
+    <dgm:txLinClrLst/>
+    <dgm:txFillClrLst meth="repeat">
+      <a:schemeClr val="dk1"/>
+    </dgm:txFillClrLst>
+    <dgm:txEffectClrLst/>
+  </dgm:styleLbl>
+  <dgm:styleLbl name="revTx">
+    <dgm:fillClrLst meth="repeat">
+      <a:schemeClr val="lt1">
+        <a:alpha val="0"/>
+      </a:schemeClr>
+    </dgm:fillClrLst>
+    <dgm:linClrLst meth="repeat">
+      <a:schemeClr val="dk1">
+        <a:alpha val="0"/>
+      </a:schemeClr>
+    </dgm:linClrLst>
+    <dgm:effectClrLst/>
+    <dgm:txLinClrLst/>
+    <dgm:txFillClrLst meth="repeat">
+      <a:schemeClr val="tx1"/>
+    </dgm:txFillClrLst>
+    <dgm:txEffectClrLst/>
+  </dgm:styleLbl>
+</dgm:colorsDef>
+</file>
+
+<file path=ppt/diagrams/colors2.xml><?xml version="1.0" encoding="utf-8"?>
+<dgm:colorsDef xmlns:dgm="http://schemas.openxmlformats.org/drawingml/2006/diagram" xmlns:a="http://schemas.openxmlformats.org/drawingml/2006/main" uniqueId="urn:microsoft.com/office/officeart/2005/8/colors/accent3_4">
+  <dgm:title val=""/>
+  <dgm:desc val=""/>
+  <dgm:catLst>
+    <dgm:cat type="accent3" pri="11400"/>
+  </dgm:catLst>
+  <dgm:styleLbl name="node0">
+    <dgm:fillClrLst meth="cycle">
+      <a:schemeClr val="accent3">
+        <a:shade val="60000"/>
+      </a:schemeClr>
+    </dgm:fillClrLst>
+    <dgm:linClrLst meth="repeat">
+      <a:schemeClr val="lt1"/>
+    </dgm:linClrLst>
+    <dgm:effectClrLst/>
+    <dgm:txLinClrLst/>
+    <dgm:txFillClrLst/>
+    <dgm:txEffectClrLst/>
+  </dgm:styleLbl>
+  <dgm:styleLbl name="node1">
+    <dgm:fillClrLst meth="cycle">
+      <a:schemeClr val="accent3">
+        <a:shade val="50000"/>
+      </a:schemeClr>
+      <a:schemeClr val="accent3">
+        <a:tint val="55000"/>
+      </a:schemeClr>
+    </dgm:fillClrLst>
+    <dgm:linClrLst meth="repeat">
+      <a:schemeClr val="lt1"/>
+    </dgm:linClrLst>
+    <dgm:effectClrLst/>
+    <dgm:txLinClrLst/>
+    <dgm:txFillClrLst/>
+    <dgm:txEffectClrLst/>
+  </dgm:styleLbl>
+  <dgm:styleLbl name="alignNode1">
+    <dgm:fillClrLst meth="cycle">
+      <a:schemeClr val="accent3">
+        <a:shade val="50000"/>
+      </a:schemeClr>
+      <a:schemeClr val="accent3">
+        <a:tint val="55000"/>
+      </a:schemeClr>
+    </dgm:fillClrLst>
+    <dgm:linClrLst meth="cycle">
+      <a:schemeClr val="accent3">
+        <a:shade val="50000"/>
+      </a:schemeClr>
+      <a:schemeClr val="accent3">
+        <a:tint val="55000"/>
+      </a:schemeClr>
+    </dgm:linClrLst>
+    <dgm:effectClrLst/>
+    <dgm:txLinClrLst/>
+    <dgm:txFillClrLst/>
+    <dgm:txEffectClrLst/>
+  </dgm:styleLbl>
+  <dgm:styleLbl name="lnNode1">
+    <dgm:fillClrLst meth="cycle">
+      <a:schemeClr val="accent3">
+        <a:shade val="50000"/>
+      </a:schemeClr>
+      <a:schemeClr val="accent3">
+        <a:tint val="55000"/>
+      </a:schemeClr>
+    </dgm:fillClrLst>
+    <dgm:linClrLst meth="repeat">
+      <a:schemeClr val="lt1"/>
+    </dgm:linClrLst>
+    <dgm:effectClrLst/>
+    <dgm:txLinClrLst/>
+    <dgm:txFillClrLst/>
+    <dgm:txEffectClrLst/>
+  </dgm:styleLbl>
+  <dgm:styleLbl name="vennNode1">
+    <dgm:fillClrLst meth="cycle">
+      <a:schemeClr val="accent3">
+        <a:shade val="80000"/>
+        <a:alpha val="50000"/>
+      </a:schemeClr>
+      <a:schemeClr val="accent3">
+        <a:tint val="50000"/>
+        <a:alpha val="50000"/>
+      </a:schemeClr>
+    </dgm:fillClrLst>
+    <dgm:linClrLst meth="repeat">
+      <a:schemeClr val="lt1"/>
+    </dgm:linClrLst>
+    <dgm:effectClrLst/>
+    <dgm:txLinClrLst/>
+    <dgm:txFillClrLst/>
+    <dgm:txEffectClrLst/>
+  </dgm:styleLbl>
+  <dgm:styleLbl name="node2">
+    <dgm:fillClrLst>
+      <a:schemeClr val="accent3">
+        <a:shade val="80000"/>
+      </a:schemeClr>
+    </dgm:fillClrLst>
+    <dgm:linClrLst meth="repeat">
+      <a:schemeClr val="lt1"/>
+    </dgm:linClrLst>
+    <dgm:effectClrLst/>
+    <dgm:txLinClrLst/>
+    <dgm:txFillClrLst/>
+    <dgm:txEffectClrLst/>
+  </dgm:styleLbl>
+  <dgm:styleLbl name="node3">
+    <dgm:fillClrLst>
+      <a:schemeClr val="accent3">
+        <a:tint val="99000"/>
+      </a:schemeClr>
+    </dgm:fillClrLst>
+    <dgm:linClrLst meth="repeat">
+      <a:schemeClr val="lt1"/>
+    </dgm:linClrLst>
+    <dgm:effectClrLst/>
+    <dgm:txLinClrLst/>
+    <dgm:txFillClrLst/>
+    <dgm:txEffectClrLst/>
+  </dgm:styleLbl>
+  <dgm:styleLbl name="node4">
+    <dgm:fillClrLst>
+      <a:schemeClr val="accent3">
+        <a:tint val="70000"/>
+      </a:schemeClr>
+    </dgm:fillClrLst>
+    <dgm:linClrLst meth="repeat">
+      <a:schemeClr val="lt1"/>
+    </dgm:linClrLst>
+    <dgm:effectClrLst/>
+    <dgm:txLinClrLst/>
+    <dgm:txFillClrLst/>
+    <dgm:txEffectClrLst/>
+  </dgm:styleLbl>
+  <dgm:styleLbl name="fgImgPlace1">
+    <dgm:fillClrLst>
+      <a:schemeClr val="accent3">
+        <a:tint val="50000"/>
+      </a:schemeClr>
+      <a:schemeClr val="accent3">
+        <a:tint val="55000"/>
+      </a:schemeClr>
+    </dgm:fillClrLst>
+    <dgm:linClrLst meth="repeat">
+      <a:schemeClr val="lt1"/>
+    </dgm:linClrLst>
+    <dgm:effectClrLst/>
+    <dgm:txLinClrLst/>
+    <dgm:txFillClrLst meth="repeat">
+      <a:schemeClr val="lt1"/>
+    </dgm:txFillClrLst>
+    <dgm:txEffectClrLst/>
+  </dgm:styleLbl>
+  <dgm:styleLbl name="alignImgPlace1">
+    <dgm:fillClrLst>
+      <a:schemeClr val="accent3">
+        <a:tint val="50000"/>
+      </a:schemeClr>
+      <a:schemeClr val="accent3">
+        <a:tint val="55000"/>
+      </a:schemeClr>
+    </dgm:fillClrLst>
+    <dgm:linClrLst meth="repeat">
+      <a:schemeClr val="lt1"/>
+    </dgm:linClrLst>
+    <dgm:effectClrLst/>
+    <dgm:txLinClrLst/>
+    <dgm:txFillClrLst meth="repeat">
+      <a:schemeClr val="lt1"/>
+    </dgm:txFillClrLst>
+    <dgm:txEffectClrLst/>
+  </dgm:styleLbl>
+  <dgm:styleLbl name="bgImgPlace1">
+    <dgm:fillClrLst>
+      <a:schemeClr val="accent3">
+        <a:tint val="50000"/>
+      </a:schemeClr>
+      <a:schemeClr val="accent3">
+        <a:tint val="55000"/>
+      </a:schemeClr>
+    </dgm:fillClrLst>
+    <dgm:linClrLst meth="repeat">
+      <a:schemeClr val="lt1"/>
+    </dgm:linClrLst>
+    <dgm:effectClrLst/>
+    <dgm:txLinClrLst/>
+    <dgm:txFillClrLst meth="repeat">
+      <a:schemeClr val="lt1"/>
+    </dgm:txFillClrLst>
+    <dgm:txEffectClrLst/>
+  </dgm:styleLbl>
+  <dgm:styleLbl name="sibTrans2D1">
+    <dgm:fillClrLst meth="cycle">
+      <a:schemeClr val="accent3">
+        <a:shade val="90000"/>
+      </a:schemeClr>
+      <a:schemeClr val="accent3">
+        <a:tint val="50000"/>
+      </a:schemeClr>
+    </dgm:fillClrLst>
+    <dgm:linClrLst meth="cycle">
+      <a:schemeClr val="accent3">
+        <a:shade val="90000"/>
+      </a:schemeClr>
+      <a:schemeClr val="accent3">
+        <a:tint val="50000"/>
+      </a:schemeClr>
+    </dgm:linClrLst>
+    <dgm:effectClrLst/>
+    <dgm:txLinClrLst/>
+    <dgm:txFillClrLst/>
+    <dgm:txEffectClrLst/>
+  </dgm:styleLbl>
+  <dgm:styleLbl name="fgSibTrans2D1">
+    <dgm:fillClrLst meth="cycle">
+      <a:schemeClr val="accent3">
+        <a:shade val="90000"/>
+      </a:schemeClr>
+      <a:schemeClr val="accent3">
+        <a:tint val="50000"/>
+      </a:schemeClr>
+    </dgm:fillClrLst>
+    <dgm:linClrLst meth="cycle">
+      <a:schemeClr val="accent3">
+        <a:shade val="90000"/>
+      </a:schemeClr>
+      <a:schemeClr val="accent3">
+        <a:tint val="50000"/>
+      </a:schemeClr>
+    </dgm:linClrLst>
+    <dgm:effectClrLst/>
+    <dgm:txLinClrLst/>
+    <dgm:txFillClrLst/>
+    <dgm:txEffectClrLst/>
+  </dgm:styleLbl>
+  <dgm:styleLbl name="bgSibTrans2D1">
+    <dgm:fillClrLst meth="cycle">
+      <a:schemeClr val="accent3">
+        <a:shade val="90000"/>
+      </a:schemeClr>
+      <a:schemeClr val="accent3">
+        <a:tint val="50000"/>
+      </a:schemeClr>
+    </dgm:fillClrLst>
+    <dgm:linClrLst meth="cycle">
+      <a:schemeClr val="accent3">
+        <a:shade val="90000"/>
+      </a:schemeClr>
+      <a:schemeClr val="accent3">
+        <a:tint val="50000"/>
+      </a:schemeClr>
+    </dgm:linClrLst>
+    <dgm:effectClrLst/>
+    <dgm:txLinClrLst/>
+    <dgm:txFillClrLst/>
+    <dgm:txEffectClrLst/>
+  </dgm:styleLbl>
+  <dgm:styleLbl name="sibTrans1D1">
+    <dgm:fillClrLst meth="cycle">
+      <a:schemeClr val="accent3">
+        <a:shade val="90000"/>
+      </a:schemeClr>
+      <a:schemeClr val="accent3">
+        <a:tint val="50000"/>
+      </a:schemeClr>
+    </dgm:fillClrLst>
+    <dgm:linClrLst meth="cycle">
+      <a:schemeClr val="accent3">
+        <a:shade val="90000"/>
+      </a:schemeClr>
+      <a:schemeClr val="accent3">
+        <a:tint val="50000"/>
+      </a:schemeClr>
+    </dgm:linClrLst>
+    <dgm:effectClrLst/>
+    <dgm:txLinClrLst/>
+    <dgm:txFillClrLst meth="repeat">
+      <a:schemeClr val="tx1"/>
+    </dgm:txFillClrLst>
+    <dgm:txEffectClrLst/>
+  </dgm:styleLbl>
+  <dgm:styleLbl name="callout">
+    <dgm:fillClrLst meth="repeat">
+      <a:schemeClr val="accent3"/>
+    </dgm:fillClrLst>
+    <dgm:linClrLst meth="repeat">
+      <a:schemeClr val="accent3"/>
+    </dgm:linClrLst>
+    <dgm:effectClrLst/>
+    <dgm:txLinClrLst/>
+    <dgm:txFillClrLst meth="repeat">
+      <a:schemeClr val="tx1"/>
+    </dgm:txFillClrLst>
+    <dgm:txEffectClrLst/>
+  </dgm:styleLbl>
+  <dgm:styleLbl name="asst0">
+    <dgm:fillClrLst meth="repeat">
+      <a:schemeClr val="accent3">
+        <a:shade val="80000"/>
+      </a:schemeClr>
+    </dgm:fillClrLst>
+    <dgm:linClrLst meth="repeat">
+      <a:schemeClr val="lt1"/>
+    </dgm:linClrLst>
+    <dgm:effectClrLst/>
+    <dgm:txLinClrLst/>
+    <dgm:txFillClrLst/>
+    <dgm:txEffectClrLst/>
+  </dgm:styleLbl>
+  <dgm:styleLbl name="asst1">
+    <dgm:fillClrLst meth="repeat">
+      <a:schemeClr val="accent3">
+        <a:shade val="80000"/>
+      </a:schemeClr>
+    </dgm:fillClrLst>
+    <dgm:linClrLst meth="repeat">
+      <a:schemeClr val="lt1"/>
+    </dgm:linClrLst>
+    <dgm:effectClrLst/>
+    <dgm:txLinClrLst/>
+    <dgm:txFillClrLst/>
+    <dgm:txEffectClrLst/>
+  </dgm:styleLbl>
+  <dgm:styleLbl name="asst2">
+    <dgm:fillClrLst>
+      <a:schemeClr val="accent3">
+        <a:tint val="90000"/>
+      </a:schemeClr>
+    </dgm:fillClrLst>
+    <dgm:linClrLst meth="repeat">
+      <a:schemeClr val="lt1"/>
+    </dgm:linClrLst>
+    <dgm:effectClrLst/>
+    <dgm:txLinClrLst/>
+    <dgm:txFillClrLst/>
+    <dgm:txEffectClrLst/>
+  </dgm:styleLbl>
+  <dgm:styleLbl name="asst3">
+    <dgm:fillClrLst>
+      <a:schemeClr val="accent3">
+        <a:tint val="70000"/>
+      </a:schemeClr>
+    </dgm:fillClrLst>
+    <dgm:linClrLst meth="repeat">
+      <a:schemeClr val="lt1"/>
+    </dgm:linClrLst>
+    <dgm:effectClrLst/>
+    <dgm:txLinClrLst/>
+    <dgm:txFillClrLst/>
+    <dgm:txEffectClrLst/>
+  </dgm:styleLbl>
+  <dgm:styleLbl name="asst4">
+    <dgm:fillClrLst>
+      <a:schemeClr val="accent3">
+        <a:tint val="50000"/>
+      </a:schemeClr>
+    </dgm:fillClrLst>
+    <dgm:linClrLst meth="repeat">
+      <a:schemeClr val="lt1"/>
+    </dgm:linClrLst>
+    <dgm:effectClrLst/>
+    <dgm:txLinClrLst/>
+    <dgm:txFillClrLst/>
+    <dgm:txEffectClrLst/>
+  </dgm:styleLbl>
+  <dgm:styleLbl name="parChTrans2D1">
+    <dgm:fillClrLst meth="repeat">
+      <a:schemeClr val="accent3">
+        <a:tint val="60000"/>
+      </a:schemeClr>
+    </dgm:fillClrLst>
+    <dgm:linClrLst meth="repeat">
+      <a:schemeClr val="accent3">
+        <a:shade val="80000"/>
+      </a:schemeClr>
+    </dgm:linClrLst>
+    <dgm:effectClrLst/>
+    <dgm:txLinClrLst/>
+    <dgm:txFillClrLst/>
+    <dgm:txEffectClrLst/>
+  </dgm:styleLbl>
+  <dgm:styleLbl name="parChTrans2D2">
+    <dgm:fillClrLst meth="repeat">
+      <a:schemeClr val="accent3">
+        <a:tint val="90000"/>
+      </a:schemeClr>
+    </dgm:fillClrLst>
+    <dgm:linClrLst meth="repeat">
+      <a:schemeClr val="accent3">
+        <a:tint val="90000"/>
+      </a:schemeClr>
+    </dgm:linClrLst>
+    <dgm:effectClrLst/>
+    <dgm:txLinClrLst/>
+    <dgm:txFillClrLst/>
+    <dgm:txEffectClrLst/>
+  </dgm:styleLbl>
+  <dgm:styleLbl name="parChTrans2D3">
+    <dgm:fillClrLst meth="repeat">
+      <a:schemeClr val="accent3">
+        <a:tint val="70000"/>
+      </a:schemeClr>
+    </dgm:fillClrLst>
+    <dgm:linClrLst meth="repeat">
+      <a:schemeClr val="accent3">
+        <a:tint val="70000"/>
+      </a:schemeClr>
+    </dgm:linClrLst>
+    <dgm:effectClrLst/>
+    <dgm:txLinClrLst/>
+    <dgm:txFillClrLst/>
+    <dgm:txEffectClrLst/>
+  </dgm:styleLbl>
+  <dgm:styleLbl name="parChTrans2D4">
+    <dgm:fillClrLst meth="repeat">
+      <a:schemeClr val="accent3">
+        <a:tint val="50000"/>
+      </a:schemeClr>
+    </dgm:fillClrLst>
+    <dgm:linClrLst meth="repeat">
+      <a:schemeClr val="accent3">
+        <a:tint val="50000"/>
+      </a:schemeClr>
+    </dgm:linClrLst>
+    <dgm:effectClrLst/>
+    <dgm:txLinClrLst/>
+    <dgm:txFillClrLst meth="repeat">
+      <a:schemeClr val="dk1"/>
+    </dgm:txFillClrLst>
+    <dgm:txEffectClrLst/>
+  </dgm:styleLbl>
+  <dgm:styleLbl name="parChTrans1D1">
+    <dgm:fillClrLst meth="repeat">
+      <a:schemeClr val="accent3">
+        <a:shade val="80000"/>
+      </a:schemeClr>
+    </dgm:fillClrLst>
+    <dgm:linClrLst meth="repeat">
+      <a:schemeClr val="accent3">
+        <a:shade val="80000"/>
+      </a:schemeClr>
+    </dgm:linClrLst>
+    <dgm:effectClrLst/>
+    <dgm:txLinClrLst/>
+    <dgm:txFillClrLst meth="repeat">
+      <a:schemeClr val="tx1"/>
+    </dgm:txFillClrLst>
+    <dgm:txEffectClrLst/>
+  </dgm:styleLbl>
+  <dgm:styleLbl name="parChTrans1D2">
+    <dgm:fillClrLst meth="repeat">
+      <a:schemeClr val="accent3">
+        <a:tint val="90000"/>
+      </a:schemeClr>
+    </dgm:fillClrLst>
+    <dgm:linClrLst meth="repeat">
+      <a:schemeClr val="accent3">
+        <a:tint val="90000"/>
+      </a:schemeClr>
+    </dgm:linClrLst>
+    <dgm:effectClrLst/>
+    <dgm:txLinClrLst/>
+    <dgm:txFillClrLst meth="repeat">
+      <a:schemeClr val="tx1"/>
+    </dgm:txFillClrLst>
+    <dgm:txEffectClrLst/>
+  </dgm:styleLbl>
+  <dgm:styleLbl name="parChTrans1D3">
+    <dgm:fillClrLst meth="repeat">
+      <a:schemeClr val="accent3">
+        <a:tint val="70000"/>
+      </a:schemeClr>
+    </dgm:fillClrLst>
+    <dgm:linClrLst meth="repeat">
+      <a:schemeClr val="accent3">
+        <a:tint val="70000"/>
+      </a:schemeClr>
+    </dgm:linClrLst>
+    <dgm:effectClrLst/>
+    <dgm:txLinClrLst/>
+    <dgm:txFillClrLst meth="repeat">
+      <a:schemeClr val="tx1"/>
+    </dgm:txFillClrLst>
+    <dgm:txEffectClrLst/>
+  </dgm:styleLbl>
+  <dgm:styleLbl name="parChTrans1D4">
+    <dgm:fillClrLst meth="repeat">
+      <a:schemeClr val="accent3">
+        <a:tint val="50000"/>
+      </a:schemeClr>
+    </dgm:fillClrLst>
+    <dgm:linClrLst meth="repeat">
+      <a:schemeClr val="accent3">
+        <a:tint val="50000"/>
+      </a:schemeClr>
+    </dgm:linClrLst>
+    <dgm:effectClrLst/>
+    <dgm:txLinClrLst/>
+    <dgm:txFillClrLst meth="repeat">
+      <a:schemeClr val="tx1"/>
+    </dgm:txFillClrLst>
+    <dgm:txEffectClrLst/>
+  </dgm:styleLbl>
+  <dgm:styleLbl name="fgAcc1">
+    <dgm:fillClrLst meth="repeat">
+      <a:schemeClr val="lt1">
+        <a:alpha val="90000"/>
+      </a:schemeClr>
+    </dgm:fillClrLst>
+    <dgm:linClrLst meth="cycle">
+      <a:schemeClr val="accent3">
+        <a:shade val="50000"/>
+      </a:schemeClr>
+      <a:schemeClr val="accent3">
+        <a:tint val="55000"/>
+      </a:schemeClr>
+    </dgm:linClrLst>
+    <dgm:effectClrLst/>
+    <dgm:txLinClrLst/>
+    <dgm:txFillClrLst meth="repeat">
+      <a:schemeClr val="dk1"/>
+    </dgm:txFillClrLst>
+    <dgm:txEffectClrLst/>
+  </dgm:styleLbl>
+  <dgm:styleLbl name="conFgAcc1">
+    <dgm:fillClrLst meth="repeat">
+      <a:schemeClr val="lt1">
+        <a:alpha val="90000"/>
+      </a:schemeClr>
+    </dgm:fillClrLst>
+    <dgm:linClrLst meth="cycle">
+      <a:schemeClr val="accent3">
+        <a:shade val="50000"/>
+      </a:schemeClr>
+      <a:schemeClr val="accent3">
+        <a:tint val="55000"/>
+      </a:schemeClr>
+    </dgm:linClrLst>
+    <dgm:effectClrLst/>
+    <dgm:txLinClrLst/>
+    <dgm:txFillClrLst meth="repeat">
+      <a:schemeClr val="dk1"/>
+    </dgm:txFillClrLst>
+    <dgm:txEffectClrLst/>
+  </dgm:styleLbl>
+  <dgm:styleLbl name="alignAcc1">
+    <dgm:fillClrLst meth="repeat">
+      <a:schemeClr val="lt1">
+        <a:alpha val="90000"/>
+      </a:schemeClr>
+    </dgm:fillClrLst>
+    <dgm:linClrLst meth="cycle">
+      <a:schemeClr val="accent3">
+        <a:shade val="50000"/>
+      </a:schemeClr>
+      <a:schemeClr val="accent3">
+        <a:tint val="55000"/>
+      </a:schemeClr>
+    </dgm:linClrLst>
+    <dgm:effectClrLst/>
+    <dgm:txLinClrLst/>
+    <dgm:txFillClrLst meth="repeat">
+      <a:schemeClr val="dk1"/>
+    </dgm:txFillClrLst>
+    <dgm:txEffectClrLst/>
+  </dgm:styleLbl>
+  <dgm:styleLbl name="trAlignAcc1">
+    <dgm:fillClrLst meth="repeat">
+      <a:schemeClr val="lt1">
+        <a:alpha val="55000"/>
+      </a:schemeClr>
+    </dgm:fillClrLst>
+    <dgm:linClrLst meth="repeat">
+      <a:schemeClr val="accent3"/>
+    </dgm:linClrLst>
+    <dgm:effectClrLst/>
+    <dgm:txLinClrLst/>
+    <dgm:txFillClrLst meth="repeat">
+      <a:schemeClr val="dk1"/>
+    </dgm:txFillClrLst>
+    <dgm:txEffectClrLst/>
+  </dgm:styleLbl>
+  <dgm:styleLbl name="bgAcc1">
+    <dgm:fillClrLst meth="repeat">
+      <a:schemeClr val="lt1">
+        <a:alpha val="90000"/>
+      </a:schemeClr>
+    </dgm:fillClrLst>
+    <dgm:linClrLst meth="cycle">
+      <a:schemeClr val="accent3">
+        <a:shade val="50000"/>
+      </a:schemeClr>
+      <a:schemeClr val="accent3">
+        <a:tint val="55000"/>
+      </a:schemeClr>
+    </dgm:linClrLst>
+    <dgm:effectClrLst/>
+    <dgm:txLinClrLst/>
+    <dgm:txFillClrLst meth="repeat">
+      <a:schemeClr val="dk1"/>
+    </dgm:txFillClrLst>
+    <dgm:txEffectClrLst/>
+  </dgm:styleLbl>
+  <dgm:styleLbl name="solidFgAcc1">
+    <dgm:fillClrLst meth="repeat">
+      <a:schemeClr val="lt1"/>
+    </dgm:fillClrLst>
+    <dgm:linClrLst meth="cycle">
+      <a:schemeClr val="accent3">
+        <a:shade val="50000"/>
+      </a:schemeClr>
+      <a:schemeClr val="accent3">
+        <a:tint val="55000"/>
+      </a:schemeClr>
+    </dgm:linClrLst>
+    <dgm:effectClrLst/>
+    <dgm:txLinClrLst/>
+    <dgm:txFillClrLst meth="repeat">
+      <a:schemeClr val="dk1"/>
+    </dgm:txFillClrLst>
+    <dgm:txEffectClrLst/>
+  </dgm:styleLbl>
+  <dgm:styleLbl name="solidAlignAcc1">
+    <dgm:fillClrLst meth="repeat">
+      <a:schemeClr val="lt1"/>
+    </dgm:fillClrLst>
+    <dgm:linClrLst meth="repeat">
+      <a:schemeClr val="accent3"/>
+    </dgm:linClrLst>
+    <dgm:effectClrLst/>
+    <dgm:txLinClrLst/>
+    <dgm:txFillClrLst meth="repeat">
+      <a:schemeClr val="dk1"/>
+    </dgm:txFillClrLst>
+    <dgm:txEffectClrLst/>
+  </dgm:styleLbl>
+  <dgm:styleLbl name="solidBgAcc1">
+    <dgm:fillClrLst meth="repeat">
+      <a:schemeClr val="lt1"/>
+    </dgm:fillClrLst>
+    <dgm:linClrLst meth="repeat">
+      <a:schemeClr val="accent3"/>
+    </dgm:linClrLst>
+    <dgm:effectClrLst/>
+    <dgm:txLinClrLst/>
+    <dgm:txFillClrLst meth="repeat">
+      <a:schemeClr val="dk1"/>
+    </dgm:txFillClrLst>
+    <dgm:txEffectClrLst/>
+  </dgm:styleLbl>
+  <dgm:styleLbl name="fgAccFollowNode1">
+    <dgm:fillClrLst meth="repeat">
+      <a:schemeClr val="accent3">
+        <a:alpha val="90000"/>
+        <a:tint val="55000"/>
+      </a:schemeClr>
+    </dgm:fillClrLst>
+    <dgm:linClrLst meth="repeat">
+      <a:schemeClr val="accent3">
+        <a:alpha val="90000"/>
+        <a:tint val="55000"/>
+      </a:schemeClr>
+    </dgm:linClrLst>
+    <dgm:effectClrLst/>
+    <dgm:txLinClrLst/>
+    <dgm:txFillClrLst meth="repeat">
+      <a:schemeClr val="dk1"/>
+    </dgm:txFillClrLst>
+    <dgm:txEffectClrLst/>
+  </dgm:styleLbl>
+  <dgm:styleLbl name="alignAccFollowNode1">
+    <dgm:fillClrLst meth="repeat">
+      <a:schemeClr val="accent3">
+        <a:alpha val="90000"/>
+        <a:tint val="55000"/>
+      </a:schemeClr>
+    </dgm:fillClrLst>
+    <dgm:linClrLst meth="repeat">
+      <a:schemeClr val="accent3">
+        <a:alpha val="90000"/>
+        <a:tint val="55000"/>
+      </a:schemeClr>
+    </dgm:linClrLst>
+    <dgm:effectClrLst/>
+    <dgm:txLinClrLst/>
+    <dgm:txFillClrLst meth="repeat">
+      <a:schemeClr val="dk1"/>
+    </dgm:txFillClrLst>
+    <dgm:txEffectClrLst/>
+  </dgm:styleLbl>
+  <dgm:styleLbl name="bgAccFollowNode1">
+    <dgm:fillClrLst meth="repeat">
+      <a:schemeClr val="accent3">
+        <a:alpha val="90000"/>
+        <a:tint val="55000"/>
+      </a:schemeClr>
+    </dgm:fillClrLst>
+    <dgm:linClrLst meth="repeat">
+      <a:schemeClr val="lt1"/>
+    </dgm:linClrLst>
+    <dgm:effectClrLst/>
+    <dgm:txLinClrLst/>
+    <dgm:txFillClrLst meth="repeat">
+      <a:schemeClr val="dk1"/>
+    </dgm:txFillClrLst>
+    <dgm:txEffectClrLst/>
+  </dgm:styleLbl>
+  <dgm:styleLbl name="fgAcc0">
+    <dgm:fillClrLst meth="repeat">
+      <a:schemeClr val="lt1">
+        <a:alpha val="90000"/>
+      </a:schemeClr>
+    </dgm:fillClrLst>
+    <dgm:linClrLst meth="repeat">
+      <a:schemeClr val="accent3">
+        <a:shade val="80000"/>
+      </a:schemeClr>
+    </dgm:linClrLst>
+    <dgm:effectClrLst/>
+    <dgm:txLinClrLst/>
+    <dgm:txFillClrLst meth="repeat">
+      <a:schemeClr val="dk1"/>
+    </dgm:txFillClrLst>
+    <dgm:txEffectClrLst/>
+  </dgm:styleLbl>
+  <dgm:styleLbl name="fgAcc2">
+    <dgm:fillClrLst meth="repeat">
+      <a:schemeClr val="lt1">
+        <a:alpha val="90000"/>
+      </a:schemeClr>
+    </dgm:fillClrLst>
+    <dgm:linClrLst meth="repeat">
+      <a:schemeClr val="accent3">
+        <a:tint val="90000"/>
+      </a:schemeClr>
+    </dgm:linClrLst>
+    <dgm:effectClrLst/>
+    <dgm:txLinClrLst/>
+    <dgm:txFillClrLst meth="repeat">
+      <a:schemeClr val="dk1"/>
+    </dgm:txFillClrLst>
+    <dgm:txEffectClrLst/>
+  </dgm:styleLbl>
+  <dgm:styleLbl name="fgAcc3">
+    <dgm:fillClrLst meth="repeat">
+      <a:schemeClr val="lt1">
+        <a:alpha val="90000"/>
+      </a:schemeClr>
+    </dgm:fillClrLst>
+    <dgm:linClrLst meth="repeat">
+      <a:schemeClr val="accent3">
+        <a:tint val="70000"/>
+      </a:schemeClr>
+    </dgm:linClrLst>
+    <dgm:effectClrLst/>
+    <dgm:txLinClrLst/>
+    <dgm:txFillClrLst meth="repeat">
+      <a:schemeClr val="dk1"/>
+    </dgm:txFillClrLst>
+    <dgm:txEffectClrLst/>
+  </dgm:styleLbl>
+  <dgm:styleLbl name="fgAcc4">
+    <dgm:fillClrLst meth="repeat">
+      <a:schemeClr val="lt1">
+        <a:alpha val="90000"/>
+      </a:schemeClr>
+    </dgm:fillClrLst>
+    <dgm:linClrLst meth="repeat">
+      <a:schemeClr val="accent3">
+        <a:tint val="50000"/>
+      </a:schemeClr>
+    </dgm:linClrLst>
+    <dgm:effectClrLst/>
+    <dgm:txLinClrLst/>
+    <dgm:txFillClrLst meth="repeat">
+      <a:schemeClr val="dk1"/>
+    </dgm:txFillClrLst>
+    <dgm:txEffectClrLst/>
+  </dgm:styleLbl>
+  <dgm:styleLbl name="bgShp">
+    <dgm:fillClrLst meth="repeat">
+      <a:schemeClr val="accent3">
+        <a:tint val="55000"/>
+      </a:schemeClr>
+    </dgm:fillClrLst>
+    <dgm:linClrLst meth="repeat">
+      <a:schemeClr val="dk1"/>
+    </dgm:linClrLst>
+    <dgm:effectClrLst/>
+    <dgm:txLinClrLst/>
+    <dgm:txFillClrLst meth="repeat">
+      <a:schemeClr val="dk1"/>
+    </dgm:txFillClrLst>
+    <dgm:txEffectClrLst/>
+  </dgm:styleLbl>
+  <dgm:styleLbl name="dkBgShp">
+    <dgm:fillClrLst meth="repeat">
+      <a:schemeClr val="accent3">
+        <a:shade val="90000"/>
+      </a:schemeClr>
+    </dgm:fillClrLst>
+    <dgm:linClrLst meth="repeat">
+      <a:schemeClr val="dk1"/>
+    </dgm:linClrLst>
+    <dgm:effectClrLst/>
+    <dgm:txLinClrLst/>
+    <dgm:txFillClrLst meth="repeat">
+      <a:schemeClr val="lt1"/>
+    </dgm:txFillClrLst>
+    <dgm:txEffectClrLst/>
+  </dgm:styleLbl>
+  <dgm:styleLbl name="trBgShp">
+    <dgm:fillClrLst meth="repeat">
+      <a:schemeClr val="accent3">
+        <a:tint val="50000"/>
+        <a:alpha val="55000"/>
+      </a:schemeClr>
+    </dgm:fillClrLst>
+    <dgm:linClrLst meth="repeat">
+      <a:schemeClr val="accent3"/>
+    </dgm:linClrLst>
+    <dgm:effectClrLst/>
+    <dgm:txLinClrLst/>
+    <dgm:txFillClrLst meth="repeat">
+      <a:schemeClr val="lt1"/>
+    </dgm:txFillClrLst>
+    <dgm:txEffectClrLst/>
+  </dgm:styleLbl>
+  <dgm:styleLbl name="fgShp">
+    <dgm:fillClrLst meth="repeat">
+      <a:schemeClr val="accent3">
+        <a:tint val="55000"/>
+      </a:schemeClr>
+    </dgm:fillClrLst>
+    <dgm:linClrLst meth="repeat">
+      <a:schemeClr val="lt1"/>
+    </dgm:linClrLst>
+    <dgm:effectClrLst/>
+    <dgm:txLinClrLst/>
+    <dgm:txFillClrLst meth="repeat">
+      <a:schemeClr val="dk1"/>
+    </dgm:txFillClrLst>
+    <dgm:txEffectClrLst/>
+  </dgm:styleLbl>
+  <dgm:styleLbl name="revTx">
+    <dgm:fillClrLst meth="repeat">
+      <a:schemeClr val="lt1">
+        <a:alpha val="0"/>
+      </a:schemeClr>
+    </dgm:fillClrLst>
+    <dgm:linClrLst meth="repeat">
+      <a:schemeClr val="dk1">
+        <a:alpha val="0"/>
+      </a:schemeClr>
+    </dgm:linClrLst>
+    <dgm:effectClrLst/>
+    <dgm:txLinClrLst/>
+    <dgm:txFillClrLst meth="repeat">
+      <a:schemeClr val="tx1"/>
+    </dgm:txFillClrLst>
+    <dgm:txEffectClrLst/>
+  </dgm:styleLbl>
+</dgm:colorsDef>
+</file>
+
+<file path=ppt/diagrams/data1.xml><?xml version="1.0" encoding="utf-8"?>
+<dgm:dataModel xmlns:dgm="http://schemas.openxmlformats.org/drawingml/2006/diagram" xmlns:a="http://schemas.openxmlformats.org/drawingml/2006/main">
+  <dgm:ptLst>
+    <dgm:pt modelId="{0389FD0D-08CC-EB4A-A5DF-1B9DBE7B621E}" type="doc">
+      <dgm:prSet loTypeId="urn:microsoft.com/office/officeart/2005/8/layout/pyramid1" loCatId="" qsTypeId="urn:microsoft.com/office/officeart/2005/8/quickstyle/simple2" qsCatId="simple" csTypeId="urn:microsoft.com/office/officeart/2005/8/colors/accent3_4" csCatId="accent3" phldr="1"/>
+      <dgm:spPr/>
+    </dgm:pt>
+    <dgm:pt modelId="{F6CDD4AB-2A99-B343-8299-09DAF82D64D3}">
+      <dgm:prSet phldrT="[テキスト]" custT="1"/>
+      <dgm:spPr/>
+      <dgm:t>
+        <a:bodyPr/>
+        <a:lstStyle/>
+        <a:p>
+          <a:r>
+            <a:rPr kumimoji="1" lang="ja-JP" altLang="en-US" sz="2800" b="1" i="0">
+              <a:latin typeface="Hiragino Sans W7" panose="020B0400000000000000" pitchFamily="34" charset="-128"/>
+              <a:ea typeface="Hiragino Sans W7" panose="020B0400000000000000" pitchFamily="34" charset="-128"/>
+            </a:rPr>
+            <a:t>事務次官</a:t>
+          </a:r>
+        </a:p>
+      </dgm:t>
+    </dgm:pt>
+    <dgm:pt modelId="{08D6CE4A-BE6C-4D46-8A50-91368612AF66}" type="parTrans" cxnId="{C9E1D7C0-FB7D-2B46-BC53-A553522A5218}">
+      <dgm:prSet/>
+      <dgm:spPr/>
+      <dgm:t>
+        <a:bodyPr/>
+        <a:lstStyle/>
+        <a:p>
+          <a:endParaRPr kumimoji="1" lang="ja-JP" altLang="en-US"/>
+        </a:p>
+      </dgm:t>
+    </dgm:pt>
+    <dgm:pt modelId="{7374A5E6-305D-1E4E-B9D0-B3F0F3E33F01}" type="sibTrans" cxnId="{C9E1D7C0-FB7D-2B46-BC53-A553522A5218}">
+      <dgm:prSet/>
+      <dgm:spPr/>
+      <dgm:t>
+        <a:bodyPr/>
+        <a:lstStyle/>
+        <a:p>
+          <a:endParaRPr kumimoji="1" lang="ja-JP" altLang="en-US"/>
+        </a:p>
+      </dgm:t>
+    </dgm:pt>
+    <dgm:pt modelId="{DD79DD09-40F6-D24A-AC01-5AC78B22BA11}">
+      <dgm:prSet phldrT="[テキスト]" custT="1"/>
+      <dgm:spPr/>
+      <dgm:t>
+        <a:bodyPr/>
+        <a:lstStyle/>
+        <a:p>
+          <a:r>
+            <a:rPr kumimoji="1" lang="ja-JP" altLang="en-US" sz="2800" b="1" i="0">
+              <a:latin typeface="Hiragino Sans W7" panose="020B0400000000000000" pitchFamily="34" charset="-128"/>
+              <a:ea typeface="Hiragino Sans W7" panose="020B0400000000000000" pitchFamily="34" charset="-128"/>
+            </a:rPr>
+            <a:t>局長</a:t>
+          </a:r>
+        </a:p>
+      </dgm:t>
+    </dgm:pt>
+    <dgm:pt modelId="{4DCA80F3-C789-6544-885C-8C15C447A23A}" type="parTrans" cxnId="{21E474FC-26EB-0043-B130-D68CA05972C7}">
+      <dgm:prSet/>
+      <dgm:spPr/>
+      <dgm:t>
+        <a:bodyPr/>
+        <a:lstStyle/>
+        <a:p>
+          <a:endParaRPr kumimoji="1" lang="ja-JP" altLang="en-US"/>
+        </a:p>
+      </dgm:t>
+    </dgm:pt>
+    <dgm:pt modelId="{50002D2F-4AC9-0848-AFF0-071EE9006E3A}" type="sibTrans" cxnId="{21E474FC-26EB-0043-B130-D68CA05972C7}">
+      <dgm:prSet/>
+      <dgm:spPr/>
+      <dgm:t>
+        <a:bodyPr/>
+        <a:lstStyle/>
+        <a:p>
+          <a:endParaRPr kumimoji="1" lang="ja-JP" altLang="en-US"/>
+        </a:p>
+      </dgm:t>
+    </dgm:pt>
+    <dgm:pt modelId="{F7B3E139-E59A-A740-B50A-7FA45ED603DD}">
+      <dgm:prSet phldrT="[テキスト]" custT="1"/>
+      <dgm:spPr/>
+      <dgm:t>
+        <a:bodyPr/>
+        <a:lstStyle/>
+        <a:p>
+          <a:r>
+            <a:rPr kumimoji="1" lang="ja-JP" altLang="en-US" sz="2800" b="1" i="0">
+              <a:latin typeface="Hiragino Sans W7" panose="020B0400000000000000" pitchFamily="34" charset="-128"/>
+              <a:ea typeface="Hiragino Sans W7" panose="020B0400000000000000" pitchFamily="34" charset="-128"/>
+            </a:rPr>
+            <a:t>部長・審議官</a:t>
+          </a:r>
+        </a:p>
+      </dgm:t>
+    </dgm:pt>
+    <dgm:pt modelId="{D7844E70-E8FD-7344-9802-6FCCF432984F}" type="parTrans" cxnId="{16C9CE1B-3C26-A24A-AEC6-02441A667BA4}">
+      <dgm:prSet/>
+      <dgm:spPr/>
+      <dgm:t>
+        <a:bodyPr/>
+        <a:lstStyle/>
+        <a:p>
+          <a:endParaRPr kumimoji="1" lang="ja-JP" altLang="en-US"/>
+        </a:p>
+      </dgm:t>
+    </dgm:pt>
+    <dgm:pt modelId="{2FB01BBA-BB56-514A-8A70-88CFC024BDB0}" type="sibTrans" cxnId="{16C9CE1B-3C26-A24A-AEC6-02441A667BA4}">
+      <dgm:prSet/>
+      <dgm:spPr/>
+      <dgm:t>
+        <a:bodyPr/>
+        <a:lstStyle/>
+        <a:p>
+          <a:endParaRPr kumimoji="1" lang="ja-JP" altLang="en-US"/>
+        </a:p>
+      </dgm:t>
+    </dgm:pt>
+    <dgm:pt modelId="{850958D8-7D07-2F44-963F-493D214A66DA}">
+      <dgm:prSet phldrT="[テキスト]" custT="1"/>
+      <dgm:spPr/>
+      <dgm:t>
+        <a:bodyPr/>
+        <a:lstStyle/>
+        <a:p>
+          <a:r>
+            <a:rPr kumimoji="1" lang="ja-JP" altLang="en-US" sz="2800" b="1" i="0">
+              <a:latin typeface="Hiragino Sans W7" panose="020B0400000000000000" pitchFamily="34" charset="-128"/>
+              <a:ea typeface="Hiragino Sans W7" panose="020B0400000000000000" pitchFamily="34" charset="-128"/>
+            </a:rPr>
+            <a:t>室長・企画官</a:t>
+          </a:r>
+        </a:p>
+      </dgm:t>
+    </dgm:pt>
+    <dgm:pt modelId="{0BB4B529-8593-0346-835E-9B7D3D5D6C3A}" type="parTrans" cxnId="{3615E526-16AB-E641-BBA5-0CADB1AC801C}">
+      <dgm:prSet/>
+      <dgm:spPr/>
+      <dgm:t>
+        <a:bodyPr/>
+        <a:lstStyle/>
+        <a:p>
+          <a:endParaRPr kumimoji="1" lang="ja-JP" altLang="en-US"/>
+        </a:p>
+      </dgm:t>
+    </dgm:pt>
+    <dgm:pt modelId="{2E0ACE65-AF39-8C44-8401-D98852C7276F}" type="sibTrans" cxnId="{3615E526-16AB-E641-BBA5-0CADB1AC801C}">
+      <dgm:prSet/>
+      <dgm:spPr/>
+      <dgm:t>
+        <a:bodyPr/>
+        <a:lstStyle/>
+        <a:p>
+          <a:endParaRPr kumimoji="1" lang="ja-JP" altLang="en-US"/>
+        </a:p>
+      </dgm:t>
+    </dgm:pt>
+    <dgm:pt modelId="{95782D1F-D851-E94D-B608-96BF0BE8701E}">
+      <dgm:prSet phldrT="[テキスト]" custT="1"/>
+      <dgm:spPr/>
+      <dgm:t>
+        <a:bodyPr/>
+        <a:lstStyle/>
+        <a:p>
+          <a:r>
+            <a:rPr kumimoji="1" lang="ja-JP" altLang="en-US" sz="2800" b="1" i="0">
+              <a:latin typeface="Hiragino Sans W7" panose="020B0400000000000000" pitchFamily="34" charset="-128"/>
+              <a:ea typeface="Hiragino Sans W7" panose="020B0400000000000000" pitchFamily="34" charset="-128"/>
+            </a:rPr>
+            <a:t>課長補佐</a:t>
+          </a:r>
+        </a:p>
+      </dgm:t>
+    </dgm:pt>
+    <dgm:pt modelId="{63A8760A-08DB-374E-A26B-BEB2A6F86E2B}" type="parTrans" cxnId="{2FDE969A-6E9A-524E-9C0A-9EAFE9A56F1C}">
+      <dgm:prSet/>
+      <dgm:spPr/>
+      <dgm:t>
+        <a:bodyPr/>
+        <a:lstStyle/>
+        <a:p>
+          <a:endParaRPr kumimoji="1" lang="ja-JP" altLang="en-US"/>
+        </a:p>
+      </dgm:t>
+    </dgm:pt>
+    <dgm:pt modelId="{427C4D84-3977-CC46-B852-16308ACB54B4}" type="sibTrans" cxnId="{2FDE969A-6E9A-524E-9C0A-9EAFE9A56F1C}">
+      <dgm:prSet/>
+      <dgm:spPr/>
+      <dgm:t>
+        <a:bodyPr/>
+        <a:lstStyle/>
+        <a:p>
+          <a:endParaRPr kumimoji="1" lang="ja-JP" altLang="en-US"/>
+        </a:p>
+      </dgm:t>
+    </dgm:pt>
+    <dgm:pt modelId="{7443D139-61A7-0145-8805-F8882DDC7D5C}">
+      <dgm:prSet phldrT="[テキスト]" custT="1"/>
+      <dgm:spPr/>
+      <dgm:t>
+        <a:bodyPr/>
+        <a:lstStyle/>
+        <a:p>
+          <a:r>
+            <a:rPr kumimoji="1" lang="ja-JP" altLang="en-US" sz="2800" b="1" i="0">
+              <a:latin typeface="Hiragino Sans W7" panose="020B0400000000000000" pitchFamily="34" charset="-128"/>
+              <a:ea typeface="Hiragino Sans W7" panose="020B0400000000000000" pitchFamily="34" charset="-128"/>
+            </a:rPr>
+            <a:t>課長</a:t>
+          </a:r>
+        </a:p>
+      </dgm:t>
+    </dgm:pt>
+    <dgm:pt modelId="{D492241A-3038-6C48-8C47-E5BF51FB75AE}" type="parTrans" cxnId="{2E8298B4-B520-C74E-B857-1B426FF9E4D2}">
+      <dgm:prSet/>
+      <dgm:spPr/>
+      <dgm:t>
+        <a:bodyPr/>
+        <a:lstStyle/>
+        <a:p>
+          <a:endParaRPr kumimoji="1" lang="ja-JP" altLang="en-US"/>
+        </a:p>
+      </dgm:t>
+    </dgm:pt>
+    <dgm:pt modelId="{9BD379DD-0E48-3047-9153-AF5BB9CC3616}" type="sibTrans" cxnId="{2E8298B4-B520-C74E-B857-1B426FF9E4D2}">
+      <dgm:prSet/>
+      <dgm:spPr/>
+      <dgm:t>
+        <a:bodyPr/>
+        <a:lstStyle/>
+        <a:p>
+          <a:endParaRPr kumimoji="1" lang="ja-JP" altLang="en-US"/>
+        </a:p>
+      </dgm:t>
+    </dgm:pt>
+    <dgm:pt modelId="{1391C414-B245-7940-BFC7-2DA1C9F0EE12}">
+      <dgm:prSet phldrT="[テキスト]" custT="1"/>
+      <dgm:spPr/>
+      <dgm:t>
+        <a:bodyPr/>
+        <a:lstStyle/>
+        <a:p>
+          <a:r>
+            <a:rPr kumimoji="1" lang="ja-JP" altLang="en-US" sz="2800" b="1" i="0">
+              <a:latin typeface="Hiragino Sans W7" panose="020B0400000000000000" pitchFamily="34" charset="-128"/>
+              <a:ea typeface="Hiragino Sans W7" panose="020B0400000000000000" pitchFamily="34" charset="-128"/>
+            </a:rPr>
+            <a:t>係長</a:t>
+          </a:r>
+        </a:p>
+      </dgm:t>
+    </dgm:pt>
+    <dgm:pt modelId="{D8C48D69-212C-CF4B-BFF1-597DCCE18F08}" type="parTrans" cxnId="{D8C54F86-3B10-2445-B633-AD973B5598EF}">
+      <dgm:prSet/>
+      <dgm:spPr/>
+      <dgm:t>
+        <a:bodyPr/>
+        <a:lstStyle/>
+        <a:p>
+          <a:endParaRPr kumimoji="1" lang="ja-JP" altLang="en-US"/>
+        </a:p>
+      </dgm:t>
+    </dgm:pt>
+    <dgm:pt modelId="{08959778-D44C-6B4E-8275-25956B33CAF4}" type="sibTrans" cxnId="{D8C54F86-3B10-2445-B633-AD973B5598EF}">
+      <dgm:prSet/>
+      <dgm:spPr/>
+      <dgm:t>
+        <a:bodyPr/>
+        <a:lstStyle/>
+        <a:p>
+          <a:endParaRPr kumimoji="1" lang="ja-JP" altLang="en-US"/>
+        </a:p>
+      </dgm:t>
+    </dgm:pt>
+    <dgm:pt modelId="{09D1DE98-6701-0948-832D-FEA0A7B7E27E}">
+      <dgm:prSet phldrT="[テキスト]" custT="1"/>
+      <dgm:spPr/>
+      <dgm:t>
+        <a:bodyPr/>
+        <a:lstStyle/>
+        <a:p>
+          <a:r>
+            <a:rPr kumimoji="1" lang="ja-JP" altLang="en-US" sz="2800" b="1" i="0">
+              <a:latin typeface="Hiragino Sans W7" panose="020B0400000000000000" pitchFamily="34" charset="-128"/>
+              <a:ea typeface="Hiragino Sans W7" panose="020B0400000000000000" pitchFamily="34" charset="-128"/>
+            </a:rPr>
+            <a:t>係員</a:t>
+          </a:r>
+        </a:p>
+      </dgm:t>
+    </dgm:pt>
+    <dgm:pt modelId="{56D11491-D116-0949-80BC-F1495E763216}" type="parTrans" cxnId="{87BF92D7-94A9-D944-8826-11D76C6AA672}">
+      <dgm:prSet/>
+      <dgm:spPr/>
+      <dgm:t>
+        <a:bodyPr/>
+        <a:lstStyle/>
+        <a:p>
+          <a:endParaRPr kumimoji="1" lang="ja-JP" altLang="en-US"/>
+        </a:p>
+      </dgm:t>
+    </dgm:pt>
+    <dgm:pt modelId="{D7EEF697-4A1B-654D-9E5A-8D20F80AC5D7}" type="sibTrans" cxnId="{87BF92D7-94A9-D944-8826-11D76C6AA672}">
+      <dgm:prSet/>
+      <dgm:spPr/>
+      <dgm:t>
+        <a:bodyPr/>
+        <a:lstStyle/>
+        <a:p>
+          <a:endParaRPr kumimoji="1" lang="ja-JP" altLang="en-US"/>
+        </a:p>
+      </dgm:t>
+    </dgm:pt>
+    <dgm:pt modelId="{3AD2CC66-88A6-3A43-A256-83D02C5A51C6}" type="pres">
+      <dgm:prSet presAssocID="{0389FD0D-08CC-EB4A-A5DF-1B9DBE7B621E}" presName="Name0" presStyleCnt="0">
+        <dgm:presLayoutVars>
+          <dgm:dir/>
+          <dgm:animLvl val="lvl"/>
+          <dgm:resizeHandles val="exact"/>
+        </dgm:presLayoutVars>
+      </dgm:prSet>
+      <dgm:spPr/>
+    </dgm:pt>
+    <dgm:pt modelId="{3784CF05-224A-EE45-9F2B-BD7A592AF553}" type="pres">
+      <dgm:prSet presAssocID="{F6CDD4AB-2A99-B343-8299-09DAF82D64D3}" presName="Name8" presStyleCnt="0"/>
+      <dgm:spPr/>
+    </dgm:pt>
+    <dgm:pt modelId="{1C19F794-3B38-1C44-ABC1-E6A1B91F38A9}" type="pres">
+      <dgm:prSet presAssocID="{F6CDD4AB-2A99-B343-8299-09DAF82D64D3}" presName="level" presStyleLbl="node1" presStyleIdx="0" presStyleCnt="8">
+        <dgm:presLayoutVars>
+          <dgm:chMax val="1"/>
+          <dgm:bulletEnabled val="1"/>
+        </dgm:presLayoutVars>
+      </dgm:prSet>
+      <dgm:spPr/>
+    </dgm:pt>
+    <dgm:pt modelId="{6D55B128-0737-094B-87C7-98DCC20D82FE}" type="pres">
+      <dgm:prSet presAssocID="{F6CDD4AB-2A99-B343-8299-09DAF82D64D3}" presName="levelTx" presStyleLbl="revTx" presStyleIdx="0" presStyleCnt="0">
+        <dgm:presLayoutVars>
+          <dgm:chMax val="1"/>
+          <dgm:bulletEnabled val="1"/>
+        </dgm:presLayoutVars>
+      </dgm:prSet>
+      <dgm:spPr/>
+    </dgm:pt>
+    <dgm:pt modelId="{A1CBF0A4-F5E2-324F-9CA9-CC20540C47F9}" type="pres">
+      <dgm:prSet presAssocID="{DD79DD09-40F6-D24A-AC01-5AC78B22BA11}" presName="Name8" presStyleCnt="0"/>
+      <dgm:spPr/>
+    </dgm:pt>
+    <dgm:pt modelId="{138958A9-A30B-A645-BEF4-EC92188C90CE}" type="pres">
+      <dgm:prSet presAssocID="{DD79DD09-40F6-D24A-AC01-5AC78B22BA11}" presName="level" presStyleLbl="node1" presStyleIdx="1" presStyleCnt="8">
+        <dgm:presLayoutVars>
+          <dgm:chMax val="1"/>
+          <dgm:bulletEnabled val="1"/>
+        </dgm:presLayoutVars>
+      </dgm:prSet>
+      <dgm:spPr/>
+    </dgm:pt>
+    <dgm:pt modelId="{9CD087D8-0311-C449-B414-9F22ACA308E5}" type="pres">
+      <dgm:prSet presAssocID="{DD79DD09-40F6-D24A-AC01-5AC78B22BA11}" presName="levelTx" presStyleLbl="revTx" presStyleIdx="0" presStyleCnt="0">
+        <dgm:presLayoutVars>
+          <dgm:chMax val="1"/>
+          <dgm:bulletEnabled val="1"/>
+        </dgm:presLayoutVars>
+      </dgm:prSet>
+      <dgm:spPr/>
+    </dgm:pt>
+    <dgm:pt modelId="{59EF5177-33B2-CC41-AA49-8DA222C3D394}" type="pres">
+      <dgm:prSet presAssocID="{F7B3E139-E59A-A740-B50A-7FA45ED603DD}" presName="Name8" presStyleCnt="0"/>
+      <dgm:spPr/>
+    </dgm:pt>
+    <dgm:pt modelId="{76F31ED9-ED42-B941-AE6C-DCD1BE33515D}" type="pres">
+      <dgm:prSet presAssocID="{F7B3E139-E59A-A740-B50A-7FA45ED603DD}" presName="level" presStyleLbl="node1" presStyleIdx="2" presStyleCnt="8">
+        <dgm:presLayoutVars>
+          <dgm:chMax val="1"/>
+          <dgm:bulletEnabled val="1"/>
+        </dgm:presLayoutVars>
+      </dgm:prSet>
+      <dgm:spPr/>
+    </dgm:pt>
+    <dgm:pt modelId="{5F7F763D-A78C-A84C-8EEF-9089BD38BA10}" type="pres">
+      <dgm:prSet presAssocID="{F7B3E139-E59A-A740-B50A-7FA45ED603DD}" presName="levelTx" presStyleLbl="revTx" presStyleIdx="0" presStyleCnt="0">
+        <dgm:presLayoutVars>
+          <dgm:chMax val="1"/>
+          <dgm:bulletEnabled val="1"/>
+        </dgm:presLayoutVars>
+      </dgm:prSet>
+      <dgm:spPr/>
+    </dgm:pt>
+    <dgm:pt modelId="{6C515B82-8D5B-C34F-B928-548726742907}" type="pres">
+      <dgm:prSet presAssocID="{7443D139-61A7-0145-8805-F8882DDC7D5C}" presName="Name8" presStyleCnt="0"/>
+      <dgm:spPr/>
+    </dgm:pt>
+    <dgm:pt modelId="{EDE32EC4-7A01-DA48-B7AB-30CA1147812B}" type="pres">
+      <dgm:prSet presAssocID="{7443D139-61A7-0145-8805-F8882DDC7D5C}" presName="level" presStyleLbl="node1" presStyleIdx="3" presStyleCnt="8">
+        <dgm:presLayoutVars>
+          <dgm:chMax val="1"/>
+          <dgm:bulletEnabled val="1"/>
+        </dgm:presLayoutVars>
+      </dgm:prSet>
+      <dgm:spPr/>
+    </dgm:pt>
+    <dgm:pt modelId="{50FA948C-50C2-0041-9021-9B919CA09D8C}" type="pres">
+      <dgm:prSet presAssocID="{7443D139-61A7-0145-8805-F8882DDC7D5C}" presName="levelTx" presStyleLbl="revTx" presStyleIdx="0" presStyleCnt="0">
+        <dgm:presLayoutVars>
+          <dgm:chMax val="1"/>
+          <dgm:bulletEnabled val="1"/>
+        </dgm:presLayoutVars>
+      </dgm:prSet>
+      <dgm:spPr/>
+    </dgm:pt>
+    <dgm:pt modelId="{CBDB869F-3646-2C47-B3F9-0EC7DDC891B2}" type="pres">
+      <dgm:prSet presAssocID="{850958D8-7D07-2F44-963F-493D214A66DA}" presName="Name8" presStyleCnt="0"/>
+      <dgm:spPr/>
+    </dgm:pt>
+    <dgm:pt modelId="{25C66891-C093-3947-8F3E-D77010DF7ABC}" type="pres">
+      <dgm:prSet presAssocID="{850958D8-7D07-2F44-963F-493D214A66DA}" presName="level" presStyleLbl="node1" presStyleIdx="4" presStyleCnt="8">
+        <dgm:presLayoutVars>
+          <dgm:chMax val="1"/>
+          <dgm:bulletEnabled val="1"/>
+        </dgm:presLayoutVars>
+      </dgm:prSet>
+      <dgm:spPr/>
+    </dgm:pt>
+    <dgm:pt modelId="{9141C474-911D-9947-A6AE-A7090D5E66AB}" type="pres">
+      <dgm:prSet presAssocID="{850958D8-7D07-2F44-963F-493D214A66DA}" presName="levelTx" presStyleLbl="revTx" presStyleIdx="0" presStyleCnt="0">
+        <dgm:presLayoutVars>
+          <dgm:chMax val="1"/>
+          <dgm:bulletEnabled val="1"/>
+        </dgm:presLayoutVars>
+      </dgm:prSet>
+      <dgm:spPr/>
+    </dgm:pt>
+    <dgm:pt modelId="{91C37737-F442-3643-BB63-489CD97EF9FA}" type="pres">
+      <dgm:prSet presAssocID="{95782D1F-D851-E94D-B608-96BF0BE8701E}" presName="Name8" presStyleCnt="0"/>
+      <dgm:spPr/>
+    </dgm:pt>
+    <dgm:pt modelId="{8E12950F-896A-A643-809A-4B576B6FADE1}" type="pres">
+      <dgm:prSet presAssocID="{95782D1F-D851-E94D-B608-96BF0BE8701E}" presName="level" presStyleLbl="node1" presStyleIdx="5" presStyleCnt="8">
+        <dgm:presLayoutVars>
+          <dgm:chMax val="1"/>
+          <dgm:bulletEnabled val="1"/>
+        </dgm:presLayoutVars>
+      </dgm:prSet>
+      <dgm:spPr/>
+    </dgm:pt>
+    <dgm:pt modelId="{688ECD8E-A9F5-8540-9BEE-D0AE64CF5CFC}" type="pres">
+      <dgm:prSet presAssocID="{95782D1F-D851-E94D-B608-96BF0BE8701E}" presName="levelTx" presStyleLbl="revTx" presStyleIdx="0" presStyleCnt="0">
+        <dgm:presLayoutVars>
+          <dgm:chMax val="1"/>
+          <dgm:bulletEnabled val="1"/>
+        </dgm:presLayoutVars>
+      </dgm:prSet>
+      <dgm:spPr/>
+    </dgm:pt>
+    <dgm:pt modelId="{B9E5EE8C-79FD-0E48-951F-FD3C63405CAC}" type="pres">
+      <dgm:prSet presAssocID="{1391C414-B245-7940-BFC7-2DA1C9F0EE12}" presName="Name8" presStyleCnt="0"/>
+      <dgm:spPr/>
+    </dgm:pt>
+    <dgm:pt modelId="{F1364463-D7DE-E24B-A241-45501851B3AA}" type="pres">
+      <dgm:prSet presAssocID="{1391C414-B245-7940-BFC7-2DA1C9F0EE12}" presName="level" presStyleLbl="node1" presStyleIdx="6" presStyleCnt="8">
+        <dgm:presLayoutVars>
+          <dgm:chMax val="1"/>
+          <dgm:bulletEnabled val="1"/>
+        </dgm:presLayoutVars>
+      </dgm:prSet>
+      <dgm:spPr/>
+    </dgm:pt>
+    <dgm:pt modelId="{CC791127-DE6A-0D47-86E4-71485F8C834C}" type="pres">
+      <dgm:prSet presAssocID="{1391C414-B245-7940-BFC7-2DA1C9F0EE12}" presName="levelTx" presStyleLbl="revTx" presStyleIdx="0" presStyleCnt="0">
+        <dgm:presLayoutVars>
+          <dgm:chMax val="1"/>
+          <dgm:bulletEnabled val="1"/>
+        </dgm:presLayoutVars>
+      </dgm:prSet>
+      <dgm:spPr/>
+    </dgm:pt>
+    <dgm:pt modelId="{E189F5DA-72DA-3E4E-BEE3-98E9A65FD1F6}" type="pres">
+      <dgm:prSet presAssocID="{09D1DE98-6701-0948-832D-FEA0A7B7E27E}" presName="Name8" presStyleCnt="0"/>
+      <dgm:spPr/>
+    </dgm:pt>
+    <dgm:pt modelId="{AF212A41-9690-F546-B416-57C98C898A1D}" type="pres">
+      <dgm:prSet presAssocID="{09D1DE98-6701-0948-832D-FEA0A7B7E27E}" presName="level" presStyleLbl="node1" presStyleIdx="7" presStyleCnt="8">
+        <dgm:presLayoutVars>
+          <dgm:chMax val="1"/>
+          <dgm:bulletEnabled val="1"/>
+        </dgm:presLayoutVars>
+      </dgm:prSet>
+      <dgm:spPr/>
+    </dgm:pt>
+    <dgm:pt modelId="{0A4DAA36-70A3-3A4C-A4FF-7C2B58A55135}" type="pres">
+      <dgm:prSet presAssocID="{09D1DE98-6701-0948-832D-FEA0A7B7E27E}" presName="levelTx" presStyleLbl="revTx" presStyleIdx="0" presStyleCnt="0">
+        <dgm:presLayoutVars>
+          <dgm:chMax val="1"/>
+          <dgm:bulletEnabled val="1"/>
+        </dgm:presLayoutVars>
+      </dgm:prSet>
+      <dgm:spPr/>
+    </dgm:pt>
+  </dgm:ptLst>
+  <dgm:cxnLst>
+    <dgm:cxn modelId="{47A2431B-7CB9-804A-8956-9F927D7F751F}" type="presOf" srcId="{0389FD0D-08CC-EB4A-A5DF-1B9DBE7B621E}" destId="{3AD2CC66-88A6-3A43-A256-83D02C5A51C6}" srcOrd="0" destOrd="0" presId="urn:microsoft.com/office/officeart/2005/8/layout/pyramid1"/>
+    <dgm:cxn modelId="{16C9CE1B-3C26-A24A-AEC6-02441A667BA4}" srcId="{0389FD0D-08CC-EB4A-A5DF-1B9DBE7B621E}" destId="{F7B3E139-E59A-A740-B50A-7FA45ED603DD}" srcOrd="2" destOrd="0" parTransId="{D7844E70-E8FD-7344-9802-6FCCF432984F}" sibTransId="{2FB01BBA-BB56-514A-8A70-88CFC024BDB0}"/>
+    <dgm:cxn modelId="{CF16721F-2D1C-DF4E-AC07-E98B2FC7576D}" type="presOf" srcId="{1391C414-B245-7940-BFC7-2DA1C9F0EE12}" destId="{F1364463-D7DE-E24B-A241-45501851B3AA}" srcOrd="0" destOrd="0" presId="urn:microsoft.com/office/officeart/2005/8/layout/pyramid1"/>
+    <dgm:cxn modelId="{3615E526-16AB-E641-BBA5-0CADB1AC801C}" srcId="{0389FD0D-08CC-EB4A-A5DF-1B9DBE7B621E}" destId="{850958D8-7D07-2F44-963F-493D214A66DA}" srcOrd="4" destOrd="0" parTransId="{0BB4B529-8593-0346-835E-9B7D3D5D6C3A}" sibTransId="{2E0ACE65-AF39-8C44-8401-D98852C7276F}"/>
+    <dgm:cxn modelId="{49F89538-A8AE-9241-9B81-2EC1494E7834}" type="presOf" srcId="{DD79DD09-40F6-D24A-AC01-5AC78B22BA11}" destId="{9CD087D8-0311-C449-B414-9F22ACA308E5}" srcOrd="1" destOrd="0" presId="urn:microsoft.com/office/officeart/2005/8/layout/pyramid1"/>
+    <dgm:cxn modelId="{5914DD49-C8D9-4146-B221-F4B9F9AB3C20}" type="presOf" srcId="{95782D1F-D851-E94D-B608-96BF0BE8701E}" destId="{688ECD8E-A9F5-8540-9BEE-D0AE64CF5CFC}" srcOrd="1" destOrd="0" presId="urn:microsoft.com/office/officeart/2005/8/layout/pyramid1"/>
+    <dgm:cxn modelId="{3F9DB56A-94C8-D14B-AECE-F8E849412D72}" type="presOf" srcId="{F6CDD4AB-2A99-B343-8299-09DAF82D64D3}" destId="{6D55B128-0737-094B-87C7-98DCC20D82FE}" srcOrd="1" destOrd="0" presId="urn:microsoft.com/office/officeart/2005/8/layout/pyramid1"/>
+    <dgm:cxn modelId="{8B5F8E6E-F68E-BB4E-A5E0-2ED6E1047BEB}" type="presOf" srcId="{F7B3E139-E59A-A740-B50A-7FA45ED603DD}" destId="{76F31ED9-ED42-B941-AE6C-DCD1BE33515D}" srcOrd="0" destOrd="0" presId="urn:microsoft.com/office/officeart/2005/8/layout/pyramid1"/>
+    <dgm:cxn modelId="{18CED37D-8F33-114B-8944-915210CDFFC3}" type="presOf" srcId="{7443D139-61A7-0145-8805-F8882DDC7D5C}" destId="{50FA948C-50C2-0041-9021-9B919CA09D8C}" srcOrd="1" destOrd="0" presId="urn:microsoft.com/office/officeart/2005/8/layout/pyramid1"/>
+    <dgm:cxn modelId="{0ED7BE81-4CEB-E049-B53F-D82DB6DED31E}" type="presOf" srcId="{09D1DE98-6701-0948-832D-FEA0A7B7E27E}" destId="{0A4DAA36-70A3-3A4C-A4FF-7C2B58A55135}" srcOrd="1" destOrd="0" presId="urn:microsoft.com/office/officeart/2005/8/layout/pyramid1"/>
+    <dgm:cxn modelId="{2E479A83-0D06-BE47-A35C-5A6F05355DE8}" type="presOf" srcId="{95782D1F-D851-E94D-B608-96BF0BE8701E}" destId="{8E12950F-896A-A643-809A-4B576B6FADE1}" srcOrd="0" destOrd="0" presId="urn:microsoft.com/office/officeart/2005/8/layout/pyramid1"/>
+    <dgm:cxn modelId="{9A42D783-F896-5849-AB5C-FBCF6375DE0A}" type="presOf" srcId="{850958D8-7D07-2F44-963F-493D214A66DA}" destId="{25C66891-C093-3947-8F3E-D77010DF7ABC}" srcOrd="0" destOrd="0" presId="urn:microsoft.com/office/officeart/2005/8/layout/pyramid1"/>
+    <dgm:cxn modelId="{D8C54F86-3B10-2445-B633-AD973B5598EF}" srcId="{0389FD0D-08CC-EB4A-A5DF-1B9DBE7B621E}" destId="{1391C414-B245-7940-BFC7-2DA1C9F0EE12}" srcOrd="6" destOrd="0" parTransId="{D8C48D69-212C-CF4B-BFF1-597DCCE18F08}" sibTransId="{08959778-D44C-6B4E-8275-25956B33CAF4}"/>
+    <dgm:cxn modelId="{2FDE969A-6E9A-524E-9C0A-9EAFE9A56F1C}" srcId="{0389FD0D-08CC-EB4A-A5DF-1B9DBE7B621E}" destId="{95782D1F-D851-E94D-B608-96BF0BE8701E}" srcOrd="5" destOrd="0" parTransId="{63A8760A-08DB-374E-A26B-BEB2A6F86E2B}" sibTransId="{427C4D84-3977-CC46-B852-16308ACB54B4}"/>
+    <dgm:cxn modelId="{0E15AAA4-50B6-4F4E-841B-295E8965165F}" type="presOf" srcId="{850958D8-7D07-2F44-963F-493D214A66DA}" destId="{9141C474-911D-9947-A6AE-A7090D5E66AB}" srcOrd="1" destOrd="0" presId="urn:microsoft.com/office/officeart/2005/8/layout/pyramid1"/>
+    <dgm:cxn modelId="{2E8298B4-B520-C74E-B857-1B426FF9E4D2}" srcId="{0389FD0D-08CC-EB4A-A5DF-1B9DBE7B621E}" destId="{7443D139-61A7-0145-8805-F8882DDC7D5C}" srcOrd="3" destOrd="0" parTransId="{D492241A-3038-6C48-8C47-E5BF51FB75AE}" sibTransId="{9BD379DD-0E48-3047-9153-AF5BB9CC3616}"/>
+    <dgm:cxn modelId="{C62E1EBF-453E-2C45-9E47-0CF42BEB02F2}" type="presOf" srcId="{1391C414-B245-7940-BFC7-2DA1C9F0EE12}" destId="{CC791127-DE6A-0D47-86E4-71485F8C834C}" srcOrd="1" destOrd="0" presId="urn:microsoft.com/office/officeart/2005/8/layout/pyramid1"/>
+    <dgm:cxn modelId="{C9E1D7C0-FB7D-2B46-BC53-A553522A5218}" srcId="{0389FD0D-08CC-EB4A-A5DF-1B9DBE7B621E}" destId="{F6CDD4AB-2A99-B343-8299-09DAF82D64D3}" srcOrd="0" destOrd="0" parTransId="{08D6CE4A-BE6C-4D46-8A50-91368612AF66}" sibTransId="{7374A5E6-305D-1E4E-B9D0-B3F0F3E33F01}"/>
+    <dgm:cxn modelId="{87BF92D7-94A9-D944-8826-11D76C6AA672}" srcId="{0389FD0D-08CC-EB4A-A5DF-1B9DBE7B621E}" destId="{09D1DE98-6701-0948-832D-FEA0A7B7E27E}" srcOrd="7" destOrd="0" parTransId="{56D11491-D116-0949-80BC-F1495E763216}" sibTransId="{D7EEF697-4A1B-654D-9E5A-8D20F80AC5D7}"/>
+    <dgm:cxn modelId="{E4582ADE-1A9E-0C46-BAE3-576581C2CB21}" type="presOf" srcId="{DD79DD09-40F6-D24A-AC01-5AC78B22BA11}" destId="{138958A9-A30B-A645-BEF4-EC92188C90CE}" srcOrd="0" destOrd="0" presId="urn:microsoft.com/office/officeart/2005/8/layout/pyramid1"/>
+    <dgm:cxn modelId="{E75CD3E2-3046-334C-88F5-2A589335916C}" type="presOf" srcId="{F6CDD4AB-2A99-B343-8299-09DAF82D64D3}" destId="{1C19F794-3B38-1C44-ABC1-E6A1B91F38A9}" srcOrd="0" destOrd="0" presId="urn:microsoft.com/office/officeart/2005/8/layout/pyramid1"/>
+    <dgm:cxn modelId="{432641F0-E213-C24A-BE89-15A16DA3026D}" type="presOf" srcId="{F7B3E139-E59A-A740-B50A-7FA45ED603DD}" destId="{5F7F763D-A78C-A84C-8EEF-9089BD38BA10}" srcOrd="1" destOrd="0" presId="urn:microsoft.com/office/officeart/2005/8/layout/pyramid1"/>
+    <dgm:cxn modelId="{FA94F2F3-72FD-5547-BCB4-7FBED463AD50}" type="presOf" srcId="{7443D139-61A7-0145-8805-F8882DDC7D5C}" destId="{EDE32EC4-7A01-DA48-B7AB-30CA1147812B}" srcOrd="0" destOrd="0" presId="urn:microsoft.com/office/officeart/2005/8/layout/pyramid1"/>
+    <dgm:cxn modelId="{9291E8F9-A746-384A-9088-8D1D1E15D077}" type="presOf" srcId="{09D1DE98-6701-0948-832D-FEA0A7B7E27E}" destId="{AF212A41-9690-F546-B416-57C98C898A1D}" srcOrd="0" destOrd="0" presId="urn:microsoft.com/office/officeart/2005/8/layout/pyramid1"/>
+    <dgm:cxn modelId="{21E474FC-26EB-0043-B130-D68CA05972C7}" srcId="{0389FD0D-08CC-EB4A-A5DF-1B9DBE7B621E}" destId="{DD79DD09-40F6-D24A-AC01-5AC78B22BA11}" srcOrd="1" destOrd="0" parTransId="{4DCA80F3-C789-6544-885C-8C15C447A23A}" sibTransId="{50002D2F-4AC9-0848-AFF0-071EE9006E3A}"/>
+    <dgm:cxn modelId="{B7A0F423-698C-3A45-ACAC-0D12E285396C}" type="presParOf" srcId="{3AD2CC66-88A6-3A43-A256-83D02C5A51C6}" destId="{3784CF05-224A-EE45-9F2B-BD7A592AF553}" srcOrd="0" destOrd="0" presId="urn:microsoft.com/office/officeart/2005/8/layout/pyramid1"/>
+    <dgm:cxn modelId="{F8A0400D-500D-6C49-B059-9527489E3D91}" type="presParOf" srcId="{3784CF05-224A-EE45-9F2B-BD7A592AF553}" destId="{1C19F794-3B38-1C44-ABC1-E6A1B91F38A9}" srcOrd="0" destOrd="0" presId="urn:microsoft.com/office/officeart/2005/8/layout/pyramid1"/>
+    <dgm:cxn modelId="{CF375F8E-CCA3-8D4F-ACA4-118D63D4AE3C}" type="presParOf" srcId="{3784CF05-224A-EE45-9F2B-BD7A592AF553}" destId="{6D55B128-0737-094B-87C7-98DCC20D82FE}" srcOrd="1" destOrd="0" presId="urn:microsoft.com/office/officeart/2005/8/layout/pyramid1"/>
+    <dgm:cxn modelId="{135C4C01-FF76-3A45-B329-E23113429950}" type="presParOf" srcId="{3AD2CC66-88A6-3A43-A256-83D02C5A51C6}" destId="{A1CBF0A4-F5E2-324F-9CA9-CC20540C47F9}" srcOrd="1" destOrd="0" presId="urn:microsoft.com/office/officeart/2005/8/layout/pyramid1"/>
+    <dgm:cxn modelId="{45514126-EA77-EA48-8024-F315B1885C96}" type="presParOf" srcId="{A1CBF0A4-F5E2-324F-9CA9-CC20540C47F9}" destId="{138958A9-A30B-A645-BEF4-EC92188C90CE}" srcOrd="0" destOrd="0" presId="urn:microsoft.com/office/officeart/2005/8/layout/pyramid1"/>
+    <dgm:cxn modelId="{6BE4C758-27C1-4444-BAE0-F4350AB54A3F}" type="presParOf" srcId="{A1CBF0A4-F5E2-324F-9CA9-CC20540C47F9}" destId="{9CD087D8-0311-C449-B414-9F22ACA308E5}" srcOrd="1" destOrd="0" presId="urn:microsoft.com/office/officeart/2005/8/layout/pyramid1"/>
+    <dgm:cxn modelId="{2CE2E196-6ECF-9744-B6BB-1E3CF2B745D9}" type="presParOf" srcId="{3AD2CC66-88A6-3A43-A256-83D02C5A51C6}" destId="{59EF5177-33B2-CC41-AA49-8DA222C3D394}" srcOrd="2" destOrd="0" presId="urn:microsoft.com/office/officeart/2005/8/layout/pyramid1"/>
+    <dgm:cxn modelId="{0617F54F-80B5-5346-8E5B-855915930A7A}" type="presParOf" srcId="{59EF5177-33B2-CC41-AA49-8DA222C3D394}" destId="{76F31ED9-ED42-B941-AE6C-DCD1BE33515D}" srcOrd="0" destOrd="0" presId="urn:microsoft.com/office/officeart/2005/8/layout/pyramid1"/>
+    <dgm:cxn modelId="{A879AE82-7AA1-484D-BC3F-5B25C2B5B49F}" type="presParOf" srcId="{59EF5177-33B2-CC41-AA49-8DA222C3D394}" destId="{5F7F763D-A78C-A84C-8EEF-9089BD38BA10}" srcOrd="1" destOrd="0" presId="urn:microsoft.com/office/officeart/2005/8/layout/pyramid1"/>
+    <dgm:cxn modelId="{2DA9A438-4571-AA49-BF97-521B41FBD9EB}" type="presParOf" srcId="{3AD2CC66-88A6-3A43-A256-83D02C5A51C6}" destId="{6C515B82-8D5B-C34F-B928-548726742907}" srcOrd="3" destOrd="0" presId="urn:microsoft.com/office/officeart/2005/8/layout/pyramid1"/>
+    <dgm:cxn modelId="{D7497852-9A21-834A-BA3F-EF4481DBD1BD}" type="presParOf" srcId="{6C515B82-8D5B-C34F-B928-548726742907}" destId="{EDE32EC4-7A01-DA48-B7AB-30CA1147812B}" srcOrd="0" destOrd="0" presId="urn:microsoft.com/office/officeart/2005/8/layout/pyramid1"/>
+    <dgm:cxn modelId="{C2AD467C-E3AB-C641-AA4C-AF17E0EFFF9F}" type="presParOf" srcId="{6C515B82-8D5B-C34F-B928-548726742907}" destId="{50FA948C-50C2-0041-9021-9B919CA09D8C}" srcOrd="1" destOrd="0" presId="urn:microsoft.com/office/officeart/2005/8/layout/pyramid1"/>
+    <dgm:cxn modelId="{83BDB3AE-8E2D-814B-AA49-E972EA4CDC2D}" type="presParOf" srcId="{3AD2CC66-88A6-3A43-A256-83D02C5A51C6}" destId="{CBDB869F-3646-2C47-B3F9-0EC7DDC891B2}" srcOrd="4" destOrd="0" presId="urn:microsoft.com/office/officeart/2005/8/layout/pyramid1"/>
+    <dgm:cxn modelId="{723C3190-6FA6-D84D-A93E-A569299625CA}" type="presParOf" srcId="{CBDB869F-3646-2C47-B3F9-0EC7DDC891B2}" destId="{25C66891-C093-3947-8F3E-D77010DF7ABC}" srcOrd="0" destOrd="0" presId="urn:microsoft.com/office/officeart/2005/8/layout/pyramid1"/>
+    <dgm:cxn modelId="{066F21AB-B76A-7148-8D14-1B08D60C7EA3}" type="presParOf" srcId="{CBDB869F-3646-2C47-B3F9-0EC7DDC891B2}" destId="{9141C474-911D-9947-A6AE-A7090D5E66AB}" srcOrd="1" destOrd="0" presId="urn:microsoft.com/office/officeart/2005/8/layout/pyramid1"/>
+    <dgm:cxn modelId="{5A655005-2115-7D4F-A123-32CAD911357F}" type="presParOf" srcId="{3AD2CC66-88A6-3A43-A256-83D02C5A51C6}" destId="{91C37737-F442-3643-BB63-489CD97EF9FA}" srcOrd="5" destOrd="0" presId="urn:microsoft.com/office/officeart/2005/8/layout/pyramid1"/>
+    <dgm:cxn modelId="{3532C781-5EE5-D040-B135-A59180D3EB1C}" type="presParOf" srcId="{91C37737-F442-3643-BB63-489CD97EF9FA}" destId="{8E12950F-896A-A643-809A-4B576B6FADE1}" srcOrd="0" destOrd="0" presId="urn:microsoft.com/office/officeart/2005/8/layout/pyramid1"/>
+    <dgm:cxn modelId="{BD58AD8F-E367-2549-B639-FCB7B84E1459}" type="presParOf" srcId="{91C37737-F442-3643-BB63-489CD97EF9FA}" destId="{688ECD8E-A9F5-8540-9BEE-D0AE64CF5CFC}" srcOrd="1" destOrd="0" presId="urn:microsoft.com/office/officeart/2005/8/layout/pyramid1"/>
+    <dgm:cxn modelId="{13E96228-213A-904F-AF55-B2BE51C654D7}" type="presParOf" srcId="{3AD2CC66-88A6-3A43-A256-83D02C5A51C6}" destId="{B9E5EE8C-79FD-0E48-951F-FD3C63405CAC}" srcOrd="6" destOrd="0" presId="urn:microsoft.com/office/officeart/2005/8/layout/pyramid1"/>
+    <dgm:cxn modelId="{8FF8E63A-75B5-1F42-99C0-ACB21442E58F}" type="presParOf" srcId="{B9E5EE8C-79FD-0E48-951F-FD3C63405CAC}" destId="{F1364463-D7DE-E24B-A241-45501851B3AA}" srcOrd="0" destOrd="0" presId="urn:microsoft.com/office/officeart/2005/8/layout/pyramid1"/>
+    <dgm:cxn modelId="{C3321B56-527D-BC49-AE1F-502790233656}" type="presParOf" srcId="{B9E5EE8C-79FD-0E48-951F-FD3C63405CAC}" destId="{CC791127-DE6A-0D47-86E4-71485F8C834C}" srcOrd="1" destOrd="0" presId="urn:microsoft.com/office/officeart/2005/8/layout/pyramid1"/>
+    <dgm:cxn modelId="{12265324-F029-DA4C-A905-BBA8656A637E}" type="presParOf" srcId="{3AD2CC66-88A6-3A43-A256-83D02C5A51C6}" destId="{E189F5DA-72DA-3E4E-BEE3-98E9A65FD1F6}" srcOrd="7" destOrd="0" presId="urn:microsoft.com/office/officeart/2005/8/layout/pyramid1"/>
+    <dgm:cxn modelId="{78BD27C7-6714-B04D-9B06-D5767F2AE1FB}" type="presParOf" srcId="{E189F5DA-72DA-3E4E-BEE3-98E9A65FD1F6}" destId="{AF212A41-9690-F546-B416-57C98C898A1D}" srcOrd="0" destOrd="0" presId="urn:microsoft.com/office/officeart/2005/8/layout/pyramid1"/>
+    <dgm:cxn modelId="{17822869-9CE8-EB4E-A9DF-DCD5D6BD7B82}" type="presParOf" srcId="{E189F5DA-72DA-3E4E-BEE3-98E9A65FD1F6}" destId="{0A4DAA36-70A3-3A4C-A4FF-7C2B58A55135}" srcOrd="1" destOrd="0" presId="urn:microsoft.com/office/officeart/2005/8/layout/pyramid1"/>
+  </dgm:cxnLst>
+  <dgm:bg/>
+  <dgm:whole/>
+  <dgm:extLst>
+    <a:ext uri="http://schemas.microsoft.com/office/drawing/2008/diagram">
+      <dsp:dataModelExt xmlns:dsp="http://schemas.microsoft.com/office/drawing/2008/diagram" relId="rId6" minVer="http://schemas.openxmlformats.org/drawingml/2006/diagram"/>
+    </a:ext>
+  </dgm:extLst>
+</dgm:dataModel>
+</file>
+
+<file path=ppt/diagrams/data2.xml><?xml version="1.0" encoding="utf-8"?>
+<dgm:dataModel xmlns:dgm="http://schemas.openxmlformats.org/drawingml/2006/diagram" xmlns:a="http://schemas.openxmlformats.org/drawingml/2006/main">
+  <dgm:ptLst>
+    <dgm:pt modelId="{0389FD0D-08CC-EB4A-A5DF-1B9DBE7B621E}" type="doc">
+      <dgm:prSet loTypeId="urn:microsoft.com/office/officeart/2005/8/layout/pyramid1" loCatId="" qsTypeId="urn:microsoft.com/office/officeart/2005/8/quickstyle/simple2" qsCatId="simple" csTypeId="urn:microsoft.com/office/officeart/2005/8/colors/accent3_4" csCatId="accent3" phldr="1"/>
+      <dgm:spPr/>
+    </dgm:pt>
+    <dgm:pt modelId="{F6CDD4AB-2A99-B343-8299-09DAF82D64D3}">
+      <dgm:prSet phldrT="[テキスト]" custT="1"/>
+      <dgm:spPr/>
+      <dgm:t>
+        <a:bodyPr/>
+        <a:lstStyle/>
+        <a:p>
+          <a:r>
+            <a:rPr kumimoji="1" lang="ja-JP" altLang="en-US" sz="2800" b="1" i="0">
+              <a:latin typeface="Hiragino Sans W7" panose="020B0400000000000000" pitchFamily="34" charset="-128"/>
+              <a:ea typeface="Hiragino Sans W7" panose="020B0400000000000000" pitchFamily="34" charset="-128"/>
+            </a:rPr>
+            <a:t>事務次官</a:t>
+          </a:r>
+        </a:p>
+      </dgm:t>
+    </dgm:pt>
+    <dgm:pt modelId="{08D6CE4A-BE6C-4D46-8A50-91368612AF66}" type="parTrans" cxnId="{C9E1D7C0-FB7D-2B46-BC53-A553522A5218}">
+      <dgm:prSet/>
+      <dgm:spPr/>
+      <dgm:t>
+        <a:bodyPr/>
+        <a:lstStyle/>
+        <a:p>
+          <a:endParaRPr kumimoji="1" lang="ja-JP" altLang="en-US"/>
+        </a:p>
+      </dgm:t>
+    </dgm:pt>
+    <dgm:pt modelId="{7374A5E6-305D-1E4E-B9D0-B3F0F3E33F01}" type="sibTrans" cxnId="{C9E1D7C0-FB7D-2B46-BC53-A553522A5218}">
+      <dgm:prSet/>
+      <dgm:spPr/>
+      <dgm:t>
+        <a:bodyPr/>
+        <a:lstStyle/>
+        <a:p>
+          <a:endParaRPr kumimoji="1" lang="ja-JP" altLang="en-US"/>
+        </a:p>
+      </dgm:t>
+    </dgm:pt>
+    <dgm:pt modelId="{DD79DD09-40F6-D24A-AC01-5AC78B22BA11}">
+      <dgm:prSet phldrT="[テキスト]" custT="1"/>
+      <dgm:spPr/>
+      <dgm:t>
+        <a:bodyPr/>
+        <a:lstStyle/>
+        <a:p>
+          <a:r>
+            <a:rPr kumimoji="1" lang="ja-JP" altLang="en-US" sz="2800" b="1" i="0">
+              <a:latin typeface="Hiragino Sans W7" panose="020B0400000000000000" pitchFamily="34" charset="-128"/>
+              <a:ea typeface="Hiragino Sans W7" panose="020B0400000000000000" pitchFamily="34" charset="-128"/>
+            </a:rPr>
+            <a:t>局長</a:t>
+          </a:r>
+        </a:p>
+      </dgm:t>
+    </dgm:pt>
+    <dgm:pt modelId="{4DCA80F3-C789-6544-885C-8C15C447A23A}" type="parTrans" cxnId="{21E474FC-26EB-0043-B130-D68CA05972C7}">
+      <dgm:prSet/>
+      <dgm:spPr/>
+      <dgm:t>
+        <a:bodyPr/>
+        <a:lstStyle/>
+        <a:p>
+          <a:endParaRPr kumimoji="1" lang="ja-JP" altLang="en-US"/>
+        </a:p>
+      </dgm:t>
+    </dgm:pt>
+    <dgm:pt modelId="{50002D2F-4AC9-0848-AFF0-071EE9006E3A}" type="sibTrans" cxnId="{21E474FC-26EB-0043-B130-D68CA05972C7}">
+      <dgm:prSet/>
+      <dgm:spPr/>
+      <dgm:t>
+        <a:bodyPr/>
+        <a:lstStyle/>
+        <a:p>
+          <a:endParaRPr kumimoji="1" lang="ja-JP" altLang="en-US"/>
+        </a:p>
+      </dgm:t>
+    </dgm:pt>
+    <dgm:pt modelId="{F7B3E139-E59A-A740-B50A-7FA45ED603DD}">
+      <dgm:prSet phldrT="[テキスト]" custT="1"/>
+      <dgm:spPr/>
+      <dgm:t>
+        <a:bodyPr/>
+        <a:lstStyle/>
+        <a:p>
+          <a:r>
+            <a:rPr kumimoji="1" lang="ja-JP" altLang="en-US" sz="2800" b="1" i="0">
+              <a:latin typeface="Hiragino Sans W7" panose="020B0400000000000000" pitchFamily="34" charset="-128"/>
+              <a:ea typeface="Hiragino Sans W7" panose="020B0400000000000000" pitchFamily="34" charset="-128"/>
+            </a:rPr>
+            <a:t>部長・審議官</a:t>
+          </a:r>
+        </a:p>
+      </dgm:t>
+    </dgm:pt>
+    <dgm:pt modelId="{D7844E70-E8FD-7344-9802-6FCCF432984F}" type="parTrans" cxnId="{16C9CE1B-3C26-A24A-AEC6-02441A667BA4}">
+      <dgm:prSet/>
+      <dgm:spPr/>
+      <dgm:t>
+        <a:bodyPr/>
+        <a:lstStyle/>
+        <a:p>
+          <a:endParaRPr kumimoji="1" lang="ja-JP" altLang="en-US"/>
+        </a:p>
+      </dgm:t>
+    </dgm:pt>
+    <dgm:pt modelId="{2FB01BBA-BB56-514A-8A70-88CFC024BDB0}" type="sibTrans" cxnId="{16C9CE1B-3C26-A24A-AEC6-02441A667BA4}">
+      <dgm:prSet/>
+      <dgm:spPr/>
+      <dgm:t>
+        <a:bodyPr/>
+        <a:lstStyle/>
+        <a:p>
+          <a:endParaRPr kumimoji="1" lang="ja-JP" altLang="en-US"/>
+        </a:p>
+      </dgm:t>
+    </dgm:pt>
+    <dgm:pt modelId="{850958D8-7D07-2F44-963F-493D214A66DA}">
+      <dgm:prSet phldrT="[テキスト]" custT="1"/>
+      <dgm:spPr/>
+      <dgm:t>
+        <a:bodyPr/>
+        <a:lstStyle/>
+        <a:p>
+          <a:r>
+            <a:rPr kumimoji="1" lang="ja-JP" altLang="en-US" sz="2800" b="1" i="0">
+              <a:latin typeface="Hiragino Sans W7" panose="020B0400000000000000" pitchFamily="34" charset="-128"/>
+              <a:ea typeface="Hiragino Sans W7" panose="020B0400000000000000" pitchFamily="34" charset="-128"/>
+            </a:rPr>
+            <a:t>室長・企画官</a:t>
+          </a:r>
+        </a:p>
+      </dgm:t>
+    </dgm:pt>
+    <dgm:pt modelId="{0BB4B529-8593-0346-835E-9B7D3D5D6C3A}" type="parTrans" cxnId="{3615E526-16AB-E641-BBA5-0CADB1AC801C}">
+      <dgm:prSet/>
+      <dgm:spPr/>
+      <dgm:t>
+        <a:bodyPr/>
+        <a:lstStyle/>
+        <a:p>
+          <a:endParaRPr kumimoji="1" lang="ja-JP" altLang="en-US"/>
+        </a:p>
+      </dgm:t>
+    </dgm:pt>
+    <dgm:pt modelId="{2E0ACE65-AF39-8C44-8401-D98852C7276F}" type="sibTrans" cxnId="{3615E526-16AB-E641-BBA5-0CADB1AC801C}">
+      <dgm:prSet/>
+      <dgm:spPr/>
+      <dgm:t>
+        <a:bodyPr/>
+        <a:lstStyle/>
+        <a:p>
+          <a:endParaRPr kumimoji="1" lang="ja-JP" altLang="en-US"/>
+        </a:p>
+      </dgm:t>
+    </dgm:pt>
+    <dgm:pt modelId="{95782D1F-D851-E94D-B608-96BF0BE8701E}">
+      <dgm:prSet phldrT="[テキスト]" custT="1"/>
+      <dgm:spPr/>
+      <dgm:t>
+        <a:bodyPr/>
+        <a:lstStyle/>
+        <a:p>
+          <a:r>
+            <a:rPr kumimoji="1" lang="ja-JP" altLang="en-US" sz="2800" b="1" i="0">
+              <a:latin typeface="Hiragino Sans W7" panose="020B0400000000000000" pitchFamily="34" charset="-128"/>
+              <a:ea typeface="Hiragino Sans W7" panose="020B0400000000000000" pitchFamily="34" charset="-128"/>
+            </a:rPr>
+            <a:t>課長補佐</a:t>
+          </a:r>
+        </a:p>
+      </dgm:t>
+    </dgm:pt>
+    <dgm:pt modelId="{63A8760A-08DB-374E-A26B-BEB2A6F86E2B}" type="parTrans" cxnId="{2FDE969A-6E9A-524E-9C0A-9EAFE9A56F1C}">
+      <dgm:prSet/>
+      <dgm:spPr/>
+      <dgm:t>
+        <a:bodyPr/>
+        <a:lstStyle/>
+        <a:p>
+          <a:endParaRPr kumimoji="1" lang="ja-JP" altLang="en-US"/>
+        </a:p>
+      </dgm:t>
+    </dgm:pt>
+    <dgm:pt modelId="{427C4D84-3977-CC46-B852-16308ACB54B4}" type="sibTrans" cxnId="{2FDE969A-6E9A-524E-9C0A-9EAFE9A56F1C}">
+      <dgm:prSet/>
+      <dgm:spPr/>
+      <dgm:t>
+        <a:bodyPr/>
+        <a:lstStyle/>
+        <a:p>
+          <a:endParaRPr kumimoji="1" lang="ja-JP" altLang="en-US"/>
+        </a:p>
+      </dgm:t>
+    </dgm:pt>
+    <dgm:pt modelId="{7443D139-61A7-0145-8805-F8882DDC7D5C}">
+      <dgm:prSet phldrT="[テキスト]" custT="1"/>
+      <dgm:spPr/>
+      <dgm:t>
+        <a:bodyPr/>
+        <a:lstStyle/>
+        <a:p>
+          <a:r>
+            <a:rPr kumimoji="1" lang="ja-JP" altLang="en-US" sz="2800" b="1" i="0">
+              <a:latin typeface="Hiragino Sans W7" panose="020B0400000000000000" pitchFamily="34" charset="-128"/>
+              <a:ea typeface="Hiragino Sans W7" panose="020B0400000000000000" pitchFamily="34" charset="-128"/>
+            </a:rPr>
+            <a:t>課長</a:t>
+          </a:r>
+        </a:p>
+      </dgm:t>
+    </dgm:pt>
+    <dgm:pt modelId="{D492241A-3038-6C48-8C47-E5BF51FB75AE}" type="parTrans" cxnId="{2E8298B4-B520-C74E-B857-1B426FF9E4D2}">
+      <dgm:prSet/>
+      <dgm:spPr/>
+      <dgm:t>
+        <a:bodyPr/>
+        <a:lstStyle/>
+        <a:p>
+          <a:endParaRPr kumimoji="1" lang="ja-JP" altLang="en-US"/>
+        </a:p>
+      </dgm:t>
+    </dgm:pt>
+    <dgm:pt modelId="{9BD379DD-0E48-3047-9153-AF5BB9CC3616}" type="sibTrans" cxnId="{2E8298B4-B520-C74E-B857-1B426FF9E4D2}">
+      <dgm:prSet/>
+      <dgm:spPr/>
+      <dgm:t>
+        <a:bodyPr/>
+        <a:lstStyle/>
+        <a:p>
+          <a:endParaRPr kumimoji="1" lang="ja-JP" altLang="en-US"/>
+        </a:p>
+      </dgm:t>
+    </dgm:pt>
+    <dgm:pt modelId="{1391C414-B245-7940-BFC7-2DA1C9F0EE12}">
+      <dgm:prSet phldrT="[テキスト]" custT="1"/>
+      <dgm:spPr/>
+      <dgm:t>
+        <a:bodyPr/>
+        <a:lstStyle/>
+        <a:p>
+          <a:r>
+            <a:rPr kumimoji="1" lang="ja-JP" altLang="en-US" sz="2800" b="1" i="0">
+              <a:latin typeface="Hiragino Sans W7" panose="020B0400000000000000" pitchFamily="34" charset="-128"/>
+              <a:ea typeface="Hiragino Sans W7" panose="020B0400000000000000" pitchFamily="34" charset="-128"/>
+            </a:rPr>
+            <a:t>係長</a:t>
+          </a:r>
+        </a:p>
+      </dgm:t>
+    </dgm:pt>
+    <dgm:pt modelId="{D8C48D69-212C-CF4B-BFF1-597DCCE18F08}" type="parTrans" cxnId="{D8C54F86-3B10-2445-B633-AD973B5598EF}">
+      <dgm:prSet/>
+      <dgm:spPr/>
+      <dgm:t>
+        <a:bodyPr/>
+        <a:lstStyle/>
+        <a:p>
+          <a:endParaRPr kumimoji="1" lang="ja-JP" altLang="en-US"/>
+        </a:p>
+      </dgm:t>
+    </dgm:pt>
+    <dgm:pt modelId="{08959778-D44C-6B4E-8275-25956B33CAF4}" type="sibTrans" cxnId="{D8C54F86-3B10-2445-B633-AD973B5598EF}">
+      <dgm:prSet/>
+      <dgm:spPr/>
+      <dgm:t>
+        <a:bodyPr/>
+        <a:lstStyle/>
+        <a:p>
+          <a:endParaRPr kumimoji="1" lang="ja-JP" altLang="en-US"/>
+        </a:p>
+      </dgm:t>
+    </dgm:pt>
+    <dgm:pt modelId="{09D1DE98-6701-0948-832D-FEA0A7B7E27E}">
+      <dgm:prSet phldrT="[テキスト]" custT="1"/>
+      <dgm:spPr/>
+      <dgm:t>
+        <a:bodyPr/>
+        <a:lstStyle/>
+        <a:p>
+          <a:r>
+            <a:rPr kumimoji="1" lang="ja-JP" altLang="en-US" sz="2800" b="1" i="0">
+              <a:latin typeface="Hiragino Sans W7" panose="020B0400000000000000" pitchFamily="34" charset="-128"/>
+              <a:ea typeface="Hiragino Sans W7" panose="020B0400000000000000" pitchFamily="34" charset="-128"/>
+            </a:rPr>
+            <a:t>係員</a:t>
+          </a:r>
+        </a:p>
+      </dgm:t>
+    </dgm:pt>
+    <dgm:pt modelId="{56D11491-D116-0949-80BC-F1495E763216}" type="parTrans" cxnId="{87BF92D7-94A9-D944-8826-11D76C6AA672}">
+      <dgm:prSet/>
+      <dgm:spPr/>
+      <dgm:t>
+        <a:bodyPr/>
+        <a:lstStyle/>
+        <a:p>
+          <a:endParaRPr kumimoji="1" lang="ja-JP" altLang="en-US"/>
+        </a:p>
+      </dgm:t>
+    </dgm:pt>
+    <dgm:pt modelId="{D7EEF697-4A1B-654D-9E5A-8D20F80AC5D7}" type="sibTrans" cxnId="{87BF92D7-94A9-D944-8826-11D76C6AA672}">
+      <dgm:prSet/>
+      <dgm:spPr/>
+      <dgm:t>
+        <a:bodyPr/>
+        <a:lstStyle/>
+        <a:p>
+          <a:endParaRPr kumimoji="1" lang="ja-JP" altLang="en-US"/>
+        </a:p>
+      </dgm:t>
+    </dgm:pt>
+    <dgm:pt modelId="{3AD2CC66-88A6-3A43-A256-83D02C5A51C6}" type="pres">
+      <dgm:prSet presAssocID="{0389FD0D-08CC-EB4A-A5DF-1B9DBE7B621E}" presName="Name0" presStyleCnt="0">
+        <dgm:presLayoutVars>
+          <dgm:dir/>
+          <dgm:animLvl val="lvl"/>
+          <dgm:resizeHandles val="exact"/>
+        </dgm:presLayoutVars>
+      </dgm:prSet>
+      <dgm:spPr/>
+    </dgm:pt>
+    <dgm:pt modelId="{3784CF05-224A-EE45-9F2B-BD7A592AF553}" type="pres">
+      <dgm:prSet presAssocID="{F6CDD4AB-2A99-B343-8299-09DAF82D64D3}" presName="Name8" presStyleCnt="0"/>
+      <dgm:spPr/>
+    </dgm:pt>
+    <dgm:pt modelId="{1C19F794-3B38-1C44-ABC1-E6A1B91F38A9}" type="pres">
+      <dgm:prSet presAssocID="{F6CDD4AB-2A99-B343-8299-09DAF82D64D3}" presName="level" presStyleLbl="node1" presStyleIdx="0" presStyleCnt="8">
+        <dgm:presLayoutVars>
+          <dgm:chMax val="1"/>
+          <dgm:bulletEnabled val="1"/>
+        </dgm:presLayoutVars>
+      </dgm:prSet>
+      <dgm:spPr/>
+    </dgm:pt>
+    <dgm:pt modelId="{6D55B128-0737-094B-87C7-98DCC20D82FE}" type="pres">
+      <dgm:prSet presAssocID="{F6CDD4AB-2A99-B343-8299-09DAF82D64D3}" presName="levelTx" presStyleLbl="revTx" presStyleIdx="0" presStyleCnt="0">
+        <dgm:presLayoutVars>
+          <dgm:chMax val="1"/>
+          <dgm:bulletEnabled val="1"/>
+        </dgm:presLayoutVars>
+      </dgm:prSet>
+      <dgm:spPr/>
+    </dgm:pt>
+    <dgm:pt modelId="{A1CBF0A4-F5E2-324F-9CA9-CC20540C47F9}" type="pres">
+      <dgm:prSet presAssocID="{DD79DD09-40F6-D24A-AC01-5AC78B22BA11}" presName="Name8" presStyleCnt="0"/>
+      <dgm:spPr/>
+    </dgm:pt>
+    <dgm:pt modelId="{138958A9-A30B-A645-BEF4-EC92188C90CE}" type="pres">
+      <dgm:prSet presAssocID="{DD79DD09-40F6-D24A-AC01-5AC78B22BA11}" presName="level" presStyleLbl="node1" presStyleIdx="1" presStyleCnt="8">
+        <dgm:presLayoutVars>
+          <dgm:chMax val="1"/>
+          <dgm:bulletEnabled val="1"/>
+        </dgm:presLayoutVars>
+      </dgm:prSet>
+      <dgm:spPr/>
+    </dgm:pt>
+    <dgm:pt modelId="{9CD087D8-0311-C449-B414-9F22ACA308E5}" type="pres">
+      <dgm:prSet presAssocID="{DD79DD09-40F6-D24A-AC01-5AC78B22BA11}" presName="levelTx" presStyleLbl="revTx" presStyleIdx="0" presStyleCnt="0">
+        <dgm:presLayoutVars>
+          <dgm:chMax val="1"/>
+          <dgm:bulletEnabled val="1"/>
+        </dgm:presLayoutVars>
+      </dgm:prSet>
+      <dgm:spPr/>
+    </dgm:pt>
+    <dgm:pt modelId="{59EF5177-33B2-CC41-AA49-8DA222C3D394}" type="pres">
+      <dgm:prSet presAssocID="{F7B3E139-E59A-A740-B50A-7FA45ED603DD}" presName="Name8" presStyleCnt="0"/>
+      <dgm:spPr/>
+    </dgm:pt>
+    <dgm:pt modelId="{76F31ED9-ED42-B941-AE6C-DCD1BE33515D}" type="pres">
+      <dgm:prSet presAssocID="{F7B3E139-E59A-A740-B50A-7FA45ED603DD}" presName="level" presStyleLbl="node1" presStyleIdx="2" presStyleCnt="8">
+        <dgm:presLayoutVars>
+          <dgm:chMax val="1"/>
+          <dgm:bulletEnabled val="1"/>
+        </dgm:presLayoutVars>
+      </dgm:prSet>
+      <dgm:spPr/>
+    </dgm:pt>
+    <dgm:pt modelId="{5F7F763D-A78C-A84C-8EEF-9089BD38BA10}" type="pres">
+      <dgm:prSet presAssocID="{F7B3E139-E59A-A740-B50A-7FA45ED603DD}" presName="levelTx" presStyleLbl="revTx" presStyleIdx="0" presStyleCnt="0">
+        <dgm:presLayoutVars>
+          <dgm:chMax val="1"/>
+          <dgm:bulletEnabled val="1"/>
+        </dgm:presLayoutVars>
+      </dgm:prSet>
+      <dgm:spPr/>
+    </dgm:pt>
+    <dgm:pt modelId="{6C515B82-8D5B-C34F-B928-548726742907}" type="pres">
+      <dgm:prSet presAssocID="{7443D139-61A7-0145-8805-F8882DDC7D5C}" presName="Name8" presStyleCnt="0"/>
+      <dgm:spPr/>
+    </dgm:pt>
+    <dgm:pt modelId="{EDE32EC4-7A01-DA48-B7AB-30CA1147812B}" type="pres">
+      <dgm:prSet presAssocID="{7443D139-61A7-0145-8805-F8882DDC7D5C}" presName="level" presStyleLbl="node1" presStyleIdx="3" presStyleCnt="8">
+        <dgm:presLayoutVars>
+          <dgm:chMax val="1"/>
+          <dgm:bulletEnabled val="1"/>
+        </dgm:presLayoutVars>
+      </dgm:prSet>
+      <dgm:spPr/>
+    </dgm:pt>
+    <dgm:pt modelId="{50FA948C-50C2-0041-9021-9B919CA09D8C}" type="pres">
+      <dgm:prSet presAssocID="{7443D139-61A7-0145-8805-F8882DDC7D5C}" presName="levelTx" presStyleLbl="revTx" presStyleIdx="0" presStyleCnt="0">
+        <dgm:presLayoutVars>
+          <dgm:chMax val="1"/>
+          <dgm:bulletEnabled val="1"/>
+        </dgm:presLayoutVars>
+      </dgm:prSet>
+      <dgm:spPr/>
+    </dgm:pt>
+    <dgm:pt modelId="{CBDB869F-3646-2C47-B3F9-0EC7DDC891B2}" type="pres">
+      <dgm:prSet presAssocID="{850958D8-7D07-2F44-963F-493D214A66DA}" presName="Name8" presStyleCnt="0"/>
+      <dgm:spPr/>
+    </dgm:pt>
+    <dgm:pt modelId="{25C66891-C093-3947-8F3E-D77010DF7ABC}" type="pres">
+      <dgm:prSet presAssocID="{850958D8-7D07-2F44-963F-493D214A66DA}" presName="level" presStyleLbl="node1" presStyleIdx="4" presStyleCnt="8">
+        <dgm:presLayoutVars>
+          <dgm:chMax val="1"/>
+          <dgm:bulletEnabled val="1"/>
+        </dgm:presLayoutVars>
+      </dgm:prSet>
+      <dgm:spPr/>
+    </dgm:pt>
+    <dgm:pt modelId="{9141C474-911D-9947-A6AE-A7090D5E66AB}" type="pres">
+      <dgm:prSet presAssocID="{850958D8-7D07-2F44-963F-493D214A66DA}" presName="levelTx" presStyleLbl="revTx" presStyleIdx="0" presStyleCnt="0">
+        <dgm:presLayoutVars>
+          <dgm:chMax val="1"/>
+          <dgm:bulletEnabled val="1"/>
+        </dgm:presLayoutVars>
+      </dgm:prSet>
+      <dgm:spPr/>
+    </dgm:pt>
+    <dgm:pt modelId="{91C37737-F442-3643-BB63-489CD97EF9FA}" type="pres">
+      <dgm:prSet presAssocID="{95782D1F-D851-E94D-B608-96BF0BE8701E}" presName="Name8" presStyleCnt="0"/>
+      <dgm:spPr/>
+    </dgm:pt>
+    <dgm:pt modelId="{8E12950F-896A-A643-809A-4B576B6FADE1}" type="pres">
+      <dgm:prSet presAssocID="{95782D1F-D851-E94D-B608-96BF0BE8701E}" presName="level" presStyleLbl="node1" presStyleIdx="5" presStyleCnt="8">
+        <dgm:presLayoutVars>
+          <dgm:chMax val="1"/>
+          <dgm:bulletEnabled val="1"/>
+        </dgm:presLayoutVars>
+      </dgm:prSet>
+      <dgm:spPr/>
+    </dgm:pt>
+    <dgm:pt modelId="{688ECD8E-A9F5-8540-9BEE-D0AE64CF5CFC}" type="pres">
+      <dgm:prSet presAssocID="{95782D1F-D851-E94D-B608-96BF0BE8701E}" presName="levelTx" presStyleLbl="revTx" presStyleIdx="0" presStyleCnt="0">
+        <dgm:presLayoutVars>
+          <dgm:chMax val="1"/>
+          <dgm:bulletEnabled val="1"/>
+        </dgm:presLayoutVars>
+      </dgm:prSet>
+      <dgm:spPr/>
+    </dgm:pt>
+    <dgm:pt modelId="{B9E5EE8C-79FD-0E48-951F-FD3C63405CAC}" type="pres">
+      <dgm:prSet presAssocID="{1391C414-B245-7940-BFC7-2DA1C9F0EE12}" presName="Name8" presStyleCnt="0"/>
+      <dgm:spPr/>
+    </dgm:pt>
+    <dgm:pt modelId="{F1364463-D7DE-E24B-A241-45501851B3AA}" type="pres">
+      <dgm:prSet presAssocID="{1391C414-B245-7940-BFC7-2DA1C9F0EE12}" presName="level" presStyleLbl="node1" presStyleIdx="6" presStyleCnt="8">
+        <dgm:presLayoutVars>
+          <dgm:chMax val="1"/>
+          <dgm:bulletEnabled val="1"/>
+        </dgm:presLayoutVars>
+      </dgm:prSet>
+      <dgm:spPr/>
+    </dgm:pt>
+    <dgm:pt modelId="{CC791127-DE6A-0D47-86E4-71485F8C834C}" type="pres">
+      <dgm:prSet presAssocID="{1391C414-B245-7940-BFC7-2DA1C9F0EE12}" presName="levelTx" presStyleLbl="revTx" presStyleIdx="0" presStyleCnt="0">
+        <dgm:presLayoutVars>
+          <dgm:chMax val="1"/>
+          <dgm:bulletEnabled val="1"/>
+        </dgm:presLayoutVars>
+      </dgm:prSet>
+      <dgm:spPr/>
+    </dgm:pt>
+    <dgm:pt modelId="{E189F5DA-72DA-3E4E-BEE3-98E9A65FD1F6}" type="pres">
+      <dgm:prSet presAssocID="{09D1DE98-6701-0948-832D-FEA0A7B7E27E}" presName="Name8" presStyleCnt="0"/>
+      <dgm:spPr/>
+    </dgm:pt>
+    <dgm:pt modelId="{AF212A41-9690-F546-B416-57C98C898A1D}" type="pres">
+      <dgm:prSet presAssocID="{09D1DE98-6701-0948-832D-FEA0A7B7E27E}" presName="level" presStyleLbl="node1" presStyleIdx="7" presStyleCnt="8">
+        <dgm:presLayoutVars>
+          <dgm:chMax val="1"/>
+          <dgm:bulletEnabled val="1"/>
+        </dgm:presLayoutVars>
+      </dgm:prSet>
+      <dgm:spPr/>
+    </dgm:pt>
+    <dgm:pt modelId="{0A4DAA36-70A3-3A4C-A4FF-7C2B58A55135}" type="pres">
+      <dgm:prSet presAssocID="{09D1DE98-6701-0948-832D-FEA0A7B7E27E}" presName="levelTx" presStyleLbl="revTx" presStyleIdx="0" presStyleCnt="0">
+        <dgm:presLayoutVars>
+          <dgm:chMax val="1"/>
+          <dgm:bulletEnabled val="1"/>
+        </dgm:presLayoutVars>
+      </dgm:prSet>
+      <dgm:spPr/>
+    </dgm:pt>
+  </dgm:ptLst>
+  <dgm:cxnLst>
+    <dgm:cxn modelId="{47A2431B-7CB9-804A-8956-9F927D7F751F}" type="presOf" srcId="{0389FD0D-08CC-EB4A-A5DF-1B9DBE7B621E}" destId="{3AD2CC66-88A6-3A43-A256-83D02C5A51C6}" srcOrd="0" destOrd="0" presId="urn:microsoft.com/office/officeart/2005/8/layout/pyramid1"/>
+    <dgm:cxn modelId="{16C9CE1B-3C26-A24A-AEC6-02441A667BA4}" srcId="{0389FD0D-08CC-EB4A-A5DF-1B9DBE7B621E}" destId="{F7B3E139-E59A-A740-B50A-7FA45ED603DD}" srcOrd="2" destOrd="0" parTransId="{D7844E70-E8FD-7344-9802-6FCCF432984F}" sibTransId="{2FB01BBA-BB56-514A-8A70-88CFC024BDB0}"/>
+    <dgm:cxn modelId="{CF16721F-2D1C-DF4E-AC07-E98B2FC7576D}" type="presOf" srcId="{1391C414-B245-7940-BFC7-2DA1C9F0EE12}" destId="{F1364463-D7DE-E24B-A241-45501851B3AA}" srcOrd="0" destOrd="0" presId="urn:microsoft.com/office/officeart/2005/8/layout/pyramid1"/>
+    <dgm:cxn modelId="{3615E526-16AB-E641-BBA5-0CADB1AC801C}" srcId="{0389FD0D-08CC-EB4A-A5DF-1B9DBE7B621E}" destId="{850958D8-7D07-2F44-963F-493D214A66DA}" srcOrd="4" destOrd="0" parTransId="{0BB4B529-8593-0346-835E-9B7D3D5D6C3A}" sibTransId="{2E0ACE65-AF39-8C44-8401-D98852C7276F}"/>
+    <dgm:cxn modelId="{49F89538-A8AE-9241-9B81-2EC1494E7834}" type="presOf" srcId="{DD79DD09-40F6-D24A-AC01-5AC78B22BA11}" destId="{9CD087D8-0311-C449-B414-9F22ACA308E5}" srcOrd="1" destOrd="0" presId="urn:microsoft.com/office/officeart/2005/8/layout/pyramid1"/>
+    <dgm:cxn modelId="{5914DD49-C8D9-4146-B221-F4B9F9AB3C20}" type="presOf" srcId="{95782D1F-D851-E94D-B608-96BF0BE8701E}" destId="{688ECD8E-A9F5-8540-9BEE-D0AE64CF5CFC}" srcOrd="1" destOrd="0" presId="urn:microsoft.com/office/officeart/2005/8/layout/pyramid1"/>
+    <dgm:cxn modelId="{3F9DB56A-94C8-D14B-AECE-F8E849412D72}" type="presOf" srcId="{F6CDD4AB-2A99-B343-8299-09DAF82D64D3}" destId="{6D55B128-0737-094B-87C7-98DCC20D82FE}" srcOrd="1" destOrd="0" presId="urn:microsoft.com/office/officeart/2005/8/layout/pyramid1"/>
+    <dgm:cxn modelId="{8B5F8E6E-F68E-BB4E-A5E0-2ED6E1047BEB}" type="presOf" srcId="{F7B3E139-E59A-A740-B50A-7FA45ED603DD}" destId="{76F31ED9-ED42-B941-AE6C-DCD1BE33515D}" srcOrd="0" destOrd="0" presId="urn:microsoft.com/office/officeart/2005/8/layout/pyramid1"/>
+    <dgm:cxn modelId="{18CED37D-8F33-114B-8944-915210CDFFC3}" type="presOf" srcId="{7443D139-61A7-0145-8805-F8882DDC7D5C}" destId="{50FA948C-50C2-0041-9021-9B919CA09D8C}" srcOrd="1" destOrd="0" presId="urn:microsoft.com/office/officeart/2005/8/layout/pyramid1"/>
+    <dgm:cxn modelId="{0ED7BE81-4CEB-E049-B53F-D82DB6DED31E}" type="presOf" srcId="{09D1DE98-6701-0948-832D-FEA0A7B7E27E}" destId="{0A4DAA36-70A3-3A4C-A4FF-7C2B58A55135}" srcOrd="1" destOrd="0" presId="urn:microsoft.com/office/officeart/2005/8/layout/pyramid1"/>
+    <dgm:cxn modelId="{2E479A83-0D06-BE47-A35C-5A6F05355DE8}" type="presOf" srcId="{95782D1F-D851-E94D-B608-96BF0BE8701E}" destId="{8E12950F-896A-A643-809A-4B576B6FADE1}" srcOrd="0" destOrd="0" presId="urn:microsoft.com/office/officeart/2005/8/layout/pyramid1"/>
+    <dgm:cxn modelId="{9A42D783-F896-5849-AB5C-FBCF6375DE0A}" type="presOf" srcId="{850958D8-7D07-2F44-963F-493D214A66DA}" destId="{25C66891-C093-3947-8F3E-D77010DF7ABC}" srcOrd="0" destOrd="0" presId="urn:microsoft.com/office/officeart/2005/8/layout/pyramid1"/>
+    <dgm:cxn modelId="{D8C54F86-3B10-2445-B633-AD973B5598EF}" srcId="{0389FD0D-08CC-EB4A-A5DF-1B9DBE7B621E}" destId="{1391C414-B245-7940-BFC7-2DA1C9F0EE12}" srcOrd="6" destOrd="0" parTransId="{D8C48D69-212C-CF4B-BFF1-597DCCE18F08}" sibTransId="{08959778-D44C-6B4E-8275-25956B33CAF4}"/>
+    <dgm:cxn modelId="{2FDE969A-6E9A-524E-9C0A-9EAFE9A56F1C}" srcId="{0389FD0D-08CC-EB4A-A5DF-1B9DBE7B621E}" destId="{95782D1F-D851-E94D-B608-96BF0BE8701E}" srcOrd="5" destOrd="0" parTransId="{63A8760A-08DB-374E-A26B-BEB2A6F86E2B}" sibTransId="{427C4D84-3977-CC46-B852-16308ACB54B4}"/>
+    <dgm:cxn modelId="{0E15AAA4-50B6-4F4E-841B-295E8965165F}" type="presOf" srcId="{850958D8-7D07-2F44-963F-493D214A66DA}" destId="{9141C474-911D-9947-A6AE-A7090D5E66AB}" srcOrd="1" destOrd="0" presId="urn:microsoft.com/office/officeart/2005/8/layout/pyramid1"/>
+    <dgm:cxn modelId="{2E8298B4-B520-C74E-B857-1B426FF9E4D2}" srcId="{0389FD0D-08CC-EB4A-A5DF-1B9DBE7B621E}" destId="{7443D139-61A7-0145-8805-F8882DDC7D5C}" srcOrd="3" destOrd="0" parTransId="{D492241A-3038-6C48-8C47-E5BF51FB75AE}" sibTransId="{9BD379DD-0E48-3047-9153-AF5BB9CC3616}"/>
+    <dgm:cxn modelId="{C62E1EBF-453E-2C45-9E47-0CF42BEB02F2}" type="presOf" srcId="{1391C414-B245-7940-BFC7-2DA1C9F0EE12}" destId="{CC791127-DE6A-0D47-86E4-71485F8C834C}" srcOrd="1" destOrd="0" presId="urn:microsoft.com/office/officeart/2005/8/layout/pyramid1"/>
+    <dgm:cxn modelId="{C9E1D7C0-FB7D-2B46-BC53-A553522A5218}" srcId="{0389FD0D-08CC-EB4A-A5DF-1B9DBE7B621E}" destId="{F6CDD4AB-2A99-B343-8299-09DAF82D64D3}" srcOrd="0" destOrd="0" parTransId="{08D6CE4A-BE6C-4D46-8A50-91368612AF66}" sibTransId="{7374A5E6-305D-1E4E-B9D0-B3F0F3E33F01}"/>
+    <dgm:cxn modelId="{87BF92D7-94A9-D944-8826-11D76C6AA672}" srcId="{0389FD0D-08CC-EB4A-A5DF-1B9DBE7B621E}" destId="{09D1DE98-6701-0948-832D-FEA0A7B7E27E}" srcOrd="7" destOrd="0" parTransId="{56D11491-D116-0949-80BC-F1495E763216}" sibTransId="{D7EEF697-4A1B-654D-9E5A-8D20F80AC5D7}"/>
+    <dgm:cxn modelId="{E4582ADE-1A9E-0C46-BAE3-576581C2CB21}" type="presOf" srcId="{DD79DD09-40F6-D24A-AC01-5AC78B22BA11}" destId="{138958A9-A30B-A645-BEF4-EC92188C90CE}" srcOrd="0" destOrd="0" presId="urn:microsoft.com/office/officeart/2005/8/layout/pyramid1"/>
+    <dgm:cxn modelId="{E75CD3E2-3046-334C-88F5-2A589335916C}" type="presOf" srcId="{F6CDD4AB-2A99-B343-8299-09DAF82D64D3}" destId="{1C19F794-3B38-1C44-ABC1-E6A1B91F38A9}" srcOrd="0" destOrd="0" presId="urn:microsoft.com/office/officeart/2005/8/layout/pyramid1"/>
+    <dgm:cxn modelId="{432641F0-E213-C24A-BE89-15A16DA3026D}" type="presOf" srcId="{F7B3E139-E59A-A740-B50A-7FA45ED603DD}" destId="{5F7F763D-A78C-A84C-8EEF-9089BD38BA10}" srcOrd="1" destOrd="0" presId="urn:microsoft.com/office/officeart/2005/8/layout/pyramid1"/>
+    <dgm:cxn modelId="{FA94F2F3-72FD-5547-BCB4-7FBED463AD50}" type="presOf" srcId="{7443D139-61A7-0145-8805-F8882DDC7D5C}" destId="{EDE32EC4-7A01-DA48-B7AB-30CA1147812B}" srcOrd="0" destOrd="0" presId="urn:microsoft.com/office/officeart/2005/8/layout/pyramid1"/>
+    <dgm:cxn modelId="{9291E8F9-A746-384A-9088-8D1D1E15D077}" type="presOf" srcId="{09D1DE98-6701-0948-832D-FEA0A7B7E27E}" destId="{AF212A41-9690-F546-B416-57C98C898A1D}" srcOrd="0" destOrd="0" presId="urn:microsoft.com/office/officeart/2005/8/layout/pyramid1"/>
+    <dgm:cxn modelId="{21E474FC-26EB-0043-B130-D68CA05972C7}" srcId="{0389FD0D-08CC-EB4A-A5DF-1B9DBE7B621E}" destId="{DD79DD09-40F6-D24A-AC01-5AC78B22BA11}" srcOrd="1" destOrd="0" parTransId="{4DCA80F3-C789-6544-885C-8C15C447A23A}" sibTransId="{50002D2F-4AC9-0848-AFF0-071EE9006E3A}"/>
+    <dgm:cxn modelId="{B7A0F423-698C-3A45-ACAC-0D12E285396C}" type="presParOf" srcId="{3AD2CC66-88A6-3A43-A256-83D02C5A51C6}" destId="{3784CF05-224A-EE45-9F2B-BD7A592AF553}" srcOrd="0" destOrd="0" presId="urn:microsoft.com/office/officeart/2005/8/layout/pyramid1"/>
+    <dgm:cxn modelId="{F8A0400D-500D-6C49-B059-9527489E3D91}" type="presParOf" srcId="{3784CF05-224A-EE45-9F2B-BD7A592AF553}" destId="{1C19F794-3B38-1C44-ABC1-E6A1B91F38A9}" srcOrd="0" destOrd="0" presId="urn:microsoft.com/office/officeart/2005/8/layout/pyramid1"/>
+    <dgm:cxn modelId="{CF375F8E-CCA3-8D4F-ACA4-118D63D4AE3C}" type="presParOf" srcId="{3784CF05-224A-EE45-9F2B-BD7A592AF553}" destId="{6D55B128-0737-094B-87C7-98DCC20D82FE}" srcOrd="1" destOrd="0" presId="urn:microsoft.com/office/officeart/2005/8/layout/pyramid1"/>
+    <dgm:cxn modelId="{135C4C01-FF76-3A45-B329-E23113429950}" type="presParOf" srcId="{3AD2CC66-88A6-3A43-A256-83D02C5A51C6}" destId="{A1CBF0A4-F5E2-324F-9CA9-CC20540C47F9}" srcOrd="1" destOrd="0" presId="urn:microsoft.com/office/officeart/2005/8/layout/pyramid1"/>
+    <dgm:cxn modelId="{45514126-EA77-EA48-8024-F315B1885C96}" type="presParOf" srcId="{A1CBF0A4-F5E2-324F-9CA9-CC20540C47F9}" destId="{138958A9-A30B-A645-BEF4-EC92188C90CE}" srcOrd="0" destOrd="0" presId="urn:microsoft.com/office/officeart/2005/8/layout/pyramid1"/>
+    <dgm:cxn modelId="{6BE4C758-27C1-4444-BAE0-F4350AB54A3F}" type="presParOf" srcId="{A1CBF0A4-F5E2-324F-9CA9-CC20540C47F9}" destId="{9CD087D8-0311-C449-B414-9F22ACA308E5}" srcOrd="1" destOrd="0" presId="urn:microsoft.com/office/officeart/2005/8/layout/pyramid1"/>
+    <dgm:cxn modelId="{2CE2E196-6ECF-9744-B6BB-1E3CF2B745D9}" type="presParOf" srcId="{3AD2CC66-88A6-3A43-A256-83D02C5A51C6}" destId="{59EF5177-33B2-CC41-AA49-8DA222C3D394}" srcOrd="2" destOrd="0" presId="urn:microsoft.com/office/officeart/2005/8/layout/pyramid1"/>
+    <dgm:cxn modelId="{0617F54F-80B5-5346-8E5B-855915930A7A}" type="presParOf" srcId="{59EF5177-33B2-CC41-AA49-8DA222C3D394}" destId="{76F31ED9-ED42-B941-AE6C-DCD1BE33515D}" srcOrd="0" destOrd="0" presId="urn:microsoft.com/office/officeart/2005/8/layout/pyramid1"/>
+    <dgm:cxn modelId="{A879AE82-7AA1-484D-BC3F-5B25C2B5B49F}" type="presParOf" srcId="{59EF5177-33B2-CC41-AA49-8DA222C3D394}" destId="{5F7F763D-A78C-A84C-8EEF-9089BD38BA10}" srcOrd="1" destOrd="0" presId="urn:microsoft.com/office/officeart/2005/8/layout/pyramid1"/>
+    <dgm:cxn modelId="{2DA9A438-4571-AA49-BF97-521B41FBD9EB}" type="presParOf" srcId="{3AD2CC66-88A6-3A43-A256-83D02C5A51C6}" destId="{6C515B82-8D5B-C34F-B928-548726742907}" srcOrd="3" destOrd="0" presId="urn:microsoft.com/office/officeart/2005/8/layout/pyramid1"/>
+    <dgm:cxn modelId="{D7497852-9A21-834A-BA3F-EF4481DBD1BD}" type="presParOf" srcId="{6C515B82-8D5B-C34F-B928-548726742907}" destId="{EDE32EC4-7A01-DA48-B7AB-30CA1147812B}" srcOrd="0" destOrd="0" presId="urn:microsoft.com/office/officeart/2005/8/layout/pyramid1"/>
+    <dgm:cxn modelId="{C2AD467C-E3AB-C641-AA4C-AF17E0EFFF9F}" type="presParOf" srcId="{6C515B82-8D5B-C34F-B928-548726742907}" destId="{50FA948C-50C2-0041-9021-9B919CA09D8C}" srcOrd="1" destOrd="0" presId="urn:microsoft.com/office/officeart/2005/8/layout/pyramid1"/>
+    <dgm:cxn modelId="{83BDB3AE-8E2D-814B-AA49-E972EA4CDC2D}" type="presParOf" srcId="{3AD2CC66-88A6-3A43-A256-83D02C5A51C6}" destId="{CBDB869F-3646-2C47-B3F9-0EC7DDC891B2}" srcOrd="4" destOrd="0" presId="urn:microsoft.com/office/officeart/2005/8/layout/pyramid1"/>
+    <dgm:cxn modelId="{723C3190-6FA6-D84D-A93E-A569299625CA}" type="presParOf" srcId="{CBDB869F-3646-2C47-B3F9-0EC7DDC891B2}" destId="{25C66891-C093-3947-8F3E-D77010DF7ABC}" srcOrd="0" destOrd="0" presId="urn:microsoft.com/office/officeart/2005/8/layout/pyramid1"/>
+    <dgm:cxn modelId="{066F21AB-B76A-7148-8D14-1B08D60C7EA3}" type="presParOf" srcId="{CBDB869F-3646-2C47-B3F9-0EC7DDC891B2}" destId="{9141C474-911D-9947-A6AE-A7090D5E66AB}" srcOrd="1" destOrd="0" presId="urn:microsoft.com/office/officeart/2005/8/layout/pyramid1"/>
+    <dgm:cxn modelId="{5A655005-2115-7D4F-A123-32CAD911357F}" type="presParOf" srcId="{3AD2CC66-88A6-3A43-A256-83D02C5A51C6}" destId="{91C37737-F442-3643-BB63-489CD97EF9FA}" srcOrd="5" destOrd="0" presId="urn:microsoft.com/office/officeart/2005/8/layout/pyramid1"/>
+    <dgm:cxn modelId="{3532C781-5EE5-D040-B135-A59180D3EB1C}" type="presParOf" srcId="{91C37737-F442-3643-BB63-489CD97EF9FA}" destId="{8E12950F-896A-A643-809A-4B576B6FADE1}" srcOrd="0" destOrd="0" presId="urn:microsoft.com/office/officeart/2005/8/layout/pyramid1"/>
+    <dgm:cxn modelId="{BD58AD8F-E367-2549-B639-FCB7B84E1459}" type="presParOf" srcId="{91C37737-F442-3643-BB63-489CD97EF9FA}" destId="{688ECD8E-A9F5-8540-9BEE-D0AE64CF5CFC}" srcOrd="1" destOrd="0" presId="urn:microsoft.com/office/officeart/2005/8/layout/pyramid1"/>
+    <dgm:cxn modelId="{13E96228-213A-904F-AF55-B2BE51C654D7}" type="presParOf" srcId="{3AD2CC66-88A6-3A43-A256-83D02C5A51C6}" destId="{B9E5EE8C-79FD-0E48-951F-FD3C63405CAC}" srcOrd="6" destOrd="0" presId="urn:microsoft.com/office/officeart/2005/8/layout/pyramid1"/>
+    <dgm:cxn modelId="{8FF8E63A-75B5-1F42-99C0-ACB21442E58F}" type="presParOf" srcId="{B9E5EE8C-79FD-0E48-951F-FD3C63405CAC}" destId="{F1364463-D7DE-E24B-A241-45501851B3AA}" srcOrd="0" destOrd="0" presId="urn:microsoft.com/office/officeart/2005/8/layout/pyramid1"/>
+    <dgm:cxn modelId="{C3321B56-527D-BC49-AE1F-502790233656}" type="presParOf" srcId="{B9E5EE8C-79FD-0E48-951F-FD3C63405CAC}" destId="{CC791127-DE6A-0D47-86E4-71485F8C834C}" srcOrd="1" destOrd="0" presId="urn:microsoft.com/office/officeart/2005/8/layout/pyramid1"/>
+    <dgm:cxn modelId="{12265324-F029-DA4C-A905-BBA8656A637E}" type="presParOf" srcId="{3AD2CC66-88A6-3A43-A256-83D02C5A51C6}" destId="{E189F5DA-72DA-3E4E-BEE3-98E9A65FD1F6}" srcOrd="7" destOrd="0" presId="urn:microsoft.com/office/officeart/2005/8/layout/pyramid1"/>
+    <dgm:cxn modelId="{78BD27C7-6714-B04D-9B06-D5767F2AE1FB}" type="presParOf" srcId="{E189F5DA-72DA-3E4E-BEE3-98E9A65FD1F6}" destId="{AF212A41-9690-F546-B416-57C98C898A1D}" srcOrd="0" destOrd="0" presId="urn:microsoft.com/office/officeart/2005/8/layout/pyramid1"/>
+    <dgm:cxn modelId="{17822869-9CE8-EB4E-A9DF-DCD5D6BD7B82}" type="presParOf" srcId="{E189F5DA-72DA-3E4E-BEE3-98E9A65FD1F6}" destId="{0A4DAA36-70A3-3A4C-A4FF-7C2B58A55135}" srcOrd="1" destOrd="0" presId="urn:microsoft.com/office/officeart/2005/8/layout/pyramid1"/>
+  </dgm:cxnLst>
+  <dgm:bg/>
+  <dgm:whole/>
+  <dgm:extLst>
+    <a:ext uri="http://schemas.microsoft.com/office/drawing/2008/diagram">
+      <dsp:dataModelExt xmlns:dsp="http://schemas.microsoft.com/office/drawing/2008/diagram" relId="rId6" minVer="http://schemas.openxmlformats.org/drawingml/2006/diagram"/>
+    </a:ext>
+  </dgm:extLst>
+</dgm:dataModel>
+</file>
+
+<file path=ppt/diagrams/drawing1.xml><?xml version="1.0" encoding="utf-8"?>
+<dsp:drawing xmlns:dgm="http://schemas.openxmlformats.org/drawingml/2006/diagram" xmlns:dsp="http://schemas.microsoft.com/office/drawing/2008/diagram" xmlns:a="http://schemas.openxmlformats.org/drawingml/2006/main">
+  <dsp:spTree>
+    <dsp:nvGrpSpPr>
+      <dsp:cNvPr id="0" name=""/>
+      <dsp:cNvGrpSpPr/>
+    </dsp:nvGrpSpPr>
+    <dsp:grpSpPr/>
+    <dsp:sp modelId="{1C19F794-3B38-1C44-ABC1-E6A1B91F38A9}">
+      <dsp:nvSpPr>
+        <dsp:cNvPr id="0" name=""/>
+        <dsp:cNvSpPr/>
+      </dsp:nvSpPr>
+      <dsp:spPr>
+        <a:xfrm>
+          <a:off x="2759666" y="0"/>
+          <a:ext cx="788476" cy="1200149"/>
+        </a:xfrm>
+        <a:prstGeom prst="trapezoid">
+          <a:avLst>
+            <a:gd name="adj" fmla="val 50000"/>
+          </a:avLst>
+        </a:prstGeom>
+        <a:solidFill>
+          <a:schemeClr val="accent3">
+            <a:shade val="50000"/>
+            <a:hueOff val="0"/>
+            <a:satOff val="0"/>
+            <a:lumOff val="0"/>
+            <a:alphaOff val="0"/>
+          </a:schemeClr>
+        </a:solidFill>
+        <a:ln w="19050" cap="flat" cmpd="sng" algn="ctr">
+          <a:solidFill>
+            <a:schemeClr val="lt1">
+              <a:hueOff val="0"/>
+              <a:satOff val="0"/>
+              <a:lumOff val="0"/>
+              <a:alphaOff val="0"/>
+            </a:schemeClr>
+          </a:solidFill>
+          <a:prstDash val="solid"/>
+          <a:miter lim="800000"/>
+        </a:ln>
+        <a:effectLst/>
+      </dsp:spPr>
+      <dsp:style>
+        <a:lnRef idx="3">
+          <a:scrgbClr r="0" g="0" b="0"/>
+        </a:lnRef>
+        <a:fillRef idx="1">
+          <a:scrgbClr r="0" g="0" b="0"/>
+        </a:fillRef>
+        <a:effectRef idx="1">
+          <a:scrgbClr r="0" g="0" b="0"/>
+        </a:effectRef>
+        <a:fontRef idx="minor">
+          <a:schemeClr val="lt1"/>
+        </a:fontRef>
+      </dsp:style>
+      <dsp:txBody>
+        <a:bodyPr spcFirstLastPara="0" vert="horz" wrap="square" lIns="35560" tIns="35560" rIns="35560" bIns="35560" numCol="1" spcCol="1270" anchor="ctr" anchorCtr="0">
+          <a:noAutofit/>
+        </a:bodyPr>
+        <a:lstStyle/>
+        <a:p>
+          <a:pPr marL="0" lvl="0" indent="0" algn="ctr" defTabSz="1244600">
+            <a:lnSpc>
+              <a:spcPct val="90000"/>
+            </a:lnSpc>
+            <a:spcBef>
+              <a:spcPct val="0"/>
+            </a:spcBef>
+            <a:spcAft>
+              <a:spcPct val="35000"/>
+            </a:spcAft>
+            <a:buNone/>
+          </a:pPr>
+          <a:r>
+            <a:rPr kumimoji="1" lang="ja-JP" altLang="en-US" sz="2800" b="1" i="0" kern="1200">
+              <a:latin typeface="Hiragino Sans W7" panose="020B0400000000000000" pitchFamily="34" charset="-128"/>
+              <a:ea typeface="Hiragino Sans W7" panose="020B0400000000000000" pitchFamily="34" charset="-128"/>
+            </a:rPr>
+            <a:t>事務次官</a:t>
+          </a:r>
+        </a:p>
+      </dsp:txBody>
+      <dsp:txXfrm>
+        <a:off x="2759666" y="0"/>
+        <a:ext cx="788476" cy="1200149"/>
+      </dsp:txXfrm>
+    </dsp:sp>
+    <dsp:sp modelId="{138958A9-A30B-A645-BEF4-EC92188C90CE}">
+      <dsp:nvSpPr>
+        <dsp:cNvPr id="0" name=""/>
+        <dsp:cNvSpPr/>
+      </dsp:nvSpPr>
+      <dsp:spPr>
+        <a:xfrm>
+          <a:off x="2365428" y="1200149"/>
+          <a:ext cx="1576952" cy="1200149"/>
+        </a:xfrm>
+        <a:prstGeom prst="trapezoid">
+          <a:avLst>
+            <a:gd name="adj" fmla="val 32849"/>
+          </a:avLst>
+        </a:prstGeom>
+        <a:solidFill>
+          <a:schemeClr val="accent3">
+            <a:shade val="50000"/>
+            <a:hueOff val="0"/>
+            <a:satOff val="0"/>
+            <a:lumOff val="8990"/>
+            <a:alphaOff val="0"/>
+          </a:schemeClr>
+        </a:solidFill>
+        <a:ln w="19050" cap="flat" cmpd="sng" algn="ctr">
+          <a:solidFill>
+            <a:schemeClr val="lt1">
+              <a:hueOff val="0"/>
+              <a:satOff val="0"/>
+              <a:lumOff val="0"/>
+              <a:alphaOff val="0"/>
+            </a:schemeClr>
+          </a:solidFill>
+          <a:prstDash val="solid"/>
+          <a:miter lim="800000"/>
+        </a:ln>
+        <a:effectLst/>
+      </dsp:spPr>
+      <dsp:style>
+        <a:lnRef idx="3">
+          <a:scrgbClr r="0" g="0" b="0"/>
+        </a:lnRef>
+        <a:fillRef idx="1">
+          <a:scrgbClr r="0" g="0" b="0"/>
+        </a:fillRef>
+        <a:effectRef idx="1">
+          <a:scrgbClr r="0" g="0" b="0"/>
+        </a:effectRef>
+        <a:fontRef idx="minor">
+          <a:schemeClr val="lt1"/>
+        </a:fontRef>
+      </dsp:style>
+      <dsp:txBody>
+        <a:bodyPr spcFirstLastPara="0" vert="horz" wrap="square" lIns="35560" tIns="35560" rIns="35560" bIns="35560" numCol="1" spcCol="1270" anchor="ctr" anchorCtr="0">
+          <a:noAutofit/>
+        </a:bodyPr>
+        <a:lstStyle/>
+        <a:p>
+          <a:pPr marL="0" lvl="0" indent="0" algn="ctr" defTabSz="1244600">
+            <a:lnSpc>
+              <a:spcPct val="90000"/>
+            </a:lnSpc>
+            <a:spcBef>
+              <a:spcPct val="0"/>
+            </a:spcBef>
+            <a:spcAft>
+              <a:spcPct val="35000"/>
+            </a:spcAft>
+            <a:buNone/>
+          </a:pPr>
+          <a:r>
+            <a:rPr kumimoji="1" lang="ja-JP" altLang="en-US" sz="2800" b="1" i="0" kern="1200">
+              <a:latin typeface="Hiragino Sans W7" panose="020B0400000000000000" pitchFamily="34" charset="-128"/>
+              <a:ea typeface="Hiragino Sans W7" panose="020B0400000000000000" pitchFamily="34" charset="-128"/>
+            </a:rPr>
+            <a:t>局長</a:t>
+          </a:r>
+        </a:p>
+      </dsp:txBody>
+      <dsp:txXfrm>
+        <a:off x="2641395" y="1200149"/>
+        <a:ext cx="1025019" cy="1200149"/>
+      </dsp:txXfrm>
+    </dsp:sp>
+    <dsp:sp modelId="{76F31ED9-ED42-B941-AE6C-DCD1BE33515D}">
+      <dsp:nvSpPr>
+        <dsp:cNvPr id="0" name=""/>
+        <dsp:cNvSpPr/>
+      </dsp:nvSpPr>
+      <dsp:spPr>
+        <a:xfrm>
+          <a:off x="1971190" y="2400299"/>
+          <a:ext cx="2365428" cy="1200149"/>
+        </a:xfrm>
+        <a:prstGeom prst="trapezoid">
+          <a:avLst>
+            <a:gd name="adj" fmla="val 32849"/>
+          </a:avLst>
+        </a:prstGeom>
+        <a:solidFill>
+          <a:schemeClr val="accent3">
+            <a:shade val="50000"/>
+            <a:hueOff val="0"/>
+            <a:satOff val="0"/>
+            <a:lumOff val="17981"/>
+            <a:alphaOff val="0"/>
+          </a:schemeClr>
+        </a:solidFill>
+        <a:ln w="19050" cap="flat" cmpd="sng" algn="ctr">
+          <a:solidFill>
+            <a:schemeClr val="lt1">
+              <a:hueOff val="0"/>
+              <a:satOff val="0"/>
+              <a:lumOff val="0"/>
+              <a:alphaOff val="0"/>
+            </a:schemeClr>
+          </a:solidFill>
+          <a:prstDash val="solid"/>
+          <a:miter lim="800000"/>
+        </a:ln>
+        <a:effectLst/>
+      </dsp:spPr>
+      <dsp:style>
+        <a:lnRef idx="3">
+          <a:scrgbClr r="0" g="0" b="0"/>
+        </a:lnRef>
+        <a:fillRef idx="1">
+          <a:scrgbClr r="0" g="0" b="0"/>
+        </a:fillRef>
+        <a:effectRef idx="1">
+          <a:scrgbClr r="0" g="0" b="0"/>
+        </a:effectRef>
+        <a:fontRef idx="minor">
+          <a:schemeClr val="lt1"/>
+        </a:fontRef>
+      </dsp:style>
+      <dsp:txBody>
+        <a:bodyPr spcFirstLastPara="0" vert="horz" wrap="square" lIns="35560" tIns="35560" rIns="35560" bIns="35560" numCol="1" spcCol="1270" anchor="ctr" anchorCtr="0">
+          <a:noAutofit/>
+        </a:bodyPr>
+        <a:lstStyle/>
+        <a:p>
+          <a:pPr marL="0" lvl="0" indent="0" algn="ctr" defTabSz="1244600">
+            <a:lnSpc>
+              <a:spcPct val="90000"/>
+            </a:lnSpc>
+            <a:spcBef>
+              <a:spcPct val="0"/>
+            </a:spcBef>
+            <a:spcAft>
+              <a:spcPct val="35000"/>
+            </a:spcAft>
+            <a:buNone/>
+          </a:pPr>
+          <a:r>
+            <a:rPr kumimoji="1" lang="ja-JP" altLang="en-US" sz="2800" b="1" i="0" kern="1200">
+              <a:latin typeface="Hiragino Sans W7" panose="020B0400000000000000" pitchFamily="34" charset="-128"/>
+              <a:ea typeface="Hiragino Sans W7" panose="020B0400000000000000" pitchFamily="34" charset="-128"/>
+            </a:rPr>
+            <a:t>部長・審議官</a:t>
+          </a:r>
+        </a:p>
+      </dsp:txBody>
+      <dsp:txXfrm>
+        <a:off x="2385140" y="2400299"/>
+        <a:ext cx="1537528" cy="1200149"/>
+      </dsp:txXfrm>
+    </dsp:sp>
+    <dsp:sp modelId="{EDE32EC4-7A01-DA48-B7AB-30CA1147812B}">
+      <dsp:nvSpPr>
+        <dsp:cNvPr id="0" name=""/>
+        <dsp:cNvSpPr/>
+      </dsp:nvSpPr>
+      <dsp:spPr>
+        <a:xfrm>
+          <a:off x="1576952" y="3600449"/>
+          <a:ext cx="3153905" cy="1200149"/>
+        </a:xfrm>
+        <a:prstGeom prst="trapezoid">
+          <a:avLst>
+            <a:gd name="adj" fmla="val 32849"/>
+          </a:avLst>
+        </a:prstGeom>
+        <a:solidFill>
+          <a:schemeClr val="accent3">
+            <a:shade val="50000"/>
+            <a:hueOff val="0"/>
+            <a:satOff val="0"/>
+            <a:lumOff val="26971"/>
+            <a:alphaOff val="0"/>
+          </a:schemeClr>
+        </a:solidFill>
+        <a:ln w="19050" cap="flat" cmpd="sng" algn="ctr">
+          <a:solidFill>
+            <a:schemeClr val="lt1">
+              <a:hueOff val="0"/>
+              <a:satOff val="0"/>
+              <a:lumOff val="0"/>
+              <a:alphaOff val="0"/>
+            </a:schemeClr>
+          </a:solidFill>
+          <a:prstDash val="solid"/>
+          <a:miter lim="800000"/>
+        </a:ln>
+        <a:effectLst/>
+      </dsp:spPr>
+      <dsp:style>
+        <a:lnRef idx="3">
+          <a:scrgbClr r="0" g="0" b="0"/>
+        </a:lnRef>
+        <a:fillRef idx="1">
+          <a:scrgbClr r="0" g="0" b="0"/>
+        </a:fillRef>
+        <a:effectRef idx="1">
+          <a:scrgbClr r="0" g="0" b="0"/>
+        </a:effectRef>
+        <a:fontRef idx="minor">
+          <a:schemeClr val="lt1"/>
+        </a:fontRef>
+      </dsp:style>
+      <dsp:txBody>
+        <a:bodyPr spcFirstLastPara="0" vert="horz" wrap="square" lIns="35560" tIns="35560" rIns="35560" bIns="35560" numCol="1" spcCol="1270" anchor="ctr" anchorCtr="0">
+          <a:noAutofit/>
+        </a:bodyPr>
+        <a:lstStyle/>
+        <a:p>
+          <a:pPr marL="0" lvl="0" indent="0" algn="ctr" defTabSz="1244600">
+            <a:lnSpc>
+              <a:spcPct val="90000"/>
+            </a:lnSpc>
+            <a:spcBef>
+              <a:spcPct val="0"/>
+            </a:spcBef>
+            <a:spcAft>
+              <a:spcPct val="35000"/>
+            </a:spcAft>
+            <a:buNone/>
+          </a:pPr>
+          <a:r>
+            <a:rPr kumimoji="1" lang="ja-JP" altLang="en-US" sz="2800" b="1" i="0" kern="1200">
+              <a:latin typeface="Hiragino Sans W7" panose="020B0400000000000000" pitchFamily="34" charset="-128"/>
+              <a:ea typeface="Hiragino Sans W7" panose="020B0400000000000000" pitchFamily="34" charset="-128"/>
+            </a:rPr>
+            <a:t>課長</a:t>
+          </a:r>
+        </a:p>
+      </dsp:txBody>
+      <dsp:txXfrm>
+        <a:off x="2128885" y="3600449"/>
+        <a:ext cx="2050038" cy="1200149"/>
+      </dsp:txXfrm>
+    </dsp:sp>
+    <dsp:sp modelId="{25C66891-C093-3947-8F3E-D77010DF7ABC}">
+      <dsp:nvSpPr>
+        <dsp:cNvPr id="0" name=""/>
+        <dsp:cNvSpPr/>
+      </dsp:nvSpPr>
+      <dsp:spPr>
+        <a:xfrm>
+          <a:off x="1182714" y="4800599"/>
+          <a:ext cx="3942381" cy="1200149"/>
+        </a:xfrm>
+        <a:prstGeom prst="trapezoid">
+          <a:avLst>
+            <a:gd name="adj" fmla="val 32849"/>
+          </a:avLst>
+        </a:prstGeom>
+        <a:solidFill>
+          <a:schemeClr val="accent3">
+            <a:shade val="50000"/>
+            <a:hueOff val="0"/>
+            <a:satOff val="0"/>
+            <a:lumOff val="35962"/>
+            <a:alphaOff val="0"/>
+          </a:schemeClr>
+        </a:solidFill>
+        <a:ln w="19050" cap="flat" cmpd="sng" algn="ctr">
+          <a:solidFill>
+            <a:schemeClr val="lt1">
+              <a:hueOff val="0"/>
+              <a:satOff val="0"/>
+              <a:lumOff val="0"/>
+              <a:alphaOff val="0"/>
+            </a:schemeClr>
+          </a:solidFill>
+          <a:prstDash val="solid"/>
+          <a:miter lim="800000"/>
+        </a:ln>
+        <a:effectLst/>
+      </dsp:spPr>
+      <dsp:style>
+        <a:lnRef idx="3">
+          <a:scrgbClr r="0" g="0" b="0"/>
+        </a:lnRef>
+        <a:fillRef idx="1">
+          <a:scrgbClr r="0" g="0" b="0"/>
+        </a:fillRef>
+        <a:effectRef idx="1">
+          <a:scrgbClr r="0" g="0" b="0"/>
+        </a:effectRef>
+        <a:fontRef idx="minor">
+          <a:schemeClr val="lt1"/>
+        </a:fontRef>
+      </dsp:style>
+      <dsp:txBody>
+        <a:bodyPr spcFirstLastPara="0" vert="horz" wrap="square" lIns="35560" tIns="35560" rIns="35560" bIns="35560" numCol="1" spcCol="1270" anchor="ctr" anchorCtr="0">
+          <a:noAutofit/>
+        </a:bodyPr>
+        <a:lstStyle/>
+        <a:p>
+          <a:pPr marL="0" lvl="0" indent="0" algn="ctr" defTabSz="1244600">
+            <a:lnSpc>
+              <a:spcPct val="90000"/>
+            </a:lnSpc>
+            <a:spcBef>
+              <a:spcPct val="0"/>
+            </a:spcBef>
+            <a:spcAft>
+              <a:spcPct val="35000"/>
+            </a:spcAft>
+            <a:buNone/>
+          </a:pPr>
+          <a:r>
+            <a:rPr kumimoji="1" lang="ja-JP" altLang="en-US" sz="2800" b="1" i="0" kern="1200">
+              <a:latin typeface="Hiragino Sans W7" panose="020B0400000000000000" pitchFamily="34" charset="-128"/>
+              <a:ea typeface="Hiragino Sans W7" panose="020B0400000000000000" pitchFamily="34" charset="-128"/>
+            </a:rPr>
+            <a:t>室長・企画官</a:t>
+          </a:r>
+        </a:p>
+      </dsp:txBody>
+      <dsp:txXfrm>
+        <a:off x="1872631" y="4800599"/>
+        <a:ext cx="2562547" cy="1200149"/>
+      </dsp:txXfrm>
+    </dsp:sp>
+    <dsp:sp modelId="{8E12950F-896A-A643-809A-4B576B6FADE1}">
+      <dsp:nvSpPr>
+        <dsp:cNvPr id="0" name=""/>
+        <dsp:cNvSpPr/>
+      </dsp:nvSpPr>
+      <dsp:spPr>
+        <a:xfrm>
+          <a:off x="788476" y="6000749"/>
+          <a:ext cx="4730857" cy="1200149"/>
+        </a:xfrm>
+        <a:prstGeom prst="trapezoid">
+          <a:avLst>
+            <a:gd name="adj" fmla="val 32849"/>
+          </a:avLst>
+        </a:prstGeom>
+        <a:solidFill>
+          <a:schemeClr val="accent3">
+            <a:shade val="50000"/>
+            <a:hueOff val="0"/>
+            <a:satOff val="0"/>
+            <a:lumOff val="26971"/>
+            <a:alphaOff val="0"/>
+          </a:schemeClr>
+        </a:solidFill>
+        <a:ln w="19050" cap="flat" cmpd="sng" algn="ctr">
+          <a:solidFill>
+            <a:schemeClr val="lt1">
+              <a:hueOff val="0"/>
+              <a:satOff val="0"/>
+              <a:lumOff val="0"/>
+              <a:alphaOff val="0"/>
+            </a:schemeClr>
+          </a:solidFill>
+          <a:prstDash val="solid"/>
+          <a:miter lim="800000"/>
+        </a:ln>
+        <a:effectLst/>
+      </dsp:spPr>
+      <dsp:style>
+        <a:lnRef idx="3">
+          <a:scrgbClr r="0" g="0" b="0"/>
+        </a:lnRef>
+        <a:fillRef idx="1">
+          <a:scrgbClr r="0" g="0" b="0"/>
+        </a:fillRef>
+        <a:effectRef idx="1">
+          <a:scrgbClr r="0" g="0" b="0"/>
+        </a:effectRef>
+        <a:fontRef idx="minor">
+          <a:schemeClr val="lt1"/>
+        </a:fontRef>
+      </dsp:style>
+      <dsp:txBody>
+        <a:bodyPr spcFirstLastPara="0" vert="horz" wrap="square" lIns="35560" tIns="35560" rIns="35560" bIns="35560" numCol="1" spcCol="1270" anchor="ctr" anchorCtr="0">
+          <a:noAutofit/>
+        </a:bodyPr>
+        <a:lstStyle/>
+        <a:p>
+          <a:pPr marL="0" lvl="0" indent="0" algn="ctr" defTabSz="1244600">
+            <a:lnSpc>
+              <a:spcPct val="90000"/>
+            </a:lnSpc>
+            <a:spcBef>
+              <a:spcPct val="0"/>
+            </a:spcBef>
+            <a:spcAft>
+              <a:spcPct val="35000"/>
+            </a:spcAft>
+            <a:buNone/>
+          </a:pPr>
+          <a:r>
+            <a:rPr kumimoji="1" lang="ja-JP" altLang="en-US" sz="2800" b="1" i="0" kern="1200">
+              <a:latin typeface="Hiragino Sans W7" panose="020B0400000000000000" pitchFamily="34" charset="-128"/>
+              <a:ea typeface="Hiragino Sans W7" panose="020B0400000000000000" pitchFamily="34" charset="-128"/>
+            </a:rPr>
+            <a:t>課長補佐</a:t>
+          </a:r>
+        </a:p>
+      </dsp:txBody>
+      <dsp:txXfrm>
+        <a:off x="1616376" y="6000749"/>
+        <a:ext cx="3075057" cy="1200149"/>
+      </dsp:txXfrm>
+    </dsp:sp>
+    <dsp:sp modelId="{F1364463-D7DE-E24B-A241-45501851B3AA}">
+      <dsp:nvSpPr>
+        <dsp:cNvPr id="0" name=""/>
+        <dsp:cNvSpPr/>
+      </dsp:nvSpPr>
+      <dsp:spPr>
+        <a:xfrm>
+          <a:off x="394238" y="7200899"/>
+          <a:ext cx="5519333" cy="1200149"/>
+        </a:xfrm>
+        <a:prstGeom prst="trapezoid">
+          <a:avLst>
+            <a:gd name="adj" fmla="val 32849"/>
+          </a:avLst>
+        </a:prstGeom>
+        <a:solidFill>
+          <a:schemeClr val="accent3">
+            <a:shade val="50000"/>
+            <a:hueOff val="0"/>
+            <a:satOff val="0"/>
+            <a:lumOff val="17981"/>
+            <a:alphaOff val="0"/>
+          </a:schemeClr>
+        </a:solidFill>
+        <a:ln w="19050" cap="flat" cmpd="sng" algn="ctr">
+          <a:solidFill>
+            <a:schemeClr val="lt1">
+              <a:hueOff val="0"/>
+              <a:satOff val="0"/>
+              <a:lumOff val="0"/>
+              <a:alphaOff val="0"/>
+            </a:schemeClr>
+          </a:solidFill>
+          <a:prstDash val="solid"/>
+          <a:miter lim="800000"/>
+        </a:ln>
+        <a:effectLst/>
+      </dsp:spPr>
+      <dsp:style>
+        <a:lnRef idx="3">
+          <a:scrgbClr r="0" g="0" b="0"/>
+        </a:lnRef>
+        <a:fillRef idx="1">
+          <a:scrgbClr r="0" g="0" b="0"/>
+        </a:fillRef>
+        <a:effectRef idx="1">
+          <a:scrgbClr r="0" g="0" b="0"/>
+        </a:effectRef>
+        <a:fontRef idx="minor">
+          <a:schemeClr val="lt1"/>
+        </a:fontRef>
+      </dsp:style>
+      <dsp:txBody>
+        <a:bodyPr spcFirstLastPara="0" vert="horz" wrap="square" lIns="35560" tIns="35560" rIns="35560" bIns="35560" numCol="1" spcCol="1270" anchor="ctr" anchorCtr="0">
+          <a:noAutofit/>
+        </a:bodyPr>
+        <a:lstStyle/>
+        <a:p>
+          <a:pPr marL="0" lvl="0" indent="0" algn="ctr" defTabSz="1244600">
+            <a:lnSpc>
+              <a:spcPct val="90000"/>
+            </a:lnSpc>
+            <a:spcBef>
+              <a:spcPct val="0"/>
+            </a:spcBef>
+            <a:spcAft>
+              <a:spcPct val="35000"/>
+            </a:spcAft>
+            <a:buNone/>
+          </a:pPr>
+          <a:r>
+            <a:rPr kumimoji="1" lang="ja-JP" altLang="en-US" sz="2800" b="1" i="0" kern="1200">
+              <a:latin typeface="Hiragino Sans W7" panose="020B0400000000000000" pitchFamily="34" charset="-128"/>
+              <a:ea typeface="Hiragino Sans W7" panose="020B0400000000000000" pitchFamily="34" charset="-128"/>
+            </a:rPr>
+            <a:t>係長</a:t>
+          </a:r>
+        </a:p>
+      </dsp:txBody>
+      <dsp:txXfrm>
+        <a:off x="1360121" y="7200899"/>
+        <a:ext cx="3587566" cy="1200149"/>
+      </dsp:txXfrm>
+    </dsp:sp>
+    <dsp:sp modelId="{AF212A41-9690-F546-B416-57C98C898A1D}">
+      <dsp:nvSpPr>
+        <dsp:cNvPr id="0" name=""/>
+        <dsp:cNvSpPr/>
+      </dsp:nvSpPr>
+      <dsp:spPr>
+        <a:xfrm>
+          <a:off x="0" y="8401049"/>
+          <a:ext cx="6307810" cy="1200149"/>
+        </a:xfrm>
+        <a:prstGeom prst="trapezoid">
+          <a:avLst>
+            <a:gd name="adj" fmla="val 32849"/>
+          </a:avLst>
+        </a:prstGeom>
+        <a:solidFill>
+          <a:schemeClr val="accent3">
+            <a:shade val="50000"/>
+            <a:hueOff val="0"/>
+            <a:satOff val="0"/>
+            <a:lumOff val="8990"/>
+            <a:alphaOff val="0"/>
+          </a:schemeClr>
+        </a:solidFill>
+        <a:ln w="19050" cap="flat" cmpd="sng" algn="ctr">
+          <a:solidFill>
+            <a:schemeClr val="lt1">
+              <a:hueOff val="0"/>
+              <a:satOff val="0"/>
+              <a:lumOff val="0"/>
+              <a:alphaOff val="0"/>
+            </a:schemeClr>
+          </a:solidFill>
+          <a:prstDash val="solid"/>
+          <a:miter lim="800000"/>
+        </a:ln>
+        <a:effectLst/>
+      </dsp:spPr>
+      <dsp:style>
+        <a:lnRef idx="3">
+          <a:scrgbClr r="0" g="0" b="0"/>
+        </a:lnRef>
+        <a:fillRef idx="1">
+          <a:scrgbClr r="0" g="0" b="0"/>
+        </a:fillRef>
+        <a:effectRef idx="1">
+          <a:scrgbClr r="0" g="0" b="0"/>
+        </a:effectRef>
+        <a:fontRef idx="minor">
+          <a:schemeClr val="lt1"/>
+        </a:fontRef>
+      </dsp:style>
+      <dsp:txBody>
+        <a:bodyPr spcFirstLastPara="0" vert="horz" wrap="square" lIns="35560" tIns="35560" rIns="35560" bIns="35560" numCol="1" spcCol="1270" anchor="ctr" anchorCtr="0">
+          <a:noAutofit/>
+        </a:bodyPr>
+        <a:lstStyle/>
+        <a:p>
+          <a:pPr marL="0" lvl="0" indent="0" algn="ctr" defTabSz="1244600">
+            <a:lnSpc>
+              <a:spcPct val="90000"/>
+            </a:lnSpc>
+            <a:spcBef>
+              <a:spcPct val="0"/>
+            </a:spcBef>
+            <a:spcAft>
+              <a:spcPct val="35000"/>
+            </a:spcAft>
+            <a:buNone/>
+          </a:pPr>
+          <a:r>
+            <a:rPr kumimoji="1" lang="ja-JP" altLang="en-US" sz="2800" b="1" i="0" kern="1200">
+              <a:latin typeface="Hiragino Sans W7" panose="020B0400000000000000" pitchFamily="34" charset="-128"/>
+              <a:ea typeface="Hiragino Sans W7" panose="020B0400000000000000" pitchFamily="34" charset="-128"/>
+            </a:rPr>
+            <a:t>係員</a:t>
+          </a:r>
+        </a:p>
+      </dsp:txBody>
+      <dsp:txXfrm>
+        <a:off x="1103866" y="8401049"/>
+        <a:ext cx="4100076" cy="1200149"/>
+      </dsp:txXfrm>
+    </dsp:sp>
+  </dsp:spTree>
+</dsp:drawing>
+</file>
+
+<file path=ppt/diagrams/drawing2.xml><?xml version="1.0" encoding="utf-8"?>
+<dsp:drawing xmlns:dgm="http://schemas.openxmlformats.org/drawingml/2006/diagram" xmlns:dsp="http://schemas.microsoft.com/office/drawing/2008/diagram" xmlns:a="http://schemas.openxmlformats.org/drawingml/2006/main">
+  <dsp:spTree>
+    <dsp:nvGrpSpPr>
+      <dsp:cNvPr id="0" name=""/>
+      <dsp:cNvGrpSpPr/>
+    </dsp:nvGrpSpPr>
+    <dsp:grpSpPr/>
+    <dsp:sp modelId="{1C19F794-3B38-1C44-ABC1-E6A1B91F38A9}">
+      <dsp:nvSpPr>
+        <dsp:cNvPr id="0" name=""/>
+        <dsp:cNvSpPr/>
+      </dsp:nvSpPr>
+      <dsp:spPr>
+        <a:xfrm>
+          <a:off x="5600699" y="0"/>
+          <a:ext cx="1600199" cy="1200149"/>
+        </a:xfrm>
+        <a:prstGeom prst="trapezoid">
+          <a:avLst>
+            <a:gd name="adj" fmla="val 66667"/>
+          </a:avLst>
+        </a:prstGeom>
+        <a:solidFill>
+          <a:schemeClr val="accent3">
+            <a:shade val="50000"/>
+            <a:hueOff val="0"/>
+            <a:satOff val="0"/>
+            <a:lumOff val="0"/>
+            <a:alphaOff val="0"/>
+          </a:schemeClr>
+        </a:solidFill>
+        <a:ln w="19050" cap="flat" cmpd="sng" algn="ctr">
+          <a:solidFill>
+            <a:schemeClr val="lt1">
+              <a:hueOff val="0"/>
+              <a:satOff val="0"/>
+              <a:lumOff val="0"/>
+              <a:alphaOff val="0"/>
+            </a:schemeClr>
+          </a:solidFill>
+          <a:prstDash val="solid"/>
+          <a:miter lim="800000"/>
+        </a:ln>
+        <a:effectLst/>
+      </dsp:spPr>
+      <dsp:style>
+        <a:lnRef idx="3">
+          <a:scrgbClr r="0" g="0" b="0"/>
+        </a:lnRef>
+        <a:fillRef idx="1">
+          <a:scrgbClr r="0" g="0" b="0"/>
+        </a:fillRef>
+        <a:effectRef idx="1">
+          <a:scrgbClr r="0" g="0" b="0"/>
+        </a:effectRef>
+        <a:fontRef idx="minor">
+          <a:schemeClr val="lt1"/>
+        </a:fontRef>
+      </dsp:style>
+      <dsp:txBody>
+        <a:bodyPr spcFirstLastPara="0" vert="horz" wrap="square" lIns="35560" tIns="35560" rIns="35560" bIns="35560" numCol="1" spcCol="1270" anchor="ctr" anchorCtr="0">
+          <a:noAutofit/>
+        </a:bodyPr>
+        <a:lstStyle/>
+        <a:p>
+          <a:pPr marL="0" lvl="0" indent="0" algn="ctr" defTabSz="1244600">
+            <a:lnSpc>
+              <a:spcPct val="90000"/>
+            </a:lnSpc>
+            <a:spcBef>
+              <a:spcPct val="0"/>
+            </a:spcBef>
+            <a:spcAft>
+              <a:spcPct val="35000"/>
+            </a:spcAft>
+            <a:buNone/>
+          </a:pPr>
+          <a:r>
+            <a:rPr kumimoji="1" lang="ja-JP" altLang="en-US" sz="2800" b="1" i="0" kern="1200">
+              <a:latin typeface="Hiragino Sans W7" panose="020B0400000000000000" pitchFamily="34" charset="-128"/>
+              <a:ea typeface="Hiragino Sans W7" panose="020B0400000000000000" pitchFamily="34" charset="-128"/>
+            </a:rPr>
+            <a:t>事務次官</a:t>
+          </a:r>
+        </a:p>
+      </dsp:txBody>
+      <dsp:txXfrm>
+        <a:off x="5600699" y="0"/>
+        <a:ext cx="1600199" cy="1200149"/>
+      </dsp:txXfrm>
+    </dsp:sp>
+    <dsp:sp modelId="{138958A9-A30B-A645-BEF4-EC92188C90CE}">
+      <dsp:nvSpPr>
+        <dsp:cNvPr id="0" name=""/>
+        <dsp:cNvSpPr/>
+      </dsp:nvSpPr>
+      <dsp:spPr>
+        <a:xfrm>
+          <a:off x="4800599" y="1200149"/>
+          <a:ext cx="3200399" cy="1200149"/>
+        </a:xfrm>
+        <a:prstGeom prst="trapezoid">
+          <a:avLst>
+            <a:gd name="adj" fmla="val 66667"/>
+          </a:avLst>
+        </a:prstGeom>
+        <a:solidFill>
+          <a:schemeClr val="accent3">
+            <a:shade val="50000"/>
+            <a:hueOff val="0"/>
+            <a:satOff val="0"/>
+            <a:lumOff val="8990"/>
+            <a:alphaOff val="0"/>
+          </a:schemeClr>
+        </a:solidFill>
+        <a:ln w="19050" cap="flat" cmpd="sng" algn="ctr">
+          <a:solidFill>
+            <a:schemeClr val="lt1">
+              <a:hueOff val="0"/>
+              <a:satOff val="0"/>
+              <a:lumOff val="0"/>
+              <a:alphaOff val="0"/>
+            </a:schemeClr>
+          </a:solidFill>
+          <a:prstDash val="solid"/>
+          <a:miter lim="800000"/>
+        </a:ln>
+        <a:effectLst/>
+      </dsp:spPr>
+      <dsp:style>
+        <a:lnRef idx="3">
+          <a:scrgbClr r="0" g="0" b="0"/>
+        </a:lnRef>
+        <a:fillRef idx="1">
+          <a:scrgbClr r="0" g="0" b="0"/>
+        </a:fillRef>
+        <a:effectRef idx="1">
+          <a:scrgbClr r="0" g="0" b="0"/>
+        </a:effectRef>
+        <a:fontRef idx="minor">
+          <a:schemeClr val="lt1"/>
+        </a:fontRef>
+      </dsp:style>
+      <dsp:txBody>
+        <a:bodyPr spcFirstLastPara="0" vert="horz" wrap="square" lIns="35560" tIns="35560" rIns="35560" bIns="35560" numCol="1" spcCol="1270" anchor="ctr" anchorCtr="0">
+          <a:noAutofit/>
+        </a:bodyPr>
+        <a:lstStyle/>
+        <a:p>
+          <a:pPr marL="0" lvl="0" indent="0" algn="ctr" defTabSz="1244600">
+            <a:lnSpc>
+              <a:spcPct val="90000"/>
+            </a:lnSpc>
+            <a:spcBef>
+              <a:spcPct val="0"/>
+            </a:spcBef>
+            <a:spcAft>
+              <a:spcPct val="35000"/>
+            </a:spcAft>
+            <a:buNone/>
+          </a:pPr>
+          <a:r>
+            <a:rPr kumimoji="1" lang="ja-JP" altLang="en-US" sz="2800" b="1" i="0" kern="1200">
+              <a:latin typeface="Hiragino Sans W7" panose="020B0400000000000000" pitchFamily="34" charset="-128"/>
+              <a:ea typeface="Hiragino Sans W7" panose="020B0400000000000000" pitchFamily="34" charset="-128"/>
+            </a:rPr>
+            <a:t>局長</a:t>
+          </a:r>
+        </a:p>
+      </dsp:txBody>
+      <dsp:txXfrm>
+        <a:off x="5360669" y="1200149"/>
+        <a:ext cx="2080259" cy="1200149"/>
+      </dsp:txXfrm>
+    </dsp:sp>
+    <dsp:sp modelId="{76F31ED9-ED42-B941-AE6C-DCD1BE33515D}">
+      <dsp:nvSpPr>
+        <dsp:cNvPr id="0" name=""/>
+        <dsp:cNvSpPr/>
+      </dsp:nvSpPr>
+      <dsp:spPr>
+        <a:xfrm>
+          <a:off x="4000499" y="2400299"/>
+          <a:ext cx="4800599" cy="1200149"/>
+        </a:xfrm>
+        <a:prstGeom prst="trapezoid">
+          <a:avLst>
+            <a:gd name="adj" fmla="val 66667"/>
+          </a:avLst>
+        </a:prstGeom>
+        <a:solidFill>
+          <a:schemeClr val="accent3">
+            <a:shade val="50000"/>
+            <a:hueOff val="0"/>
+            <a:satOff val="0"/>
+            <a:lumOff val="17981"/>
+            <a:alphaOff val="0"/>
+          </a:schemeClr>
+        </a:solidFill>
+        <a:ln w="19050" cap="flat" cmpd="sng" algn="ctr">
+          <a:solidFill>
+            <a:schemeClr val="lt1">
+              <a:hueOff val="0"/>
+              <a:satOff val="0"/>
+              <a:lumOff val="0"/>
+              <a:alphaOff val="0"/>
+            </a:schemeClr>
+          </a:solidFill>
+          <a:prstDash val="solid"/>
+          <a:miter lim="800000"/>
+        </a:ln>
+        <a:effectLst/>
+      </dsp:spPr>
+      <dsp:style>
+        <a:lnRef idx="3">
+          <a:scrgbClr r="0" g="0" b="0"/>
+        </a:lnRef>
+        <a:fillRef idx="1">
+          <a:scrgbClr r="0" g="0" b="0"/>
+        </a:fillRef>
+        <a:effectRef idx="1">
+          <a:scrgbClr r="0" g="0" b="0"/>
+        </a:effectRef>
+        <a:fontRef idx="minor">
+          <a:schemeClr val="lt1"/>
+        </a:fontRef>
+      </dsp:style>
+      <dsp:txBody>
+        <a:bodyPr spcFirstLastPara="0" vert="horz" wrap="square" lIns="35560" tIns="35560" rIns="35560" bIns="35560" numCol="1" spcCol="1270" anchor="ctr" anchorCtr="0">
+          <a:noAutofit/>
+        </a:bodyPr>
+        <a:lstStyle/>
+        <a:p>
+          <a:pPr marL="0" lvl="0" indent="0" algn="ctr" defTabSz="1244600">
+            <a:lnSpc>
+              <a:spcPct val="90000"/>
+            </a:lnSpc>
+            <a:spcBef>
+              <a:spcPct val="0"/>
+            </a:spcBef>
+            <a:spcAft>
+              <a:spcPct val="35000"/>
+            </a:spcAft>
+            <a:buNone/>
+          </a:pPr>
+          <a:r>
+            <a:rPr kumimoji="1" lang="ja-JP" altLang="en-US" sz="2800" b="1" i="0" kern="1200">
+              <a:latin typeface="Hiragino Sans W7" panose="020B0400000000000000" pitchFamily="34" charset="-128"/>
+              <a:ea typeface="Hiragino Sans W7" panose="020B0400000000000000" pitchFamily="34" charset="-128"/>
+            </a:rPr>
+            <a:t>部長・審議官</a:t>
+          </a:r>
+        </a:p>
+      </dsp:txBody>
+      <dsp:txXfrm>
+        <a:off x="4840604" y="2400299"/>
+        <a:ext cx="3120389" cy="1200149"/>
+      </dsp:txXfrm>
+    </dsp:sp>
+    <dsp:sp modelId="{EDE32EC4-7A01-DA48-B7AB-30CA1147812B}">
+      <dsp:nvSpPr>
+        <dsp:cNvPr id="0" name=""/>
+        <dsp:cNvSpPr/>
+      </dsp:nvSpPr>
+      <dsp:spPr>
+        <a:xfrm>
+          <a:off x="3200399" y="3600449"/>
+          <a:ext cx="6400799" cy="1200149"/>
+        </a:xfrm>
+        <a:prstGeom prst="trapezoid">
+          <a:avLst>
+            <a:gd name="adj" fmla="val 66667"/>
+          </a:avLst>
+        </a:prstGeom>
+        <a:solidFill>
+          <a:schemeClr val="accent3">
+            <a:shade val="50000"/>
+            <a:hueOff val="0"/>
+            <a:satOff val="0"/>
+            <a:lumOff val="26971"/>
+            <a:alphaOff val="0"/>
+          </a:schemeClr>
+        </a:solidFill>
+        <a:ln w="19050" cap="flat" cmpd="sng" algn="ctr">
+          <a:solidFill>
+            <a:schemeClr val="lt1">
+              <a:hueOff val="0"/>
+              <a:satOff val="0"/>
+              <a:lumOff val="0"/>
+              <a:alphaOff val="0"/>
+            </a:schemeClr>
+          </a:solidFill>
+          <a:prstDash val="solid"/>
+          <a:miter lim="800000"/>
+        </a:ln>
+        <a:effectLst/>
+      </dsp:spPr>
+      <dsp:style>
+        <a:lnRef idx="3">
+          <a:scrgbClr r="0" g="0" b="0"/>
+        </a:lnRef>
+        <a:fillRef idx="1">
+          <a:scrgbClr r="0" g="0" b="0"/>
+        </a:fillRef>
+        <a:effectRef idx="1">
+          <a:scrgbClr r="0" g="0" b="0"/>
+        </a:effectRef>
+        <a:fontRef idx="minor">
+          <a:schemeClr val="lt1"/>
+        </a:fontRef>
+      </dsp:style>
+      <dsp:txBody>
+        <a:bodyPr spcFirstLastPara="0" vert="horz" wrap="square" lIns="35560" tIns="35560" rIns="35560" bIns="35560" numCol="1" spcCol="1270" anchor="ctr" anchorCtr="0">
+          <a:noAutofit/>
+        </a:bodyPr>
+        <a:lstStyle/>
+        <a:p>
+          <a:pPr marL="0" lvl="0" indent="0" algn="ctr" defTabSz="1244600">
+            <a:lnSpc>
+              <a:spcPct val="90000"/>
+            </a:lnSpc>
+            <a:spcBef>
+              <a:spcPct val="0"/>
+            </a:spcBef>
+            <a:spcAft>
+              <a:spcPct val="35000"/>
+            </a:spcAft>
+            <a:buNone/>
+          </a:pPr>
+          <a:r>
+            <a:rPr kumimoji="1" lang="ja-JP" altLang="en-US" sz="2800" b="1" i="0" kern="1200">
+              <a:latin typeface="Hiragino Sans W7" panose="020B0400000000000000" pitchFamily="34" charset="-128"/>
+              <a:ea typeface="Hiragino Sans W7" panose="020B0400000000000000" pitchFamily="34" charset="-128"/>
+            </a:rPr>
+            <a:t>課長</a:t>
+          </a:r>
+        </a:p>
+      </dsp:txBody>
+      <dsp:txXfrm>
+        <a:off x="4320539" y="3600449"/>
+        <a:ext cx="4160519" cy="1200149"/>
+      </dsp:txXfrm>
+    </dsp:sp>
+    <dsp:sp modelId="{25C66891-C093-3947-8F3E-D77010DF7ABC}">
+      <dsp:nvSpPr>
+        <dsp:cNvPr id="0" name=""/>
+        <dsp:cNvSpPr/>
+      </dsp:nvSpPr>
+      <dsp:spPr>
+        <a:xfrm>
+          <a:off x="2400299" y="4800599"/>
+          <a:ext cx="8000999" cy="1200149"/>
+        </a:xfrm>
+        <a:prstGeom prst="trapezoid">
+          <a:avLst>
+            <a:gd name="adj" fmla="val 66667"/>
+          </a:avLst>
+        </a:prstGeom>
+        <a:solidFill>
+          <a:schemeClr val="accent3">
+            <a:shade val="50000"/>
+            <a:hueOff val="0"/>
+            <a:satOff val="0"/>
+            <a:lumOff val="35962"/>
+            <a:alphaOff val="0"/>
+          </a:schemeClr>
+        </a:solidFill>
+        <a:ln w="19050" cap="flat" cmpd="sng" algn="ctr">
+          <a:solidFill>
+            <a:schemeClr val="lt1">
+              <a:hueOff val="0"/>
+              <a:satOff val="0"/>
+              <a:lumOff val="0"/>
+              <a:alphaOff val="0"/>
+            </a:schemeClr>
+          </a:solidFill>
+          <a:prstDash val="solid"/>
+          <a:miter lim="800000"/>
+        </a:ln>
+        <a:effectLst/>
+      </dsp:spPr>
+      <dsp:style>
+        <a:lnRef idx="3">
+          <a:scrgbClr r="0" g="0" b="0"/>
+        </a:lnRef>
+        <a:fillRef idx="1">
+          <a:scrgbClr r="0" g="0" b="0"/>
+        </a:fillRef>
+        <a:effectRef idx="1">
+          <a:scrgbClr r="0" g="0" b="0"/>
+        </a:effectRef>
+        <a:fontRef idx="minor">
+          <a:schemeClr val="lt1"/>
+        </a:fontRef>
+      </dsp:style>
+      <dsp:txBody>
+        <a:bodyPr spcFirstLastPara="0" vert="horz" wrap="square" lIns="35560" tIns="35560" rIns="35560" bIns="35560" numCol="1" spcCol="1270" anchor="ctr" anchorCtr="0">
+          <a:noAutofit/>
+        </a:bodyPr>
+        <a:lstStyle/>
+        <a:p>
+          <a:pPr marL="0" lvl="0" indent="0" algn="ctr" defTabSz="1244600">
+            <a:lnSpc>
+              <a:spcPct val="90000"/>
+            </a:lnSpc>
+            <a:spcBef>
+              <a:spcPct val="0"/>
+            </a:spcBef>
+            <a:spcAft>
+              <a:spcPct val="35000"/>
+            </a:spcAft>
+            <a:buNone/>
+          </a:pPr>
+          <a:r>
+            <a:rPr kumimoji="1" lang="ja-JP" altLang="en-US" sz="2800" b="1" i="0" kern="1200">
+              <a:latin typeface="Hiragino Sans W7" panose="020B0400000000000000" pitchFamily="34" charset="-128"/>
+              <a:ea typeface="Hiragino Sans W7" panose="020B0400000000000000" pitchFamily="34" charset="-128"/>
+            </a:rPr>
+            <a:t>室長・企画官</a:t>
+          </a:r>
+        </a:p>
+      </dsp:txBody>
+      <dsp:txXfrm>
+        <a:off x="3800474" y="4800599"/>
+        <a:ext cx="5200649" cy="1200149"/>
+      </dsp:txXfrm>
+    </dsp:sp>
+    <dsp:sp modelId="{8E12950F-896A-A643-809A-4B576B6FADE1}">
+      <dsp:nvSpPr>
+        <dsp:cNvPr id="0" name=""/>
+        <dsp:cNvSpPr/>
+      </dsp:nvSpPr>
+      <dsp:spPr>
+        <a:xfrm>
+          <a:off x="1600199" y="6000749"/>
+          <a:ext cx="9601199" cy="1200149"/>
+        </a:xfrm>
+        <a:prstGeom prst="trapezoid">
+          <a:avLst>
+            <a:gd name="adj" fmla="val 66667"/>
+          </a:avLst>
+        </a:prstGeom>
+        <a:solidFill>
+          <a:schemeClr val="accent3">
+            <a:shade val="50000"/>
+            <a:hueOff val="0"/>
+            <a:satOff val="0"/>
+            <a:lumOff val="26971"/>
+            <a:alphaOff val="0"/>
+          </a:schemeClr>
+        </a:solidFill>
+        <a:ln w="19050" cap="flat" cmpd="sng" algn="ctr">
+          <a:solidFill>
+            <a:schemeClr val="lt1">
+              <a:hueOff val="0"/>
+              <a:satOff val="0"/>
+              <a:lumOff val="0"/>
+              <a:alphaOff val="0"/>
+            </a:schemeClr>
+          </a:solidFill>
+          <a:prstDash val="solid"/>
+          <a:miter lim="800000"/>
+        </a:ln>
+        <a:effectLst/>
+      </dsp:spPr>
+      <dsp:style>
+        <a:lnRef idx="3">
+          <a:scrgbClr r="0" g="0" b="0"/>
+        </a:lnRef>
+        <a:fillRef idx="1">
+          <a:scrgbClr r="0" g="0" b="0"/>
+        </a:fillRef>
+        <a:effectRef idx="1">
+          <a:scrgbClr r="0" g="0" b="0"/>
+        </a:effectRef>
+        <a:fontRef idx="minor">
+          <a:schemeClr val="lt1"/>
+        </a:fontRef>
+      </dsp:style>
+      <dsp:txBody>
+        <a:bodyPr spcFirstLastPara="0" vert="horz" wrap="square" lIns="35560" tIns="35560" rIns="35560" bIns="35560" numCol="1" spcCol="1270" anchor="ctr" anchorCtr="0">
+          <a:noAutofit/>
+        </a:bodyPr>
+        <a:lstStyle/>
+        <a:p>
+          <a:pPr marL="0" lvl="0" indent="0" algn="ctr" defTabSz="1244600">
+            <a:lnSpc>
+              <a:spcPct val="90000"/>
+            </a:lnSpc>
+            <a:spcBef>
+              <a:spcPct val="0"/>
+            </a:spcBef>
+            <a:spcAft>
+              <a:spcPct val="35000"/>
+            </a:spcAft>
+            <a:buNone/>
+          </a:pPr>
+          <a:r>
+            <a:rPr kumimoji="1" lang="ja-JP" altLang="en-US" sz="2800" b="1" i="0" kern="1200">
+              <a:latin typeface="Hiragino Sans W7" panose="020B0400000000000000" pitchFamily="34" charset="-128"/>
+              <a:ea typeface="Hiragino Sans W7" panose="020B0400000000000000" pitchFamily="34" charset="-128"/>
+            </a:rPr>
+            <a:t>課長補佐</a:t>
+          </a:r>
+        </a:p>
+      </dsp:txBody>
+      <dsp:txXfrm>
+        <a:off x="3280409" y="6000749"/>
+        <a:ext cx="6240779" cy="1200149"/>
+      </dsp:txXfrm>
+    </dsp:sp>
+    <dsp:sp modelId="{F1364463-D7DE-E24B-A241-45501851B3AA}">
+      <dsp:nvSpPr>
+        <dsp:cNvPr id="0" name=""/>
+        <dsp:cNvSpPr/>
+      </dsp:nvSpPr>
+      <dsp:spPr>
+        <a:xfrm>
+          <a:off x="800099" y="7200899"/>
+          <a:ext cx="11201399" cy="1200149"/>
+        </a:xfrm>
+        <a:prstGeom prst="trapezoid">
+          <a:avLst>
+            <a:gd name="adj" fmla="val 66667"/>
+          </a:avLst>
+        </a:prstGeom>
+        <a:solidFill>
+          <a:schemeClr val="accent3">
+            <a:shade val="50000"/>
+            <a:hueOff val="0"/>
+            <a:satOff val="0"/>
+            <a:lumOff val="17981"/>
+            <a:alphaOff val="0"/>
+          </a:schemeClr>
+        </a:solidFill>
+        <a:ln w="19050" cap="flat" cmpd="sng" algn="ctr">
+          <a:solidFill>
+            <a:schemeClr val="lt1">
+              <a:hueOff val="0"/>
+              <a:satOff val="0"/>
+              <a:lumOff val="0"/>
+              <a:alphaOff val="0"/>
+            </a:schemeClr>
+          </a:solidFill>
+          <a:prstDash val="solid"/>
+          <a:miter lim="800000"/>
+        </a:ln>
+        <a:effectLst/>
+      </dsp:spPr>
+      <dsp:style>
+        <a:lnRef idx="3">
+          <a:scrgbClr r="0" g="0" b="0"/>
+        </a:lnRef>
+        <a:fillRef idx="1">
+          <a:scrgbClr r="0" g="0" b="0"/>
+        </a:fillRef>
+        <a:effectRef idx="1">
+          <a:scrgbClr r="0" g="0" b="0"/>
+        </a:effectRef>
+        <a:fontRef idx="minor">
+          <a:schemeClr val="lt1"/>
+        </a:fontRef>
+      </dsp:style>
+      <dsp:txBody>
+        <a:bodyPr spcFirstLastPara="0" vert="horz" wrap="square" lIns="35560" tIns="35560" rIns="35560" bIns="35560" numCol="1" spcCol="1270" anchor="ctr" anchorCtr="0">
+          <a:noAutofit/>
+        </a:bodyPr>
+        <a:lstStyle/>
+        <a:p>
+          <a:pPr marL="0" lvl="0" indent="0" algn="ctr" defTabSz="1244600">
+            <a:lnSpc>
+              <a:spcPct val="90000"/>
+            </a:lnSpc>
+            <a:spcBef>
+              <a:spcPct val="0"/>
+            </a:spcBef>
+            <a:spcAft>
+              <a:spcPct val="35000"/>
+            </a:spcAft>
+            <a:buNone/>
+          </a:pPr>
+          <a:r>
+            <a:rPr kumimoji="1" lang="ja-JP" altLang="en-US" sz="2800" b="1" i="0" kern="1200">
+              <a:latin typeface="Hiragino Sans W7" panose="020B0400000000000000" pitchFamily="34" charset="-128"/>
+              <a:ea typeface="Hiragino Sans W7" panose="020B0400000000000000" pitchFamily="34" charset="-128"/>
+            </a:rPr>
+            <a:t>係長</a:t>
+          </a:r>
+        </a:p>
+      </dsp:txBody>
+      <dsp:txXfrm>
+        <a:off x="2760344" y="7200899"/>
+        <a:ext cx="7280909" cy="1200149"/>
+      </dsp:txXfrm>
+    </dsp:sp>
+    <dsp:sp modelId="{AF212A41-9690-F546-B416-57C98C898A1D}">
+      <dsp:nvSpPr>
+        <dsp:cNvPr id="0" name=""/>
+        <dsp:cNvSpPr/>
+      </dsp:nvSpPr>
+      <dsp:spPr>
+        <a:xfrm>
+          <a:off x="0" y="8401049"/>
+          <a:ext cx="12801599" cy="1200149"/>
+        </a:xfrm>
+        <a:prstGeom prst="trapezoid">
+          <a:avLst>
+            <a:gd name="adj" fmla="val 66667"/>
+          </a:avLst>
+        </a:prstGeom>
+        <a:solidFill>
+          <a:schemeClr val="accent3">
+            <a:shade val="50000"/>
+            <a:hueOff val="0"/>
+            <a:satOff val="0"/>
+            <a:lumOff val="8990"/>
+            <a:alphaOff val="0"/>
+          </a:schemeClr>
+        </a:solidFill>
+        <a:ln w="19050" cap="flat" cmpd="sng" algn="ctr">
+          <a:solidFill>
+            <a:schemeClr val="lt1">
+              <a:hueOff val="0"/>
+              <a:satOff val="0"/>
+              <a:lumOff val="0"/>
+              <a:alphaOff val="0"/>
+            </a:schemeClr>
+          </a:solidFill>
+          <a:prstDash val="solid"/>
+          <a:miter lim="800000"/>
+        </a:ln>
+        <a:effectLst/>
+      </dsp:spPr>
+      <dsp:style>
+        <a:lnRef idx="3">
+          <a:scrgbClr r="0" g="0" b="0"/>
+        </a:lnRef>
+        <a:fillRef idx="1">
+          <a:scrgbClr r="0" g="0" b="0"/>
+        </a:fillRef>
+        <a:effectRef idx="1">
+          <a:scrgbClr r="0" g="0" b="0"/>
+        </a:effectRef>
+        <a:fontRef idx="minor">
+          <a:schemeClr val="lt1"/>
+        </a:fontRef>
+      </dsp:style>
+      <dsp:txBody>
+        <a:bodyPr spcFirstLastPara="0" vert="horz" wrap="square" lIns="35560" tIns="35560" rIns="35560" bIns="35560" numCol="1" spcCol="1270" anchor="ctr" anchorCtr="0">
+          <a:noAutofit/>
+        </a:bodyPr>
+        <a:lstStyle/>
+        <a:p>
+          <a:pPr marL="0" lvl="0" indent="0" algn="ctr" defTabSz="1244600">
+            <a:lnSpc>
+              <a:spcPct val="90000"/>
+            </a:lnSpc>
+            <a:spcBef>
+              <a:spcPct val="0"/>
+            </a:spcBef>
+            <a:spcAft>
+              <a:spcPct val="35000"/>
+            </a:spcAft>
+            <a:buNone/>
+          </a:pPr>
+          <a:r>
+            <a:rPr kumimoji="1" lang="ja-JP" altLang="en-US" sz="2800" b="1" i="0" kern="1200">
+              <a:latin typeface="Hiragino Sans W7" panose="020B0400000000000000" pitchFamily="34" charset="-128"/>
+              <a:ea typeface="Hiragino Sans W7" panose="020B0400000000000000" pitchFamily="34" charset="-128"/>
+            </a:rPr>
+            <a:t>係員</a:t>
+          </a:r>
+        </a:p>
+      </dsp:txBody>
+      <dsp:txXfrm>
+        <a:off x="2240279" y="8401049"/>
+        <a:ext cx="8321039" cy="1200149"/>
+      </dsp:txXfrm>
+    </dsp:sp>
+  </dsp:spTree>
+</dsp:drawing>
+</file>
+
+<file path=ppt/diagrams/layout1.xml><?xml version="1.0" encoding="utf-8"?>
+<dgm:layoutDef xmlns:dgm="http://schemas.openxmlformats.org/drawingml/2006/diagram" xmlns:a="http://schemas.openxmlformats.org/drawingml/2006/main" uniqueId="urn:microsoft.com/office/officeart/2005/8/layout/pyramid1">
+  <dgm:title val=""/>
+  <dgm:desc val=""/>
+  <dgm:catLst>
+    <dgm:cat type="pyramid" pri="1000"/>
+  </dgm:catLst>
+  <dgm:sampData useDef="1">
+    <dgm:dataModel>
+      <dgm:ptLst/>
+      <dgm:bg/>
+      <dgm:whole/>
+    </dgm:dataModel>
+  </dgm:sampData>
+  <dgm:styleData>
+    <dgm:dataModel>
+      <dgm:ptLst>
+        <dgm:pt modelId="0" type="doc"/>
+        <dgm:pt modelId="1"/>
+        <dgm:pt modelId="2"/>
+      </dgm:ptLst>
+      <dgm:cxnLst>
+        <dgm:cxn modelId="3" srcId="0" destId="1" srcOrd="0" destOrd="0"/>
+        <dgm:cxn modelId="4" srcId="0" destId="2" srcOrd="1" destOrd="0"/>
+      </dgm:cxnLst>
+      <dgm:bg/>
+      <dgm:whole/>
+    </dgm:dataModel>
+  </dgm:styleData>
+  <dgm:clrData>
+    <dgm:dataModel>
+      <dgm:ptLst>
+        <dgm:pt modelId="0" type="doc"/>
+        <dgm:pt modelId="1"/>
+        <dgm:pt modelId="2"/>
+        <dgm:pt modelId="3"/>
+        <dgm:pt modelId="4"/>
+      </dgm:ptLst>
+      <dgm:cxnLst>
+        <dgm:cxn modelId="5" srcId="0" destId="1" srcOrd="0" destOrd="0"/>
+        <dgm:cxn modelId="6" srcId="0" destId="2" srcOrd="1" destOrd="0"/>
+        <dgm:cxn modelId="7" srcId="0" destId="3" srcOrd="2" destOrd="0"/>
+        <dgm:cxn modelId="8" srcId="0" destId="4" srcOrd="3" destOrd="0"/>
+      </dgm:cxnLst>
+      <dgm:bg/>
+      <dgm:whole/>
+    </dgm:dataModel>
+  </dgm:clrData>
+  <dgm:layoutNode name="Name0">
+    <dgm:varLst>
+      <dgm:dir/>
+      <dgm:animLvl val="lvl"/>
+      <dgm:resizeHandles val="exact"/>
+    </dgm:varLst>
+    <dgm:choose name="Name1">
+      <dgm:if name="Name2" func="var" arg="dir" op="equ" val="norm">
+        <dgm:alg type="pyra">
+          <dgm:param type="linDir" val="fromB"/>
+          <dgm:param type="txDir" val="fromT"/>
+          <dgm:param type="pyraAcctPos" val="aft"/>
+          <dgm:param type="pyraAcctTxMar" val="step"/>
+          <dgm:param type="pyraAcctBkgdNode" val="acctBkgd"/>
+          <dgm:param type="pyraAcctTxNode" val="acctTx"/>
+          <dgm:param type="pyraLvlNode" val="level"/>
+        </dgm:alg>
+      </dgm:if>
+      <dgm:else name="Name3">
+        <dgm:alg type="pyra">
+          <dgm:param type="linDir" val="fromB"/>
+          <dgm:param type="txDir" val="fromT"/>
+          <dgm:param type="pyraAcctPos" val="bef"/>
+          <dgm:param type="pyraAcctTxMar" val="step"/>
+          <dgm:param type="pyraAcctBkgdNode" val="acctBkgd"/>
+          <dgm:param type="pyraAcctTxNode" val="acctTx"/>
+          <dgm:param type="pyraLvlNode" val="level"/>
+        </dgm:alg>
+      </dgm:else>
+    </dgm:choose>
+    <dgm:shape xmlns:r="http://schemas.openxmlformats.org/officeDocument/2006/relationships" r:blip="">
+      <dgm:adjLst/>
+    </dgm:shape>
+    <dgm:presOf/>
+    <dgm:choose name="Name4">
+      <dgm:if name="Name5" axis="root des" ptType="all node" func="maxDepth" op="gte" val="2">
+        <dgm:constrLst>
+          <dgm:constr type="primFontSz" for="des" forName="levelTx" op="equ"/>
+          <dgm:constr type="secFontSz" for="des" forName="acctTx" op="equ"/>
+          <dgm:constr type="pyraAcctRatio" val="0.32"/>
+        </dgm:constrLst>
+      </dgm:if>
+      <dgm:else name="Name6">
+        <dgm:constrLst>
+          <dgm:constr type="primFontSz" for="des" forName="levelTx" op="equ"/>
+          <dgm:constr type="secFontSz" for="des" forName="acctTx" op="equ"/>
+          <dgm:constr type="pyraAcctRatio"/>
+        </dgm:constrLst>
+      </dgm:else>
+    </dgm:choose>
+    <dgm:ruleLst/>
+    <dgm:forEach name="Name7" axis="ch" ptType="node">
+      <dgm:layoutNode name="Name8">
+        <dgm:alg type="composite">
+          <dgm:param type="horzAlign" val="none"/>
+        </dgm:alg>
+        <dgm:shape xmlns:r="http://schemas.openxmlformats.org/officeDocument/2006/relationships" r:blip="">
+          <dgm:adjLst/>
+        </dgm:shape>
+        <dgm:presOf/>
+        <dgm:choose name="Name9">
+          <dgm:if name="Name10" axis="self" ptType="node" func="pos" op="equ" val="1">
+            <dgm:constrLst>
+              <dgm:constr type="ctrX" for="ch" forName="acctBkgd" val="1"/>
+              <dgm:constr type="ctrY" for="ch" forName="acctBkgd" val="1"/>
+              <dgm:constr type="w" for="ch" forName="acctBkgd" val="1"/>
+              <dgm:constr type="h" for="ch" forName="acctBkgd" val="1"/>
+              <dgm:constr type="ctrX" for="ch" forName="acctTx" val="1"/>
+              <dgm:constr type="ctrY" for="ch" forName="acctTx" val="1"/>
+              <dgm:constr type="w" for="ch" forName="acctTx" val="1"/>
+              <dgm:constr type="h" for="ch" forName="acctTx" val="1"/>
+              <dgm:constr type="ctrX" for="ch" forName="level" val="1"/>
+              <dgm:constr type="ctrY" for="ch" forName="level" val="1"/>
+              <dgm:constr type="w" for="ch" forName="level" val="1"/>
+              <dgm:constr type="h" for="ch" forName="level" val="1"/>
+              <dgm:constr type="ctrX" for="ch" forName="levelTx" refType="ctrX" refFor="ch" refForName="level"/>
+              <dgm:constr type="ctrY" for="ch" forName="levelTx" refType="ctrY" refFor="ch" refForName="level"/>
+              <dgm:constr type="w" for="ch" forName="levelTx" refType="w" refFor="ch" refForName="level"/>
+              <dgm:constr type="h" for="ch" forName="levelTx" refType="h" refFor="ch" refForName="level"/>
+            </dgm:constrLst>
+          </dgm:if>
+          <dgm:else name="Name11">
+            <dgm:constrLst>
+              <dgm:constr type="ctrX" for="ch" forName="acctBkgd" val="1"/>
+              <dgm:constr type="ctrY" for="ch" forName="acctBkgd" val="1"/>
+              <dgm:constr type="w" for="ch" forName="acctBkgd" val="1"/>
+              <dgm:constr type="h" for="ch" forName="acctBkgd" val="1"/>
+              <dgm:constr type="ctrX" for="ch" forName="acctTx" val="1"/>
+              <dgm:constr type="ctrY" for="ch" forName="acctTx" val="1"/>
+              <dgm:constr type="w" for="ch" forName="acctTx" val="1"/>
+              <dgm:constr type="h" for="ch" forName="acctTx" val="1"/>
+              <dgm:constr type="ctrX" for="ch" forName="level" val="1"/>
+              <dgm:constr type="ctrY" for="ch" forName="level" val="1"/>
+              <dgm:constr type="w" for="ch" forName="level" val="1"/>
+              <dgm:constr type="h" for="ch" forName="level" val="1"/>
+              <dgm:constr type="ctrX" for="ch" forName="levelTx" refType="ctrX" refFor="ch" refForName="level"/>
+              <dgm:constr type="ctrY" for="ch" forName="levelTx" refType="ctrY" refFor="ch" refForName="level"/>
+              <dgm:constr type="w" for="ch" forName="levelTx" refType="w" refFor="ch" refForName="level" fact="0.65"/>
+              <dgm:constr type="h" for="ch" forName="levelTx" refType="h" refFor="ch" refForName="level"/>
+            </dgm:constrLst>
+          </dgm:else>
+        </dgm:choose>
+        <dgm:ruleLst/>
+        <dgm:choose name="Name12">
+          <dgm:if name="Name13" axis="ch" ptType="node" func="cnt" op="gte" val="1">
+            <dgm:layoutNode name="acctBkgd" styleLbl="alignAcc1">
+              <dgm:alg type="sp"/>
+              <dgm:shape xmlns:r="http://schemas.openxmlformats.org/officeDocument/2006/relationships" type="nonIsoscelesTrapezoid" r:blip="">
+                <dgm:adjLst/>
+              </dgm:shape>
+              <dgm:presOf axis="des" ptType="node"/>
+              <dgm:constrLst/>
+              <dgm:ruleLst/>
+            </dgm:layoutNode>
+            <dgm:layoutNode name="acctTx" styleLbl="alignAcc1">
+              <dgm:varLst>
+                <dgm:bulletEnabled val="1"/>
+              </dgm:varLst>
+              <dgm:alg type="tx">
+                <dgm:param type="stBulletLvl" val="1"/>
+                <dgm:param type="txAnchorVertCh" val="mid"/>
+              </dgm:alg>
+              <dgm:shape xmlns:r="http://schemas.openxmlformats.org/officeDocument/2006/relationships" type="nonIsoscelesTrapezoid" r:blip="" hideGeom="1">
+                <dgm:adjLst/>
+              </dgm:shape>
+              <dgm:presOf axis="des" ptType="node"/>
+              <dgm:constrLst>
+                <dgm:constr type="secFontSz" val="65"/>
+                <dgm:constr type="primFontSz" refType="secFontSz"/>
+                <dgm:constr type="tMarg" refType="secFontSz" fact="0.3"/>
+                <dgm:constr type="bMarg" refType="secFontSz" fact="0.3"/>
+                <dgm:constr type="lMarg" refType="secFontSz" fact="0.3"/>
+                <dgm:constr type="rMarg" refType="secFontSz" fact="0.3"/>
+              </dgm:constrLst>
+              <dgm:ruleLst>
+                <dgm:rule type="secFontSz" val="5" fact="NaN" max="NaN"/>
+              </dgm:ruleLst>
+            </dgm:layoutNode>
+          </dgm:if>
+          <dgm:else name="Name14"/>
+        </dgm:choose>
+        <dgm:layoutNode name="level">
+          <dgm:varLst>
+            <dgm:chMax val="1"/>
+            <dgm:bulletEnabled val="1"/>
+          </dgm:varLst>
+          <dgm:alg type="sp"/>
+          <dgm:shape xmlns:r="http://schemas.openxmlformats.org/officeDocument/2006/relationships" type="trapezoid" r:blip="">
+            <dgm:adjLst/>
+          </dgm:shape>
+          <dgm:presOf axis="self"/>
+          <dgm:constrLst>
+            <dgm:constr type="h" val="500"/>
+            <dgm:constr type="w" val="1"/>
+          </dgm:constrLst>
+          <dgm:ruleLst/>
+        </dgm:layoutNode>
+        <dgm:layoutNode name="levelTx" styleLbl="revTx">
+          <dgm:varLst>
+            <dgm:chMax val="1"/>
+            <dgm:bulletEnabled val="1"/>
+          </dgm:varLst>
+          <dgm:alg type="tx"/>
+          <dgm:shape xmlns:r="http://schemas.openxmlformats.org/officeDocument/2006/relationships" type="rect" r:blip="" hideGeom="1">
+            <dgm:adjLst/>
+          </dgm:shape>
+          <dgm:presOf axis="self"/>
+          <dgm:constrLst>
+            <dgm:constr type="tMarg" refType="primFontSz" fact="0.1"/>
+            <dgm:constr type="bMarg" refType="primFontSz" fact="0.1"/>
+            <dgm:constr type="lMarg" refType="primFontSz" fact="0.1"/>
+            <dgm:constr type="rMarg" refType="primFontSz" fact="0.1"/>
+            <dgm:constr type="primFontSz" val="65"/>
+          </dgm:constrLst>
+          <dgm:ruleLst>
+            <dgm:rule type="primFontSz" val="5" fact="NaN" max="NaN"/>
+          </dgm:ruleLst>
+        </dgm:layoutNode>
+      </dgm:layoutNode>
+    </dgm:forEach>
+  </dgm:layoutNode>
+</dgm:layoutDef>
+</file>
+
+<file path=ppt/diagrams/layout2.xml><?xml version="1.0" encoding="utf-8"?>
+<dgm:layoutDef xmlns:dgm="http://schemas.openxmlformats.org/drawingml/2006/diagram" xmlns:a="http://schemas.openxmlformats.org/drawingml/2006/main" uniqueId="urn:microsoft.com/office/officeart/2005/8/layout/pyramid1">
+  <dgm:title val=""/>
+  <dgm:desc val=""/>
+  <dgm:catLst>
+    <dgm:cat type="pyramid" pri="1000"/>
+  </dgm:catLst>
+  <dgm:sampData useDef="1">
+    <dgm:dataModel>
+      <dgm:ptLst/>
+      <dgm:bg/>
+      <dgm:whole/>
+    </dgm:dataModel>
+  </dgm:sampData>
+  <dgm:styleData>
+    <dgm:dataModel>
+      <dgm:ptLst>
+        <dgm:pt modelId="0" type="doc"/>
+        <dgm:pt modelId="1"/>
+        <dgm:pt modelId="2"/>
+      </dgm:ptLst>
+      <dgm:cxnLst>
+        <dgm:cxn modelId="3" srcId="0" destId="1" srcOrd="0" destOrd="0"/>
+        <dgm:cxn modelId="4" srcId="0" destId="2" srcOrd="1" destOrd="0"/>
+      </dgm:cxnLst>
+      <dgm:bg/>
+      <dgm:whole/>
+    </dgm:dataModel>
+  </dgm:styleData>
+  <dgm:clrData>
+    <dgm:dataModel>
+      <dgm:ptLst>
+        <dgm:pt modelId="0" type="doc"/>
+        <dgm:pt modelId="1"/>
+        <dgm:pt modelId="2"/>
+        <dgm:pt modelId="3"/>
+        <dgm:pt modelId="4"/>
+      </dgm:ptLst>
+      <dgm:cxnLst>
+        <dgm:cxn modelId="5" srcId="0" destId="1" srcOrd="0" destOrd="0"/>
+        <dgm:cxn modelId="6" srcId="0" destId="2" srcOrd="1" destOrd="0"/>
+        <dgm:cxn modelId="7" srcId="0" destId="3" srcOrd="2" destOrd="0"/>
+        <dgm:cxn modelId="8" srcId="0" destId="4" srcOrd="3" destOrd="0"/>
+      </dgm:cxnLst>
+      <dgm:bg/>
+      <dgm:whole/>
+    </dgm:dataModel>
+  </dgm:clrData>
+  <dgm:layoutNode name="Name0">
+    <dgm:varLst>
+      <dgm:dir/>
+      <dgm:animLvl val="lvl"/>
+      <dgm:resizeHandles val="exact"/>
+    </dgm:varLst>
+    <dgm:choose name="Name1">
+      <dgm:if name="Name2" func="var" arg="dir" op="equ" val="norm">
+        <dgm:alg type="pyra">
+          <dgm:param type="linDir" val="fromB"/>
+          <dgm:param type="txDir" val="fromT"/>
+          <dgm:param type="pyraAcctPos" val="aft"/>
+          <dgm:param type="pyraAcctTxMar" val="step"/>
+          <dgm:param type="pyraAcctBkgdNode" val="acctBkgd"/>
+          <dgm:param type="pyraAcctTxNode" val="acctTx"/>
+          <dgm:param type="pyraLvlNode" val="level"/>
+        </dgm:alg>
+      </dgm:if>
+      <dgm:else name="Name3">
+        <dgm:alg type="pyra">
+          <dgm:param type="linDir" val="fromB"/>
+          <dgm:param type="txDir" val="fromT"/>
+          <dgm:param type="pyraAcctPos" val="bef"/>
+          <dgm:param type="pyraAcctTxMar" val="step"/>
+          <dgm:param type="pyraAcctBkgdNode" val="acctBkgd"/>
+          <dgm:param type="pyraAcctTxNode" val="acctTx"/>
+          <dgm:param type="pyraLvlNode" val="level"/>
+        </dgm:alg>
+      </dgm:else>
+    </dgm:choose>
+    <dgm:shape xmlns:r="http://schemas.openxmlformats.org/officeDocument/2006/relationships" r:blip="">
+      <dgm:adjLst/>
+    </dgm:shape>
+    <dgm:presOf/>
+    <dgm:choose name="Name4">
+      <dgm:if name="Name5" axis="root des" ptType="all node" func="maxDepth" op="gte" val="2">
+        <dgm:constrLst>
+          <dgm:constr type="primFontSz" for="des" forName="levelTx" op="equ"/>
+          <dgm:constr type="secFontSz" for="des" forName="acctTx" op="equ"/>
+          <dgm:constr type="pyraAcctRatio" val="0.32"/>
+        </dgm:constrLst>
+      </dgm:if>
+      <dgm:else name="Name6">
+        <dgm:constrLst>
+          <dgm:constr type="primFontSz" for="des" forName="levelTx" op="equ"/>
+          <dgm:constr type="secFontSz" for="des" forName="acctTx" op="equ"/>
+          <dgm:constr type="pyraAcctRatio"/>
+        </dgm:constrLst>
+      </dgm:else>
+    </dgm:choose>
+    <dgm:ruleLst/>
+    <dgm:forEach name="Name7" axis="ch" ptType="node">
+      <dgm:layoutNode name="Name8">
+        <dgm:alg type="composite">
+          <dgm:param type="horzAlign" val="none"/>
+        </dgm:alg>
+        <dgm:shape xmlns:r="http://schemas.openxmlformats.org/officeDocument/2006/relationships" r:blip="">
+          <dgm:adjLst/>
+        </dgm:shape>
+        <dgm:presOf/>
+        <dgm:choose name="Name9">
+          <dgm:if name="Name10" axis="self" ptType="node" func="pos" op="equ" val="1">
+            <dgm:constrLst>
+              <dgm:constr type="ctrX" for="ch" forName="acctBkgd" val="1"/>
+              <dgm:constr type="ctrY" for="ch" forName="acctBkgd" val="1"/>
+              <dgm:constr type="w" for="ch" forName="acctBkgd" val="1"/>
+              <dgm:constr type="h" for="ch" forName="acctBkgd" val="1"/>
+              <dgm:constr type="ctrX" for="ch" forName="acctTx" val="1"/>
+              <dgm:constr type="ctrY" for="ch" forName="acctTx" val="1"/>
+              <dgm:constr type="w" for="ch" forName="acctTx" val="1"/>
+              <dgm:constr type="h" for="ch" forName="acctTx" val="1"/>
+              <dgm:constr type="ctrX" for="ch" forName="level" val="1"/>
+              <dgm:constr type="ctrY" for="ch" forName="level" val="1"/>
+              <dgm:constr type="w" for="ch" forName="level" val="1"/>
+              <dgm:constr type="h" for="ch" forName="level" val="1"/>
+              <dgm:constr type="ctrX" for="ch" forName="levelTx" refType="ctrX" refFor="ch" refForName="level"/>
+              <dgm:constr type="ctrY" for="ch" forName="levelTx" refType="ctrY" refFor="ch" refForName="level"/>
+              <dgm:constr type="w" for="ch" forName="levelTx" refType="w" refFor="ch" refForName="level"/>
+              <dgm:constr type="h" for="ch" forName="levelTx" refType="h" refFor="ch" refForName="level"/>
+            </dgm:constrLst>
+          </dgm:if>
+          <dgm:else name="Name11">
+            <dgm:constrLst>
+              <dgm:constr type="ctrX" for="ch" forName="acctBkgd" val="1"/>
+              <dgm:constr type="ctrY" for="ch" forName="acctBkgd" val="1"/>
+              <dgm:constr type="w" for="ch" forName="acctBkgd" val="1"/>
+              <dgm:constr type="h" for="ch" forName="acctBkgd" val="1"/>
+              <dgm:constr type="ctrX" for="ch" forName="acctTx" val="1"/>
+              <dgm:constr type="ctrY" for="ch" forName="acctTx" val="1"/>
+              <dgm:constr type="w" for="ch" forName="acctTx" val="1"/>
+              <dgm:constr type="h" for="ch" forName="acctTx" val="1"/>
+              <dgm:constr type="ctrX" for="ch" forName="level" val="1"/>
+              <dgm:constr type="ctrY" for="ch" forName="level" val="1"/>
+              <dgm:constr type="w" for="ch" forName="level" val="1"/>
+              <dgm:constr type="h" for="ch" forName="level" val="1"/>
+              <dgm:constr type="ctrX" for="ch" forName="levelTx" refType="ctrX" refFor="ch" refForName="level"/>
+              <dgm:constr type="ctrY" for="ch" forName="levelTx" refType="ctrY" refFor="ch" refForName="level"/>
+              <dgm:constr type="w" for="ch" forName="levelTx" refType="w" refFor="ch" refForName="level" fact="0.65"/>
+              <dgm:constr type="h" for="ch" forName="levelTx" refType="h" refFor="ch" refForName="level"/>
+            </dgm:constrLst>
+          </dgm:else>
+        </dgm:choose>
+        <dgm:ruleLst/>
+        <dgm:choose name="Name12">
+          <dgm:if name="Name13" axis="ch" ptType="node" func="cnt" op="gte" val="1">
+            <dgm:layoutNode name="acctBkgd" styleLbl="alignAcc1">
+              <dgm:alg type="sp"/>
+              <dgm:shape xmlns:r="http://schemas.openxmlformats.org/officeDocument/2006/relationships" type="nonIsoscelesTrapezoid" r:blip="">
+                <dgm:adjLst/>
+              </dgm:shape>
+              <dgm:presOf axis="des" ptType="node"/>
+              <dgm:constrLst/>
+              <dgm:ruleLst/>
+            </dgm:layoutNode>
+            <dgm:layoutNode name="acctTx" styleLbl="alignAcc1">
+              <dgm:varLst>
+                <dgm:bulletEnabled val="1"/>
+              </dgm:varLst>
+              <dgm:alg type="tx">
+                <dgm:param type="stBulletLvl" val="1"/>
+                <dgm:param type="txAnchorVertCh" val="mid"/>
+              </dgm:alg>
+              <dgm:shape xmlns:r="http://schemas.openxmlformats.org/officeDocument/2006/relationships" type="nonIsoscelesTrapezoid" r:blip="" hideGeom="1">
+                <dgm:adjLst/>
+              </dgm:shape>
+              <dgm:presOf axis="des" ptType="node"/>
+              <dgm:constrLst>
+                <dgm:constr type="secFontSz" val="65"/>
+                <dgm:constr type="primFontSz" refType="secFontSz"/>
+                <dgm:constr type="tMarg" refType="secFontSz" fact="0.3"/>
+                <dgm:constr type="bMarg" refType="secFontSz" fact="0.3"/>
+                <dgm:constr type="lMarg" refType="secFontSz" fact="0.3"/>
+                <dgm:constr type="rMarg" refType="secFontSz" fact="0.3"/>
+              </dgm:constrLst>
+              <dgm:ruleLst>
+                <dgm:rule type="secFontSz" val="5" fact="NaN" max="NaN"/>
+              </dgm:ruleLst>
+            </dgm:layoutNode>
+          </dgm:if>
+          <dgm:else name="Name14"/>
+        </dgm:choose>
+        <dgm:layoutNode name="level">
+          <dgm:varLst>
+            <dgm:chMax val="1"/>
+            <dgm:bulletEnabled val="1"/>
+          </dgm:varLst>
+          <dgm:alg type="sp"/>
+          <dgm:shape xmlns:r="http://schemas.openxmlformats.org/officeDocument/2006/relationships" type="trapezoid" r:blip="">
+            <dgm:adjLst/>
+          </dgm:shape>
+          <dgm:presOf axis="self"/>
+          <dgm:constrLst>
+            <dgm:constr type="h" val="500"/>
+            <dgm:constr type="w" val="1"/>
+          </dgm:constrLst>
+          <dgm:ruleLst/>
+        </dgm:layoutNode>
+        <dgm:layoutNode name="levelTx" styleLbl="revTx">
+          <dgm:varLst>
+            <dgm:chMax val="1"/>
+            <dgm:bulletEnabled val="1"/>
+          </dgm:varLst>
+          <dgm:alg type="tx"/>
+          <dgm:shape xmlns:r="http://schemas.openxmlformats.org/officeDocument/2006/relationships" type="rect" r:blip="" hideGeom="1">
+            <dgm:adjLst/>
+          </dgm:shape>
+          <dgm:presOf axis="self"/>
+          <dgm:constrLst>
+            <dgm:constr type="tMarg" refType="primFontSz" fact="0.1"/>
+            <dgm:constr type="bMarg" refType="primFontSz" fact="0.1"/>
+            <dgm:constr type="lMarg" refType="primFontSz" fact="0.1"/>
+            <dgm:constr type="rMarg" refType="primFontSz" fact="0.1"/>
+            <dgm:constr type="primFontSz" val="65"/>
+          </dgm:constrLst>
+          <dgm:ruleLst>
+            <dgm:rule type="primFontSz" val="5" fact="NaN" max="NaN"/>
+          </dgm:ruleLst>
+        </dgm:layoutNode>
+      </dgm:layoutNode>
+    </dgm:forEach>
+  </dgm:layoutNode>
+</dgm:layoutDef>
+</file>
+
+<file path=ppt/diagrams/quickStyle1.xml><?xml version="1.0" encoding="utf-8"?>
+<dgm:styleDef xmlns:dgm="http://schemas.openxmlformats.org/drawingml/2006/diagram" xmlns:a="http://schemas.openxmlformats.org/drawingml/2006/main" uniqueId="urn:microsoft.com/office/officeart/2005/8/quickstyle/simple2">
+  <dgm:title val=""/>
+  <dgm:desc val=""/>
+  <dgm:catLst>
+    <dgm:cat type="simple" pri="10200"/>
+  </dgm:catLst>
+  <dgm:scene3d>
+    <a:camera prst="orthographicFront"/>
+    <a:lightRig rig="threePt" dir="t"/>
+  </dgm:scene3d>
+  <dgm:styleLbl name="node0">
+    <dgm:scene3d>
+      <a:camera prst="orthographicFront"/>
+      <a:lightRig rig="threePt" dir="t"/>
+    </dgm:scene3d>
+    <dgm:sp3d/>
+    <dgm:txPr/>
+    <dgm:style>
+      <a:lnRef idx="3">
+        <a:scrgbClr r="0" g="0" b="0"/>
+      </a:lnRef>
+      <a:fillRef idx="1">
+        <a:scrgbClr r="0" g="0" b="0"/>
+      </a:fillRef>
+      <a:effectRef idx="1">
+        <a:scrgbClr r="0" g="0" b="0"/>
+      </a:effectRef>
+      <a:fontRef idx="minor">
+        <a:schemeClr val="lt1"/>
+      </a:fontRef>
+    </dgm:style>
+  </dgm:styleLbl>
+  <dgm:styleLbl name="lnNode1">
+    <dgm:scene3d>
+      <a:camera prst="orthographicFront"/>
+      <a:lightRig rig="threePt" dir="t"/>
+    </dgm:scene3d>
+    <dgm:sp3d/>
+    <dgm:txPr/>
+    <dgm:style>
+      <a:lnRef idx="3">
+        <a:scrgbClr r="0" g="0" b="0"/>
+      </a:lnRef>
+      <a:fillRef idx="1">
+        <a:scrgbClr r="0" g="0" b="0"/>
+      </a:fillRef>
+      <a:effectRef idx="1">
+        <a:scrgbClr r="0" g="0" b="0"/>
+      </a:effectRef>
+      <a:fontRef idx="minor">
+        <a:schemeClr val="lt1"/>
+      </a:fontRef>
+    </dgm:style>
+  </dgm:styleLbl>
+  <dgm:styleLbl name="vennNode1">
+    <dgm:scene3d>
+      <a:camera prst="orthographicFront"/>
+      <a:lightRig rig="threePt" dir="t"/>
+    </dgm:scene3d>
+    <dgm:sp3d/>
+    <dgm:txPr/>
+    <dgm:style>
+      <a:lnRef idx="3">
+        <a:scrgbClr r="0" g="0" b="0"/>
+      </a:lnRef>
+      <a:fillRef idx="1">
+        <a:scrgbClr r="0" g="0" b="0"/>
+      </a:fillRef>
+      <a:effectRef idx="0">
+        <a:scrgbClr r="0" g="0" b="0"/>
+      </a:effectRef>
+      <a:fontRef idx="minor">
+        <a:schemeClr val="tx1"/>
+      </a:fontRef>
+    </dgm:style>
+  </dgm:styleLbl>
+  <dgm:styleLbl name="alignNode1">
+    <dgm:scene3d>
+      <a:camera prst="orthographicFront"/>
+      <a:lightRig rig="threePt" dir="t"/>
+    </dgm:scene3d>
+    <dgm:sp3d/>
+    <dgm:txPr/>
+    <dgm:style>
+      <a:lnRef idx="2">
+        <a:scrgbClr r="0" g="0" b="0"/>
+      </a:lnRef>
+      <a:fillRef idx="1">
+        <a:scrgbClr r="0" g="0" b="0"/>
+      </a:fillRef>
+      <a:effectRef idx="1">
+        <a:scrgbClr r="0" g="0" b="0"/>
+      </a:effectRef>
+      <a:fontRef idx="minor">
+        <a:schemeClr val="lt1"/>
+      </a:fontRef>
+    </dgm:style>
+  </dgm:styleLbl>
+  <dgm:styleLbl name="node1">
+    <dgm:scene3d>
+      <a:camera prst="orthographicFront"/>
+      <a:lightRig rig="threePt" dir="t"/>
+    </dgm:scene3d>
+    <dgm:sp3d/>
+    <dgm:txPr/>
+    <dgm:style>
+      <a:lnRef idx="3">
+        <a:scrgbClr r="0" g="0" b="0"/>
+      </a:lnRef>
+      <a:fillRef idx="1">
+        <a:scrgbClr r="0" g="0" b="0"/>
+      </a:fillRef>
+      <a:effectRef idx="1">
+        <a:scrgbClr r="0" g="0" b="0"/>
+      </a:effectRef>
+      <a:fontRef idx="minor">
+        <a:schemeClr val="lt1"/>
+      </a:fontRef>
+    </dgm:style>
+  </dgm:styleLbl>
+  <dgm:styleLbl name="node2">
+    <dgm:scene3d>
+      <a:camera prst="orthographicFront"/>
+      <a:lightRig rig="threePt" dir="t"/>
+    </dgm:scene3d>
+    <dgm:sp3d/>
+    <dgm:txPr/>
+    <dgm:style>
+      <a:lnRef idx="3">
+        <a:scrgbClr r="0" g="0" b="0"/>
+      </a:lnRef>
+      <a:fillRef idx="1">
+        <a:scrgbClr r="0" g="0" b="0"/>
+      </a:fillRef>
+      <a:effectRef idx="1">
+        <a:scrgbClr r="0" g="0" b="0"/>
+      </a:effectRef>
+      <a:fontRef idx="minor">
+        <a:schemeClr val="lt1"/>
+      </a:fontRef>
+    </dgm:style>
+  </dgm:styleLbl>
+  <dgm:styleLbl name="node3">
+    <dgm:scene3d>
+      <a:camera prst="orthographicFront"/>
+      <a:lightRig rig="threePt" dir="t"/>
+    </dgm:scene3d>
+    <dgm:sp3d/>
+    <dgm:txPr/>
+    <dgm:style>
+      <a:lnRef idx="3">
+        <a:scrgbClr r="0" g="0" b="0"/>
+      </a:lnRef>
+      <a:fillRef idx="1">
+        <a:scrgbClr r="0" g="0" b="0"/>
+      </a:fillRef>
+      <a:effectRef idx="1">
+        <a:scrgbClr r="0" g="0" b="0"/>
+      </a:effectRef>
+      <a:fontRef idx="minor">
+        <a:schemeClr val="lt1"/>
+      </a:fontRef>
+    </dgm:style>
+  </dgm:styleLbl>
+  <dgm:styleLbl name="node4">
+    <dgm:scene3d>
+      <a:camera prst="orthographicFront"/>
+      <a:lightRig rig="threePt" dir="t"/>
+    </dgm:scene3d>
+    <dgm:sp3d/>
+    <dgm:txPr/>
+    <dgm:style>
+      <a:lnRef idx="3">
+        <a:scrgbClr r="0" g="0" b="0"/>
+      </a:lnRef>
+      <a:fillRef idx="1">
+        <a:scrgbClr r="0" g="0" b="0"/>
+      </a:fillRef>
+      <a:effectRef idx="1">
+        <a:scrgbClr r="0" g="0" b="0"/>
+      </a:effectRef>
+      <a:fontRef idx="minor">
+        <a:schemeClr val="lt1"/>
+      </a:fontRef>
+    </dgm:style>
+  </dgm:styleLbl>
+  <dgm:styleLbl name="fgImgPlace1">
+    <dgm:scene3d>
+      <a:camera prst="orthographicFront"/>
+      <a:lightRig rig="threePt" dir="t"/>
+    </dgm:scene3d>
+    <dgm:sp3d/>
+    <dgm:txPr/>
+    <dgm:style>
+      <a:lnRef idx="3">
+        <a:scrgbClr r="0" g="0" b="0"/>
+      </a:lnRef>
+      <a:fillRef idx="1">
+        <a:scrgbClr r="0" g="0" b="0"/>
+      </a:fillRef>
+      <a:effectRef idx="1">
+        <a:scrgbClr r="0" g="0" b="0"/>
+      </a:effectRef>
+      <a:fontRef idx="minor"/>
+    </dgm:style>
+  </dgm:styleLbl>
+  <dgm:styleLbl name="alignImgPlace1">
+    <dgm:scene3d>
+      <a:camera prst="orthographicFront"/>
+      <a:lightRig rig="threePt" dir="t"/>
+    </dgm:scene3d>
+    <dgm:sp3d/>
+    <dgm:txPr/>
+    <dgm:style>
+      <a:lnRef idx="3">
+        <a:scrgbClr r="0" g="0" b="0"/>
+      </a:lnRef>
+      <a:fillRef idx="1">
+        <a:scrgbClr r="0" g="0" b="0"/>
+      </a:fillRef>
+      <a:effectRef idx="1">
+        <a:scrgbClr r="0" g="0" b="0"/>
+      </a:effectRef>
+      <a:fontRef idx="minor"/>
+    </dgm:style>
+  </dgm:styleLbl>
+  <dgm:styleLbl name="bgImgPlace1">
+    <dgm:scene3d>
+      <a:camera prst="orthographicFront"/>
+      <a:lightRig rig="threePt" dir="t"/>
+    </dgm:scene3d>
+    <dgm:sp3d/>
+    <dgm:txPr/>
+    <dgm:style>
+      <a:lnRef idx="3">
+        <a:scrgbClr r="0" g="0" b="0"/>
+      </a:lnRef>
+      <a:fillRef idx="1">
+        <a:scrgbClr r="0" g="0" b="0"/>
+      </a:fillRef>
+      <a:effectRef idx="1">
+        <a:scrgbClr r="0" g="0" b="0"/>
+      </a:effectRef>
+      <a:fontRef idx="minor"/>
+    </dgm:style>
+  </dgm:styleLbl>
+  <dgm:styleLbl name="sibTrans2D1">
+    <dgm:scene3d>
+      <a:camera prst="orthographicFront"/>
+      <a:lightRig rig="threePt" dir="t"/>
+    </dgm:scene3d>
+    <dgm:sp3d/>
+    <dgm:txPr/>
+    <dgm:style>
+      <a:lnRef idx="0">
+        <a:scrgbClr r="0" g="0" b="0"/>
+      </a:lnRef>
+      <a:fillRef idx="1">
+        <a:scrgbClr r="0" g="0" b="0"/>
+      </a:fillRef>
+      <a:effectRef idx="1">
+        <a:scrgbClr r="0" g="0" b="0"/>
+      </a:effectRef>
+      <a:fontRef idx="minor">
+        <a:schemeClr val="lt1"/>
+      </a:fontRef>
+    </dgm:style>
+  </dgm:styleLbl>
+  <dgm:styleLbl name="fgSibTrans2D1">
+    <dgm:scene3d>
+      <a:camera prst="orthographicFront"/>
+      <a:lightRig rig="threePt" dir="t"/>
+    </dgm:scene3d>
+    <dgm:sp3d/>
+    <dgm:txPr/>
+    <dgm:style>
+      <a:lnRef idx="0">
+        <a:scrgbClr r="0" g="0" b="0"/>
+      </a:lnRef>
+      <a:fillRef idx="1">
+        <a:scrgbClr r="0" g="0" b="0"/>
+      </a:fillRef>
+      <a:effectRef idx="1">
+        <a:scrgbClr r="0" g="0" b="0"/>
+      </a:effectRef>
+      <a:fontRef idx="minor">
+        <a:schemeClr val="lt1"/>
+      </a:fontRef>
+    </dgm:style>
+  </dgm:styleLbl>
+  <dgm:styleLbl name="bgSibTrans2D1">
+    <dgm:scene3d>
+      <a:camera prst="orthographicFront"/>
+      <a:lightRig rig="threePt" dir="t"/>
+    </dgm:scene3d>
+    <dgm:sp3d/>
+    <dgm:txPr/>
+    <dgm:style>
+      <a:lnRef idx="0">
+        <a:scrgbClr r="0" g="0" b="0"/>
+      </a:lnRef>
+      <a:fillRef idx="1">
+        <a:scrgbClr r="0" g="0" b="0"/>
+      </a:fillRef>
+      <a:effectRef idx="1">
+        <a:scrgbClr r="0" g="0" b="0"/>
+      </a:effectRef>
+      <a:fontRef idx="minor">
+        <a:schemeClr val="lt1"/>
+      </a:fontRef>
+    </dgm:style>
+  </dgm:styleLbl>
+  <dgm:styleLbl name="sibTrans1D1">
+    <dgm:scene3d>
+      <a:camera prst="orthographicFront"/>
+      <a:lightRig rig="threePt" dir="t"/>
+    </dgm:scene3d>
+    <dgm:sp3d/>
+    <dgm:txPr/>
+    <dgm:style>
+      <a:lnRef idx="1">
+        <a:scrgbClr r="0" g="0" b="0"/>
+      </a:lnRef>
+      <a:fillRef idx="0">
+        <a:scrgbClr r="0" g="0" b="0"/>
+      </a:fillRef>
+      <a:effectRef idx="0">
+        <a:scrgbClr r="0" g="0" b="0"/>
+      </a:effectRef>
+      <a:fontRef idx="minor"/>
+    </dgm:style>
+  </dgm:styleLbl>
+  <dgm:styleLbl name="callout">
+    <dgm:scene3d>
+      <a:camera prst="orthographicFront"/>
+      <a:lightRig rig="threePt" dir="t"/>
+    </dgm:scene3d>
+    <dgm:sp3d/>
+    <dgm:txPr/>
+    <dgm:style>
+      <a:lnRef idx="2">
+        <a:scrgbClr r="0" g="0" b="0"/>
+      </a:lnRef>
+      <a:fillRef idx="1">
+        <a:scrgbClr r="0" g="0" b="0"/>
+      </a:fillRef>
+      <a:effectRef idx="1">
+        <a:scrgbClr r="0" g="0" b="0"/>
+      </a:effectRef>
+      <a:fontRef idx="minor"/>
+    </dgm:style>
+  </dgm:styleLbl>
+  <dgm:styleLbl name="asst0">
+    <dgm:scene3d>
+      <a:camera prst="orthographicFront"/>
+      <a:lightRig rig="threePt" dir="t"/>
+    </dgm:scene3d>
+    <dgm:sp3d/>
+    <dgm:txPr/>
+    <dgm:style>
+      <a:lnRef idx="3">
+        <a:scrgbClr r="0" g="0" b="0"/>
+      </a:lnRef>
+      <a:fillRef idx="1">
+        <a:scrgbClr r="0" g="0" b="0"/>
+      </a:fillRef>
+      <a:effectRef idx="1">
+        <a:scrgbClr r="0" g="0" b="0"/>
+      </a:effectRef>
+      <a:fontRef idx="minor">
+        <a:schemeClr val="lt1"/>
+      </a:fontRef>
+    </dgm:style>
+  </dgm:styleLbl>
+  <dgm:styleLbl name="asst1">
+    <dgm:scene3d>
+      <a:camera prst="orthographicFront"/>
+      <a:lightRig rig="threePt" dir="t"/>
+    </dgm:scene3d>
+    <dgm:sp3d/>
+    <dgm:txPr/>
+    <dgm:style>
+      <a:lnRef idx="3">
+        <a:scrgbClr r="0" g="0" b="0"/>
+      </a:lnRef>
+      <a:fillRef idx="1">
+        <a:scrgbClr r="0" g="0" b="0"/>
+      </a:fillRef>
+      <a:effectRef idx="1">
+        <a:scrgbClr r="0" g="0" b="0"/>
+      </a:effectRef>
+      <a:fontRef idx="minor">
+        <a:schemeClr val="lt1"/>
+      </a:fontRef>
+    </dgm:style>
+  </dgm:styleLbl>
+  <dgm:styleLbl name="asst2">
+    <dgm:scene3d>
+      <a:camera prst="orthographicFront"/>
+      <a:lightRig rig="threePt" dir="t"/>
+    </dgm:scene3d>
+    <dgm:sp3d/>
+    <dgm:txPr/>
+    <dgm:style>
+      <a:lnRef idx="3">
+        <a:scrgbClr r="0" g="0" b="0"/>
+      </a:lnRef>
+      <a:fillRef idx="1">
+        <a:scrgbClr r="0" g="0" b="0"/>
+      </a:fillRef>
+      <a:effectRef idx="1">
+        <a:scrgbClr r="0" g="0" b="0"/>
+      </a:effectRef>
+      <a:fontRef idx="minor">
+        <a:schemeClr val="lt1"/>
+      </a:fontRef>
+    </dgm:style>
+  </dgm:styleLbl>
+  <dgm:styleLbl name="asst3">
+    <dgm:scene3d>
+      <a:camera prst="orthographicFront"/>
+      <a:lightRig rig="threePt" dir="t"/>
+    </dgm:scene3d>
+    <dgm:sp3d/>
+    <dgm:txPr/>
+    <dgm:style>
+      <a:lnRef idx="3">
+        <a:scrgbClr r="0" g="0" b="0"/>
+      </a:lnRef>
+      <a:fillRef idx="1">
+        <a:scrgbClr r="0" g="0" b="0"/>
+      </a:fillRef>
+      <a:effectRef idx="1">
+        <a:scrgbClr r="0" g="0" b="0"/>
+      </a:effectRef>
+      <a:fontRef idx="minor">
+        <a:schemeClr val="lt1"/>
+      </a:fontRef>
+    </dgm:style>
+  </dgm:styleLbl>
+  <dgm:styleLbl name="asst4">
+    <dgm:scene3d>
+      <a:camera prst="orthographicFront"/>
+      <a:lightRig rig="threePt" dir="t"/>
+    </dgm:scene3d>
+    <dgm:sp3d/>
+    <dgm:txPr/>
+    <dgm:style>
+      <a:lnRef idx="3">
+        <a:scrgbClr r="0" g="0" b="0"/>
+      </a:lnRef>
+      <a:fillRef idx="1">
+        <a:scrgbClr r="0" g="0" b="0"/>
+      </a:fillRef>
+      <a:effectRef idx="1">
+        <a:scrgbClr r="0" g="0" b="0"/>
+      </a:effectRef>
+      <a:fontRef idx="minor">
+        <a:schemeClr val="lt1"/>
+      </a:fontRef>
+    </dgm:style>
+  </dgm:styleLbl>
+  <dgm:styleLbl name="parChTrans2D1">
+    <dgm:scene3d>
+      <a:camera prst="orthographicFront"/>
+      <a:lightRig rig="threePt" dir="t"/>
+    </dgm:scene3d>
+    <dgm:sp3d/>
+    <dgm:txPr/>
+    <dgm:style>
+      <a:lnRef idx="3">
+        <a:scrgbClr r="0" g="0" b="0"/>
+      </a:lnRef>
+      <a:fillRef idx="1">
+        <a:scrgbClr r="0" g="0" b="0"/>
+      </a:fillRef>
+      <a:effectRef idx="1">
+        <a:scrgbClr r="0" g="0" b="0"/>
+      </a:effectRef>
+      <a:fontRef idx="minor">
+        <a:schemeClr val="lt1"/>
+      </a:fontRef>
+    </dgm:style>
+  </dgm:styleLbl>
+  <dgm:styleLbl name="parChTrans2D2">
+    <dgm:scene3d>
+      <a:camera prst="orthographicFront"/>
+      <a:lightRig rig="threePt" dir="t"/>
+    </dgm:scene3d>
+    <dgm:sp3d/>
+    <dgm:txPr/>
+    <dgm:style>
+      <a:lnRef idx="3">
+        <a:scrgbClr r="0" g="0" b="0"/>
+      </a:lnRef>
+      <a:fillRef idx="1">
+        <a:scrgbClr r="0" g="0" b="0"/>
+      </a:fillRef>
+      <a:effectRef idx="1">
+        <a:scrgbClr r="0" g="0" b="0"/>
+      </a:effectRef>
+      <a:fontRef idx="minor">
+        <a:schemeClr val="lt1"/>
+      </a:fontRef>
+    </dgm:style>
+  </dgm:styleLbl>
+  <dgm:styleLbl name="parChTrans2D3">
+    <dgm:scene3d>
+      <a:camera prst="orthographicFront"/>
+      <a:lightRig rig="threePt" dir="t"/>
+    </dgm:scene3d>
+    <dgm:sp3d/>
+    <dgm:txPr/>
+    <dgm:style>
+      <a:lnRef idx="3">
+        <a:scrgbClr r="0" g="0" b="0"/>
+      </a:lnRef>
+      <a:fillRef idx="1">
+        <a:scrgbClr r="0" g="0" b="0"/>
+      </a:fillRef>
+      <a:effectRef idx="1">
+        <a:scrgbClr r="0" g="0" b="0"/>
+      </a:effectRef>
+      <a:fontRef idx="minor">
+        <a:schemeClr val="lt1"/>
+      </a:fontRef>
+    </dgm:style>
+  </dgm:styleLbl>
+  <dgm:styleLbl name="parChTrans2D4">
+    <dgm:scene3d>
+      <a:camera prst="orthographicFront"/>
+      <a:lightRig rig="threePt" dir="t"/>
+    </dgm:scene3d>
+    <dgm:sp3d/>
+    <dgm:txPr/>
+    <dgm:style>
+      <a:lnRef idx="3">
+        <a:scrgbClr r="0" g="0" b="0"/>
+      </a:lnRef>
+      <a:fillRef idx="1">
+        <a:scrgbClr r="0" g="0" b="0"/>
+      </a:fillRef>
+      <a:effectRef idx="1">
+        <a:scrgbClr r="0" g="0" b="0"/>
+      </a:effectRef>
+      <a:fontRef idx="minor">
+        <a:schemeClr val="lt1"/>
+      </a:fontRef>
+    </dgm:style>
+  </dgm:styleLbl>
+  <dgm:styleLbl name="parChTrans1D1">
+    <dgm:scene3d>
+      <a:camera prst="orthographicFront"/>
+      <a:lightRig rig="threePt" dir="t"/>
+    </dgm:scene3d>
+    <dgm:sp3d/>
+    <dgm:txPr/>
+    <dgm:style>
+      <a:lnRef idx="2">
+        <a:scrgbClr r="0" g="0" b="0"/>
+      </a:lnRef>
+      <a:fillRef idx="0">
+        <a:scrgbClr r="0" g="0" b="0"/>
+      </a:fillRef>
+      <a:effectRef idx="0">
+        <a:scrgbClr r="0" g="0" b="0"/>
+      </a:effectRef>
+      <a:fontRef idx="minor"/>
+    </dgm:style>
+  </dgm:styleLbl>
+  <dgm:styleLbl name="parChTrans1D2">
+    <dgm:scene3d>
+      <a:camera prst="orthographicFront"/>
+      <a:lightRig rig="threePt" dir="t"/>
+    </dgm:scene3d>
+    <dgm:sp3d/>
+    <dgm:txPr/>
+    <dgm:style>
+      <a:lnRef idx="2">
+        <a:scrgbClr r="0" g="0" b="0"/>
+      </a:lnRef>
+      <a:fillRef idx="0">
+        <a:scrgbClr r="0" g="0" b="0"/>
+      </a:fillRef>
+      <a:effectRef idx="0">
+        <a:scrgbClr r="0" g="0" b="0"/>
+      </a:effectRef>
+      <a:fontRef idx="minor"/>
+    </dgm:style>
+  </dgm:styleLbl>
+  <dgm:styleLbl name="parChTrans1D3">
+    <dgm:scene3d>
+      <a:camera prst="orthographicFront"/>
+      <a:lightRig rig="threePt" dir="t"/>
+    </dgm:scene3d>
+    <dgm:sp3d/>
+    <dgm:txPr/>
+    <dgm:style>
+      <a:lnRef idx="2">
+        <a:scrgbClr r="0" g="0" b="0"/>
+      </a:lnRef>
+      <a:fillRef idx="0">
+        <a:scrgbClr r="0" g="0" b="0"/>
+      </a:fillRef>
+      <a:effectRef idx="0">
+        <a:scrgbClr r="0" g="0" b="0"/>
+      </a:effectRef>
+      <a:fontRef idx="minor"/>
+    </dgm:style>
+  </dgm:styleLbl>
+  <dgm:styleLbl name="parChTrans1D4">
+    <dgm:scene3d>
+      <a:camera prst="orthographicFront"/>
+      <a:lightRig rig="threePt" dir="t"/>
+    </dgm:scene3d>
+    <dgm:sp3d/>
+    <dgm:txPr/>
+    <dgm:style>
+      <a:lnRef idx="2">
+        <a:scrgbClr r="0" g="0" b="0"/>
+      </a:lnRef>
+      <a:fillRef idx="0">
+        <a:scrgbClr r="0" g="0" b="0"/>
+      </a:fillRef>
+      <a:effectRef idx="0">
+        <a:scrgbClr r="0" g="0" b="0"/>
+      </a:effectRef>
+      <a:fontRef idx="minor"/>
+    </dgm:style>
+  </dgm:styleLbl>
+  <dgm:styleLbl name="fgAcc1">
+    <dgm:scene3d>
+      <a:camera prst="orthographicFront"/>
+      <a:lightRig rig="threePt" dir="t"/>
+    </dgm:scene3d>
+    <dgm:sp3d/>
+    <dgm:txPr/>
+    <dgm:style>
+      <a:lnRef idx="2">
+        <a:scrgbClr r="0" g="0" b="0"/>
+      </a:lnRef>
+      <a:fillRef idx="1">
+        <a:scrgbClr r="0" g="0" b="0"/>
+      </a:fillRef>
+      <a:effectRef idx="0">
+        <a:scrgbClr r="0" g="0" b="0"/>
+      </a:effectRef>
+      <a:fontRef idx="minor"/>
+    </dgm:style>
+  </dgm:styleLbl>
+  <dgm:styleLbl name="conFgAcc1">
+    <dgm:scene3d>
+      <a:camera prst="orthographicFront"/>
+      <a:lightRig rig="threePt" dir="t"/>
+    </dgm:scene3d>
+    <dgm:sp3d/>
+    <dgm:txPr/>
+    <dgm:style>
+      <a:lnRef idx="2">
+        <a:scrgbClr r="0" g="0" b="0"/>
+      </a:lnRef>
+      <a:fillRef idx="1">
+        <a:scrgbClr r="0" g="0" b="0"/>
+      </a:fillRef>
+      <a:effectRef idx="0">
+        <a:scrgbClr r="0" g="0" b="0"/>
+      </a:effectRef>
+      <a:fontRef idx="minor"/>
+    </dgm:style>
+  </dgm:styleLbl>
+  <dgm:styleLbl name="alignAcc1">
+    <dgm:scene3d>
+      <a:camera prst="orthographicFront"/>
+      <a:lightRig rig="threePt" dir="t"/>
+    </dgm:scene3d>
+    <dgm:sp3d/>
+    <dgm:txPr/>
+    <dgm:style>
+      <a:lnRef idx="2">
+        <a:scrgbClr r="0" g="0" b="0"/>
+      </a:lnRef>
+      <a:fillRef idx="1">
+        <a:scrgbClr r="0" g="0" b="0"/>
+      </a:fillRef>
+      <a:effectRef idx="0">
+        <a:scrgbClr r="0" g="0" b="0"/>
+      </a:effectRef>
+      <a:fontRef idx="minor"/>
+    </dgm:style>
+  </dgm:styleLbl>
+  <dgm:styleLbl name="trAlignAcc1">
+    <dgm:scene3d>
+      <a:camera prst="orthographicFront"/>
+      <a:lightRig rig="threePt" dir="t"/>
+    </dgm:scene3d>
+    <dgm:sp3d/>
+    <dgm:txPr/>
+    <dgm:style>
+      <a:lnRef idx="1">
+        <a:scrgbClr r="0" g="0" b="0"/>
+      </a:lnRef>
+      <a:fillRef idx="1">
+        <a:scrgbClr r="0" g="0" b="0"/>
+      </a:fillRef>
+      <a:effectRef idx="0">
+        <a:scrgbClr r="0" g="0" b="0"/>
+      </a:effectRef>
+      <a:fontRef idx="minor"/>
+    </dgm:style>
+  </dgm:styleLbl>
+  <dgm:styleLbl name="bgAcc1">
+    <dgm:scene3d>
+      <a:camera prst="orthographicFront"/>
+      <a:lightRig rig="threePt" dir="t"/>
+    </dgm:scene3d>
+    <dgm:sp3d/>
+    <dgm:txPr/>
+    <dgm:style>
+      <a:lnRef idx="2">
+        <a:scrgbClr r="0" g="0" b="0"/>
+      </a:lnRef>
+      <a:fillRef idx="1">
+        <a:scrgbClr r="0" g="0" b="0"/>
+      </a:fillRef>
+      <a:effectRef idx="0">
+        <a:scrgbClr r="0" g="0" b="0"/>
+      </a:effectRef>
+      <a:fontRef idx="minor"/>
+    </dgm:style>
+  </dgm:styleLbl>
+  <dgm:styleLbl name="solidFgAcc1">
+    <dgm:scene3d>
+      <a:camera prst="orthographicFront"/>
+      <a:lightRig rig="threePt" dir="t"/>
+    </dgm:scene3d>
+    <dgm:sp3d/>
+    <dgm:txPr/>
+    <dgm:style>
+      <a:lnRef idx="2">
+        <a:scrgbClr r="0" g="0" b="0"/>
+      </a:lnRef>
+      <a:fillRef idx="1">
+        <a:scrgbClr r="0" g="0" b="0"/>
+      </a:fillRef>
+      <a:effectRef idx="0">
+        <a:scrgbClr r="0" g="0" b="0"/>
+      </a:effectRef>
+      <a:fontRef idx="minor"/>
+    </dgm:style>
+  </dgm:styleLbl>
+  <dgm:styleLbl name="solidAlignAcc1">
+    <dgm:scene3d>
+      <a:camera prst="orthographicFront"/>
+      <a:lightRig rig="threePt" dir="t"/>
+    </dgm:scene3d>
+    <dgm:sp3d/>
+    <dgm:txPr/>
+    <dgm:style>
+      <a:lnRef idx="2">
+        <a:scrgbClr r="0" g="0" b="0"/>
+      </a:lnRef>
+      <a:fillRef idx="1">
+        <a:scrgbClr r="0" g="0" b="0"/>
+      </a:fillRef>
+      <a:effectRef idx="0">
+        <a:scrgbClr r="0" g="0" b="0"/>
+      </a:effectRef>
+      <a:fontRef idx="minor"/>
+    </dgm:style>
+  </dgm:styleLbl>
+  <dgm:styleLbl name="solidBgAcc1">
+    <dgm:scene3d>
+      <a:camera prst="orthographicFront"/>
+      <a:lightRig rig="threePt" dir="t"/>
+    </dgm:scene3d>
+    <dgm:sp3d/>
+    <dgm:txPr/>
+    <dgm:style>
+      <a:lnRef idx="2">
+        <a:scrgbClr r="0" g="0" b="0"/>
+      </a:lnRef>
+      <a:fillRef idx="1">
+        <a:scrgbClr r="0" g="0" b="0"/>
+      </a:fillRef>
+      <a:effectRef idx="0">
+        <a:scrgbClr r="0" g="0" b="0"/>
+      </a:effectRef>
+      <a:fontRef idx="minor"/>
+    </dgm:style>
+  </dgm:styleLbl>
+  <dgm:styleLbl name="fgAccFollowNode1">
+    <dgm:scene3d>
+      <a:camera prst="orthographicFront"/>
+      <a:lightRig rig="threePt" dir="t"/>
+    </dgm:scene3d>
+    <dgm:sp3d/>
+    <dgm:txPr/>
+    <dgm:style>
+      <a:lnRef idx="2">
+        <a:scrgbClr r="0" g="0" b="0"/>
+      </a:lnRef>
+      <a:fillRef idx="1">
+        <a:scrgbClr r="0" g="0" b="0"/>
+      </a:fillRef>
+      <a:effectRef idx="0">
+        <a:scrgbClr r="0" g="0" b="0"/>
+      </a:effectRef>
+      <a:fontRef idx="minor"/>
+    </dgm:style>
+  </dgm:styleLbl>
+  <dgm:styleLbl name="alignAccFollowNode1">
+    <dgm:scene3d>
+      <a:camera prst="orthographicFront"/>
+      <a:lightRig rig="threePt" dir="t"/>
+    </dgm:scene3d>
+    <dgm:sp3d/>
+    <dgm:txPr/>
+    <dgm:style>
+      <a:lnRef idx="2">
+        <a:scrgbClr r="0" g="0" b="0"/>
+      </a:lnRef>
+      <a:fillRef idx="1">
+        <a:scrgbClr r="0" g="0" b="0"/>
+      </a:fillRef>
+      <a:effectRef idx="0">
+        <a:scrgbClr r="0" g="0" b="0"/>
+      </a:effectRef>
+      <a:fontRef idx="minor"/>
+    </dgm:style>
+  </dgm:styleLbl>
+  <dgm:styleLbl name="bgAccFollowNode1">
+    <dgm:scene3d>
+      <a:camera prst="orthographicFront"/>
+      <a:lightRig rig="threePt" dir="t"/>
+    </dgm:scene3d>
+    <dgm:sp3d/>
+    <dgm:txPr/>
+    <dgm:style>
+      <a:lnRef idx="2">
+        <a:scrgbClr r="0" g="0" b="0"/>
+      </a:lnRef>
+      <a:fillRef idx="1">
+        <a:scrgbClr r="0" g="0" b="0"/>
+      </a:fillRef>
+      <a:effectRef idx="0">
+        <a:scrgbClr r="0" g="0" b="0"/>
+      </a:effectRef>
+      <a:fontRef idx="minor"/>
+    </dgm:style>
+  </dgm:styleLbl>
+  <dgm:styleLbl name="fgAcc0">
+    <dgm:scene3d>
+      <a:camera prst="orthographicFront"/>
+      <a:lightRig rig="threePt" dir="t"/>
+    </dgm:scene3d>
+    <dgm:sp3d/>
+    <dgm:txPr/>
+    <dgm:style>
+      <a:lnRef idx="2">
+        <a:scrgbClr r="0" g="0" b="0"/>
+      </a:lnRef>
+      <a:fillRef idx="1">
+        <a:scrgbClr r="0" g="0" b="0"/>
+      </a:fillRef>
+      <a:effectRef idx="0">
+        <a:scrgbClr r="0" g="0" b="0"/>
+      </a:effectRef>
+      <a:fontRef idx="minor"/>
+    </dgm:style>
+  </dgm:styleLbl>
+  <dgm:styleLbl name="fgAcc2">
+    <dgm:scene3d>
+      <a:camera prst="orthographicFront"/>
+      <a:lightRig rig="threePt" dir="t"/>
+    </dgm:scene3d>
+    <dgm:sp3d/>
+    <dgm:txPr/>
+    <dgm:style>
+      <a:lnRef idx="2">
+        <a:scrgbClr r="0" g="0" b="0"/>
+      </a:lnRef>
+      <a:fillRef idx="1">
+        <a:scrgbClr r="0" g="0" b="0"/>
+      </a:fillRef>
+      <a:effectRef idx="0">
+        <a:scrgbClr r="0" g="0" b="0"/>
+      </a:effectRef>
+      <a:fontRef idx="minor"/>
+    </dgm:style>
+  </dgm:styleLbl>
+  <dgm:styleLbl name="fgAcc3">
+    <dgm:scene3d>
+      <a:camera prst="orthographicFront"/>
+      <a:lightRig rig="threePt" dir="t"/>
+    </dgm:scene3d>
+    <dgm:sp3d/>
+    <dgm:txPr/>
+    <dgm:style>
+      <a:lnRef idx="2">
+        <a:scrgbClr r="0" g="0" b="0"/>
+      </a:lnRef>
+      <a:fillRef idx="1">
+        <a:scrgbClr r="0" g="0" b="0"/>
+      </a:fillRef>
+      <a:effectRef idx="0">
+        <a:scrgbClr r="0" g="0" b="0"/>
+      </a:effectRef>
+      <a:fontRef idx="minor"/>
+    </dgm:style>
+  </dgm:styleLbl>
+  <dgm:styleLbl name="fgAcc4">
+    <dgm:scene3d>
+      <a:camera prst="orthographicFront"/>
+      <a:lightRig rig="threePt" dir="t"/>
+    </dgm:scene3d>
+    <dgm:sp3d/>
+    <dgm:txPr/>
+    <dgm:style>
+      <a:lnRef idx="2">
+        <a:scrgbClr r="0" g="0" b="0"/>
+      </a:lnRef>
+      <a:fillRef idx="1">
+        <a:scrgbClr r="0" g="0" b="0"/>
+      </a:fillRef>
+      <a:effectRef idx="0">
+        <a:scrgbClr r="0" g="0" b="0"/>
+      </a:effectRef>
+      <a:fontRef idx="minor"/>
+    </dgm:style>
+  </dgm:styleLbl>
+  <dgm:styleLbl name="bgShp">
+    <dgm:scene3d>
+      <a:camera prst="orthographicFront"/>
+      <a:lightRig rig="threePt" dir="t"/>
+    </dgm:scene3d>
+    <dgm:sp3d/>
+    <dgm:txPr/>
+    <dgm:style>
+      <a:lnRef idx="0">
+        <a:scrgbClr r="0" g="0" b="0"/>
+      </a:lnRef>
+      <a:fillRef idx="1">
+        <a:scrgbClr r="0" g="0" b="0"/>
+      </a:fillRef>
+      <a:effectRef idx="0">
+        <a:scrgbClr r="0" g="0" b="0"/>
+      </a:effectRef>
+      <a:fontRef idx="minor"/>
+    </dgm:style>
+  </dgm:styleLbl>
+  <dgm:styleLbl name="dkBgShp">
+    <dgm:scene3d>
+      <a:camera prst="orthographicFront"/>
+      <a:lightRig rig="threePt" dir="t"/>
+    </dgm:scene3d>
+    <dgm:sp3d/>
+    <dgm:txPr/>
+    <dgm:style>
+      <a:lnRef idx="0">
+        <a:scrgbClr r="0" g="0" b="0"/>
+      </a:lnRef>
+      <a:fillRef idx="1">
+        <a:scrgbClr r="0" g="0" b="0"/>
+      </a:fillRef>
+      <a:effectRef idx="0">
+        <a:scrgbClr r="0" g="0" b="0"/>
+      </a:effectRef>
+      <a:fontRef idx="minor"/>
+    </dgm:style>
+  </dgm:styleLbl>
+  <dgm:styleLbl name="trBgShp">
+    <dgm:scene3d>
+      <a:camera prst="orthographicFront"/>
+      <a:lightRig rig="threePt" dir="t"/>
+    </dgm:scene3d>
+    <dgm:sp3d/>
+    <dgm:txPr/>
+    <dgm:style>
+      <a:lnRef idx="0">
+        <a:scrgbClr r="0" g="0" b="0"/>
+      </a:lnRef>
+      <a:fillRef idx="1">
+        <a:scrgbClr r="0" g="0" b="0"/>
+      </a:fillRef>
+      <a:effectRef idx="0">
+        <a:scrgbClr r="0" g="0" b="0"/>
+      </a:effectRef>
+      <a:fontRef idx="minor"/>
+    </dgm:style>
+  </dgm:styleLbl>
+  <dgm:styleLbl name="fgShp">
+    <dgm:scene3d>
+      <a:camera prst="orthographicFront"/>
+      <a:lightRig rig="threePt" dir="t"/>
+    </dgm:scene3d>
+    <dgm:sp3d/>
+    <dgm:txPr/>
+    <dgm:style>
+      <a:lnRef idx="3">
+        <a:scrgbClr r="0" g="0" b="0"/>
+      </a:lnRef>
+      <a:fillRef idx="1">
+        <a:scrgbClr r="0" g="0" b="0"/>
+      </a:fillRef>
+      <a:effectRef idx="1">
+        <a:scrgbClr r="0" g="0" b="0"/>
+      </a:effectRef>
+      <a:fontRef idx="minor"/>
+    </dgm:style>
+  </dgm:styleLbl>
+  <dgm:styleLbl name="revTx">
+    <dgm:scene3d>
+      <a:camera prst="orthographicFront"/>
+      <a:lightRig rig="threePt" dir="t"/>
+    </dgm:scene3d>
+    <dgm:sp3d/>
+    <dgm:txPr/>
+    <dgm:style>
+      <a:lnRef idx="0">
+        <a:scrgbClr r="0" g="0" b="0"/>
+      </a:lnRef>
+      <a:fillRef idx="0">
+        <a:scrgbClr r="0" g="0" b="0"/>
+      </a:fillRef>
+      <a:effectRef idx="0">
+        <a:scrgbClr r="0" g="0" b="0"/>
+      </a:effectRef>
+      <a:fontRef idx="minor"/>
+    </dgm:style>
+  </dgm:styleLbl>
+</dgm:styleDef>
+</file>
+
+<file path=ppt/diagrams/quickStyle2.xml><?xml version="1.0" encoding="utf-8"?>
+<dgm:styleDef xmlns:dgm="http://schemas.openxmlformats.org/drawingml/2006/diagram" xmlns:a="http://schemas.openxmlformats.org/drawingml/2006/main" uniqueId="urn:microsoft.com/office/officeart/2005/8/quickstyle/simple2">
+  <dgm:title val=""/>
+  <dgm:desc val=""/>
+  <dgm:catLst>
+    <dgm:cat type="simple" pri="10200"/>
+  </dgm:catLst>
+  <dgm:scene3d>
+    <a:camera prst="orthographicFront"/>
+    <a:lightRig rig="threePt" dir="t"/>
+  </dgm:scene3d>
+  <dgm:styleLbl name="node0">
+    <dgm:scene3d>
+      <a:camera prst="orthographicFront"/>
+      <a:lightRig rig="threePt" dir="t"/>
+    </dgm:scene3d>
+    <dgm:sp3d/>
+    <dgm:txPr/>
+    <dgm:style>
+      <a:lnRef idx="3">
+        <a:scrgbClr r="0" g="0" b="0"/>
+      </a:lnRef>
+      <a:fillRef idx="1">
+        <a:scrgbClr r="0" g="0" b="0"/>
+      </a:fillRef>
+      <a:effectRef idx="1">
+        <a:scrgbClr r="0" g="0" b="0"/>
+      </a:effectRef>
+      <a:fontRef idx="minor">
+        <a:schemeClr val="lt1"/>
+      </a:fontRef>
+    </dgm:style>
+  </dgm:styleLbl>
+  <dgm:styleLbl name="lnNode1">
+    <dgm:scene3d>
+      <a:camera prst="orthographicFront"/>
+      <a:lightRig rig="threePt" dir="t"/>
+    </dgm:scene3d>
+    <dgm:sp3d/>
+    <dgm:txPr/>
+    <dgm:style>
+      <a:lnRef idx="3">
+        <a:scrgbClr r="0" g="0" b="0"/>
+      </a:lnRef>
+      <a:fillRef idx="1">
+        <a:scrgbClr r="0" g="0" b="0"/>
+      </a:fillRef>
+      <a:effectRef idx="1">
+        <a:scrgbClr r="0" g="0" b="0"/>
+      </a:effectRef>
+      <a:fontRef idx="minor">
+        <a:schemeClr val="lt1"/>
+      </a:fontRef>
+    </dgm:style>
+  </dgm:styleLbl>
+  <dgm:styleLbl name="vennNode1">
+    <dgm:scene3d>
+      <a:camera prst="orthographicFront"/>
+      <a:lightRig rig="threePt" dir="t"/>
+    </dgm:scene3d>
+    <dgm:sp3d/>
+    <dgm:txPr/>
+    <dgm:style>
+      <a:lnRef idx="3">
+        <a:scrgbClr r="0" g="0" b="0"/>
+      </a:lnRef>
+      <a:fillRef idx="1">
+        <a:scrgbClr r="0" g="0" b="0"/>
+      </a:fillRef>
+      <a:effectRef idx="0">
+        <a:scrgbClr r="0" g="0" b="0"/>
+      </a:effectRef>
+      <a:fontRef idx="minor">
+        <a:schemeClr val="tx1"/>
+      </a:fontRef>
+    </dgm:style>
+  </dgm:styleLbl>
+  <dgm:styleLbl name="alignNode1">
+    <dgm:scene3d>
+      <a:camera prst="orthographicFront"/>
+      <a:lightRig rig="threePt" dir="t"/>
+    </dgm:scene3d>
+    <dgm:sp3d/>
+    <dgm:txPr/>
+    <dgm:style>
+      <a:lnRef idx="2">
+        <a:scrgbClr r="0" g="0" b="0"/>
+      </a:lnRef>
+      <a:fillRef idx="1">
+        <a:scrgbClr r="0" g="0" b="0"/>
+      </a:fillRef>
+      <a:effectRef idx="1">
+        <a:scrgbClr r="0" g="0" b="0"/>
+      </a:effectRef>
+      <a:fontRef idx="minor">
+        <a:schemeClr val="lt1"/>
+      </a:fontRef>
+    </dgm:style>
+  </dgm:styleLbl>
+  <dgm:styleLbl name="node1">
+    <dgm:scene3d>
+      <a:camera prst="orthographicFront"/>
+      <a:lightRig rig="threePt" dir="t"/>
+    </dgm:scene3d>
+    <dgm:sp3d/>
+    <dgm:txPr/>
+    <dgm:style>
+      <a:lnRef idx="3">
+        <a:scrgbClr r="0" g="0" b="0"/>
+      </a:lnRef>
+      <a:fillRef idx="1">
+        <a:scrgbClr r="0" g="0" b="0"/>
+      </a:fillRef>
+      <a:effectRef idx="1">
+        <a:scrgbClr r="0" g="0" b="0"/>
+      </a:effectRef>
+      <a:fontRef idx="minor">
+        <a:schemeClr val="lt1"/>
+      </a:fontRef>
+    </dgm:style>
+  </dgm:styleLbl>
+  <dgm:styleLbl name="node2">
+    <dgm:scene3d>
+      <a:camera prst="orthographicFront"/>
+      <a:lightRig rig="threePt" dir="t"/>
+    </dgm:scene3d>
+    <dgm:sp3d/>
+    <dgm:txPr/>
+    <dgm:style>
+      <a:lnRef idx="3">
+        <a:scrgbClr r="0" g="0" b="0"/>
+      </a:lnRef>
+      <a:fillRef idx="1">
+        <a:scrgbClr r="0" g="0" b="0"/>
+      </a:fillRef>
+      <a:effectRef idx="1">
+        <a:scrgbClr r="0" g="0" b="0"/>
+      </a:effectRef>
+      <a:fontRef idx="minor">
+        <a:schemeClr val="lt1"/>
+      </a:fontRef>
+    </dgm:style>
+  </dgm:styleLbl>
+  <dgm:styleLbl name="node3">
+    <dgm:scene3d>
+      <a:camera prst="orthographicFront"/>
+      <a:lightRig rig="threePt" dir="t"/>
+    </dgm:scene3d>
+    <dgm:sp3d/>
+    <dgm:txPr/>
+    <dgm:style>
+      <a:lnRef idx="3">
+        <a:scrgbClr r="0" g="0" b="0"/>
+      </a:lnRef>
+      <a:fillRef idx="1">
+        <a:scrgbClr r="0" g="0" b="0"/>
+      </a:fillRef>
+      <a:effectRef idx="1">
+        <a:scrgbClr r="0" g="0" b="0"/>
+      </a:effectRef>
+      <a:fontRef idx="minor">
+        <a:schemeClr val="lt1"/>
+      </a:fontRef>
+    </dgm:style>
+  </dgm:styleLbl>
+  <dgm:styleLbl name="node4">
+    <dgm:scene3d>
+      <a:camera prst="orthographicFront"/>
+      <a:lightRig rig="threePt" dir="t"/>
+    </dgm:scene3d>
+    <dgm:sp3d/>
+    <dgm:txPr/>
+    <dgm:style>
+      <a:lnRef idx="3">
+        <a:scrgbClr r="0" g="0" b="0"/>
+      </a:lnRef>
+      <a:fillRef idx="1">
+        <a:scrgbClr r="0" g="0" b="0"/>
+      </a:fillRef>
+      <a:effectRef idx="1">
+        <a:scrgbClr r="0" g="0" b="0"/>
+      </a:effectRef>
+      <a:fontRef idx="minor">
+        <a:schemeClr val="lt1"/>
+      </a:fontRef>
+    </dgm:style>
+  </dgm:styleLbl>
+  <dgm:styleLbl name="fgImgPlace1">
+    <dgm:scene3d>
+      <a:camera prst="orthographicFront"/>
+      <a:lightRig rig="threePt" dir="t"/>
+    </dgm:scene3d>
+    <dgm:sp3d/>
+    <dgm:txPr/>
+    <dgm:style>
+      <a:lnRef idx="3">
+        <a:scrgbClr r="0" g="0" b="0"/>
+      </a:lnRef>
+      <a:fillRef idx="1">
+        <a:scrgbClr r="0" g="0" b="0"/>
+      </a:fillRef>
+      <a:effectRef idx="1">
+        <a:scrgbClr r="0" g="0" b="0"/>
+      </a:effectRef>
+      <a:fontRef idx="minor"/>
+    </dgm:style>
+  </dgm:styleLbl>
+  <dgm:styleLbl name="alignImgPlace1">
+    <dgm:scene3d>
+      <a:camera prst="orthographicFront"/>
+      <a:lightRig rig="threePt" dir="t"/>
+    </dgm:scene3d>
+    <dgm:sp3d/>
+    <dgm:txPr/>
+    <dgm:style>
+      <a:lnRef idx="3">
+        <a:scrgbClr r="0" g="0" b="0"/>
+      </a:lnRef>
+      <a:fillRef idx="1">
+        <a:scrgbClr r="0" g="0" b="0"/>
+      </a:fillRef>
+      <a:effectRef idx="1">
+        <a:scrgbClr r="0" g="0" b="0"/>
+      </a:effectRef>
+      <a:fontRef idx="minor"/>
+    </dgm:style>
+  </dgm:styleLbl>
+  <dgm:styleLbl name="bgImgPlace1">
+    <dgm:scene3d>
+      <a:camera prst="orthographicFront"/>
+      <a:lightRig rig="threePt" dir="t"/>
+    </dgm:scene3d>
+    <dgm:sp3d/>
+    <dgm:txPr/>
+    <dgm:style>
+      <a:lnRef idx="3">
+        <a:scrgbClr r="0" g="0" b="0"/>
+      </a:lnRef>
+      <a:fillRef idx="1">
+        <a:scrgbClr r="0" g="0" b="0"/>
+      </a:fillRef>
+      <a:effectRef idx="1">
+        <a:scrgbClr r="0" g="0" b="0"/>
+      </a:effectRef>
+      <a:fontRef idx="minor"/>
+    </dgm:style>
+  </dgm:styleLbl>
+  <dgm:styleLbl name="sibTrans2D1">
+    <dgm:scene3d>
+      <a:camera prst="orthographicFront"/>
+      <a:lightRig rig="threePt" dir="t"/>
+    </dgm:scene3d>
+    <dgm:sp3d/>
+    <dgm:txPr/>
+    <dgm:style>
+      <a:lnRef idx="0">
+        <a:scrgbClr r="0" g="0" b="0"/>
+      </a:lnRef>
+      <a:fillRef idx="1">
+        <a:scrgbClr r="0" g="0" b="0"/>
+      </a:fillRef>
+      <a:effectRef idx="1">
+        <a:scrgbClr r="0" g="0" b="0"/>
+      </a:effectRef>
+      <a:fontRef idx="minor">
+        <a:schemeClr val="lt1"/>
+      </a:fontRef>
+    </dgm:style>
+  </dgm:styleLbl>
+  <dgm:styleLbl name="fgSibTrans2D1">
+    <dgm:scene3d>
+      <a:camera prst="orthographicFront"/>
+      <a:lightRig rig="threePt" dir="t"/>
+    </dgm:scene3d>
+    <dgm:sp3d/>
+    <dgm:txPr/>
+    <dgm:style>
+      <a:lnRef idx="0">
+        <a:scrgbClr r="0" g="0" b="0"/>
+      </a:lnRef>
+      <a:fillRef idx="1">
+        <a:scrgbClr r="0" g="0" b="0"/>
+      </a:fillRef>
+      <a:effectRef idx="1">
+        <a:scrgbClr r="0" g="0" b="0"/>
+      </a:effectRef>
+      <a:fontRef idx="minor">
+        <a:schemeClr val="lt1"/>
+      </a:fontRef>
+    </dgm:style>
+  </dgm:styleLbl>
+  <dgm:styleLbl name="bgSibTrans2D1">
+    <dgm:scene3d>
+      <a:camera prst="orthographicFront"/>
+      <a:lightRig rig="threePt" dir="t"/>
+    </dgm:scene3d>
+    <dgm:sp3d/>
+    <dgm:txPr/>
+    <dgm:style>
+      <a:lnRef idx="0">
+        <a:scrgbClr r="0" g="0" b="0"/>
+      </a:lnRef>
+      <a:fillRef idx="1">
+        <a:scrgbClr r="0" g="0" b="0"/>
+      </a:fillRef>
+      <a:effectRef idx="1">
+        <a:scrgbClr r="0" g="0" b="0"/>
+      </a:effectRef>
+      <a:fontRef idx="minor">
+        <a:schemeClr val="lt1"/>
+      </a:fontRef>
+    </dgm:style>
+  </dgm:styleLbl>
+  <dgm:styleLbl name="sibTrans1D1">
+    <dgm:scene3d>
+      <a:camera prst="orthographicFront"/>
+      <a:lightRig rig="threePt" dir="t"/>
+    </dgm:scene3d>
+    <dgm:sp3d/>
+    <dgm:txPr/>
+    <dgm:style>
+      <a:lnRef idx="1">
+        <a:scrgbClr r="0" g="0" b="0"/>
+      </a:lnRef>
+      <a:fillRef idx="0">
+        <a:scrgbClr r="0" g="0" b="0"/>
+      </a:fillRef>
+      <a:effectRef idx="0">
+        <a:scrgbClr r="0" g="0" b="0"/>
+      </a:effectRef>
+      <a:fontRef idx="minor"/>
+    </dgm:style>
+  </dgm:styleLbl>
+  <dgm:styleLbl name="callout">
+    <dgm:scene3d>
+      <a:camera prst="orthographicFront"/>
+      <a:lightRig rig="threePt" dir="t"/>
+    </dgm:scene3d>
+    <dgm:sp3d/>
+    <dgm:txPr/>
+    <dgm:style>
+      <a:lnRef idx="2">
+        <a:scrgbClr r="0" g="0" b="0"/>
+      </a:lnRef>
+      <a:fillRef idx="1">
+        <a:scrgbClr r="0" g="0" b="0"/>
+      </a:fillRef>
+      <a:effectRef idx="1">
+        <a:scrgbClr r="0" g="0" b="0"/>
+      </a:effectRef>
+      <a:fontRef idx="minor"/>
+    </dgm:style>
+  </dgm:styleLbl>
+  <dgm:styleLbl name="asst0">
+    <dgm:scene3d>
+      <a:camera prst="orthographicFront"/>
+      <a:lightRig rig="threePt" dir="t"/>
+    </dgm:scene3d>
+    <dgm:sp3d/>
+    <dgm:txPr/>
+    <dgm:style>
+      <a:lnRef idx="3">
+        <a:scrgbClr r="0" g="0" b="0"/>
+      </a:lnRef>
+      <a:fillRef idx="1">
+        <a:scrgbClr r="0" g="0" b="0"/>
+      </a:fillRef>
+      <a:effectRef idx="1">
+        <a:scrgbClr r="0" g="0" b="0"/>
+      </a:effectRef>
+      <a:fontRef idx="minor">
+        <a:schemeClr val="lt1"/>
+      </a:fontRef>
+    </dgm:style>
+  </dgm:styleLbl>
+  <dgm:styleLbl name="asst1">
+    <dgm:scene3d>
+      <a:camera prst="orthographicFront"/>
+      <a:lightRig rig="threePt" dir="t"/>
+    </dgm:scene3d>
+    <dgm:sp3d/>
+    <dgm:txPr/>
+    <dgm:style>
+      <a:lnRef idx="3">
+        <a:scrgbClr r="0" g="0" b="0"/>
+      </a:lnRef>
+      <a:fillRef idx="1">
+        <a:scrgbClr r="0" g="0" b="0"/>
+      </a:fillRef>
+      <a:effectRef idx="1">
+        <a:scrgbClr r="0" g="0" b="0"/>
+      </a:effectRef>
+      <a:fontRef idx="minor">
+        <a:schemeClr val="lt1"/>
+      </a:fontRef>
+    </dgm:style>
+  </dgm:styleLbl>
+  <dgm:styleLbl name="asst2">
+    <dgm:scene3d>
+      <a:camera prst="orthographicFront"/>
+      <a:lightRig rig="threePt" dir="t"/>
+    </dgm:scene3d>
+    <dgm:sp3d/>
+    <dgm:txPr/>
+    <dgm:style>
+      <a:lnRef idx="3">
+        <a:scrgbClr r="0" g="0" b="0"/>
+      </a:lnRef>
+      <a:fillRef idx="1">
+        <a:scrgbClr r="0" g="0" b="0"/>
+      </a:fillRef>
+      <a:effectRef idx="1">
+        <a:scrgbClr r="0" g="0" b="0"/>
+      </a:effectRef>
+      <a:fontRef idx="minor">
+        <a:schemeClr val="lt1"/>
+      </a:fontRef>
+    </dgm:style>
+  </dgm:styleLbl>
+  <dgm:styleLbl name="asst3">
+    <dgm:scene3d>
+      <a:camera prst="orthographicFront"/>
+      <a:lightRig rig="threePt" dir="t"/>
+    </dgm:scene3d>
+    <dgm:sp3d/>
+    <dgm:txPr/>
+    <dgm:style>
+      <a:lnRef idx="3">
+        <a:scrgbClr r="0" g="0" b="0"/>
+      </a:lnRef>
+      <a:fillRef idx="1">
+        <a:scrgbClr r="0" g="0" b="0"/>
+      </a:fillRef>
+      <a:effectRef idx="1">
+        <a:scrgbClr r="0" g="0" b="0"/>
+      </a:effectRef>
+      <a:fontRef idx="minor">
+        <a:schemeClr val="lt1"/>
+      </a:fontRef>
+    </dgm:style>
+  </dgm:styleLbl>
+  <dgm:styleLbl name="asst4">
+    <dgm:scene3d>
+      <a:camera prst="orthographicFront"/>
+      <a:lightRig rig="threePt" dir="t"/>
+    </dgm:scene3d>
+    <dgm:sp3d/>
+    <dgm:txPr/>
+    <dgm:style>
+      <a:lnRef idx="3">
+        <a:scrgbClr r="0" g="0" b="0"/>
+      </a:lnRef>
+      <a:fillRef idx="1">
+        <a:scrgbClr r="0" g="0" b="0"/>
+      </a:fillRef>
+      <a:effectRef idx="1">
+        <a:scrgbClr r="0" g="0" b="0"/>
+      </a:effectRef>
+      <a:fontRef idx="minor">
+        <a:schemeClr val="lt1"/>
+      </a:fontRef>
+    </dgm:style>
+  </dgm:styleLbl>
+  <dgm:styleLbl name="parChTrans2D1">
+    <dgm:scene3d>
+      <a:camera prst="orthographicFront"/>
+      <a:lightRig rig="threePt" dir="t"/>
+    </dgm:scene3d>
+    <dgm:sp3d/>
+    <dgm:txPr/>
+    <dgm:style>
+      <a:lnRef idx="3">
+        <a:scrgbClr r="0" g="0" b="0"/>
+      </a:lnRef>
+      <a:fillRef idx="1">
+        <a:scrgbClr r="0" g="0" b="0"/>
+      </a:fillRef>
+      <a:effectRef idx="1">
+        <a:scrgbClr r="0" g="0" b="0"/>
+      </a:effectRef>
+      <a:fontRef idx="minor">
+        <a:schemeClr val="lt1"/>
+      </a:fontRef>
+    </dgm:style>
+  </dgm:styleLbl>
+  <dgm:styleLbl name="parChTrans2D2">
+    <dgm:scene3d>
+      <a:camera prst="orthographicFront"/>
+      <a:lightRig rig="threePt" dir="t"/>
+    </dgm:scene3d>
+    <dgm:sp3d/>
+    <dgm:txPr/>
+    <dgm:style>
+      <a:lnRef idx="3">
+        <a:scrgbClr r="0" g="0" b="0"/>
+      </a:lnRef>
+      <a:fillRef idx="1">
+        <a:scrgbClr r="0" g="0" b="0"/>
+      </a:fillRef>
+      <a:effectRef idx="1">
+        <a:scrgbClr r="0" g="0" b="0"/>
+      </a:effectRef>
+      <a:fontRef idx="minor">
+        <a:schemeClr val="lt1"/>
+      </a:fontRef>
+    </dgm:style>
+  </dgm:styleLbl>
+  <dgm:styleLbl name="parChTrans2D3">
+    <dgm:scene3d>
+      <a:camera prst="orthographicFront"/>
+      <a:lightRig rig="threePt" dir="t"/>
+    </dgm:scene3d>
+    <dgm:sp3d/>
+    <dgm:txPr/>
+    <dgm:style>
+      <a:lnRef idx="3">
+        <a:scrgbClr r="0" g="0" b="0"/>
+      </a:lnRef>
+      <a:fillRef idx="1">
+        <a:scrgbClr r="0" g="0" b="0"/>
+      </a:fillRef>
+      <a:effectRef idx="1">
+        <a:scrgbClr r="0" g="0" b="0"/>
+      </a:effectRef>
+      <a:fontRef idx="minor">
+        <a:schemeClr val="lt1"/>
+      </a:fontRef>
+    </dgm:style>
+  </dgm:styleLbl>
+  <dgm:styleLbl name="parChTrans2D4">
+    <dgm:scene3d>
+      <a:camera prst="orthographicFront"/>
+      <a:lightRig rig="threePt" dir="t"/>
+    </dgm:scene3d>
+    <dgm:sp3d/>
+    <dgm:txPr/>
+    <dgm:style>
+      <a:lnRef idx="3">
+        <a:scrgbClr r="0" g="0" b="0"/>
+      </a:lnRef>
+      <a:fillRef idx="1">
+        <a:scrgbClr r="0" g="0" b="0"/>
+      </a:fillRef>
+      <a:effectRef idx="1">
+        <a:scrgbClr r="0" g="0" b="0"/>
+      </a:effectRef>
+      <a:fontRef idx="minor">
+        <a:schemeClr val="lt1"/>
+      </a:fontRef>
+    </dgm:style>
+  </dgm:styleLbl>
+  <dgm:styleLbl name="parChTrans1D1">
+    <dgm:scene3d>
+      <a:camera prst="orthographicFront"/>
+      <a:lightRig rig="threePt" dir="t"/>
+    </dgm:scene3d>
+    <dgm:sp3d/>
+    <dgm:txPr/>
+    <dgm:style>
+      <a:lnRef idx="2">
+        <a:scrgbClr r="0" g="0" b="0"/>
+      </a:lnRef>
+      <a:fillRef idx="0">
+        <a:scrgbClr r="0" g="0" b="0"/>
+      </a:fillRef>
+      <a:effectRef idx="0">
+        <a:scrgbClr r="0" g="0" b="0"/>
+      </a:effectRef>
+      <a:fontRef idx="minor"/>
+    </dgm:style>
+  </dgm:styleLbl>
+  <dgm:styleLbl name="parChTrans1D2">
+    <dgm:scene3d>
+      <a:camera prst="orthographicFront"/>
+      <a:lightRig rig="threePt" dir="t"/>
+    </dgm:scene3d>
+    <dgm:sp3d/>
+    <dgm:txPr/>
+    <dgm:style>
+      <a:lnRef idx="2">
+        <a:scrgbClr r="0" g="0" b="0"/>
+      </a:lnRef>
+      <a:fillRef idx="0">
+        <a:scrgbClr r="0" g="0" b="0"/>
+      </a:fillRef>
+      <a:effectRef idx="0">
+        <a:scrgbClr r="0" g="0" b="0"/>
+      </a:effectRef>
+      <a:fontRef idx="minor"/>
+    </dgm:style>
+  </dgm:styleLbl>
+  <dgm:styleLbl name="parChTrans1D3">
+    <dgm:scene3d>
+      <a:camera prst="orthographicFront"/>
+      <a:lightRig rig="threePt" dir="t"/>
+    </dgm:scene3d>
+    <dgm:sp3d/>
+    <dgm:txPr/>
+    <dgm:style>
+      <a:lnRef idx="2">
+        <a:scrgbClr r="0" g="0" b="0"/>
+      </a:lnRef>
+      <a:fillRef idx="0">
+        <a:scrgbClr r="0" g="0" b="0"/>
+      </a:fillRef>
+      <a:effectRef idx="0">
+        <a:scrgbClr r="0" g="0" b="0"/>
+      </a:effectRef>
+      <a:fontRef idx="minor"/>
+    </dgm:style>
+  </dgm:styleLbl>
+  <dgm:styleLbl name="parChTrans1D4">
+    <dgm:scene3d>
+      <a:camera prst="orthographicFront"/>
+      <a:lightRig rig="threePt" dir="t"/>
+    </dgm:scene3d>
+    <dgm:sp3d/>
+    <dgm:txPr/>
+    <dgm:style>
+      <a:lnRef idx="2">
+        <a:scrgbClr r="0" g="0" b="0"/>
+      </a:lnRef>
+      <a:fillRef idx="0">
+        <a:scrgbClr r="0" g="0" b="0"/>
+      </a:fillRef>
+      <a:effectRef idx="0">
+        <a:scrgbClr r="0" g="0" b="0"/>
+      </a:effectRef>
+      <a:fontRef idx="minor"/>
+    </dgm:style>
+  </dgm:styleLbl>
+  <dgm:styleLbl name="fgAcc1">
+    <dgm:scene3d>
+      <a:camera prst="orthographicFront"/>
+      <a:lightRig rig="threePt" dir="t"/>
+    </dgm:scene3d>
+    <dgm:sp3d/>
+    <dgm:txPr/>
+    <dgm:style>
+      <a:lnRef idx="2">
+        <a:scrgbClr r="0" g="0" b="0"/>
+      </a:lnRef>
+      <a:fillRef idx="1">
+        <a:scrgbClr r="0" g="0" b="0"/>
+      </a:fillRef>
+      <a:effectRef idx="0">
+        <a:scrgbClr r="0" g="0" b="0"/>
+      </a:effectRef>
+      <a:fontRef idx="minor"/>
+    </dgm:style>
+  </dgm:styleLbl>
+  <dgm:styleLbl name="conFgAcc1">
+    <dgm:scene3d>
+      <a:camera prst="orthographicFront"/>
+      <a:lightRig rig="threePt" dir="t"/>
+    </dgm:scene3d>
+    <dgm:sp3d/>
+    <dgm:txPr/>
+    <dgm:style>
+      <a:lnRef idx="2">
+        <a:scrgbClr r="0" g="0" b="0"/>
+      </a:lnRef>
+      <a:fillRef idx="1">
+        <a:scrgbClr r="0" g="0" b="0"/>
+      </a:fillRef>
+      <a:effectRef idx="0">
+        <a:scrgbClr r="0" g="0" b="0"/>
+      </a:effectRef>
+      <a:fontRef idx="minor"/>
+    </dgm:style>
+  </dgm:styleLbl>
+  <dgm:styleLbl name="alignAcc1">
+    <dgm:scene3d>
+      <a:camera prst="orthographicFront"/>
+      <a:lightRig rig="threePt" dir="t"/>
+    </dgm:scene3d>
+    <dgm:sp3d/>
+    <dgm:txPr/>
+    <dgm:style>
+      <a:lnRef idx="2">
+        <a:scrgbClr r="0" g="0" b="0"/>
+      </a:lnRef>
+      <a:fillRef idx="1">
+        <a:scrgbClr r="0" g="0" b="0"/>
+      </a:fillRef>
+      <a:effectRef idx="0">
+        <a:scrgbClr r="0" g="0" b="0"/>
+      </a:effectRef>
+      <a:fontRef idx="minor"/>
+    </dgm:style>
+  </dgm:styleLbl>
+  <dgm:styleLbl name="trAlignAcc1">
+    <dgm:scene3d>
+      <a:camera prst="orthographicFront"/>
+      <a:lightRig rig="threePt" dir="t"/>
+    </dgm:scene3d>
+    <dgm:sp3d/>
+    <dgm:txPr/>
+    <dgm:style>
+      <a:lnRef idx="1">
+        <a:scrgbClr r="0" g="0" b="0"/>
+      </a:lnRef>
+      <a:fillRef idx="1">
+        <a:scrgbClr r="0" g="0" b="0"/>
+      </a:fillRef>
+      <a:effectRef idx="0">
+        <a:scrgbClr r="0" g="0" b="0"/>
+      </a:effectRef>
+      <a:fontRef idx="minor"/>
+    </dgm:style>
+  </dgm:styleLbl>
+  <dgm:styleLbl name="bgAcc1">
+    <dgm:scene3d>
+      <a:camera prst="orthographicFront"/>
+      <a:lightRig rig="threePt" dir="t"/>
+    </dgm:scene3d>
+    <dgm:sp3d/>
+    <dgm:txPr/>
+    <dgm:style>
+      <a:lnRef idx="2">
+        <a:scrgbClr r="0" g="0" b="0"/>
+      </a:lnRef>
+      <a:fillRef idx="1">
+        <a:scrgbClr r="0" g="0" b="0"/>
+      </a:fillRef>
+      <a:effectRef idx="0">
+        <a:scrgbClr r="0" g="0" b="0"/>
+      </a:effectRef>
+      <a:fontRef idx="minor"/>
+    </dgm:style>
+  </dgm:styleLbl>
+  <dgm:styleLbl name="solidFgAcc1">
+    <dgm:scene3d>
+      <a:camera prst="orthographicFront"/>
+      <a:lightRig rig="threePt" dir="t"/>
+    </dgm:scene3d>
+    <dgm:sp3d/>
+    <dgm:txPr/>
+    <dgm:style>
+      <a:lnRef idx="2">
+        <a:scrgbClr r="0" g="0" b="0"/>
+      </a:lnRef>
+      <a:fillRef idx="1">
+        <a:scrgbClr r="0" g="0" b="0"/>
+      </a:fillRef>
+      <a:effectRef idx="0">
+        <a:scrgbClr r="0" g="0" b="0"/>
+      </a:effectRef>
+      <a:fontRef idx="minor"/>
+    </dgm:style>
+  </dgm:styleLbl>
+  <dgm:styleLbl name="solidAlignAcc1">
+    <dgm:scene3d>
+      <a:camera prst="orthographicFront"/>
+      <a:lightRig rig="threePt" dir="t"/>
+    </dgm:scene3d>
+    <dgm:sp3d/>
+    <dgm:txPr/>
+    <dgm:style>
+      <a:lnRef idx="2">
+        <a:scrgbClr r="0" g="0" b="0"/>
+      </a:lnRef>
+      <a:fillRef idx="1">
+        <a:scrgbClr r="0" g="0" b="0"/>
+      </a:fillRef>
+      <a:effectRef idx="0">
+        <a:scrgbClr r="0" g="0" b="0"/>
+      </a:effectRef>
+      <a:fontRef idx="minor"/>
+    </dgm:style>
+  </dgm:styleLbl>
+  <dgm:styleLbl name="solidBgAcc1">
+    <dgm:scene3d>
+      <a:camera prst="orthographicFront"/>
+      <a:lightRig rig="threePt" dir="t"/>
+    </dgm:scene3d>
+    <dgm:sp3d/>
+    <dgm:txPr/>
+    <dgm:style>
+      <a:lnRef idx="2">
+        <a:scrgbClr r="0" g="0" b="0"/>
+      </a:lnRef>
+      <a:fillRef idx="1">
+        <a:scrgbClr r="0" g="0" b="0"/>
+      </a:fillRef>
+      <a:effectRef idx="0">
+        <a:scrgbClr r="0" g="0" b="0"/>
+      </a:effectRef>
+      <a:fontRef idx="minor"/>
+    </dgm:style>
+  </dgm:styleLbl>
+  <dgm:styleLbl name="fgAccFollowNode1">
+    <dgm:scene3d>
+      <a:camera prst="orthographicFront"/>
+      <a:lightRig rig="threePt" dir="t"/>
+    </dgm:scene3d>
+    <dgm:sp3d/>
+    <dgm:txPr/>
+    <dgm:style>
+      <a:lnRef idx="2">
+        <a:scrgbClr r="0" g="0" b="0"/>
+      </a:lnRef>
+      <a:fillRef idx="1">
+        <a:scrgbClr r="0" g="0" b="0"/>
+      </a:fillRef>
+      <a:effectRef idx="0">
+        <a:scrgbClr r="0" g="0" b="0"/>
+      </a:effectRef>
+      <a:fontRef idx="minor"/>
+    </dgm:style>
+  </dgm:styleLbl>
+  <dgm:styleLbl name="alignAccFollowNode1">
+    <dgm:scene3d>
+      <a:camera prst="orthographicFront"/>
+      <a:lightRig rig="threePt" dir="t"/>
+    </dgm:scene3d>
+    <dgm:sp3d/>
+    <dgm:txPr/>
+    <dgm:style>
+      <a:lnRef idx="2">
+        <a:scrgbClr r="0" g="0" b="0"/>
+      </a:lnRef>
+      <a:fillRef idx="1">
+        <a:scrgbClr r="0" g="0" b="0"/>
+      </a:fillRef>
+      <a:effectRef idx="0">
+        <a:scrgbClr r="0" g="0" b="0"/>
+      </a:effectRef>
+      <a:fontRef idx="minor"/>
+    </dgm:style>
+  </dgm:styleLbl>
+  <dgm:styleLbl name="bgAccFollowNode1">
+    <dgm:scene3d>
+      <a:camera prst="orthographicFront"/>
+      <a:lightRig rig="threePt" dir="t"/>
+    </dgm:scene3d>
+    <dgm:sp3d/>
+    <dgm:txPr/>
+    <dgm:style>
+      <a:lnRef idx="2">
+        <a:scrgbClr r="0" g="0" b="0"/>
+      </a:lnRef>
+      <a:fillRef idx="1">
+        <a:scrgbClr r="0" g="0" b="0"/>
+      </a:fillRef>
+      <a:effectRef idx="0">
+        <a:scrgbClr r="0" g="0" b="0"/>
+      </a:effectRef>
+      <a:fontRef idx="minor"/>
+    </dgm:style>
+  </dgm:styleLbl>
+  <dgm:styleLbl name="fgAcc0">
+    <dgm:scene3d>
+      <a:camera prst="orthographicFront"/>
+      <a:lightRig rig="threePt" dir="t"/>
+    </dgm:scene3d>
+    <dgm:sp3d/>
+    <dgm:txPr/>
+    <dgm:style>
+      <a:lnRef idx="2">
+        <a:scrgbClr r="0" g="0" b="0"/>
+      </a:lnRef>
+      <a:fillRef idx="1">
+        <a:scrgbClr r="0" g="0" b="0"/>
+      </a:fillRef>
+      <a:effectRef idx="0">
+        <a:scrgbClr r="0" g="0" b="0"/>
+      </a:effectRef>
+      <a:fontRef idx="minor"/>
+    </dgm:style>
+  </dgm:styleLbl>
+  <dgm:styleLbl name="fgAcc2">
+    <dgm:scene3d>
+      <a:camera prst="orthographicFront"/>
+      <a:lightRig rig="threePt" dir="t"/>
+    </dgm:scene3d>
+    <dgm:sp3d/>
+    <dgm:txPr/>
+    <dgm:style>
+      <a:lnRef idx="2">
+        <a:scrgbClr r="0" g="0" b="0"/>
+      </a:lnRef>
+      <a:fillRef idx="1">
+        <a:scrgbClr r="0" g="0" b="0"/>
+      </a:fillRef>
+      <a:effectRef idx="0">
+        <a:scrgbClr r="0" g="0" b="0"/>
+      </a:effectRef>
+      <a:fontRef idx="minor"/>
+    </dgm:style>
+  </dgm:styleLbl>
+  <dgm:styleLbl name="fgAcc3">
+    <dgm:scene3d>
+      <a:camera prst="orthographicFront"/>
+      <a:lightRig rig="threePt" dir="t"/>
+    </dgm:scene3d>
+    <dgm:sp3d/>
+    <dgm:txPr/>
+    <dgm:style>
+      <a:lnRef idx="2">
+        <a:scrgbClr r="0" g="0" b="0"/>
+      </a:lnRef>
+      <a:fillRef idx="1">
+        <a:scrgbClr r="0" g="0" b="0"/>
+      </a:fillRef>
+      <a:effectRef idx="0">
+        <a:scrgbClr r="0" g="0" b="0"/>
+      </a:effectRef>
+      <a:fontRef idx="minor"/>
+    </dgm:style>
+  </dgm:styleLbl>
+  <dgm:styleLbl name="fgAcc4">
+    <dgm:scene3d>
+      <a:camera prst="orthographicFront"/>
+      <a:lightRig rig="threePt" dir="t"/>
+    </dgm:scene3d>
+    <dgm:sp3d/>
+    <dgm:txPr/>
+    <dgm:style>
+      <a:lnRef idx="2">
+        <a:scrgbClr r="0" g="0" b="0"/>
+      </a:lnRef>
+      <a:fillRef idx="1">
+        <a:scrgbClr r="0" g="0" b="0"/>
+      </a:fillRef>
+      <a:effectRef idx="0">
+        <a:scrgbClr r="0" g="0" b="0"/>
+      </a:effectRef>
+      <a:fontRef idx="minor"/>
+    </dgm:style>
+  </dgm:styleLbl>
+  <dgm:styleLbl name="bgShp">
+    <dgm:scene3d>
+      <a:camera prst="orthographicFront"/>
+      <a:lightRig rig="threePt" dir="t"/>
+    </dgm:scene3d>
+    <dgm:sp3d/>
+    <dgm:txPr/>
+    <dgm:style>
+      <a:lnRef idx="0">
+        <a:scrgbClr r="0" g="0" b="0"/>
+      </a:lnRef>
+      <a:fillRef idx="1">
+        <a:scrgbClr r="0" g="0" b="0"/>
+      </a:fillRef>
+      <a:effectRef idx="0">
+        <a:scrgbClr r="0" g="0" b="0"/>
+      </a:effectRef>
+      <a:fontRef idx="minor"/>
+    </dgm:style>
+  </dgm:styleLbl>
+  <dgm:styleLbl name="dkBgShp">
+    <dgm:scene3d>
+      <a:camera prst="orthographicFront"/>
+      <a:lightRig rig="threePt" dir="t"/>
+    </dgm:scene3d>
+    <dgm:sp3d/>
+    <dgm:txPr/>
+    <dgm:style>
+      <a:lnRef idx="0">
+        <a:scrgbClr r="0" g="0" b="0"/>
+      </a:lnRef>
+      <a:fillRef idx="1">
+        <a:scrgbClr r="0" g="0" b="0"/>
+      </a:fillRef>
+      <a:effectRef idx="0">
+        <a:scrgbClr r="0" g="0" b="0"/>
+      </a:effectRef>
+      <a:fontRef idx="minor"/>
+    </dgm:style>
+  </dgm:styleLbl>
+  <dgm:styleLbl name="trBgShp">
+    <dgm:scene3d>
+      <a:camera prst="orthographicFront"/>
+      <a:lightRig rig="threePt" dir="t"/>
+    </dgm:scene3d>
+    <dgm:sp3d/>
+    <dgm:txPr/>
+    <dgm:style>
+      <a:lnRef idx="0">
+        <a:scrgbClr r="0" g="0" b="0"/>
+      </a:lnRef>
+      <a:fillRef idx="1">
+        <a:scrgbClr r="0" g="0" b="0"/>
+      </a:fillRef>
+      <a:effectRef idx="0">
+        <a:scrgbClr r="0" g="0" b="0"/>
+      </a:effectRef>
+      <a:fontRef idx="minor"/>
+    </dgm:style>
+  </dgm:styleLbl>
+  <dgm:styleLbl name="fgShp">
+    <dgm:scene3d>
+      <a:camera prst="orthographicFront"/>
+      <a:lightRig rig="threePt" dir="t"/>
+    </dgm:scene3d>
+    <dgm:sp3d/>
+    <dgm:txPr/>
+    <dgm:style>
+      <a:lnRef idx="3">
+        <a:scrgbClr r="0" g="0" b="0"/>
+      </a:lnRef>
+      <a:fillRef idx="1">
+        <a:scrgbClr r="0" g="0" b="0"/>
+      </a:fillRef>
+      <a:effectRef idx="1">
+        <a:scrgbClr r="0" g="0" b="0"/>
+      </a:effectRef>
+      <a:fontRef idx="minor"/>
+    </dgm:style>
+  </dgm:styleLbl>
+  <dgm:styleLbl name="revTx">
+    <dgm:scene3d>
+      <a:camera prst="orthographicFront"/>
+      <a:lightRig rig="threePt" dir="t"/>
+    </dgm:scene3d>
+    <dgm:sp3d/>
+    <dgm:txPr/>
+    <dgm:style>
+      <a:lnRef idx="0">
+        <a:scrgbClr r="0" g="0" b="0"/>
+      </a:lnRef>
+      <a:fillRef idx="0">
+        <a:scrgbClr r="0" g="0" b="0"/>
+      </a:fillRef>
+      <a:effectRef idx="0">
+        <a:scrgbClr r="0" g="0" b="0"/>
+      </a:effectRef>
+      <a:fontRef idx="minor"/>
+    </dgm:style>
+  </dgm:styleLbl>
+</dgm:styleDef>
 </file>
 
 <file path=ppt/slideLayouts/slideLayout1.xml><?xml version="1.0" encoding="utf-8"?>
@@ -266,7 +7041,7 @@
           <a:p>
             <a:fld id="{DBD89380-344E-284F-BE0F-D796858BF56F}" type="datetimeFigureOut">
               <a:rPr kumimoji="1" lang="ja-JP" altLang="en-US" smtClean="0"/>
-              <a:t>2026/9/18</a:t>
+              <a:t>2026/9/23</a:t>
             </a:fld>
             <a:endParaRPr kumimoji="1" lang="ja-JP" altLang="en-US"/>
           </a:p>
@@ -468,7 +7243,7 @@
           <a:p>
             <a:fld id="{DBD89380-344E-284F-BE0F-D796858BF56F}" type="datetimeFigureOut">
               <a:rPr kumimoji="1" lang="ja-JP" altLang="en-US" smtClean="0"/>
-              <a:t>2026/9/18</a:t>
+              <a:t>2026/9/23</a:t>
             </a:fld>
             <a:endParaRPr kumimoji="1" lang="ja-JP" altLang="en-US"/>
           </a:p>
@@ -680,7 +7455,7 @@
           <a:p>
             <a:fld id="{DBD89380-344E-284F-BE0F-D796858BF56F}" type="datetimeFigureOut">
               <a:rPr kumimoji="1" lang="ja-JP" altLang="en-US" smtClean="0"/>
-              <a:t>2026/9/18</a:t>
+              <a:t>2026/9/23</a:t>
             </a:fld>
             <a:endParaRPr kumimoji="1" lang="ja-JP" altLang="en-US"/>
           </a:p>
@@ -882,7 +7657,7 @@
           <a:p>
             <a:fld id="{DBD89380-344E-284F-BE0F-D796858BF56F}" type="datetimeFigureOut">
               <a:rPr kumimoji="1" lang="ja-JP" altLang="en-US" smtClean="0"/>
-              <a:t>2026/9/18</a:t>
+              <a:t>2026/9/23</a:t>
             </a:fld>
             <a:endParaRPr kumimoji="1" lang="ja-JP" altLang="en-US"/>
           </a:p>
@@ -1126,7 +7901,7 @@
           <a:p>
             <a:fld id="{DBD89380-344E-284F-BE0F-D796858BF56F}" type="datetimeFigureOut">
               <a:rPr kumimoji="1" lang="ja-JP" altLang="en-US" smtClean="0"/>
-              <a:t>2026/9/18</a:t>
+              <a:t>2026/9/23</a:t>
             </a:fld>
             <a:endParaRPr kumimoji="1" lang="ja-JP" altLang="en-US"/>
           </a:p>
@@ -1422,7 +8197,7 @@
           <a:p>
             <a:fld id="{DBD89380-344E-284F-BE0F-D796858BF56F}" type="datetimeFigureOut">
               <a:rPr kumimoji="1" lang="ja-JP" altLang="en-US" smtClean="0"/>
-              <a:t>2026/9/18</a:t>
+              <a:t>2026/9/23</a:t>
             </a:fld>
             <a:endParaRPr kumimoji="1" lang="ja-JP" altLang="en-US"/>
           </a:p>
@@ -1853,7 +8628,7 @@
           <a:p>
             <a:fld id="{DBD89380-344E-284F-BE0F-D796858BF56F}" type="datetimeFigureOut">
               <a:rPr kumimoji="1" lang="ja-JP" altLang="en-US" smtClean="0"/>
-              <a:t>2026/9/18</a:t>
+              <a:t>2026/9/23</a:t>
             </a:fld>
             <a:endParaRPr kumimoji="1" lang="ja-JP" altLang="en-US"/>
           </a:p>
@@ -1971,7 +8746,7 @@
           <a:p>
             <a:fld id="{DBD89380-344E-284F-BE0F-D796858BF56F}" type="datetimeFigureOut">
               <a:rPr kumimoji="1" lang="ja-JP" altLang="en-US" smtClean="0"/>
-              <a:t>2026/9/18</a:t>
+              <a:t>2026/9/23</a:t>
             </a:fld>
             <a:endParaRPr kumimoji="1" lang="ja-JP" altLang="en-US"/>
           </a:p>
@@ -2066,7 +8841,7 @@
           <a:p>
             <a:fld id="{DBD89380-344E-284F-BE0F-D796858BF56F}" type="datetimeFigureOut">
               <a:rPr kumimoji="1" lang="ja-JP" altLang="en-US" smtClean="0"/>
-              <a:t>2026/9/18</a:t>
+              <a:t>2026/9/23</a:t>
             </a:fld>
             <a:endParaRPr kumimoji="1" lang="ja-JP" altLang="en-US"/>
           </a:p>
@@ -2375,7 +9150,7 @@
           <a:p>
             <a:fld id="{DBD89380-344E-284F-BE0F-D796858BF56F}" type="datetimeFigureOut">
               <a:rPr kumimoji="1" lang="ja-JP" altLang="en-US" smtClean="0"/>
-              <a:t>2026/9/18</a:t>
+              <a:t>2026/9/23</a:t>
             </a:fld>
             <a:endParaRPr kumimoji="1" lang="ja-JP" altLang="en-US"/>
           </a:p>
@@ -2632,7 +9407,7 @@
           <a:p>
             <a:fld id="{DBD89380-344E-284F-BE0F-D796858BF56F}" type="datetimeFigureOut">
               <a:rPr kumimoji="1" lang="ja-JP" altLang="en-US" smtClean="0"/>
-              <a:t>2026/9/18</a:t>
+              <a:t>2026/9/23</a:t>
             </a:fld>
             <a:endParaRPr kumimoji="1" lang="ja-JP" altLang="en-US"/>
           </a:p>
@@ -2877,7 +9652,7 @@
           <a:p>
             <a:fld id="{DBD89380-344E-284F-BE0F-D796858BF56F}" type="datetimeFigureOut">
               <a:rPr kumimoji="1" lang="ja-JP" altLang="en-US" smtClean="0"/>
-              <a:t>2026/9/18</a:t>
+              <a:t>2026/9/23</a:t>
             </a:fld>
             <a:endParaRPr kumimoji="1" lang="ja-JP" altLang="en-US"/>
           </a:p>
@@ -21597,6 +28372,1260 @@
 </p:sld>
 </file>
 
+<file path=ppt/slides/slide25.xml><?xml version="1.0" encoding="utf-8"?>
+<p:sld xmlns:a="http://schemas.openxmlformats.org/drawingml/2006/main" xmlns:r="http://schemas.openxmlformats.org/officeDocument/2006/relationships" xmlns:p="http://schemas.openxmlformats.org/presentationml/2006/main">
+  <p:cSld>
+    <p:spTree>
+      <p:nvGrpSpPr>
+        <p:cNvPr id="1" name=""/>
+        <p:cNvGrpSpPr/>
+        <p:nvPr/>
+      </p:nvGrpSpPr>
+      <p:grpSpPr>
+        <a:xfrm>
+          <a:off x="0" y="0"/>
+          <a:ext cx="0" cy="0"/>
+          <a:chOff x="0" y="0"/>
+          <a:chExt cx="0" cy="0"/>
+        </a:xfrm>
+      </p:grpSpPr>
+      <p:graphicFrame>
+        <p:nvGraphicFramePr>
+          <p:cNvPr id="3" name="図表 2">
+            <a:extLst>
+              <a:ext uri="{FF2B5EF4-FFF2-40B4-BE49-F238E27FC236}">
+                <a16:creationId xmlns:a16="http://schemas.microsoft.com/office/drawing/2014/main" id="{2468D992-3176-F21B-AF12-B3370CCDEDEB}"/>
+              </a:ext>
+            </a:extLst>
+          </p:cNvPr>
+          <p:cNvGraphicFramePr/>
+          <p:nvPr>
+            <p:extLst>
+              <p:ext uri="{D42A27DB-BD31-4B8C-83A1-F6EECF244321}">
+                <p14:modId xmlns:p14="http://schemas.microsoft.com/office/powerpoint/2010/main" val="3858171274"/>
+              </p:ext>
+            </p:extLst>
+          </p:nvPr>
+        </p:nvGraphicFramePr>
+        <p:xfrm>
+          <a:off x="3456122" y="0"/>
+          <a:ext cx="6307810" cy="9601199"/>
+        </p:xfrm>
+        <a:graphic>
+          <a:graphicData uri="http://schemas.openxmlformats.org/drawingml/2006/diagram">
+            <dgm:relIds xmlns:dgm="http://schemas.openxmlformats.org/drawingml/2006/diagram" xmlns:r="http://schemas.openxmlformats.org/officeDocument/2006/relationships" r:dm="rId2" r:lo="rId3" r:qs="rId4" r:cs="rId5"/>
+          </a:graphicData>
+        </a:graphic>
+      </p:graphicFrame>
+    </p:spTree>
+    <p:extLst>
+      <p:ext uri="{BB962C8B-B14F-4D97-AF65-F5344CB8AC3E}">
+        <p14:creationId xmlns:p14="http://schemas.microsoft.com/office/powerpoint/2010/main" val="2538995614"/>
+      </p:ext>
+    </p:extLst>
+  </p:cSld>
+  <p:clrMapOvr>
+    <a:masterClrMapping/>
+  </p:clrMapOvr>
+</p:sld>
+</file>
+
+<file path=ppt/slides/slide26.xml><?xml version="1.0" encoding="utf-8"?>
+<p:sld xmlns:a="http://schemas.openxmlformats.org/drawingml/2006/main" xmlns:r="http://schemas.openxmlformats.org/officeDocument/2006/relationships" xmlns:p="http://schemas.openxmlformats.org/presentationml/2006/main">
+  <p:cSld>
+    <p:spTree>
+      <p:nvGrpSpPr>
+        <p:cNvPr id="1" name=""/>
+        <p:cNvGrpSpPr/>
+        <p:nvPr/>
+      </p:nvGrpSpPr>
+      <p:grpSpPr>
+        <a:xfrm>
+          <a:off x="0" y="0"/>
+          <a:ext cx="0" cy="0"/>
+          <a:chOff x="0" y="0"/>
+          <a:chExt cx="0" cy="0"/>
+        </a:xfrm>
+      </p:grpSpPr>
+      <p:graphicFrame>
+        <p:nvGraphicFramePr>
+          <p:cNvPr id="2" name="図表 1">
+            <a:extLst>
+              <a:ext uri="{FF2B5EF4-FFF2-40B4-BE49-F238E27FC236}">
+                <a16:creationId xmlns:a16="http://schemas.microsoft.com/office/drawing/2014/main" id="{8B318050-BD07-62B2-4269-86F9EC5DB2A1}"/>
+              </a:ext>
+            </a:extLst>
+          </p:cNvPr>
+          <p:cNvGraphicFramePr/>
+          <p:nvPr>
+            <p:extLst>
+              <p:ext uri="{D42A27DB-BD31-4B8C-83A1-F6EECF244321}">
+                <p14:modId xmlns:p14="http://schemas.microsoft.com/office/powerpoint/2010/main" val="3670825591"/>
+              </p:ext>
+            </p:extLst>
+          </p:nvPr>
+        </p:nvGraphicFramePr>
+        <p:xfrm>
+          <a:off x="0" y="1"/>
+          <a:ext cx="12801599" cy="9601199"/>
+        </p:xfrm>
+        <a:graphic>
+          <a:graphicData uri="http://schemas.openxmlformats.org/drawingml/2006/diagram">
+            <dgm:relIds xmlns:dgm="http://schemas.openxmlformats.org/drawingml/2006/diagram" xmlns:r="http://schemas.openxmlformats.org/officeDocument/2006/relationships" r:dm="rId2" r:lo="rId3" r:qs="rId4" r:cs="rId5"/>
+          </a:graphicData>
+        </a:graphic>
+      </p:graphicFrame>
+    </p:spTree>
+    <p:extLst>
+      <p:ext uri="{BB962C8B-B14F-4D97-AF65-F5344CB8AC3E}">
+        <p14:creationId xmlns:p14="http://schemas.microsoft.com/office/powerpoint/2010/main" val="2234327738"/>
+      </p:ext>
+    </p:extLst>
+  </p:cSld>
+  <p:clrMapOvr>
+    <a:masterClrMapping/>
+  </p:clrMapOvr>
+</p:sld>
+</file>
+
+<file path=ppt/slides/slide27.xml><?xml version="1.0" encoding="utf-8"?>
+<p:sld xmlns:a="http://schemas.openxmlformats.org/drawingml/2006/main" xmlns:r="http://schemas.openxmlformats.org/officeDocument/2006/relationships" xmlns:p="http://schemas.openxmlformats.org/presentationml/2006/main">
+  <p:cSld>
+    <p:spTree>
+      <p:nvGrpSpPr>
+        <p:cNvPr id="1" name=""/>
+        <p:cNvGrpSpPr/>
+        <p:nvPr/>
+      </p:nvGrpSpPr>
+      <p:grpSpPr>
+        <a:xfrm>
+          <a:off x="0" y="0"/>
+          <a:ext cx="0" cy="0"/>
+          <a:chOff x="0" y="0"/>
+          <a:chExt cx="0" cy="0"/>
+        </a:xfrm>
+      </p:grpSpPr>
+      <p:grpSp>
+        <p:nvGrpSpPr>
+          <p:cNvPr id="23" name="グループ化 22">
+            <a:extLst>
+              <a:ext uri="{FF2B5EF4-FFF2-40B4-BE49-F238E27FC236}">
+                <a16:creationId xmlns:a16="http://schemas.microsoft.com/office/drawing/2014/main" id="{361FD2F7-4779-A303-F3A9-AC44774ECCD5}"/>
+              </a:ext>
+            </a:extLst>
+          </p:cNvPr>
+          <p:cNvGrpSpPr/>
+          <p:nvPr/>
+        </p:nvGrpSpPr>
+        <p:grpSpPr>
+          <a:xfrm>
+            <a:off x="931350" y="659819"/>
+            <a:ext cx="10938899" cy="8281561"/>
+            <a:chOff x="1211772" y="487579"/>
+            <a:chExt cx="10938899" cy="8281561"/>
+          </a:xfrm>
+        </p:grpSpPr>
+        <p:sp>
+          <p:nvSpPr>
+            <p:cNvPr id="2" name="角丸四角形 1">
+              <a:extLst>
+                <a:ext uri="{FF2B5EF4-FFF2-40B4-BE49-F238E27FC236}">
+                  <a16:creationId xmlns:a16="http://schemas.microsoft.com/office/drawing/2014/main" id="{F0124EC8-DE4F-F0FB-48FD-8262D49F291D}"/>
+                </a:ext>
+              </a:extLst>
+            </p:cNvPr>
+            <p:cNvSpPr/>
+            <p:nvPr/>
+          </p:nvSpPr>
+          <p:spPr>
+            <a:xfrm>
+              <a:off x="1211772" y="4293031"/>
+              <a:ext cx="10938899" cy="4476109"/>
+            </a:xfrm>
+            <a:prstGeom prst="roundRect">
+              <a:avLst/>
+            </a:prstGeom>
+            <a:solidFill>
+              <a:schemeClr val="bg1"/>
+            </a:solidFill>
+            <a:ln w="28575"/>
+          </p:spPr>
+          <p:style>
+            <a:lnRef idx="2">
+              <a:schemeClr val="accent1">
+                <a:shade val="15000"/>
+              </a:schemeClr>
+            </a:lnRef>
+            <a:fillRef idx="1">
+              <a:schemeClr val="accent1"/>
+            </a:fillRef>
+            <a:effectRef idx="0">
+              <a:schemeClr val="accent1"/>
+            </a:effectRef>
+            <a:fontRef idx="minor">
+              <a:schemeClr val="lt1"/>
+            </a:fontRef>
+          </p:style>
+          <p:txBody>
+            <a:bodyPr rtlCol="0" anchor="t"/>
+            <a:lstStyle/>
+            <a:p>
+              <a:r>
+                <a:rPr kumimoji="1" lang="ja-JP" altLang="en-US" sz="3200" b="1">
+                  <a:solidFill>
+                    <a:schemeClr val="tx1"/>
+                  </a:solidFill>
+                  <a:latin typeface="Hiragino Sans W7" panose="020B0400000000000000" pitchFamily="34" charset="-128"/>
+                  <a:ea typeface="Hiragino Sans W7" panose="020B0400000000000000" pitchFamily="34" charset="-128"/>
+                </a:rPr>
+                <a:t>自民党</a:t>
+              </a:r>
+              <a:br>
+                <a:rPr kumimoji="1" lang="en-US" altLang="ja-JP" sz="3200" b="1" dirty="0">
+                  <a:solidFill>
+                    <a:schemeClr val="tx1"/>
+                  </a:solidFill>
+                  <a:latin typeface="Hiragino Sans W7" panose="020B0400000000000000" pitchFamily="34" charset="-128"/>
+                  <a:ea typeface="Hiragino Sans W7" panose="020B0400000000000000" pitchFamily="34" charset="-128"/>
+                </a:rPr>
+              </a:br>
+              <a:endParaRPr kumimoji="1" lang="ja-JP" altLang="en-US">
+                <a:solidFill>
+                  <a:schemeClr val="tx1"/>
+                </a:solidFill>
+                <a:latin typeface="Hiragino Sans W4" panose="020B0400000000000000" pitchFamily="34" charset="-128"/>
+                <a:ea typeface="Hiragino Sans W4" panose="020B0400000000000000" pitchFamily="34" charset="-128"/>
+              </a:endParaRPr>
+            </a:p>
+          </p:txBody>
+        </p:sp>
+        <p:sp>
+          <p:nvSpPr>
+            <p:cNvPr id="3" name="正方形/長方形 2">
+              <a:extLst>
+                <a:ext uri="{FF2B5EF4-FFF2-40B4-BE49-F238E27FC236}">
+                  <a16:creationId xmlns:a16="http://schemas.microsoft.com/office/drawing/2014/main" id="{91303911-FF9C-0937-56B4-85D8D78F8033}"/>
+                </a:ext>
+              </a:extLst>
+            </p:cNvPr>
+            <p:cNvSpPr/>
+            <p:nvPr/>
+          </p:nvSpPr>
+          <p:spPr>
+            <a:xfrm>
+              <a:off x="1813624" y="5386951"/>
+              <a:ext cx="4199720" cy="3090622"/>
+            </a:xfrm>
+            <a:prstGeom prst="rect">
+              <a:avLst/>
+            </a:prstGeom>
+            <a:solidFill>
+              <a:schemeClr val="bg1"/>
+            </a:solidFill>
+            <a:ln w="28575"/>
+          </p:spPr>
+          <p:style>
+            <a:lnRef idx="2">
+              <a:schemeClr val="accent1">
+                <a:shade val="15000"/>
+              </a:schemeClr>
+            </a:lnRef>
+            <a:fillRef idx="1">
+              <a:schemeClr val="accent1"/>
+            </a:fillRef>
+            <a:effectRef idx="0">
+              <a:schemeClr val="accent1"/>
+            </a:effectRef>
+            <a:fontRef idx="minor">
+              <a:schemeClr val="lt1"/>
+            </a:fontRef>
+          </p:style>
+          <p:txBody>
+            <a:bodyPr rtlCol="0" anchor="t"/>
+            <a:lstStyle/>
+            <a:p>
+              <a:r>
+                <a:rPr kumimoji="1" lang="ja-JP" altLang="en-US" sz="3200" b="1">
+                  <a:solidFill>
+                    <a:schemeClr val="tx1"/>
+                  </a:solidFill>
+                  <a:latin typeface="Hiragino Sans W7" panose="020B0400000000000000" pitchFamily="34" charset="-128"/>
+                  <a:ea typeface="Hiragino Sans W7" panose="020B0400000000000000" pitchFamily="34" charset="-128"/>
+                </a:rPr>
+                <a:t>政務調査会</a:t>
+              </a:r>
+              <a:br>
+                <a:rPr kumimoji="1" lang="en-US" altLang="ja-JP" sz="3200" b="1" dirty="0">
+                  <a:solidFill>
+                    <a:schemeClr val="tx1"/>
+                  </a:solidFill>
+                  <a:latin typeface="Hiragino Sans W7" panose="020B0400000000000000" pitchFamily="34" charset="-128"/>
+                  <a:ea typeface="Hiragino Sans W7" panose="020B0400000000000000" pitchFamily="34" charset="-128"/>
+                </a:rPr>
+              </a:br>
+              <a:endParaRPr kumimoji="1" lang="ja-JP" altLang="en-US">
+                <a:solidFill>
+                  <a:schemeClr val="tx1"/>
+                </a:solidFill>
+                <a:latin typeface="Hiragino Sans W4" panose="020B0400000000000000" pitchFamily="34" charset="-128"/>
+                <a:ea typeface="Hiragino Sans W4" panose="020B0400000000000000" pitchFamily="34" charset="-128"/>
+              </a:endParaRPr>
+            </a:p>
+          </p:txBody>
+        </p:sp>
+        <p:sp>
+          <p:nvSpPr>
+            <p:cNvPr id="5" name="テキスト ボックス 4">
+              <a:extLst>
+                <a:ext uri="{FF2B5EF4-FFF2-40B4-BE49-F238E27FC236}">
+                  <a16:creationId xmlns:a16="http://schemas.microsoft.com/office/drawing/2014/main" id="{6282C6A3-CDCE-B51A-CD3E-F1116B67FED3}"/>
+                </a:ext>
+              </a:extLst>
+            </p:cNvPr>
+            <p:cNvSpPr txBox="1"/>
+            <p:nvPr/>
+          </p:nvSpPr>
+          <p:spPr>
+            <a:xfrm>
+              <a:off x="4014063" y="6290888"/>
+              <a:ext cx="1751307" cy="707886"/>
+            </a:xfrm>
+            <a:prstGeom prst="rect">
+              <a:avLst/>
+            </a:prstGeom>
+            <a:solidFill>
+              <a:schemeClr val="bg1"/>
+            </a:solidFill>
+            <a:ln>
+              <a:solidFill>
+                <a:schemeClr val="tx1"/>
+              </a:solidFill>
+            </a:ln>
+          </p:spPr>
+          <p:txBody>
+            <a:bodyPr wrap="square" rtlCol="0">
+              <a:spAutoFit/>
+            </a:bodyPr>
+            <a:lstStyle/>
+            <a:p>
+              <a:pPr algn="ctr"/>
+              <a:r>
+                <a:rPr kumimoji="1" lang="ja-JP" altLang="en-US" sz="4000">
+                  <a:latin typeface="Hiragino Sans W4" panose="020B0400000000000000" pitchFamily="34" charset="-128"/>
+                  <a:ea typeface="Hiragino Sans W4" panose="020B0400000000000000" pitchFamily="34" charset="-128"/>
+                </a:rPr>
+                <a:t>部会</a:t>
+              </a:r>
+              <a:endParaRPr kumimoji="1" lang="ja-JP" altLang="en-US" sz="2800">
+                <a:latin typeface="Hiragino Sans W4" panose="020B0400000000000000" pitchFamily="34" charset="-128"/>
+                <a:ea typeface="Hiragino Sans W4" panose="020B0400000000000000" pitchFamily="34" charset="-128"/>
+              </a:endParaRPr>
+            </a:p>
+          </p:txBody>
+        </p:sp>
+        <p:sp>
+          <p:nvSpPr>
+            <p:cNvPr id="6" name="テキスト ボックス 5">
+              <a:extLst>
+                <a:ext uri="{FF2B5EF4-FFF2-40B4-BE49-F238E27FC236}">
+                  <a16:creationId xmlns:a16="http://schemas.microsoft.com/office/drawing/2014/main" id="{5A516DAA-4861-253D-8B22-A39DD2E2B4F3}"/>
+                </a:ext>
+              </a:extLst>
+            </p:cNvPr>
+            <p:cNvSpPr txBox="1"/>
+            <p:nvPr/>
+          </p:nvSpPr>
+          <p:spPr>
+            <a:xfrm>
+              <a:off x="4014063" y="7210324"/>
+              <a:ext cx="1751307" cy="707886"/>
+            </a:xfrm>
+            <a:prstGeom prst="rect">
+              <a:avLst/>
+            </a:prstGeom>
+            <a:solidFill>
+              <a:schemeClr val="bg1"/>
+            </a:solidFill>
+            <a:ln>
+              <a:solidFill>
+                <a:schemeClr val="tx1"/>
+              </a:solidFill>
+            </a:ln>
+          </p:spPr>
+          <p:txBody>
+            <a:bodyPr wrap="square" rtlCol="0">
+              <a:spAutoFit/>
+            </a:bodyPr>
+            <a:lstStyle/>
+            <a:p>
+              <a:pPr algn="ctr"/>
+              <a:r>
+                <a:rPr kumimoji="1" lang="ja-JP" altLang="en-US" sz="4000">
+                  <a:latin typeface="Hiragino Sans W4" panose="020B0400000000000000" pitchFamily="34" charset="-128"/>
+                  <a:ea typeface="Hiragino Sans W4" panose="020B0400000000000000" pitchFamily="34" charset="-128"/>
+                </a:rPr>
+                <a:t>部会</a:t>
+              </a:r>
+              <a:endParaRPr kumimoji="1" lang="ja-JP" altLang="en-US" sz="2800">
+                <a:latin typeface="Hiragino Sans W4" panose="020B0400000000000000" pitchFamily="34" charset="-128"/>
+                <a:ea typeface="Hiragino Sans W4" panose="020B0400000000000000" pitchFamily="34" charset="-128"/>
+              </a:endParaRPr>
+            </a:p>
+          </p:txBody>
+        </p:sp>
+        <p:sp>
+          <p:nvSpPr>
+            <p:cNvPr id="7" name="テキスト ボックス 6">
+              <a:extLst>
+                <a:ext uri="{FF2B5EF4-FFF2-40B4-BE49-F238E27FC236}">
+                  <a16:creationId xmlns:a16="http://schemas.microsoft.com/office/drawing/2014/main" id="{94F88449-8492-8F51-2A0E-5CF468E99180}"/>
+                </a:ext>
+              </a:extLst>
+            </p:cNvPr>
+            <p:cNvSpPr txBox="1"/>
+            <p:nvPr/>
+          </p:nvSpPr>
+          <p:spPr>
+            <a:xfrm>
+              <a:off x="1961830" y="6290888"/>
+              <a:ext cx="1751307" cy="707886"/>
+            </a:xfrm>
+            <a:prstGeom prst="rect">
+              <a:avLst/>
+            </a:prstGeom>
+            <a:solidFill>
+              <a:schemeClr val="bg1"/>
+            </a:solidFill>
+            <a:ln>
+              <a:solidFill>
+                <a:schemeClr val="tx1"/>
+              </a:solidFill>
+            </a:ln>
+          </p:spPr>
+          <p:txBody>
+            <a:bodyPr wrap="square" rtlCol="0">
+              <a:spAutoFit/>
+            </a:bodyPr>
+            <a:lstStyle/>
+            <a:p>
+              <a:pPr algn="ctr"/>
+              <a:r>
+                <a:rPr kumimoji="1" lang="ja-JP" altLang="en-US" sz="4000">
+                  <a:latin typeface="Hiragino Sans W4" panose="020B0400000000000000" pitchFamily="34" charset="-128"/>
+                  <a:ea typeface="Hiragino Sans W4" panose="020B0400000000000000" pitchFamily="34" charset="-128"/>
+                </a:rPr>
+                <a:t>部会</a:t>
+              </a:r>
+              <a:endParaRPr kumimoji="1" lang="ja-JP" altLang="en-US" sz="2800">
+                <a:latin typeface="Hiragino Sans W4" panose="020B0400000000000000" pitchFamily="34" charset="-128"/>
+                <a:ea typeface="Hiragino Sans W4" panose="020B0400000000000000" pitchFamily="34" charset="-128"/>
+              </a:endParaRPr>
+            </a:p>
+          </p:txBody>
+        </p:sp>
+        <p:sp>
+          <p:nvSpPr>
+            <p:cNvPr id="8" name="テキスト ボックス 7">
+              <a:extLst>
+                <a:ext uri="{FF2B5EF4-FFF2-40B4-BE49-F238E27FC236}">
+                  <a16:creationId xmlns:a16="http://schemas.microsoft.com/office/drawing/2014/main" id="{36D48D1A-DBC0-3155-EEEE-70DB96DE0080}"/>
+                </a:ext>
+              </a:extLst>
+            </p:cNvPr>
+            <p:cNvSpPr txBox="1"/>
+            <p:nvPr/>
+          </p:nvSpPr>
+          <p:spPr>
+            <a:xfrm>
+              <a:off x="1961830" y="7210324"/>
+              <a:ext cx="1751307" cy="707886"/>
+            </a:xfrm>
+            <a:prstGeom prst="rect">
+              <a:avLst/>
+            </a:prstGeom>
+            <a:solidFill>
+              <a:schemeClr val="bg1"/>
+            </a:solidFill>
+            <a:ln>
+              <a:solidFill>
+                <a:schemeClr val="tx1"/>
+              </a:solidFill>
+            </a:ln>
+          </p:spPr>
+          <p:txBody>
+            <a:bodyPr wrap="square" rtlCol="0">
+              <a:spAutoFit/>
+            </a:bodyPr>
+            <a:lstStyle/>
+            <a:p>
+              <a:pPr algn="ctr"/>
+              <a:r>
+                <a:rPr kumimoji="1" lang="ja-JP" altLang="en-US" sz="4000">
+                  <a:latin typeface="Hiragino Sans W4" panose="020B0400000000000000" pitchFamily="34" charset="-128"/>
+                  <a:ea typeface="Hiragino Sans W4" panose="020B0400000000000000" pitchFamily="34" charset="-128"/>
+                </a:rPr>
+                <a:t>部会</a:t>
+              </a:r>
+              <a:endParaRPr kumimoji="1" lang="ja-JP" altLang="en-US" sz="2800">
+                <a:latin typeface="Hiragino Sans W4" panose="020B0400000000000000" pitchFamily="34" charset="-128"/>
+                <a:ea typeface="Hiragino Sans W4" panose="020B0400000000000000" pitchFamily="34" charset="-128"/>
+              </a:endParaRPr>
+            </a:p>
+          </p:txBody>
+        </p:sp>
+        <p:sp>
+          <p:nvSpPr>
+            <p:cNvPr id="9" name="正方形/長方形 8">
+              <a:extLst>
+                <a:ext uri="{FF2B5EF4-FFF2-40B4-BE49-F238E27FC236}">
+                  <a16:creationId xmlns:a16="http://schemas.microsoft.com/office/drawing/2014/main" id="{B809DADB-B0EA-A509-15B0-B6789930D7D7}"/>
+                </a:ext>
+              </a:extLst>
+            </p:cNvPr>
+            <p:cNvSpPr/>
+            <p:nvPr/>
+          </p:nvSpPr>
+          <p:spPr>
+            <a:xfrm>
+              <a:off x="7089184" y="5386951"/>
+              <a:ext cx="4500644" cy="3090622"/>
+            </a:xfrm>
+            <a:prstGeom prst="rect">
+              <a:avLst/>
+            </a:prstGeom>
+            <a:solidFill>
+              <a:schemeClr val="bg1"/>
+            </a:solidFill>
+            <a:ln w="28575"/>
+          </p:spPr>
+          <p:style>
+            <a:lnRef idx="2">
+              <a:schemeClr val="accent1">
+                <a:shade val="15000"/>
+              </a:schemeClr>
+            </a:lnRef>
+            <a:fillRef idx="1">
+              <a:schemeClr val="accent1"/>
+            </a:fillRef>
+            <a:effectRef idx="0">
+              <a:schemeClr val="accent1"/>
+            </a:effectRef>
+            <a:fontRef idx="minor">
+              <a:schemeClr val="lt1"/>
+            </a:fontRef>
+          </p:style>
+          <p:txBody>
+            <a:bodyPr rtlCol="0" anchor="t"/>
+            <a:lstStyle/>
+            <a:p>
+              <a:r>
+                <a:rPr kumimoji="1" lang="ja-JP" altLang="en-US" sz="3200" b="1">
+                  <a:solidFill>
+                    <a:schemeClr val="tx1"/>
+                  </a:solidFill>
+                  <a:latin typeface="Hiragino Sans W7" panose="020B0400000000000000" pitchFamily="34" charset="-128"/>
+                  <a:ea typeface="Hiragino Sans W7" panose="020B0400000000000000" pitchFamily="34" charset="-128"/>
+                </a:rPr>
+                <a:t>総務会</a:t>
+              </a:r>
+              <a:endParaRPr kumimoji="1" lang="en-US" altLang="ja-JP" sz="3200" b="1" dirty="0">
+                <a:solidFill>
+                  <a:schemeClr val="tx1"/>
+                </a:solidFill>
+                <a:latin typeface="Hiragino Sans W7" panose="020B0400000000000000" pitchFamily="34" charset="-128"/>
+                <a:ea typeface="Hiragino Sans W7" panose="020B0400000000000000" pitchFamily="34" charset="-128"/>
+              </a:endParaRPr>
+            </a:p>
+            <a:p>
+              <a:pPr marL="457200" indent="-457200">
+                <a:buFont typeface="Arial" panose="020B0604020202020204" pitchFamily="34" charset="0"/>
+                <a:buChar char="•"/>
+              </a:pPr>
+              <a:r>
+                <a:rPr kumimoji="1" lang="en-US" altLang="ja-JP" sz="3200" dirty="0">
+                  <a:solidFill>
+                    <a:schemeClr val="tx1"/>
+                  </a:solidFill>
+                  <a:latin typeface="Hiragino Sans W4" panose="020B0400000000000000" pitchFamily="34" charset="-128"/>
+                  <a:ea typeface="Hiragino Sans W4" panose="020B0400000000000000" pitchFamily="34" charset="-128"/>
+                </a:rPr>
+                <a:t>25</a:t>
+              </a:r>
+              <a:r>
+                <a:rPr kumimoji="1" lang="ja-JP" altLang="en-US" sz="3200">
+                  <a:solidFill>
+                    <a:schemeClr val="tx1"/>
+                  </a:solidFill>
+                  <a:latin typeface="Hiragino Sans W4" panose="020B0400000000000000" pitchFamily="34" charset="-128"/>
+                  <a:ea typeface="Hiragino Sans W4" panose="020B0400000000000000" pitchFamily="34" charset="-128"/>
+                </a:rPr>
+                <a:t>名の総務で構成</a:t>
+              </a:r>
+              <a:endParaRPr kumimoji="1" lang="en-US" altLang="ja-JP" sz="3200" dirty="0">
+                <a:solidFill>
+                  <a:schemeClr val="tx1"/>
+                </a:solidFill>
+                <a:latin typeface="Hiragino Sans W4" panose="020B0400000000000000" pitchFamily="34" charset="-128"/>
+                <a:ea typeface="Hiragino Sans W4" panose="020B0400000000000000" pitchFamily="34" charset="-128"/>
+              </a:endParaRPr>
+            </a:p>
+            <a:p>
+              <a:pPr marL="457200" indent="-457200">
+                <a:buFont typeface="Arial" panose="020B0604020202020204" pitchFamily="34" charset="0"/>
+                <a:buChar char="•"/>
+              </a:pPr>
+              <a:r>
+                <a:rPr kumimoji="1" lang="ja-JP" altLang="en-US" sz="3200">
+                  <a:solidFill>
+                    <a:schemeClr val="tx1"/>
+                  </a:solidFill>
+                  <a:latin typeface="Hiragino Sans W4" panose="020B0400000000000000" pitchFamily="34" charset="-128"/>
+                  <a:ea typeface="Hiragino Sans W4" panose="020B0400000000000000" pitchFamily="34" charset="-128"/>
+                </a:rPr>
+                <a:t>平時の最高意思決定機関</a:t>
+              </a:r>
+              <a:endParaRPr kumimoji="1" lang="en-US" altLang="ja-JP" sz="3200" dirty="0">
+                <a:solidFill>
+                  <a:schemeClr val="tx1"/>
+                </a:solidFill>
+                <a:latin typeface="Hiragino Sans W4" panose="020B0400000000000000" pitchFamily="34" charset="-128"/>
+                <a:ea typeface="Hiragino Sans W4" panose="020B0400000000000000" pitchFamily="34" charset="-128"/>
+              </a:endParaRPr>
+            </a:p>
+            <a:p>
+              <a:pPr marL="457200" indent="-457200">
+                <a:buFont typeface="Arial" panose="020B0604020202020204" pitchFamily="34" charset="0"/>
+                <a:buChar char="•"/>
+              </a:pPr>
+              <a:r>
+                <a:rPr kumimoji="1" lang="ja-JP" altLang="en-US" sz="3200">
+                  <a:solidFill>
+                    <a:schemeClr val="tx1"/>
+                  </a:solidFill>
+                  <a:latin typeface="Hiragino Sans W4" panose="020B0400000000000000" pitchFamily="34" charset="-128"/>
+                  <a:ea typeface="Hiragino Sans W4" panose="020B0400000000000000" pitchFamily="34" charset="-128"/>
+                </a:rPr>
+                <a:t>承認された法案には</a:t>
+              </a:r>
+              <a:r>
+                <a:rPr kumimoji="1" lang="ja-JP" altLang="en-US" sz="3200" b="1">
+                  <a:solidFill>
+                    <a:schemeClr val="tx1"/>
+                  </a:solidFill>
+                  <a:latin typeface="Hiragino Sans W4" panose="020B0400000000000000" pitchFamily="34" charset="-128"/>
+                  <a:ea typeface="Hiragino Sans W4" panose="020B0400000000000000" pitchFamily="34" charset="-128"/>
+                </a:rPr>
+                <a:t>党議拘束</a:t>
+              </a:r>
+              <a:r>
+                <a:rPr kumimoji="1" lang="ja-JP" altLang="en-US" sz="3200">
+                  <a:solidFill>
+                    <a:schemeClr val="tx1"/>
+                  </a:solidFill>
+                  <a:latin typeface="Hiragino Sans W4" panose="020B0400000000000000" pitchFamily="34" charset="-128"/>
+                  <a:ea typeface="Hiragino Sans W4" panose="020B0400000000000000" pitchFamily="34" charset="-128"/>
+                </a:rPr>
+                <a:t>がかかる</a:t>
+              </a:r>
+              <a:br>
+                <a:rPr kumimoji="1" lang="en-US" altLang="ja-JP" sz="3200" b="1" dirty="0">
+                  <a:solidFill>
+                    <a:schemeClr val="tx1"/>
+                  </a:solidFill>
+                  <a:latin typeface="Hiragino Sans W7" panose="020B0400000000000000" pitchFamily="34" charset="-128"/>
+                  <a:ea typeface="Hiragino Sans W7" panose="020B0400000000000000" pitchFamily="34" charset="-128"/>
+                </a:rPr>
+              </a:br>
+              <a:endParaRPr kumimoji="1" lang="ja-JP" altLang="en-US">
+                <a:solidFill>
+                  <a:schemeClr val="tx1"/>
+                </a:solidFill>
+                <a:latin typeface="Hiragino Sans W4" panose="020B0400000000000000" pitchFamily="34" charset="-128"/>
+                <a:ea typeface="Hiragino Sans W4" panose="020B0400000000000000" pitchFamily="34" charset="-128"/>
+              </a:endParaRPr>
+            </a:p>
+          </p:txBody>
+        </p:sp>
+        <p:sp>
+          <p:nvSpPr>
+            <p:cNvPr id="10" name="右矢印 9">
+              <a:extLst>
+                <a:ext uri="{FF2B5EF4-FFF2-40B4-BE49-F238E27FC236}">
+                  <a16:creationId xmlns:a16="http://schemas.microsoft.com/office/drawing/2014/main" id="{13122E36-2797-BCD3-6EDC-C06E3837DE05}"/>
+                </a:ext>
+              </a:extLst>
+            </p:cNvPr>
+            <p:cNvSpPr/>
+            <p:nvPr/>
+          </p:nvSpPr>
+          <p:spPr>
+            <a:xfrm>
+              <a:off x="6161550" y="6118601"/>
+              <a:ext cx="812686" cy="1627322"/>
+            </a:xfrm>
+            <a:prstGeom prst="rightArrow">
+              <a:avLst/>
+            </a:prstGeom>
+            <a:solidFill>
+              <a:schemeClr val="tx1"/>
+            </a:solidFill>
+            <a:ln>
+              <a:noFill/>
+            </a:ln>
+          </p:spPr>
+          <p:style>
+            <a:lnRef idx="2">
+              <a:schemeClr val="accent1">
+                <a:shade val="15000"/>
+              </a:schemeClr>
+            </a:lnRef>
+            <a:fillRef idx="1">
+              <a:schemeClr val="accent1"/>
+            </a:fillRef>
+            <a:effectRef idx="0">
+              <a:schemeClr val="accent1"/>
+            </a:effectRef>
+            <a:fontRef idx="minor">
+              <a:schemeClr val="lt1"/>
+            </a:fontRef>
+          </p:style>
+          <p:txBody>
+            <a:bodyPr rtlCol="0" anchor="ctr"/>
+            <a:lstStyle/>
+            <a:p>
+              <a:pPr algn="ctr"/>
+              <a:endParaRPr kumimoji="1" lang="ja-JP" altLang="en-US"/>
+            </a:p>
+          </p:txBody>
+        </p:sp>
+        <p:sp>
+          <p:nvSpPr>
+            <p:cNvPr id="11" name="角丸四角形 10">
+              <a:extLst>
+                <a:ext uri="{FF2B5EF4-FFF2-40B4-BE49-F238E27FC236}">
+                  <a16:creationId xmlns:a16="http://schemas.microsoft.com/office/drawing/2014/main" id="{ED8A0879-879A-F012-378D-934584A51056}"/>
+                </a:ext>
+              </a:extLst>
+            </p:cNvPr>
+            <p:cNvSpPr/>
+            <p:nvPr/>
+          </p:nvSpPr>
+          <p:spPr>
+            <a:xfrm>
+              <a:off x="1542407" y="487579"/>
+              <a:ext cx="1295076" cy="2901608"/>
+            </a:xfrm>
+            <a:prstGeom prst="roundRect">
+              <a:avLst/>
+            </a:prstGeom>
+            <a:solidFill>
+              <a:schemeClr val="bg1"/>
+            </a:solidFill>
+            <a:ln w="28575"/>
+          </p:spPr>
+          <p:style>
+            <a:lnRef idx="2">
+              <a:schemeClr val="accent1">
+                <a:shade val="15000"/>
+              </a:schemeClr>
+            </a:lnRef>
+            <a:fillRef idx="1">
+              <a:schemeClr val="accent1"/>
+            </a:fillRef>
+            <a:effectRef idx="0">
+              <a:schemeClr val="accent1"/>
+            </a:effectRef>
+            <a:fontRef idx="minor">
+              <a:schemeClr val="lt1"/>
+            </a:fontRef>
+          </p:style>
+          <p:txBody>
+            <a:bodyPr vert="eaVert" rtlCol="0" anchor="ctr"/>
+            <a:lstStyle/>
+            <a:p>
+              <a:pPr algn="ctr"/>
+              <a:r>
+                <a:rPr kumimoji="1" lang="ja-JP" altLang="en-US" sz="3200" b="1">
+                  <a:solidFill>
+                    <a:schemeClr val="tx1"/>
+                  </a:solidFill>
+                  <a:latin typeface="Hiragino Sans W7" panose="020B0400000000000000" pitchFamily="34" charset="-128"/>
+                  <a:ea typeface="Hiragino Sans W7" panose="020B0400000000000000" pitchFamily="34" charset="-128"/>
+                </a:rPr>
+                <a:t>法律案作成</a:t>
+              </a:r>
+              <a:endParaRPr kumimoji="1" lang="ja-JP" altLang="en-US" b="1">
+                <a:solidFill>
+                  <a:schemeClr val="tx1"/>
+                </a:solidFill>
+                <a:latin typeface="Hiragino Sans W7" panose="020B0400000000000000" pitchFamily="34" charset="-128"/>
+                <a:ea typeface="Hiragino Sans W7" panose="020B0400000000000000" pitchFamily="34" charset="-128"/>
+              </a:endParaRPr>
+            </a:p>
+          </p:txBody>
+        </p:sp>
+        <p:sp>
+          <p:nvSpPr>
+            <p:cNvPr id="12" name="角丸四角形 11">
+              <a:extLst>
+                <a:ext uri="{FF2B5EF4-FFF2-40B4-BE49-F238E27FC236}">
+                  <a16:creationId xmlns:a16="http://schemas.microsoft.com/office/drawing/2014/main" id="{1933DC41-54D9-FF0F-D80B-376EE65D6614}"/>
+                </a:ext>
+              </a:extLst>
+            </p:cNvPr>
+            <p:cNvSpPr/>
+            <p:nvPr/>
+          </p:nvSpPr>
+          <p:spPr>
+            <a:xfrm>
+              <a:off x="4501289" y="487579"/>
+              <a:ext cx="1295076" cy="2901608"/>
+            </a:xfrm>
+            <a:prstGeom prst="roundRect">
+              <a:avLst/>
+            </a:prstGeom>
+            <a:solidFill>
+              <a:schemeClr val="bg1"/>
+            </a:solidFill>
+            <a:ln w="28575"/>
+          </p:spPr>
+          <p:style>
+            <a:lnRef idx="2">
+              <a:schemeClr val="accent1">
+                <a:shade val="15000"/>
+              </a:schemeClr>
+            </a:lnRef>
+            <a:fillRef idx="1">
+              <a:schemeClr val="accent1"/>
+            </a:fillRef>
+            <a:effectRef idx="0">
+              <a:schemeClr val="accent1"/>
+            </a:effectRef>
+            <a:fontRef idx="minor">
+              <a:schemeClr val="lt1"/>
+            </a:fontRef>
+          </p:style>
+          <p:txBody>
+            <a:bodyPr vert="eaVert" rtlCol="0" anchor="ctr"/>
+            <a:lstStyle/>
+            <a:p>
+              <a:pPr algn="ctr"/>
+              <a:r>
+                <a:rPr kumimoji="1" lang="ja-JP" altLang="en-US" sz="3200" b="1">
+                  <a:solidFill>
+                    <a:schemeClr val="tx1"/>
+                  </a:solidFill>
+                  <a:latin typeface="Hiragino Sans W7" panose="020B0400000000000000" pitchFamily="34" charset="-128"/>
+                  <a:ea typeface="Hiragino Sans W7" panose="020B0400000000000000" pitchFamily="34" charset="-128"/>
+                </a:rPr>
+                <a:t>省議</a:t>
+              </a:r>
+              <a:endParaRPr kumimoji="1" lang="ja-JP" altLang="en-US" b="1">
+                <a:solidFill>
+                  <a:schemeClr val="tx1"/>
+                </a:solidFill>
+                <a:latin typeface="Hiragino Sans W7" panose="020B0400000000000000" pitchFamily="34" charset="-128"/>
+                <a:ea typeface="Hiragino Sans W7" panose="020B0400000000000000" pitchFamily="34" charset="-128"/>
+              </a:endParaRPr>
+            </a:p>
+          </p:txBody>
+        </p:sp>
+        <p:sp>
+          <p:nvSpPr>
+            <p:cNvPr id="13" name="角丸四角形 12">
+              <a:extLst>
+                <a:ext uri="{FF2B5EF4-FFF2-40B4-BE49-F238E27FC236}">
+                  <a16:creationId xmlns:a16="http://schemas.microsoft.com/office/drawing/2014/main" id="{B483B6DB-AF84-2B7E-223B-8397EE705AD0}"/>
+                </a:ext>
+              </a:extLst>
+            </p:cNvPr>
+            <p:cNvSpPr/>
+            <p:nvPr/>
+          </p:nvSpPr>
+          <p:spPr>
+            <a:xfrm>
+              <a:off x="7460171" y="487579"/>
+              <a:ext cx="1295076" cy="2901608"/>
+            </a:xfrm>
+            <a:prstGeom prst="roundRect">
+              <a:avLst/>
+            </a:prstGeom>
+            <a:solidFill>
+              <a:schemeClr val="bg1"/>
+            </a:solidFill>
+            <a:ln w="28575"/>
+          </p:spPr>
+          <p:style>
+            <a:lnRef idx="2">
+              <a:schemeClr val="accent1">
+                <a:shade val="15000"/>
+              </a:schemeClr>
+            </a:lnRef>
+            <a:fillRef idx="1">
+              <a:schemeClr val="accent1"/>
+            </a:fillRef>
+            <a:effectRef idx="0">
+              <a:schemeClr val="accent1"/>
+            </a:effectRef>
+            <a:fontRef idx="minor">
+              <a:schemeClr val="lt1"/>
+            </a:fontRef>
+          </p:style>
+          <p:txBody>
+            <a:bodyPr vert="eaVert" rtlCol="0" anchor="ctr"/>
+            <a:lstStyle/>
+            <a:p>
+              <a:pPr algn="ctr"/>
+              <a:r>
+                <a:rPr kumimoji="1" lang="ja-JP" altLang="en-US" sz="3200" b="1">
+                  <a:solidFill>
+                    <a:schemeClr val="tx1"/>
+                  </a:solidFill>
+                  <a:latin typeface="Hiragino Sans W7" panose="020B0400000000000000" pitchFamily="34" charset="-128"/>
+                  <a:ea typeface="Hiragino Sans W7" panose="020B0400000000000000" pitchFamily="34" charset="-128"/>
+                </a:rPr>
+                <a:t>閣議</a:t>
+              </a:r>
+              <a:endParaRPr kumimoji="1" lang="ja-JP" altLang="en-US" b="1">
+                <a:solidFill>
+                  <a:schemeClr val="tx1"/>
+                </a:solidFill>
+                <a:latin typeface="Hiragino Sans W7" panose="020B0400000000000000" pitchFamily="34" charset="-128"/>
+                <a:ea typeface="Hiragino Sans W7" panose="020B0400000000000000" pitchFamily="34" charset="-128"/>
+              </a:endParaRPr>
+            </a:p>
+          </p:txBody>
+        </p:sp>
+        <p:sp>
+          <p:nvSpPr>
+            <p:cNvPr id="14" name="角丸四角形 13">
+              <a:extLst>
+                <a:ext uri="{FF2B5EF4-FFF2-40B4-BE49-F238E27FC236}">
+                  <a16:creationId xmlns:a16="http://schemas.microsoft.com/office/drawing/2014/main" id="{D0EA2A30-6C32-E166-9313-9A94E4AF8601}"/>
+                </a:ext>
+              </a:extLst>
+            </p:cNvPr>
+            <p:cNvSpPr/>
+            <p:nvPr/>
+          </p:nvSpPr>
+          <p:spPr>
+            <a:xfrm>
+              <a:off x="10419053" y="487579"/>
+              <a:ext cx="1295076" cy="2901608"/>
+            </a:xfrm>
+            <a:prstGeom prst="roundRect">
+              <a:avLst/>
+            </a:prstGeom>
+            <a:solidFill>
+              <a:schemeClr val="bg1"/>
+            </a:solidFill>
+            <a:ln w="28575"/>
+          </p:spPr>
+          <p:style>
+            <a:lnRef idx="2">
+              <a:schemeClr val="accent1">
+                <a:shade val="15000"/>
+              </a:schemeClr>
+            </a:lnRef>
+            <a:fillRef idx="1">
+              <a:schemeClr val="accent1"/>
+            </a:fillRef>
+            <a:effectRef idx="0">
+              <a:schemeClr val="accent1"/>
+            </a:effectRef>
+            <a:fontRef idx="minor">
+              <a:schemeClr val="lt1"/>
+            </a:fontRef>
+          </p:style>
+          <p:txBody>
+            <a:bodyPr vert="eaVert" rtlCol="0" anchor="ctr"/>
+            <a:lstStyle/>
+            <a:p>
+              <a:pPr algn="ctr"/>
+              <a:r>
+                <a:rPr kumimoji="1" lang="ja-JP" altLang="en-US" sz="3200" b="1">
+                  <a:solidFill>
+                    <a:schemeClr val="tx1"/>
+                  </a:solidFill>
+                  <a:latin typeface="Hiragino Sans W7" panose="020B0400000000000000" pitchFamily="34" charset="-128"/>
+                  <a:ea typeface="Hiragino Sans W7" panose="020B0400000000000000" pitchFamily="34" charset="-128"/>
+                </a:rPr>
+                <a:t>法案提出</a:t>
+              </a:r>
+              <a:endParaRPr kumimoji="1" lang="ja-JP" altLang="en-US" b="1">
+                <a:solidFill>
+                  <a:schemeClr val="tx1"/>
+                </a:solidFill>
+                <a:latin typeface="Hiragino Sans W7" panose="020B0400000000000000" pitchFamily="34" charset="-128"/>
+                <a:ea typeface="Hiragino Sans W7" panose="020B0400000000000000" pitchFamily="34" charset="-128"/>
+              </a:endParaRPr>
+            </a:p>
+          </p:txBody>
+        </p:sp>
+        <p:sp>
+          <p:nvSpPr>
+            <p:cNvPr id="15" name="右矢印 14">
+              <a:extLst>
+                <a:ext uri="{FF2B5EF4-FFF2-40B4-BE49-F238E27FC236}">
+                  <a16:creationId xmlns:a16="http://schemas.microsoft.com/office/drawing/2014/main" id="{A3CAF509-9E11-B20A-F299-EFB544952B98}"/>
+                </a:ext>
+              </a:extLst>
+            </p:cNvPr>
+            <p:cNvSpPr/>
+            <p:nvPr/>
+          </p:nvSpPr>
+          <p:spPr>
+            <a:xfrm>
+              <a:off x="3092562" y="1124722"/>
+              <a:ext cx="1153647" cy="1627322"/>
+            </a:xfrm>
+            <a:prstGeom prst="rightArrow">
+              <a:avLst/>
+            </a:prstGeom>
+            <a:solidFill>
+              <a:schemeClr val="tx1"/>
+            </a:solidFill>
+            <a:ln>
+              <a:noFill/>
+            </a:ln>
+          </p:spPr>
+          <p:style>
+            <a:lnRef idx="2">
+              <a:schemeClr val="accent1">
+                <a:shade val="15000"/>
+              </a:schemeClr>
+            </a:lnRef>
+            <a:fillRef idx="1">
+              <a:schemeClr val="accent1"/>
+            </a:fillRef>
+            <a:effectRef idx="0">
+              <a:schemeClr val="accent1"/>
+            </a:effectRef>
+            <a:fontRef idx="minor">
+              <a:schemeClr val="lt1"/>
+            </a:fontRef>
+          </p:style>
+          <p:txBody>
+            <a:bodyPr rtlCol="0" anchor="ctr"/>
+            <a:lstStyle/>
+            <a:p>
+              <a:pPr algn="ctr"/>
+              <a:endParaRPr kumimoji="1" lang="ja-JP" altLang="en-US"/>
+            </a:p>
+          </p:txBody>
+        </p:sp>
+        <p:sp>
+          <p:nvSpPr>
+            <p:cNvPr id="16" name="右矢印 15">
+              <a:extLst>
+                <a:ext uri="{FF2B5EF4-FFF2-40B4-BE49-F238E27FC236}">
+                  <a16:creationId xmlns:a16="http://schemas.microsoft.com/office/drawing/2014/main" id="{22A6D47D-8256-2448-404D-6062087CBC16}"/>
+                </a:ext>
+              </a:extLst>
+            </p:cNvPr>
+            <p:cNvSpPr/>
+            <p:nvPr/>
+          </p:nvSpPr>
+          <p:spPr>
+            <a:xfrm>
+              <a:off x="6051444" y="1124722"/>
+              <a:ext cx="1153647" cy="1627322"/>
+            </a:xfrm>
+            <a:prstGeom prst="rightArrow">
+              <a:avLst/>
+            </a:prstGeom>
+            <a:solidFill>
+              <a:schemeClr val="tx1"/>
+            </a:solidFill>
+            <a:ln>
+              <a:noFill/>
+            </a:ln>
+          </p:spPr>
+          <p:style>
+            <a:lnRef idx="2">
+              <a:schemeClr val="accent1">
+                <a:shade val="15000"/>
+              </a:schemeClr>
+            </a:lnRef>
+            <a:fillRef idx="1">
+              <a:schemeClr val="accent1"/>
+            </a:fillRef>
+            <a:effectRef idx="0">
+              <a:schemeClr val="accent1"/>
+            </a:effectRef>
+            <a:fontRef idx="minor">
+              <a:schemeClr val="lt1"/>
+            </a:fontRef>
+          </p:style>
+          <p:txBody>
+            <a:bodyPr rtlCol="0" anchor="ctr"/>
+            <a:lstStyle/>
+            <a:p>
+              <a:pPr algn="ctr"/>
+              <a:endParaRPr kumimoji="1" lang="ja-JP" altLang="en-US"/>
+            </a:p>
+          </p:txBody>
+        </p:sp>
+        <p:sp>
+          <p:nvSpPr>
+            <p:cNvPr id="17" name="右矢印 16">
+              <a:extLst>
+                <a:ext uri="{FF2B5EF4-FFF2-40B4-BE49-F238E27FC236}">
+                  <a16:creationId xmlns:a16="http://schemas.microsoft.com/office/drawing/2014/main" id="{B0EDD56B-10A9-3A2F-0593-962FFFC8B6C6}"/>
+                </a:ext>
+              </a:extLst>
+            </p:cNvPr>
+            <p:cNvSpPr/>
+            <p:nvPr/>
+          </p:nvSpPr>
+          <p:spPr>
+            <a:xfrm>
+              <a:off x="9010326" y="1124722"/>
+              <a:ext cx="1153647" cy="1627322"/>
+            </a:xfrm>
+            <a:prstGeom prst="rightArrow">
+              <a:avLst/>
+            </a:prstGeom>
+            <a:solidFill>
+              <a:schemeClr val="tx1"/>
+            </a:solidFill>
+            <a:ln>
+              <a:noFill/>
+            </a:ln>
+          </p:spPr>
+          <p:style>
+            <a:lnRef idx="2">
+              <a:schemeClr val="accent1">
+                <a:shade val="15000"/>
+              </a:schemeClr>
+            </a:lnRef>
+            <a:fillRef idx="1">
+              <a:schemeClr val="accent1"/>
+            </a:fillRef>
+            <a:effectRef idx="0">
+              <a:schemeClr val="accent1"/>
+            </a:effectRef>
+            <a:fontRef idx="minor">
+              <a:schemeClr val="lt1"/>
+            </a:fontRef>
+          </p:style>
+          <p:txBody>
+            <a:bodyPr rtlCol="0" anchor="ctr"/>
+            <a:lstStyle/>
+            <a:p>
+              <a:pPr algn="ctr"/>
+              <a:endParaRPr kumimoji="1" lang="ja-JP" altLang="en-US"/>
+            </a:p>
+          </p:txBody>
+        </p:sp>
+        <p:cxnSp>
+          <p:nvCxnSpPr>
+            <p:cNvPr id="19" name="直線矢印コネクタ 18">
+              <a:extLst>
+                <a:ext uri="{FF2B5EF4-FFF2-40B4-BE49-F238E27FC236}">
+                  <a16:creationId xmlns:a16="http://schemas.microsoft.com/office/drawing/2014/main" id="{813D31DB-DF9D-4ABD-BA2A-AC30B5AE2E61}"/>
+                </a:ext>
+              </a:extLst>
+            </p:cNvPr>
+            <p:cNvCxnSpPr>
+              <a:stCxn id="11" idx="2"/>
+            </p:cNvCxnSpPr>
+            <p:nvPr/>
+          </p:nvCxnSpPr>
+          <p:spPr>
+            <a:xfrm>
+              <a:off x="2189945" y="3389187"/>
+              <a:ext cx="2699771" cy="2901701"/>
+            </a:xfrm>
+            <a:prstGeom prst="straightConnector1">
+              <a:avLst/>
+            </a:prstGeom>
+            <a:ln w="76200">
+              <a:solidFill>
+                <a:schemeClr val="tx1"/>
+              </a:solidFill>
+              <a:prstDash val="dash"/>
+              <a:headEnd type="triangle"/>
+              <a:tailEnd type="triangle"/>
+            </a:ln>
+          </p:spPr>
+          <p:style>
+            <a:lnRef idx="1">
+              <a:schemeClr val="accent1"/>
+            </a:lnRef>
+            <a:fillRef idx="0">
+              <a:schemeClr val="accent1"/>
+            </a:fillRef>
+            <a:effectRef idx="0">
+              <a:schemeClr val="accent1"/>
+            </a:effectRef>
+            <a:fontRef idx="minor">
+              <a:schemeClr val="tx1"/>
+            </a:fontRef>
+          </p:style>
+        </p:cxnSp>
+        <p:cxnSp>
+          <p:nvCxnSpPr>
+            <p:cNvPr id="20" name="直線矢印コネクタ 19">
+              <a:extLst>
+                <a:ext uri="{FF2B5EF4-FFF2-40B4-BE49-F238E27FC236}">
+                  <a16:creationId xmlns:a16="http://schemas.microsoft.com/office/drawing/2014/main" id="{C2FCCB32-5388-4E51-BFB2-1AD825C79DA7}"/>
+                </a:ext>
+              </a:extLst>
+            </p:cNvPr>
+            <p:cNvCxnSpPr>
+              <a:cxnSpLocks/>
+              <a:stCxn id="13" idx="2"/>
+              <a:endCxn id="9" idx="0"/>
+            </p:cNvCxnSpPr>
+            <p:nvPr/>
+          </p:nvCxnSpPr>
+          <p:spPr>
+            <a:xfrm>
+              <a:off x="8107709" y="3389187"/>
+              <a:ext cx="1231797" cy="1997764"/>
+            </a:xfrm>
+            <a:prstGeom prst="straightConnector1">
+              <a:avLst/>
+            </a:prstGeom>
+            <a:ln w="76200">
+              <a:solidFill>
+                <a:schemeClr val="tx1"/>
+              </a:solidFill>
+              <a:prstDash val="dash"/>
+              <a:headEnd type="triangle" w="med" len="med"/>
+              <a:tailEnd type="none" w="med" len="med"/>
+            </a:ln>
+          </p:spPr>
+          <p:style>
+            <a:lnRef idx="1">
+              <a:schemeClr val="accent1"/>
+            </a:lnRef>
+            <a:fillRef idx="0">
+              <a:schemeClr val="accent1"/>
+            </a:fillRef>
+            <a:effectRef idx="0">
+              <a:schemeClr val="accent1"/>
+            </a:effectRef>
+            <a:fontRef idx="minor">
+              <a:schemeClr val="tx1"/>
+            </a:fontRef>
+          </p:style>
+        </p:cxnSp>
+      </p:grpSp>
+    </p:spTree>
+    <p:extLst>
+      <p:ext uri="{BB962C8B-B14F-4D97-AF65-F5344CB8AC3E}">
+        <p14:creationId xmlns:p14="http://schemas.microsoft.com/office/powerpoint/2010/main" val="2786978233"/>
+      </p:ext>
+    </p:extLst>
+  </p:cSld>
+  <p:clrMapOvr>
+    <a:masterClrMapping/>
+  </p:clrMapOvr>
+</p:sld>
+</file>
+
 <file path=ppt/slides/slide3.xml><?xml version="1.0" encoding="utf-8"?>
 <p:sld xmlns:a="http://schemas.openxmlformats.org/drawingml/2006/main" xmlns:r="http://schemas.openxmlformats.org/officeDocument/2006/relationships" xmlns:p="http://schemas.openxmlformats.org/presentationml/2006/main">
   <p:cSld>

--- a/figs/DIYfigures_pp.pptx
+++ b/figs/DIYfigures_pp.pptx
@@ -32,6 +32,7 @@
     <p:sldId id="280" r:id="rId26"/>
     <p:sldId id="282" r:id="rId27"/>
     <p:sldId id="281" r:id="rId28"/>
+    <p:sldId id="283" r:id="rId29"/>
   </p:sldIdLst>
   <p:sldSz cx="12801600" cy="9601200" type="A3"/>
   <p:notesSz cx="6858000" cy="9144000"/>
@@ -7041,7 +7042,7 @@
           <a:p>
             <a:fld id="{DBD89380-344E-284F-BE0F-D796858BF56F}" type="datetimeFigureOut">
               <a:rPr kumimoji="1" lang="ja-JP" altLang="en-US" smtClean="0"/>
-              <a:t>2026/9/23</a:t>
+              <a:t>2026/9/30</a:t>
             </a:fld>
             <a:endParaRPr kumimoji="1" lang="ja-JP" altLang="en-US"/>
           </a:p>
@@ -7243,7 +7244,7 @@
           <a:p>
             <a:fld id="{DBD89380-344E-284F-BE0F-D796858BF56F}" type="datetimeFigureOut">
               <a:rPr kumimoji="1" lang="ja-JP" altLang="en-US" smtClean="0"/>
-              <a:t>2026/9/23</a:t>
+              <a:t>2026/9/30</a:t>
             </a:fld>
             <a:endParaRPr kumimoji="1" lang="ja-JP" altLang="en-US"/>
           </a:p>
@@ -7455,7 +7456,7 @@
           <a:p>
             <a:fld id="{DBD89380-344E-284F-BE0F-D796858BF56F}" type="datetimeFigureOut">
               <a:rPr kumimoji="1" lang="ja-JP" altLang="en-US" smtClean="0"/>
-              <a:t>2026/9/23</a:t>
+              <a:t>2026/9/30</a:t>
             </a:fld>
             <a:endParaRPr kumimoji="1" lang="ja-JP" altLang="en-US"/>
           </a:p>
@@ -7657,7 +7658,7 @@
           <a:p>
             <a:fld id="{DBD89380-344E-284F-BE0F-D796858BF56F}" type="datetimeFigureOut">
               <a:rPr kumimoji="1" lang="ja-JP" altLang="en-US" smtClean="0"/>
-              <a:t>2026/9/23</a:t>
+              <a:t>2026/9/30</a:t>
             </a:fld>
             <a:endParaRPr kumimoji="1" lang="ja-JP" altLang="en-US"/>
           </a:p>
@@ -7901,7 +7902,7 @@
           <a:p>
             <a:fld id="{DBD89380-344E-284F-BE0F-D796858BF56F}" type="datetimeFigureOut">
               <a:rPr kumimoji="1" lang="ja-JP" altLang="en-US" smtClean="0"/>
-              <a:t>2026/9/23</a:t>
+              <a:t>2026/9/30</a:t>
             </a:fld>
             <a:endParaRPr kumimoji="1" lang="ja-JP" altLang="en-US"/>
           </a:p>
@@ -8197,7 +8198,7 @@
           <a:p>
             <a:fld id="{DBD89380-344E-284F-BE0F-D796858BF56F}" type="datetimeFigureOut">
               <a:rPr kumimoji="1" lang="ja-JP" altLang="en-US" smtClean="0"/>
-              <a:t>2026/9/23</a:t>
+              <a:t>2026/9/30</a:t>
             </a:fld>
             <a:endParaRPr kumimoji="1" lang="ja-JP" altLang="en-US"/>
           </a:p>
@@ -8628,7 +8629,7 @@
           <a:p>
             <a:fld id="{DBD89380-344E-284F-BE0F-D796858BF56F}" type="datetimeFigureOut">
               <a:rPr kumimoji="1" lang="ja-JP" altLang="en-US" smtClean="0"/>
-              <a:t>2026/9/23</a:t>
+              <a:t>2026/9/30</a:t>
             </a:fld>
             <a:endParaRPr kumimoji="1" lang="ja-JP" altLang="en-US"/>
           </a:p>
@@ -8746,7 +8747,7 @@
           <a:p>
             <a:fld id="{DBD89380-344E-284F-BE0F-D796858BF56F}" type="datetimeFigureOut">
               <a:rPr kumimoji="1" lang="ja-JP" altLang="en-US" smtClean="0"/>
-              <a:t>2026/9/23</a:t>
+              <a:t>2026/9/30</a:t>
             </a:fld>
             <a:endParaRPr kumimoji="1" lang="ja-JP" altLang="en-US"/>
           </a:p>
@@ -8841,7 +8842,7 @@
           <a:p>
             <a:fld id="{DBD89380-344E-284F-BE0F-D796858BF56F}" type="datetimeFigureOut">
               <a:rPr kumimoji="1" lang="ja-JP" altLang="en-US" smtClean="0"/>
-              <a:t>2026/9/23</a:t>
+              <a:t>2026/9/30</a:t>
             </a:fld>
             <a:endParaRPr kumimoji="1" lang="ja-JP" altLang="en-US"/>
           </a:p>
@@ -9150,7 +9151,7 @@
           <a:p>
             <a:fld id="{DBD89380-344E-284F-BE0F-D796858BF56F}" type="datetimeFigureOut">
               <a:rPr kumimoji="1" lang="ja-JP" altLang="en-US" smtClean="0"/>
-              <a:t>2026/9/23</a:t>
+              <a:t>2026/9/30</a:t>
             </a:fld>
             <a:endParaRPr kumimoji="1" lang="ja-JP" altLang="en-US"/>
           </a:p>
@@ -9407,7 +9408,7 @@
           <a:p>
             <a:fld id="{DBD89380-344E-284F-BE0F-D796858BF56F}" type="datetimeFigureOut">
               <a:rPr kumimoji="1" lang="ja-JP" altLang="en-US" smtClean="0"/>
-              <a:t>2026/9/23</a:t>
+              <a:t>2026/9/30</a:t>
             </a:fld>
             <a:endParaRPr kumimoji="1" lang="ja-JP" altLang="en-US"/>
           </a:p>
@@ -9652,7 +9653,7 @@
           <a:p>
             <a:fld id="{DBD89380-344E-284F-BE0F-D796858BF56F}" type="datetimeFigureOut">
               <a:rPr kumimoji="1" lang="ja-JP" altLang="en-US" smtClean="0"/>
-              <a:t>2026/9/23</a:t>
+              <a:t>2026/9/30</a:t>
             </a:fld>
             <a:endParaRPr kumimoji="1" lang="ja-JP" altLang="en-US"/>
           </a:p>
@@ -29626,6 +29627,891 @@
 </p:sld>
 </file>
 
+<file path=ppt/slides/slide28.xml><?xml version="1.0" encoding="utf-8"?>
+<p:sld xmlns:a="http://schemas.openxmlformats.org/drawingml/2006/main" xmlns:r="http://schemas.openxmlformats.org/officeDocument/2006/relationships" xmlns:p="http://schemas.openxmlformats.org/presentationml/2006/main">
+  <p:cSld>
+    <p:spTree>
+      <p:nvGrpSpPr>
+        <p:cNvPr id="1" name=""/>
+        <p:cNvGrpSpPr/>
+        <p:nvPr/>
+      </p:nvGrpSpPr>
+      <p:grpSpPr>
+        <a:xfrm>
+          <a:off x="0" y="0"/>
+          <a:ext cx="0" cy="0"/>
+          <a:chOff x="0" y="0"/>
+          <a:chExt cx="0" cy="0"/>
+        </a:xfrm>
+      </p:grpSpPr>
+      <p:grpSp>
+        <p:nvGrpSpPr>
+          <p:cNvPr id="24" name="グループ化 23">
+            <a:extLst>
+              <a:ext uri="{FF2B5EF4-FFF2-40B4-BE49-F238E27FC236}">
+                <a16:creationId xmlns:a16="http://schemas.microsoft.com/office/drawing/2014/main" id="{703D0DBC-671B-5FF9-F9D2-ABE423AFBA5C}"/>
+              </a:ext>
+            </a:extLst>
+          </p:cNvPr>
+          <p:cNvGrpSpPr/>
+          <p:nvPr/>
+        </p:nvGrpSpPr>
+        <p:grpSpPr>
+          <a:xfrm>
+            <a:off x="888679" y="331047"/>
+            <a:ext cx="11024242" cy="8716088"/>
+            <a:chOff x="1622375" y="315549"/>
+            <a:chExt cx="11024242" cy="8716088"/>
+          </a:xfrm>
+        </p:grpSpPr>
+        <p:sp>
+          <p:nvSpPr>
+            <p:cNvPr id="2" name="角丸四角形 1">
+              <a:extLst>
+                <a:ext uri="{FF2B5EF4-FFF2-40B4-BE49-F238E27FC236}">
+                  <a16:creationId xmlns:a16="http://schemas.microsoft.com/office/drawing/2014/main" id="{C80C4E6E-D69C-E0C0-B81E-0C89BA7B6899}"/>
+                </a:ext>
+              </a:extLst>
+            </p:cNvPr>
+            <p:cNvSpPr/>
+            <p:nvPr/>
+          </p:nvSpPr>
+          <p:spPr>
+            <a:xfrm>
+              <a:off x="1622375" y="1285046"/>
+              <a:ext cx="3574506" cy="2357679"/>
+            </a:xfrm>
+            <a:prstGeom prst="roundRect">
+              <a:avLst/>
+            </a:prstGeom>
+            <a:noFill/>
+            <a:ln w="28575">
+              <a:solidFill>
+                <a:schemeClr val="tx1"/>
+              </a:solidFill>
+            </a:ln>
+          </p:spPr>
+          <p:style>
+            <a:lnRef idx="2">
+              <a:schemeClr val="accent1">
+                <a:shade val="15000"/>
+              </a:schemeClr>
+            </a:lnRef>
+            <a:fillRef idx="1">
+              <a:schemeClr val="accent1"/>
+            </a:fillRef>
+            <a:effectRef idx="0">
+              <a:schemeClr val="accent1"/>
+            </a:effectRef>
+            <a:fontRef idx="minor">
+              <a:schemeClr val="lt1"/>
+            </a:fontRef>
+          </p:style>
+          <p:txBody>
+            <a:bodyPr rtlCol="0" anchor="ctr"/>
+            <a:lstStyle/>
+            <a:p>
+              <a:pPr algn="ctr"/>
+              <a:r>
+                <a:rPr kumimoji="1" lang="ja-JP" altLang="en-US" sz="4800" b="1">
+                  <a:solidFill>
+                    <a:schemeClr val="tx1"/>
+                  </a:solidFill>
+                  <a:latin typeface="Hiragino Sans W7" panose="020B0400000000000000" pitchFamily="34" charset="-128"/>
+                  <a:ea typeface="Hiragino Sans W7" panose="020B0400000000000000" pitchFamily="34" charset="-128"/>
+                </a:rPr>
+                <a:t>国会無能論</a:t>
+              </a:r>
+              <a:endParaRPr kumimoji="1" lang="en-US" altLang="ja-JP" sz="4800" b="1" dirty="0">
+                <a:solidFill>
+                  <a:schemeClr val="tx1"/>
+                </a:solidFill>
+                <a:latin typeface="Hiragino Sans W7" panose="020B0400000000000000" pitchFamily="34" charset="-128"/>
+                <a:ea typeface="Hiragino Sans W7" panose="020B0400000000000000" pitchFamily="34" charset="-128"/>
+              </a:endParaRPr>
+            </a:p>
+            <a:p>
+              <a:pPr algn="ctr"/>
+              <a:r>
+                <a:rPr kumimoji="1" lang="ja-JP" altLang="en-US" sz="2800">
+                  <a:solidFill>
+                    <a:schemeClr val="tx1"/>
+                  </a:solidFill>
+                  <a:latin typeface="Hiragino Sans W4" panose="020B0400000000000000" pitchFamily="34" charset="-128"/>
+                  <a:ea typeface="Hiragino Sans W4" panose="020B0400000000000000" pitchFamily="34" charset="-128"/>
+                </a:rPr>
+                <a:t>（</a:t>
+              </a:r>
+              <a:r>
+                <a:rPr kumimoji="1" lang="en-US" altLang="ja-JP" sz="2800" dirty="0">
+                  <a:solidFill>
+                    <a:schemeClr val="tx1"/>
+                  </a:solidFill>
+                  <a:latin typeface="Hiragino Sans W4" panose="020B0400000000000000" pitchFamily="34" charset="-128"/>
+                  <a:ea typeface="Hiragino Sans W4" panose="020B0400000000000000" pitchFamily="34" charset="-128"/>
+                </a:rPr>
+                <a:t>〜1970s</a:t>
+              </a:r>
+              <a:r>
+                <a:rPr kumimoji="1" lang="ja-JP" altLang="en-US" sz="2800">
+                  <a:solidFill>
+                    <a:schemeClr val="tx1"/>
+                  </a:solidFill>
+                  <a:latin typeface="Hiragino Sans W4" panose="020B0400000000000000" pitchFamily="34" charset="-128"/>
+                  <a:ea typeface="Hiragino Sans W4" panose="020B0400000000000000" pitchFamily="34" charset="-128"/>
+                </a:rPr>
+                <a:t>）</a:t>
+              </a:r>
+            </a:p>
+          </p:txBody>
+        </p:sp>
+        <p:sp>
+          <p:nvSpPr>
+            <p:cNvPr id="6" name="角丸四角形 5">
+              <a:extLst>
+                <a:ext uri="{FF2B5EF4-FFF2-40B4-BE49-F238E27FC236}">
+                  <a16:creationId xmlns:a16="http://schemas.microsoft.com/office/drawing/2014/main" id="{E2FD679B-0C4A-190D-EAE0-250BF0A4E485}"/>
+                </a:ext>
+              </a:extLst>
+            </p:cNvPr>
+            <p:cNvSpPr/>
+            <p:nvPr/>
+          </p:nvSpPr>
+          <p:spPr>
+            <a:xfrm>
+              <a:off x="7604721" y="1285046"/>
+              <a:ext cx="3574506" cy="2357679"/>
+            </a:xfrm>
+            <a:prstGeom prst="roundRect">
+              <a:avLst/>
+            </a:prstGeom>
+            <a:noFill/>
+            <a:ln w="28575">
+              <a:solidFill>
+                <a:schemeClr val="tx1"/>
+              </a:solidFill>
+            </a:ln>
+          </p:spPr>
+          <p:style>
+            <a:lnRef idx="2">
+              <a:schemeClr val="accent1">
+                <a:shade val="15000"/>
+              </a:schemeClr>
+            </a:lnRef>
+            <a:fillRef idx="1">
+              <a:schemeClr val="accent1"/>
+            </a:fillRef>
+            <a:effectRef idx="0">
+              <a:schemeClr val="accent1"/>
+            </a:effectRef>
+            <a:fontRef idx="minor">
+              <a:schemeClr val="lt1"/>
+            </a:fontRef>
+          </p:style>
+          <p:txBody>
+            <a:bodyPr rtlCol="0" anchor="ctr"/>
+            <a:lstStyle/>
+            <a:p>
+              <a:pPr algn="ctr"/>
+              <a:r>
+                <a:rPr kumimoji="1" lang="ja-JP" altLang="en-US" sz="4800" b="1">
+                  <a:solidFill>
+                    <a:schemeClr val="tx1"/>
+                  </a:solidFill>
+                  <a:latin typeface="Hiragino Sans W7" panose="020B0400000000000000" pitchFamily="34" charset="-128"/>
+                  <a:ea typeface="Hiragino Sans W7" panose="020B0400000000000000" pitchFamily="34" charset="-128"/>
+                </a:rPr>
+                <a:t>粘着性論</a:t>
+              </a:r>
+              <a:br>
+                <a:rPr kumimoji="1" lang="en-US" altLang="ja-JP" sz="4800" b="1" dirty="0">
+                  <a:solidFill>
+                    <a:schemeClr val="tx1"/>
+                  </a:solidFill>
+                  <a:latin typeface="Hiragino Sans W7" panose="020B0400000000000000" pitchFamily="34" charset="-128"/>
+                  <a:ea typeface="Hiragino Sans W7" panose="020B0400000000000000" pitchFamily="34" charset="-128"/>
+                </a:rPr>
+              </a:br>
+              <a:r>
+                <a:rPr kumimoji="1" lang="ja-JP" altLang="en-US" sz="2800">
+                  <a:solidFill>
+                    <a:schemeClr val="tx1"/>
+                  </a:solidFill>
+                  <a:latin typeface="Hiragino Sans W4" panose="020B0400000000000000" pitchFamily="34" charset="-128"/>
+                  <a:ea typeface="Hiragino Sans W4" panose="020B0400000000000000" pitchFamily="34" charset="-128"/>
+                </a:rPr>
+                <a:t>（</a:t>
+              </a:r>
+              <a:r>
+                <a:rPr kumimoji="1" lang="en-US" altLang="ja-JP" sz="2800" dirty="0">
+                  <a:solidFill>
+                    <a:schemeClr val="tx1"/>
+                  </a:solidFill>
+                  <a:latin typeface="Hiragino Sans W4" panose="020B0400000000000000" pitchFamily="34" charset="-128"/>
+                  <a:ea typeface="Hiragino Sans W4" panose="020B0400000000000000" pitchFamily="34" charset="-128"/>
+                </a:rPr>
+                <a:t>1980s〜</a:t>
+              </a:r>
+              <a:r>
+                <a:rPr kumimoji="1" lang="ja-JP" altLang="en-US" sz="2800">
+                  <a:solidFill>
+                    <a:schemeClr val="tx1"/>
+                  </a:solidFill>
+                  <a:latin typeface="Hiragino Sans W4" panose="020B0400000000000000" pitchFamily="34" charset="-128"/>
+                  <a:ea typeface="Hiragino Sans W4" panose="020B0400000000000000" pitchFamily="34" charset="-128"/>
+                </a:rPr>
+                <a:t>）</a:t>
+              </a:r>
+              <a:endParaRPr kumimoji="1" lang="ja-JP" altLang="en-US">
+                <a:solidFill>
+                  <a:schemeClr val="tx1"/>
+                </a:solidFill>
+                <a:latin typeface="Hiragino Sans W4" panose="020B0400000000000000" pitchFamily="34" charset="-128"/>
+                <a:ea typeface="Hiragino Sans W4" panose="020B0400000000000000" pitchFamily="34" charset="-128"/>
+              </a:endParaRPr>
+            </a:p>
+          </p:txBody>
+        </p:sp>
+        <p:sp>
+          <p:nvSpPr>
+            <p:cNvPr id="7" name="正方形/長方形 6">
+              <a:extLst>
+                <a:ext uri="{FF2B5EF4-FFF2-40B4-BE49-F238E27FC236}">
+                  <a16:creationId xmlns:a16="http://schemas.microsoft.com/office/drawing/2014/main" id="{27D75820-6F12-D209-4294-E59DAD1B5BC0}"/>
+                </a:ext>
+              </a:extLst>
+            </p:cNvPr>
+            <p:cNvSpPr/>
+            <p:nvPr/>
+          </p:nvSpPr>
+          <p:spPr>
+            <a:xfrm>
+              <a:off x="6137328" y="569562"/>
+              <a:ext cx="6509289" cy="8462075"/>
+            </a:xfrm>
+            <a:prstGeom prst="rect">
+              <a:avLst/>
+            </a:prstGeom>
+            <a:noFill/>
+            <a:ln w="57150">
+              <a:solidFill>
+                <a:schemeClr val="tx1"/>
+              </a:solidFill>
+              <a:prstDash val="sysDash"/>
+            </a:ln>
+          </p:spPr>
+          <p:style>
+            <a:lnRef idx="2">
+              <a:schemeClr val="accent1">
+                <a:shade val="15000"/>
+              </a:schemeClr>
+            </a:lnRef>
+            <a:fillRef idx="1">
+              <a:schemeClr val="accent1"/>
+            </a:fillRef>
+            <a:effectRef idx="0">
+              <a:schemeClr val="accent1"/>
+            </a:effectRef>
+            <a:fontRef idx="minor">
+              <a:schemeClr val="lt1"/>
+            </a:fontRef>
+          </p:style>
+          <p:txBody>
+            <a:bodyPr rtlCol="0" anchor="ctr"/>
+            <a:lstStyle/>
+            <a:p>
+              <a:pPr algn="ctr"/>
+              <a:endParaRPr kumimoji="1" lang="ja-JP" altLang="en-US" b="1">
+                <a:solidFill>
+                  <a:schemeClr val="tx1"/>
+                </a:solidFill>
+                <a:latin typeface="Hiragino Sans W7" panose="020B0400000000000000" pitchFamily="34" charset="-128"/>
+                <a:ea typeface="Hiragino Sans W7" panose="020B0400000000000000" pitchFamily="34" charset="-128"/>
+              </a:endParaRPr>
+            </a:p>
+          </p:txBody>
+        </p:sp>
+        <p:sp>
+          <p:nvSpPr>
+            <p:cNvPr id="9" name="テキスト ボックス 8">
+              <a:extLst>
+                <a:ext uri="{FF2B5EF4-FFF2-40B4-BE49-F238E27FC236}">
+                  <a16:creationId xmlns:a16="http://schemas.microsoft.com/office/drawing/2014/main" id="{09F2913D-C8BC-20B2-6066-89269598FCB4}"/>
+                </a:ext>
+              </a:extLst>
+            </p:cNvPr>
+            <p:cNvSpPr txBox="1"/>
+            <p:nvPr/>
+          </p:nvSpPr>
+          <p:spPr>
+            <a:xfrm>
+              <a:off x="6223189" y="315549"/>
+              <a:ext cx="2479729" cy="646331"/>
+            </a:xfrm>
+            <a:prstGeom prst="rect">
+              <a:avLst/>
+            </a:prstGeom>
+            <a:solidFill>
+              <a:schemeClr val="bg1"/>
+            </a:solidFill>
+            <a:ln w="12700">
+              <a:solidFill>
+                <a:schemeClr val="tx1"/>
+              </a:solidFill>
+            </a:ln>
+          </p:spPr>
+          <p:txBody>
+            <a:bodyPr wrap="square" rtlCol="0">
+              <a:spAutoFit/>
+            </a:bodyPr>
+            <a:lstStyle/>
+            <a:p>
+              <a:pPr algn="ctr"/>
+              <a:r>
+                <a:rPr kumimoji="1" lang="ja-JP" altLang="en-US" sz="3600" b="1">
+                  <a:latin typeface="Hiragino Sans W6" panose="020B0400000000000000" pitchFamily="34" charset="-128"/>
+                  <a:ea typeface="Hiragino Sans W6" panose="020B0400000000000000" pitchFamily="34" charset="-128"/>
+                </a:rPr>
+                <a:t>国会機能論</a:t>
+              </a:r>
+              <a:endParaRPr kumimoji="1" lang="ja-JP" altLang="en-US" sz="2000" b="1">
+                <a:latin typeface="Hiragino Sans W6" panose="020B0400000000000000" pitchFamily="34" charset="-128"/>
+                <a:ea typeface="Hiragino Sans W6" panose="020B0400000000000000" pitchFamily="34" charset="-128"/>
+              </a:endParaRPr>
+            </a:p>
+          </p:txBody>
+        </p:sp>
+        <p:sp>
+          <p:nvSpPr>
+            <p:cNvPr id="10" name="角丸四角形 9">
+              <a:extLst>
+                <a:ext uri="{FF2B5EF4-FFF2-40B4-BE49-F238E27FC236}">
+                  <a16:creationId xmlns:a16="http://schemas.microsoft.com/office/drawing/2014/main" id="{3C3D8269-5FE6-F0F2-15F1-EB0E1AA43622}"/>
+                </a:ext>
+              </a:extLst>
+            </p:cNvPr>
+            <p:cNvSpPr/>
+            <p:nvPr/>
+          </p:nvSpPr>
+          <p:spPr>
+            <a:xfrm>
+              <a:off x="6364856" y="5389514"/>
+              <a:ext cx="2479729" cy="2357679"/>
+            </a:xfrm>
+            <a:prstGeom prst="roundRect">
+              <a:avLst/>
+            </a:prstGeom>
+            <a:noFill/>
+            <a:ln w="28575">
+              <a:solidFill>
+                <a:schemeClr val="tx1"/>
+              </a:solidFill>
+            </a:ln>
+          </p:spPr>
+          <p:style>
+            <a:lnRef idx="2">
+              <a:schemeClr val="accent1">
+                <a:shade val="15000"/>
+              </a:schemeClr>
+            </a:lnRef>
+            <a:fillRef idx="1">
+              <a:schemeClr val="accent1"/>
+            </a:fillRef>
+            <a:effectRef idx="0">
+              <a:schemeClr val="accent1"/>
+            </a:effectRef>
+            <a:fontRef idx="minor">
+              <a:schemeClr val="lt1"/>
+            </a:fontRef>
+          </p:style>
+          <p:txBody>
+            <a:bodyPr rtlCol="0" anchor="ctr"/>
+            <a:lstStyle/>
+            <a:p>
+              <a:pPr algn="ctr"/>
+              <a:r>
+                <a:rPr kumimoji="1" lang="ja-JP" altLang="en-US" sz="3200" b="1">
+                  <a:solidFill>
+                    <a:schemeClr val="tx1"/>
+                  </a:solidFill>
+                  <a:latin typeface="Hiragino Sans W7" panose="020B0400000000000000" pitchFamily="34" charset="-128"/>
+                  <a:ea typeface="Hiragino Sans W7" panose="020B0400000000000000" pitchFamily="34" charset="-128"/>
+                </a:rPr>
+                <a:t>討議</a:t>
+              </a:r>
+              <a:endParaRPr kumimoji="1" lang="en-US" altLang="ja-JP" sz="3200" b="1" dirty="0">
+                <a:solidFill>
+                  <a:schemeClr val="tx1"/>
+                </a:solidFill>
+                <a:latin typeface="Hiragino Sans W7" panose="020B0400000000000000" pitchFamily="34" charset="-128"/>
+                <a:ea typeface="Hiragino Sans W7" panose="020B0400000000000000" pitchFamily="34" charset="-128"/>
+              </a:endParaRPr>
+            </a:p>
+            <a:p>
+              <a:pPr algn="ctr"/>
+              <a:r>
+                <a:rPr kumimoji="1" lang="ja-JP" altLang="en-US" sz="3200" b="1">
+                  <a:solidFill>
+                    <a:schemeClr val="tx1"/>
+                  </a:solidFill>
+                  <a:latin typeface="Hiragino Sans W7" panose="020B0400000000000000" pitchFamily="34" charset="-128"/>
+                  <a:ea typeface="Hiragino Sans W7" panose="020B0400000000000000" pitchFamily="34" charset="-128"/>
+                </a:rPr>
+                <a:t>アリーナ論</a:t>
+              </a:r>
+              <a:br>
+                <a:rPr kumimoji="1" lang="en-US" altLang="ja-JP" sz="3200" b="1" dirty="0">
+                  <a:solidFill>
+                    <a:schemeClr val="tx1"/>
+                  </a:solidFill>
+                  <a:latin typeface="Hiragino Sans W7" panose="020B0400000000000000" pitchFamily="34" charset="-128"/>
+                  <a:ea typeface="Hiragino Sans W7" panose="020B0400000000000000" pitchFamily="34" charset="-128"/>
+                </a:rPr>
+              </a:br>
+              <a:r>
+                <a:rPr kumimoji="1" lang="ja-JP" altLang="en-US" sz="2800">
+                  <a:solidFill>
+                    <a:schemeClr val="tx1"/>
+                  </a:solidFill>
+                  <a:latin typeface="Hiragino Sans W4" panose="020B0400000000000000" pitchFamily="34" charset="-128"/>
+                  <a:ea typeface="Hiragino Sans W4" panose="020B0400000000000000" pitchFamily="34" charset="-128"/>
+                </a:rPr>
+                <a:t>（</a:t>
+              </a:r>
+              <a:r>
+                <a:rPr kumimoji="1" lang="en-US" altLang="ja-JP" sz="2800" dirty="0">
+                  <a:solidFill>
+                    <a:schemeClr val="tx1"/>
+                  </a:solidFill>
+                  <a:latin typeface="Hiragino Sans W4" panose="020B0400000000000000" pitchFamily="34" charset="-128"/>
+                  <a:ea typeface="Hiragino Sans W4" panose="020B0400000000000000" pitchFamily="34" charset="-128"/>
+                </a:rPr>
+                <a:t>2000</a:t>
+              </a:r>
+              <a:r>
+                <a:rPr kumimoji="1" lang="ja-JP" altLang="en-US" sz="2800">
+                  <a:solidFill>
+                    <a:schemeClr val="tx1"/>
+                  </a:solidFill>
+                  <a:latin typeface="Hiragino Sans W4" panose="020B0400000000000000" pitchFamily="34" charset="-128"/>
+                  <a:ea typeface="Hiragino Sans W4" panose="020B0400000000000000" pitchFamily="34" charset="-128"/>
+                </a:rPr>
+                <a:t>）</a:t>
+              </a:r>
+              <a:endParaRPr kumimoji="1" lang="ja-JP" altLang="en-US" sz="1100" b="1">
+                <a:solidFill>
+                  <a:schemeClr val="tx1"/>
+                </a:solidFill>
+                <a:latin typeface="Hiragino Sans W7" panose="020B0400000000000000" pitchFamily="34" charset="-128"/>
+                <a:ea typeface="Hiragino Sans W7" panose="020B0400000000000000" pitchFamily="34" charset="-128"/>
+              </a:endParaRPr>
+            </a:p>
+          </p:txBody>
+        </p:sp>
+        <p:sp>
+          <p:nvSpPr>
+            <p:cNvPr id="11" name="角丸四角形 10">
+              <a:extLst>
+                <a:ext uri="{FF2B5EF4-FFF2-40B4-BE49-F238E27FC236}">
+                  <a16:creationId xmlns:a16="http://schemas.microsoft.com/office/drawing/2014/main" id="{D9E2B11F-55AC-BF33-E6AA-33BEC9F1C2C0}"/>
+                </a:ext>
+              </a:extLst>
+            </p:cNvPr>
+            <p:cNvSpPr/>
+            <p:nvPr/>
+          </p:nvSpPr>
+          <p:spPr>
+            <a:xfrm>
+              <a:off x="9939362" y="5389514"/>
+              <a:ext cx="2479729" cy="2357679"/>
+            </a:xfrm>
+            <a:prstGeom prst="roundRect">
+              <a:avLst/>
+            </a:prstGeom>
+            <a:noFill/>
+            <a:ln w="28575">
+              <a:solidFill>
+                <a:schemeClr val="tx1"/>
+              </a:solidFill>
+            </a:ln>
+          </p:spPr>
+          <p:style>
+            <a:lnRef idx="2">
+              <a:schemeClr val="accent1">
+                <a:shade val="15000"/>
+              </a:schemeClr>
+            </a:lnRef>
+            <a:fillRef idx="1">
+              <a:schemeClr val="accent1"/>
+            </a:fillRef>
+            <a:effectRef idx="0">
+              <a:schemeClr val="accent1"/>
+            </a:effectRef>
+            <a:fontRef idx="minor">
+              <a:schemeClr val="lt1"/>
+            </a:fontRef>
+          </p:style>
+          <p:txBody>
+            <a:bodyPr rtlCol="0" anchor="ctr"/>
+            <a:lstStyle/>
+            <a:p>
+              <a:pPr algn="ctr"/>
+              <a:r>
+                <a:rPr kumimoji="1" lang="ja-JP" altLang="en-US" sz="3200" b="1">
+                  <a:solidFill>
+                    <a:schemeClr val="tx1"/>
+                  </a:solidFill>
+                  <a:latin typeface="Hiragino Sans W7" panose="020B0400000000000000" pitchFamily="34" charset="-128"/>
+                  <a:ea typeface="Hiragino Sans W7" panose="020B0400000000000000" pitchFamily="34" charset="-128"/>
+                </a:rPr>
+                <a:t>多数主義論</a:t>
+              </a:r>
+              <a:endParaRPr kumimoji="1" lang="en-US" altLang="ja-JP" sz="3200" b="1" dirty="0">
+                <a:solidFill>
+                  <a:schemeClr val="tx1"/>
+                </a:solidFill>
+                <a:latin typeface="Hiragino Sans W7" panose="020B0400000000000000" pitchFamily="34" charset="-128"/>
+                <a:ea typeface="Hiragino Sans W7" panose="020B0400000000000000" pitchFamily="34" charset="-128"/>
+              </a:endParaRPr>
+            </a:p>
+            <a:p>
+              <a:pPr algn="ctr"/>
+              <a:r>
+                <a:rPr kumimoji="1" lang="ja-JP" altLang="en-US" sz="2800">
+                  <a:solidFill>
+                    <a:schemeClr val="tx1"/>
+                  </a:solidFill>
+                  <a:latin typeface="Hiragino Sans W4" panose="020B0400000000000000" pitchFamily="34" charset="-128"/>
+                  <a:ea typeface="Hiragino Sans W4" panose="020B0400000000000000" pitchFamily="34" charset="-128"/>
+                </a:rPr>
+                <a:t>（</a:t>
+              </a:r>
+              <a:r>
+                <a:rPr kumimoji="1" lang="en-US" altLang="ja-JP" sz="2800" dirty="0">
+                  <a:solidFill>
+                    <a:schemeClr val="tx1"/>
+                  </a:solidFill>
+                  <a:latin typeface="Hiragino Sans W4" panose="020B0400000000000000" pitchFamily="34" charset="-128"/>
+                  <a:ea typeface="Hiragino Sans W4" panose="020B0400000000000000" pitchFamily="34" charset="-128"/>
+                </a:rPr>
+                <a:t>2003</a:t>
+              </a:r>
+              <a:r>
+                <a:rPr kumimoji="1" lang="ja-JP" altLang="en-US" sz="2800">
+                  <a:solidFill>
+                    <a:schemeClr val="tx1"/>
+                  </a:solidFill>
+                  <a:latin typeface="Hiragino Sans W4" panose="020B0400000000000000" pitchFamily="34" charset="-128"/>
+                  <a:ea typeface="Hiragino Sans W4" panose="020B0400000000000000" pitchFamily="34" charset="-128"/>
+                </a:rPr>
+                <a:t>）</a:t>
+              </a:r>
+              <a:endParaRPr kumimoji="1" lang="ja-JP" altLang="en-US" sz="1100" b="1">
+                <a:solidFill>
+                  <a:schemeClr val="tx1"/>
+                </a:solidFill>
+                <a:latin typeface="Hiragino Sans W7" panose="020B0400000000000000" pitchFamily="34" charset="-128"/>
+                <a:ea typeface="Hiragino Sans W7" panose="020B0400000000000000" pitchFamily="34" charset="-128"/>
+              </a:endParaRPr>
+            </a:p>
+          </p:txBody>
+        </p:sp>
+        <p:sp>
+          <p:nvSpPr>
+            <p:cNvPr id="12" name="左右矢印 11">
+              <a:extLst>
+                <a:ext uri="{FF2B5EF4-FFF2-40B4-BE49-F238E27FC236}">
+                  <a16:creationId xmlns:a16="http://schemas.microsoft.com/office/drawing/2014/main" id="{C647A906-3E71-EFFD-B545-DE82C707320B}"/>
+                </a:ext>
+              </a:extLst>
+            </p:cNvPr>
+            <p:cNvSpPr/>
+            <p:nvPr/>
+          </p:nvSpPr>
+          <p:spPr>
+            <a:xfrm>
+              <a:off x="5196880" y="2115173"/>
+              <a:ext cx="2350795" cy="697424"/>
+            </a:xfrm>
+            <a:prstGeom prst="leftRightArrow">
+              <a:avLst/>
+            </a:prstGeom>
+          </p:spPr>
+          <p:style>
+            <a:lnRef idx="2">
+              <a:schemeClr val="dk1">
+                <a:shade val="15000"/>
+              </a:schemeClr>
+            </a:lnRef>
+            <a:fillRef idx="1">
+              <a:schemeClr val="dk1"/>
+            </a:fillRef>
+            <a:effectRef idx="0">
+              <a:schemeClr val="dk1"/>
+            </a:effectRef>
+            <a:fontRef idx="minor">
+              <a:schemeClr val="lt1"/>
+            </a:fontRef>
+          </p:style>
+          <p:txBody>
+            <a:bodyPr rtlCol="0" anchor="ctr"/>
+            <a:lstStyle/>
+            <a:p>
+              <a:pPr algn="ctr"/>
+              <a:endParaRPr kumimoji="1" lang="ja-JP" altLang="en-US"/>
+            </a:p>
+          </p:txBody>
+        </p:sp>
+        <p:sp>
+          <p:nvSpPr>
+            <p:cNvPr id="13" name="左右矢印 12">
+              <a:extLst>
+                <a:ext uri="{FF2B5EF4-FFF2-40B4-BE49-F238E27FC236}">
+                  <a16:creationId xmlns:a16="http://schemas.microsoft.com/office/drawing/2014/main" id="{90ED4BC8-4B8B-5DAD-8557-F1287ABE29AB}"/>
+                </a:ext>
+              </a:extLst>
+            </p:cNvPr>
+            <p:cNvSpPr/>
+            <p:nvPr/>
+          </p:nvSpPr>
+          <p:spPr>
+            <a:xfrm>
+              <a:off x="8891988" y="6219641"/>
+              <a:ext cx="999971" cy="697424"/>
+            </a:xfrm>
+            <a:prstGeom prst="leftRightArrow">
+              <a:avLst/>
+            </a:prstGeom>
+          </p:spPr>
+          <p:style>
+            <a:lnRef idx="2">
+              <a:schemeClr val="dk1">
+                <a:shade val="15000"/>
+              </a:schemeClr>
+            </a:lnRef>
+            <a:fillRef idx="1">
+              <a:schemeClr val="dk1"/>
+            </a:fillRef>
+            <a:effectRef idx="0">
+              <a:schemeClr val="dk1"/>
+            </a:effectRef>
+            <a:fontRef idx="minor">
+              <a:schemeClr val="lt1"/>
+            </a:fontRef>
+          </p:style>
+          <p:txBody>
+            <a:bodyPr rtlCol="0" anchor="ctr"/>
+            <a:lstStyle/>
+            <a:p>
+              <a:pPr algn="ctr"/>
+              <a:endParaRPr kumimoji="1" lang="ja-JP" altLang="en-US"/>
+            </a:p>
+          </p:txBody>
+        </p:sp>
+        <p:sp>
+          <p:nvSpPr>
+            <p:cNvPr id="19" name="上矢印 18">
+              <a:extLst>
+                <a:ext uri="{FF2B5EF4-FFF2-40B4-BE49-F238E27FC236}">
+                  <a16:creationId xmlns:a16="http://schemas.microsoft.com/office/drawing/2014/main" id="{D784787D-285B-DE5C-E26C-5BDB16F89AC1}"/>
+                </a:ext>
+              </a:extLst>
+            </p:cNvPr>
+            <p:cNvSpPr/>
+            <p:nvPr/>
+          </p:nvSpPr>
+          <p:spPr>
+            <a:xfrm rot="2700000">
+              <a:off x="8151018" y="3437832"/>
+              <a:ext cx="495945" cy="2139773"/>
+            </a:xfrm>
+            <a:prstGeom prst="upArrow">
+              <a:avLst/>
+            </a:prstGeom>
+          </p:spPr>
+          <p:style>
+            <a:lnRef idx="2">
+              <a:schemeClr val="dk1">
+                <a:shade val="15000"/>
+              </a:schemeClr>
+            </a:lnRef>
+            <a:fillRef idx="1">
+              <a:schemeClr val="dk1"/>
+            </a:fillRef>
+            <a:effectRef idx="0">
+              <a:schemeClr val="dk1"/>
+            </a:effectRef>
+            <a:fontRef idx="minor">
+              <a:schemeClr val="lt1"/>
+            </a:fontRef>
+          </p:style>
+          <p:txBody>
+            <a:bodyPr rtlCol="0" anchor="ctr"/>
+            <a:lstStyle/>
+            <a:p>
+              <a:pPr algn="ctr"/>
+              <a:endParaRPr kumimoji="1" lang="ja-JP" altLang="en-US"/>
+            </a:p>
+          </p:txBody>
+        </p:sp>
+        <p:sp>
+          <p:nvSpPr>
+            <p:cNvPr id="20" name="上矢印 19">
+              <a:extLst>
+                <a:ext uri="{FF2B5EF4-FFF2-40B4-BE49-F238E27FC236}">
+                  <a16:creationId xmlns:a16="http://schemas.microsoft.com/office/drawing/2014/main" id="{5CA77F6B-604D-A3A4-0401-95691D893E50}"/>
+                </a:ext>
+              </a:extLst>
+            </p:cNvPr>
+            <p:cNvSpPr/>
+            <p:nvPr/>
+          </p:nvSpPr>
+          <p:spPr>
+            <a:xfrm rot="18900000">
+              <a:off x="10152351" y="3437831"/>
+              <a:ext cx="495945" cy="2139773"/>
+            </a:xfrm>
+            <a:prstGeom prst="upArrow">
+              <a:avLst/>
+            </a:prstGeom>
+          </p:spPr>
+          <p:style>
+            <a:lnRef idx="2">
+              <a:schemeClr val="dk1">
+                <a:shade val="15000"/>
+              </a:schemeClr>
+            </a:lnRef>
+            <a:fillRef idx="1">
+              <a:schemeClr val="dk1"/>
+            </a:fillRef>
+            <a:effectRef idx="0">
+              <a:schemeClr val="dk1"/>
+            </a:effectRef>
+            <a:fontRef idx="minor">
+              <a:schemeClr val="lt1"/>
+            </a:fontRef>
+          </p:style>
+          <p:txBody>
+            <a:bodyPr rtlCol="0" anchor="ctr"/>
+            <a:lstStyle/>
+            <a:p>
+              <a:pPr algn="ctr"/>
+              <a:endParaRPr kumimoji="1" lang="ja-JP" altLang="en-US"/>
+            </a:p>
+          </p:txBody>
+        </p:sp>
+        <p:sp>
+          <p:nvSpPr>
+            <p:cNvPr id="22" name="右中かっこ 21">
+              <a:extLst>
+                <a:ext uri="{FF2B5EF4-FFF2-40B4-BE49-F238E27FC236}">
+                  <a16:creationId xmlns:a16="http://schemas.microsoft.com/office/drawing/2014/main" id="{17ABFF5F-A5D8-1C56-47B7-E4710B8CDE7B}"/>
+                </a:ext>
+              </a:extLst>
+            </p:cNvPr>
+            <p:cNvSpPr/>
+            <p:nvPr/>
+          </p:nvSpPr>
+          <p:spPr>
+            <a:xfrm rot="5400000">
+              <a:off x="9209400" y="5106465"/>
+              <a:ext cx="401089" cy="6018291"/>
+            </a:xfrm>
+            <a:prstGeom prst="rightBrace">
+              <a:avLst>
+                <a:gd name="adj1" fmla="val 24789"/>
+                <a:gd name="adj2" fmla="val 50000"/>
+              </a:avLst>
+            </a:prstGeom>
+            <a:ln w="38100"/>
+          </p:spPr>
+          <p:style>
+            <a:lnRef idx="1">
+              <a:schemeClr val="dk1"/>
+            </a:lnRef>
+            <a:fillRef idx="0">
+              <a:schemeClr val="dk1"/>
+            </a:fillRef>
+            <a:effectRef idx="0">
+              <a:schemeClr val="dk1"/>
+            </a:effectRef>
+            <a:fontRef idx="minor">
+              <a:schemeClr val="tx1"/>
+            </a:fontRef>
+          </p:style>
+          <p:txBody>
+            <a:bodyPr rtlCol="0" anchor="ctr"/>
+            <a:lstStyle/>
+            <a:p>
+              <a:pPr algn="ctr"/>
+              <a:endParaRPr kumimoji="1" lang="ja-JP" altLang="en-US"/>
+            </a:p>
+          </p:txBody>
+        </p:sp>
+        <p:sp>
+          <p:nvSpPr>
+            <p:cNvPr id="23" name="テキスト ボックス 22">
+              <a:extLst>
+                <a:ext uri="{FF2B5EF4-FFF2-40B4-BE49-F238E27FC236}">
+                  <a16:creationId xmlns:a16="http://schemas.microsoft.com/office/drawing/2014/main" id="{DAF696C5-0A8E-01BF-BA1D-FBC97035FFF8}"/>
+                </a:ext>
+              </a:extLst>
+            </p:cNvPr>
+            <p:cNvSpPr txBox="1"/>
+            <p:nvPr/>
+          </p:nvSpPr>
+          <p:spPr>
+            <a:xfrm>
+              <a:off x="7780148" y="8394249"/>
+              <a:ext cx="3259592" cy="584775"/>
+            </a:xfrm>
+            <a:prstGeom prst="rect">
+              <a:avLst/>
+            </a:prstGeom>
+            <a:solidFill>
+              <a:schemeClr val="bg1"/>
+            </a:solidFill>
+            <a:ln w="12700">
+              <a:solidFill>
+                <a:schemeClr val="tx1"/>
+              </a:solidFill>
+            </a:ln>
+          </p:spPr>
+          <p:txBody>
+            <a:bodyPr wrap="square" rtlCol="0">
+              <a:spAutoFit/>
+            </a:bodyPr>
+            <a:lstStyle/>
+            <a:p>
+              <a:pPr algn="ctr"/>
+              <a:r>
+                <a:rPr kumimoji="1" lang="ja-JP" altLang="en-US" sz="3200" b="1">
+                  <a:latin typeface="Hiragino Sans W6" panose="020B0400000000000000" pitchFamily="34" charset="-128"/>
+                  <a:ea typeface="Hiragino Sans W6" panose="020B0400000000000000" pitchFamily="34" charset="-128"/>
+                </a:rPr>
+                <a:t>福元＝増山論争</a:t>
+              </a:r>
+              <a:endParaRPr kumimoji="1" lang="ja-JP" altLang="en-US" b="1">
+                <a:latin typeface="Hiragino Sans W6" panose="020B0400000000000000" pitchFamily="34" charset="-128"/>
+                <a:ea typeface="Hiragino Sans W6" panose="020B0400000000000000" pitchFamily="34" charset="-128"/>
+              </a:endParaRPr>
+            </a:p>
+          </p:txBody>
+        </p:sp>
+      </p:grpSp>
+    </p:spTree>
+    <p:extLst>
+      <p:ext uri="{BB962C8B-B14F-4D97-AF65-F5344CB8AC3E}">
+        <p14:creationId xmlns:p14="http://schemas.microsoft.com/office/powerpoint/2010/main" val="2498943451"/>
+      </p:ext>
+    </p:extLst>
+  </p:cSld>
+  <p:clrMapOvr>
+    <a:masterClrMapping/>
+  </p:clrMapOvr>
+</p:sld>
+</file>
+
 <file path=ppt/slides/slide3.xml><?xml version="1.0" encoding="utf-8"?>
 <p:sld xmlns:a="http://schemas.openxmlformats.org/drawingml/2006/main" xmlns:r="http://schemas.openxmlformats.org/officeDocument/2006/relationships" xmlns:p="http://schemas.openxmlformats.org/presentationml/2006/main">
   <p:cSld>

--- a/figs/DIYfigures_pp.pptx
+++ b/figs/DIYfigures_pp.pptx
@@ -7042,7 +7042,7 @@
           <a:p>
             <a:fld id="{DBD89380-344E-284F-BE0F-D796858BF56F}" type="datetimeFigureOut">
               <a:rPr kumimoji="1" lang="ja-JP" altLang="en-US" smtClean="0"/>
-              <a:t>2026/9/30</a:t>
+              <a:t>2026/10/29</a:t>
             </a:fld>
             <a:endParaRPr kumimoji="1" lang="ja-JP" altLang="en-US"/>
           </a:p>
@@ -7244,7 +7244,7 @@
           <a:p>
             <a:fld id="{DBD89380-344E-284F-BE0F-D796858BF56F}" type="datetimeFigureOut">
               <a:rPr kumimoji="1" lang="ja-JP" altLang="en-US" smtClean="0"/>
-              <a:t>2026/9/30</a:t>
+              <a:t>2026/10/29</a:t>
             </a:fld>
             <a:endParaRPr kumimoji="1" lang="ja-JP" altLang="en-US"/>
           </a:p>
@@ -7456,7 +7456,7 @@
           <a:p>
             <a:fld id="{DBD89380-344E-284F-BE0F-D796858BF56F}" type="datetimeFigureOut">
               <a:rPr kumimoji="1" lang="ja-JP" altLang="en-US" smtClean="0"/>
-              <a:t>2026/9/30</a:t>
+              <a:t>2026/10/29</a:t>
             </a:fld>
             <a:endParaRPr kumimoji="1" lang="ja-JP" altLang="en-US"/>
           </a:p>
@@ -7658,7 +7658,7 @@
           <a:p>
             <a:fld id="{DBD89380-344E-284F-BE0F-D796858BF56F}" type="datetimeFigureOut">
               <a:rPr kumimoji="1" lang="ja-JP" altLang="en-US" smtClean="0"/>
-              <a:t>2026/9/30</a:t>
+              <a:t>2026/10/29</a:t>
             </a:fld>
             <a:endParaRPr kumimoji="1" lang="ja-JP" altLang="en-US"/>
           </a:p>
@@ -7902,7 +7902,7 @@
           <a:p>
             <a:fld id="{DBD89380-344E-284F-BE0F-D796858BF56F}" type="datetimeFigureOut">
               <a:rPr kumimoji="1" lang="ja-JP" altLang="en-US" smtClean="0"/>
-              <a:t>2026/9/30</a:t>
+              <a:t>2026/10/29</a:t>
             </a:fld>
             <a:endParaRPr kumimoji="1" lang="ja-JP" altLang="en-US"/>
           </a:p>
@@ -8198,7 +8198,7 @@
           <a:p>
             <a:fld id="{DBD89380-344E-284F-BE0F-D796858BF56F}" type="datetimeFigureOut">
               <a:rPr kumimoji="1" lang="ja-JP" altLang="en-US" smtClean="0"/>
-              <a:t>2026/9/30</a:t>
+              <a:t>2026/10/29</a:t>
             </a:fld>
             <a:endParaRPr kumimoji="1" lang="ja-JP" altLang="en-US"/>
           </a:p>
@@ -8629,7 +8629,7 @@
           <a:p>
             <a:fld id="{DBD89380-344E-284F-BE0F-D796858BF56F}" type="datetimeFigureOut">
               <a:rPr kumimoji="1" lang="ja-JP" altLang="en-US" smtClean="0"/>
-              <a:t>2026/9/30</a:t>
+              <a:t>2026/10/29</a:t>
             </a:fld>
             <a:endParaRPr kumimoji="1" lang="ja-JP" altLang="en-US"/>
           </a:p>
@@ -8747,7 +8747,7 @@
           <a:p>
             <a:fld id="{DBD89380-344E-284F-BE0F-D796858BF56F}" type="datetimeFigureOut">
               <a:rPr kumimoji="1" lang="ja-JP" altLang="en-US" smtClean="0"/>
-              <a:t>2026/9/30</a:t>
+              <a:t>2026/10/29</a:t>
             </a:fld>
             <a:endParaRPr kumimoji="1" lang="ja-JP" altLang="en-US"/>
           </a:p>
@@ -8842,7 +8842,7 @@
           <a:p>
             <a:fld id="{DBD89380-344E-284F-BE0F-D796858BF56F}" type="datetimeFigureOut">
               <a:rPr kumimoji="1" lang="ja-JP" altLang="en-US" smtClean="0"/>
-              <a:t>2026/9/30</a:t>
+              <a:t>2026/10/29</a:t>
             </a:fld>
             <a:endParaRPr kumimoji="1" lang="ja-JP" altLang="en-US"/>
           </a:p>
@@ -9151,7 +9151,7 @@
           <a:p>
             <a:fld id="{DBD89380-344E-284F-BE0F-D796858BF56F}" type="datetimeFigureOut">
               <a:rPr kumimoji="1" lang="ja-JP" altLang="en-US" smtClean="0"/>
-              <a:t>2026/9/30</a:t>
+              <a:t>2026/10/29</a:t>
             </a:fld>
             <a:endParaRPr kumimoji="1" lang="ja-JP" altLang="en-US"/>
           </a:p>
@@ -9408,7 +9408,7 @@
           <a:p>
             <a:fld id="{DBD89380-344E-284F-BE0F-D796858BF56F}" type="datetimeFigureOut">
               <a:rPr kumimoji="1" lang="ja-JP" altLang="en-US" smtClean="0"/>
-              <a:t>2026/9/30</a:t>
+              <a:t>2026/10/29</a:t>
             </a:fld>
             <a:endParaRPr kumimoji="1" lang="ja-JP" altLang="en-US"/>
           </a:p>
@@ -9653,7 +9653,7 @@
           <a:p>
             <a:fld id="{DBD89380-344E-284F-BE0F-D796858BF56F}" type="datetimeFigureOut">
               <a:rPr kumimoji="1" lang="ja-JP" altLang="en-US" smtClean="0"/>
-              <a:t>2026/9/30</a:t>
+              <a:t>2026/10/29</a:t>
             </a:fld>
             <a:endParaRPr kumimoji="1" lang="ja-JP" altLang="en-US"/>
           </a:p>
@@ -11729,7 +11729,7 @@
                   <a:latin typeface="HGPGothicE" panose="020B0900000000000000" pitchFamily="34" charset="-128"/>
                   <a:ea typeface="HGPGothicE" panose="020B0900000000000000" pitchFamily="34" charset="-128"/>
                 </a:rPr>
-                <a:t>政策実施</a:t>
+                <a:t>官僚</a:t>
               </a:r>
               <a:r>
                 <a:rPr kumimoji="1" lang="ja-JP" altLang="en-US" sz="1400">
@@ -11739,18 +11739,8 @@
                   <a:latin typeface="HGPGothicE" panose="020B0900000000000000" pitchFamily="34" charset="-128"/>
                   <a:ea typeface="HGPGothicE" panose="020B0900000000000000" pitchFamily="34" charset="-128"/>
                 </a:rPr>
-                <a:t>の</a:t>
+                <a:t>と</a:t>
               </a:r>
-              <a:endParaRPr kumimoji="1" lang="en-US" altLang="ja-JP" sz="1600" dirty="0">
-                <a:solidFill>
-                  <a:schemeClr val="tx1"/>
-                </a:solidFill>
-                <a:latin typeface="HGPGothicE" panose="020B0900000000000000" pitchFamily="34" charset="-128"/>
-                <a:ea typeface="HGPGothicE" panose="020B0900000000000000" pitchFamily="34" charset="-128"/>
-              </a:endParaRPr>
-            </a:p>
-            <a:p>
-              <a:pPr algn="ctr"/>
               <a:r>
                 <a:rPr kumimoji="1" lang="ja-JP" altLang="en-US" sz="1600">
                   <a:solidFill>
@@ -11759,7 +11749,7 @@
                   <a:latin typeface="HGPGothicE" panose="020B0900000000000000" pitchFamily="34" charset="-128"/>
                   <a:ea typeface="HGPGothicE" panose="020B0900000000000000" pitchFamily="34" charset="-128"/>
                 </a:rPr>
-                <a:t>過程</a:t>
+                <a:t>政治家</a:t>
               </a:r>
             </a:p>
           </p:txBody>
